--- a/files/Oefenzitting 3.pptx
+++ b/files/Oefenzitting 3.pptx
@@ -5,7 +5,7 @@
     <p:sldMasterId id="2147483648" r:id="rId1"/>
   </p:sldMasterIdLst>
   <p:notesMasterIdLst>
-    <p:notesMasterId r:id="rId27"/>
+    <p:notesMasterId r:id="rId32"/>
   </p:notesMasterIdLst>
   <p:sldIdLst>
     <p:sldId id="257" r:id="rId2"/>
@@ -20,19 +20,24 @@
     <p:sldId id="265" r:id="rId11"/>
     <p:sldId id="266" r:id="rId12"/>
     <p:sldId id="267" r:id="rId13"/>
-    <p:sldId id="286" r:id="rId14"/>
-    <p:sldId id="268" r:id="rId15"/>
-    <p:sldId id="270" r:id="rId16"/>
-    <p:sldId id="273" r:id="rId17"/>
-    <p:sldId id="277" r:id="rId18"/>
-    <p:sldId id="276" r:id="rId19"/>
-    <p:sldId id="279" r:id="rId20"/>
-    <p:sldId id="280" r:id="rId21"/>
-    <p:sldId id="281" r:id="rId22"/>
-    <p:sldId id="282" r:id="rId23"/>
-    <p:sldId id="283" r:id="rId24"/>
-    <p:sldId id="287" r:id="rId25"/>
-    <p:sldId id="284" r:id="rId26"/>
+    <p:sldId id="268" r:id="rId14"/>
+    <p:sldId id="270" r:id="rId15"/>
+    <p:sldId id="288" r:id="rId16"/>
+    <p:sldId id="286" r:id="rId17"/>
+    <p:sldId id="273" r:id="rId18"/>
+    <p:sldId id="277" r:id="rId19"/>
+    <p:sldId id="276" r:id="rId20"/>
+    <p:sldId id="279" r:id="rId21"/>
+    <p:sldId id="280" r:id="rId22"/>
+    <p:sldId id="281" r:id="rId23"/>
+    <p:sldId id="282" r:id="rId24"/>
+    <p:sldId id="283" r:id="rId25"/>
+    <p:sldId id="291" r:id="rId26"/>
+    <p:sldId id="292" r:id="rId27"/>
+    <p:sldId id="287" r:id="rId28"/>
+    <p:sldId id="289" r:id="rId29"/>
+    <p:sldId id="290" r:id="rId30"/>
+    <p:sldId id="284" r:id="rId31"/>
   </p:sldIdLst>
   <p:sldSz cx="12192000" cy="6858000"/>
   <p:notesSz cx="6858000" cy="9144000"/>
@@ -221,7 +226,7 @@
           <a:p>
             <a:fld id="{A9DB7E03-661F-4C0B-9E36-F84246C76B04}" type="datetimeFigureOut">
               <a:rPr lang="nl-BE" smtClean="0"/>
-              <a:t>19/10/2026</a:t>
+              <a:t>23/10/2026</a:t>
             </a:fld>
             <a:endParaRPr lang="nl-BE"/>
           </a:p>
@@ -722,7 +727,7 @@
           <a:p>
             <a:fld id="{248AEA1D-3A63-4DCC-8F9E-CD0DD112EA0F}" type="datetime1">
               <a:rPr lang="en-GB" smtClean="0"/>
-              <a:t>19/10/2026</a:t>
+              <a:t>23/10/2026</a:t>
             </a:fld>
             <a:endParaRPr lang="en-GB"/>
           </a:p>
@@ -925,7 +930,7 @@
           <a:p>
             <a:fld id="{151C7047-593E-4161-A5AA-2912C55A020C}" type="datetime1">
               <a:rPr lang="en-GB" smtClean="0"/>
-              <a:t>19/10/2026</a:t>
+              <a:t>23/10/2026</a:t>
             </a:fld>
             <a:endParaRPr lang="en-GB"/>
           </a:p>
@@ -1138,7 +1143,7 @@
           <a:p>
             <a:fld id="{699A5536-8A5B-4EF1-9BEC-91F04DF48C09}" type="datetime1">
               <a:rPr lang="en-GB" smtClean="0"/>
-              <a:t>19/10/2026</a:t>
+              <a:t>23/10/2026</a:t>
             </a:fld>
             <a:endParaRPr lang="en-GB"/>
           </a:p>
@@ -1341,7 +1346,7 @@
           <a:p>
             <a:fld id="{69D5B8CA-4143-4DB4-B3DE-A86564E80819}" type="datetime1">
               <a:rPr lang="en-GB" smtClean="0"/>
-              <a:t>19/10/2026</a:t>
+              <a:t>23/10/2026</a:t>
             </a:fld>
             <a:endParaRPr lang="en-GB"/>
           </a:p>
@@ -1620,7 +1625,7 @@
           <a:p>
             <a:fld id="{E5702A0E-D15A-4F40-9977-39CB8C790C52}" type="datetime1">
               <a:rPr lang="en-GB" smtClean="0"/>
-              <a:t>19/10/2026</a:t>
+              <a:t>23/10/2026</a:t>
             </a:fld>
             <a:endParaRPr lang="en-GB"/>
           </a:p>
@@ -1891,7 +1896,7 @@
           <a:p>
             <a:fld id="{FE6CB1B1-EFD3-4622-A266-A9B50BDDB889}" type="datetime1">
               <a:rPr lang="en-GB" smtClean="0"/>
-              <a:t>19/10/2026</a:t>
+              <a:t>23/10/2026</a:t>
             </a:fld>
             <a:endParaRPr lang="en-GB"/>
           </a:p>
@@ -2309,7 +2314,7 @@
           <a:p>
             <a:fld id="{EDCDDD00-FA74-4297-9563-A6F8F6747D94}" type="datetime1">
               <a:rPr lang="en-GB" smtClean="0"/>
-              <a:t>19/10/2026</a:t>
+              <a:t>23/10/2026</a:t>
             </a:fld>
             <a:endParaRPr lang="en-GB"/>
           </a:p>
@@ -2454,7 +2459,7 @@
           <a:p>
             <a:fld id="{1F14F46C-CEF6-41BB-B38E-8E1DFBBF95E1}" type="datetime1">
               <a:rPr lang="en-GB" smtClean="0"/>
-              <a:t>19/10/2026</a:t>
+              <a:t>23/10/2026</a:t>
             </a:fld>
             <a:endParaRPr lang="en-GB"/>
           </a:p>
@@ -2570,7 +2575,7 @@
           <a:p>
             <a:fld id="{DA2372E5-6DA2-4819-A932-963CCE7DCB96}" type="datetime1">
               <a:rPr lang="en-GB" smtClean="0"/>
-              <a:t>19/10/2026</a:t>
+              <a:t>23/10/2026</a:t>
             </a:fld>
             <a:endParaRPr lang="en-GB"/>
           </a:p>
@@ -2886,7 +2891,7 @@
           <a:p>
             <a:fld id="{68D5B330-7BF2-4076-9D48-5C97281A2A16}" type="datetime1">
               <a:rPr lang="en-GB" smtClean="0"/>
-              <a:t>19/10/2026</a:t>
+              <a:t>23/10/2026</a:t>
             </a:fld>
             <a:endParaRPr lang="en-GB"/>
           </a:p>
@@ -3178,7 +3183,7 @@
           <a:p>
             <a:fld id="{9A34BC19-953E-4C1B-949F-F6CB74DE458F}" type="datetime1">
               <a:rPr lang="en-GB" smtClean="0"/>
-              <a:t>19/10/2026</a:t>
+              <a:t>23/10/2026</a:t>
             </a:fld>
             <a:endParaRPr lang="en-GB"/>
           </a:p>
@@ -3424,7 +3429,7 @@
           <a:p>
             <a:fld id="{9E31DF74-C119-425A-907A-F8F97C0742ED}" type="datetime1">
               <a:rPr lang="en-GB" smtClean="0"/>
-              <a:t>19/10/2026</a:t>
+              <a:t>23/10/2026</a:t>
             </a:fld>
             <a:endParaRPr lang="en-GB"/>
           </a:p>
@@ -4018,6 +4023,9 @@
           <a:bodyPr/>
           <a:lstStyle/>
           <a:p>
+            <a:endParaRPr lang="nl-NL" dirty="0"/>
+          </a:p>
+          <a:p>
             <a:r>
               <a:rPr lang="nl-NL" dirty="0"/>
               <a:t>Een limiet moet voor alle deelrijen hetzelfde zijn</a:t>
@@ -4026,9 +4034,18 @@
           <a:p>
             <a:r>
               <a:rPr lang="nl-NL" dirty="0"/>
-              <a:t>dus er kan geen enkele limiet zijn</a:t>
+              <a:t>Meerdere ophopingspunten </a:t>
             </a:r>
-            <a:endParaRPr lang="nl-BE" dirty="0"/>
+            <a:r>
+              <a:rPr lang="nl-NL" dirty="0">
+                <a:sym typeface="Wingdings" panose="05000000000000000000" pitchFamily="2" charset="2"/>
+              </a:rPr>
+              <a:t> geen limiet</a:t>
+            </a:r>
+            <a:endParaRPr lang="nl-NL" dirty="0"/>
+          </a:p>
+          <a:p>
+            <a:endParaRPr lang="nl-NL" dirty="0"/>
           </a:p>
         </p:txBody>
       </p:sp>
@@ -4106,7 +4123,7 @@
                                         <p:tgtEl>
                                           <p:spTgt spid="3">
                                             <p:txEl>
-                                              <p:pRg st="0" end="0"/>
+                                              <p:pRg st="1" end="1"/>
                                             </p:txEl>
                                           </p:spTgt>
                                         </p:tgtEl>
@@ -4155,7 +4172,7 @@
                                         <p:tgtEl>
                                           <p:spTgt spid="3">
                                             <p:txEl>
-                                              <p:pRg st="1" end="1"/>
+                                              <p:pRg st="2" end="2"/>
                                             </p:txEl>
                                           </p:spTgt>
                                         </p:tgtEl>
@@ -4310,8 +4327,8 @@
             </p:nvSpPr>
             <p:spPr>
               <a:xfrm>
-                <a:off x="7204866" y="1943664"/>
-                <a:ext cx="4987134" cy="2759345"/>
+                <a:off x="7214391" y="1690688"/>
+                <a:ext cx="4653710" cy="4236673"/>
               </a:xfrm>
               <a:prstGeom prst="rect">
                 <a:avLst/>
@@ -4489,14 +4506,14 @@
                         <m:sSub>
                           <m:sSubPr>
                             <m:ctrlPr>
-                              <a:rPr lang="nl-BE" sz="3200" b="0" i="1" smtClean="0">
+                              <a:rPr lang="nl-BE" sz="3200" i="1">
                                 <a:latin typeface="Cambria Math" panose="02040503050406030204" pitchFamily="18" charset="0"/>
                               </a:rPr>
                             </m:ctrlPr>
                           </m:sSubPr>
                           <m:e>
                             <m:r>
-                              <a:rPr lang="nl-BE" sz="3200" b="0" i="1" smtClean="0">
+                              <a:rPr lang="nl-BE" sz="3200" i="1">
                                 <a:latin typeface="Cambria Math" panose="02040503050406030204" pitchFamily="18" charset="0"/>
                               </a:rPr>
                               <m:t>𝑣</m:t>
@@ -4504,7 +4521,7 @@
                           </m:e>
                           <m:sub>
                             <m:r>
-                              <a:rPr lang="nl-BE" sz="3200" b="0" i="1" smtClean="0">
+                              <a:rPr lang="nl-BE" sz="3200" i="1">
                                 <a:latin typeface="Cambria Math" panose="02040503050406030204" pitchFamily="18" charset="0"/>
                               </a:rPr>
                               <m:t>𝑛</m:t>
@@ -4517,7 +4534,13 @@
                 </a14:m>
                 <a:r>
                   <a:rPr lang="nl-BE" sz="3200" dirty="0"/>
-                  <a:t>,     </a:t>
+                  <a:t> </a:t>
+                </a:r>
+              </a:p>
+              <a:p>
+                <a:r>
+                  <a:rPr lang="nl-BE" sz="3200" dirty="0"/>
+                  <a:t>    </a:t>
                 </a:r>
               </a:p>
               <a:p>
@@ -4649,197 +4672,206 @@
                 <a:endParaRPr lang="nl-BE" sz="3200" dirty="0"/>
               </a:p>
               <a:p>
+                <a:endParaRPr lang="nl-BE" sz="3200" dirty="0"/>
+              </a:p>
+              <a:p>
+                <a:pPr/>
                 <a14:m>
-                  <m:oMath xmlns:m="http://schemas.openxmlformats.org/officeDocument/2006/math">
-                    <m:r>
-                      <a:rPr lang="nl-BE" sz="3200" i="1">
-                        <a:latin typeface="Cambria Math" panose="02040503050406030204" pitchFamily="18" charset="0"/>
-                      </a:rPr>
-                      <m:t>𝜆</m:t>
-                    </m:r>
-                    <m:r>
-                      <a:rPr lang="nl-BE" sz="3200" i="1">
-                        <a:latin typeface="Cambria Math" panose="02040503050406030204" pitchFamily="18" charset="0"/>
-                      </a:rPr>
-                      <m:t>=</m:t>
-                    </m:r>
-                    <m:func>
-                      <m:funcPr>
-                        <m:ctrlPr>
-                          <a:rPr lang="nl-BE" sz="3200" i="1">
-                            <a:latin typeface="Cambria Math" panose="02040503050406030204" pitchFamily="18" charset="0"/>
-                          </a:rPr>
-                        </m:ctrlPr>
-                      </m:funcPr>
-                      <m:fName>
-                        <m:limLow>
-                          <m:limLowPr>
-                            <m:ctrlPr>
-                              <a:rPr lang="nl-BE" sz="3200">
-                                <a:latin typeface="Cambria Math" panose="02040503050406030204" pitchFamily="18" charset="0"/>
-                              </a:rPr>
-                            </m:ctrlPr>
-                          </m:limLowPr>
-                          <m:e>
-                            <m:r>
-                              <m:rPr>
-                                <m:sty m:val="p"/>
-                              </m:rPr>
-                              <a:rPr lang="nl-BE" sz="3200">
-                                <a:latin typeface="Cambria Math" panose="02040503050406030204" pitchFamily="18" charset="0"/>
-                              </a:rPr>
-                              <m:t>lim</m:t>
-                            </m:r>
-                          </m:e>
-                          <m:lim>
-                            <m:r>
-                              <a:rPr lang="nl-BE" sz="3200" i="1">
-                                <a:latin typeface="Cambria Math" panose="02040503050406030204" pitchFamily="18" charset="0"/>
-                              </a:rPr>
-                              <m:t>𝑛</m:t>
-                            </m:r>
-                            <m:r>
-                              <a:rPr lang="nl-BE" sz="3200" i="1">
-                                <a:latin typeface="Cambria Math" panose="02040503050406030204" pitchFamily="18" charset="0"/>
-                              </a:rPr>
-                              <m:t>→∞</m:t>
-                            </m:r>
-                          </m:lim>
-                        </m:limLow>
-                      </m:fName>
-                      <m:e>
-                        <m:func>
-                          <m:funcPr>
-                            <m:ctrlPr>
-                              <a:rPr lang="nl-BE" sz="3200">
-                                <a:latin typeface="Cambria Math" panose="02040503050406030204" pitchFamily="18" charset="0"/>
-                              </a:rPr>
-                            </m:ctrlPr>
-                          </m:funcPr>
-                          <m:fName>
-                            <m:r>
-                              <m:rPr>
-                                <m:sty m:val="p"/>
-                              </m:rPr>
-                              <a:rPr lang="nl-BE" sz="3200">
-                                <a:latin typeface="Cambria Math" panose="02040503050406030204" pitchFamily="18" charset="0"/>
-                              </a:rPr>
-                              <m:t>inf</m:t>
-                            </m:r>
-                          </m:fName>
-                          <m:e>
-                            <m:sSub>
-                              <m:sSubPr>
-                                <m:ctrlPr>
-                                  <a:rPr lang="nl-BE" sz="3200" i="1">
-                                    <a:latin typeface="Cambria Math" panose="02040503050406030204" pitchFamily="18" charset="0"/>
-                                  </a:rPr>
-                                </m:ctrlPr>
-                              </m:sSubPr>
-                              <m:e>
-                                <m:r>
-                                  <a:rPr lang="nl-BE" sz="3200" i="1">
-                                    <a:latin typeface="Cambria Math" panose="02040503050406030204" pitchFamily="18" charset="0"/>
-                                  </a:rPr>
-                                  <m:t>𝑥</m:t>
-                                </m:r>
-                              </m:e>
-                              <m:sub>
-                                <m:r>
-                                  <a:rPr lang="nl-BE" sz="3200" i="1">
-                                    <a:latin typeface="Cambria Math" panose="02040503050406030204" pitchFamily="18" charset="0"/>
-                                  </a:rPr>
-                                  <m:t>𝑛</m:t>
-                                </m:r>
-                              </m:sub>
-                            </m:sSub>
-                          </m:e>
-                        </m:func>
-                      </m:e>
-                    </m:func>
-                    <m:r>
-                      <a:rPr lang="nl-BE" sz="3200" i="1">
-                        <a:latin typeface="Cambria Math" panose="02040503050406030204" pitchFamily="18" charset="0"/>
-                      </a:rPr>
-                      <m:t>=</m:t>
-                    </m:r>
-                    <m:func>
-                      <m:funcPr>
-                        <m:ctrlPr>
-                          <a:rPr lang="nl-BE" sz="3200" i="1">
-                            <a:latin typeface="Cambria Math" panose="02040503050406030204" pitchFamily="18" charset="0"/>
-                          </a:rPr>
-                        </m:ctrlPr>
-                      </m:funcPr>
-                      <m:fName>
-                        <m:limLow>
-                          <m:limLowPr>
-                            <m:ctrlPr>
-                              <a:rPr lang="nl-BE" sz="3200">
-                                <a:latin typeface="Cambria Math" panose="02040503050406030204" pitchFamily="18" charset="0"/>
-                              </a:rPr>
-                            </m:ctrlPr>
-                          </m:limLowPr>
-                          <m:e>
-                            <m:r>
-                              <m:rPr>
-                                <m:sty m:val="p"/>
-                              </m:rPr>
-                              <a:rPr lang="nl-BE" sz="3200">
-                                <a:latin typeface="Cambria Math" panose="02040503050406030204" pitchFamily="18" charset="0"/>
-                              </a:rPr>
-                              <m:t>lim</m:t>
-                            </m:r>
-                          </m:e>
-                          <m:lim>
-                            <m:r>
-                              <a:rPr lang="nl-BE" sz="3200" i="1">
-                                <a:latin typeface="Cambria Math" panose="02040503050406030204" pitchFamily="18" charset="0"/>
-                              </a:rPr>
-                              <m:t>𝑛</m:t>
-                            </m:r>
-                            <m:r>
-                              <a:rPr lang="nl-BE" sz="3200" i="1">
-                                <a:latin typeface="Cambria Math" panose="02040503050406030204" pitchFamily="18" charset="0"/>
-                              </a:rPr>
-                              <m:t>→∞</m:t>
-                            </m:r>
-                          </m:lim>
-                        </m:limLow>
-                      </m:fName>
-                      <m:e>
-                        <m:sSub>
-                          <m:sSubPr>
-                            <m:ctrlPr>
-                              <a:rPr lang="nl-BE" sz="3200" i="1">
-                                <a:latin typeface="Cambria Math" panose="02040503050406030204" pitchFamily="18" charset="0"/>
-                              </a:rPr>
-                            </m:ctrlPr>
-                          </m:sSubPr>
-                          <m:e>
-                            <m:r>
-                              <a:rPr lang="nl-BE" sz="3200" i="1">
-                                <a:latin typeface="Cambria Math" panose="02040503050406030204" pitchFamily="18" charset="0"/>
-                              </a:rPr>
-                              <m:t>𝑤</m:t>
-                            </m:r>
-                          </m:e>
-                          <m:sub>
-                            <m:r>
-                              <a:rPr lang="nl-BE" sz="3200" b="0" i="1" smtClean="0">
-                                <a:latin typeface="Cambria Math" panose="02040503050406030204" pitchFamily="18" charset="0"/>
-                              </a:rPr>
-                              <m:t>𝑛</m:t>
-                            </m:r>
-                          </m:sub>
-                        </m:sSub>
-                      </m:e>
-                    </m:func>
-                  </m:oMath>
+                  <m:oMathPara xmlns:m="http://schemas.openxmlformats.org/officeDocument/2006/math">
+                    <m:oMath>
+                      <m:r>
+                        <a:rPr lang="nl-BE" sz="3200" i="1">
+                          <a:latin typeface="Cambria Math" panose="02040503050406030204" pitchFamily="18" charset="0"/>
+                        </a:rPr>
+                        <m:t>𝜆</m:t>
+                      </m:r>
+                      <m:r>
+                        <a:rPr lang="nl-BE" sz="3200" i="1">
+                          <a:latin typeface="Cambria Math" panose="02040503050406030204" pitchFamily="18" charset="0"/>
+                        </a:rPr>
+                        <m:t>=</m:t>
+                      </m:r>
+                      <m:func>
+                        <m:funcPr>
+                          <m:ctrlPr>
+                            <a:rPr lang="nl-BE" sz="3200" i="1">
+                              <a:latin typeface="Cambria Math" panose="02040503050406030204" pitchFamily="18" charset="0"/>
+                            </a:rPr>
+                          </m:ctrlPr>
+                        </m:funcPr>
+                        <m:fName>
+                          <m:limLow>
+                            <m:limLowPr>
+                              <m:ctrlPr>
+                                <a:rPr lang="nl-BE" sz="3200">
+                                  <a:latin typeface="Cambria Math" panose="02040503050406030204" pitchFamily="18" charset="0"/>
+                                </a:rPr>
+                              </m:ctrlPr>
+                            </m:limLowPr>
+                            <m:e>
+                              <m:r>
+                                <m:rPr>
+                                  <m:sty m:val="p"/>
+                                </m:rPr>
+                                <a:rPr lang="nl-BE" sz="3200">
+                                  <a:latin typeface="Cambria Math" panose="02040503050406030204" pitchFamily="18" charset="0"/>
+                                </a:rPr>
+                                <m:t>lim</m:t>
+                              </m:r>
+                            </m:e>
+                            <m:lim>
+                              <m:r>
+                                <a:rPr lang="nl-BE" sz="3200" i="1">
+                                  <a:latin typeface="Cambria Math" panose="02040503050406030204" pitchFamily="18" charset="0"/>
+                                </a:rPr>
+                                <m:t>𝑛</m:t>
+                              </m:r>
+                              <m:r>
+                                <a:rPr lang="nl-BE" sz="3200" i="1">
+                                  <a:latin typeface="Cambria Math" panose="02040503050406030204" pitchFamily="18" charset="0"/>
+                                </a:rPr>
+                                <m:t>→∞</m:t>
+                              </m:r>
+                            </m:lim>
+                          </m:limLow>
+                        </m:fName>
+                        <m:e>
+                          <m:func>
+                            <m:funcPr>
+                              <m:ctrlPr>
+                                <a:rPr lang="nl-BE" sz="3200">
+                                  <a:latin typeface="Cambria Math" panose="02040503050406030204" pitchFamily="18" charset="0"/>
+                                </a:rPr>
+                              </m:ctrlPr>
+                            </m:funcPr>
+                            <m:fName>
+                              <m:r>
+                                <m:rPr>
+                                  <m:sty m:val="p"/>
+                                </m:rPr>
+                                <a:rPr lang="nl-BE" sz="3200">
+                                  <a:latin typeface="Cambria Math" panose="02040503050406030204" pitchFamily="18" charset="0"/>
+                                </a:rPr>
+                                <m:t>inf</m:t>
+                              </m:r>
+                            </m:fName>
+                            <m:e>
+                              <m:sSub>
+                                <m:sSubPr>
+                                  <m:ctrlPr>
+                                    <a:rPr lang="nl-BE" sz="3200" i="1">
+                                      <a:latin typeface="Cambria Math" panose="02040503050406030204" pitchFamily="18" charset="0"/>
+                                    </a:rPr>
+                                  </m:ctrlPr>
+                                </m:sSubPr>
+                                <m:e>
+                                  <m:r>
+                                    <a:rPr lang="nl-BE" sz="3200" i="1">
+                                      <a:latin typeface="Cambria Math" panose="02040503050406030204" pitchFamily="18" charset="0"/>
+                                    </a:rPr>
+                                    <m:t>𝑥</m:t>
+                                  </m:r>
+                                </m:e>
+                                <m:sub>
+                                  <m:r>
+                                    <a:rPr lang="nl-BE" sz="3200" i="1">
+                                      <a:latin typeface="Cambria Math" panose="02040503050406030204" pitchFamily="18" charset="0"/>
+                                    </a:rPr>
+                                    <m:t>𝑛</m:t>
+                                  </m:r>
+                                </m:sub>
+                              </m:sSub>
+                            </m:e>
+                          </m:func>
+                        </m:e>
+                      </m:func>
+                      <m:r>
+                        <a:rPr lang="nl-BE" sz="3200" i="1">
+                          <a:latin typeface="Cambria Math" panose="02040503050406030204" pitchFamily="18" charset="0"/>
+                        </a:rPr>
+                        <m:t>=</m:t>
+                      </m:r>
+                      <m:func>
+                        <m:funcPr>
+                          <m:ctrlPr>
+                            <a:rPr lang="nl-BE" sz="3200" i="1">
+                              <a:latin typeface="Cambria Math" panose="02040503050406030204" pitchFamily="18" charset="0"/>
+                            </a:rPr>
+                          </m:ctrlPr>
+                        </m:funcPr>
+                        <m:fName>
+                          <m:limLow>
+                            <m:limLowPr>
+                              <m:ctrlPr>
+                                <a:rPr lang="nl-BE" sz="3200">
+                                  <a:latin typeface="Cambria Math" panose="02040503050406030204" pitchFamily="18" charset="0"/>
+                                </a:rPr>
+                              </m:ctrlPr>
+                            </m:limLowPr>
+                            <m:e>
+                              <m:r>
+                                <m:rPr>
+                                  <m:sty m:val="p"/>
+                                </m:rPr>
+                                <a:rPr lang="nl-BE" sz="3200">
+                                  <a:latin typeface="Cambria Math" panose="02040503050406030204" pitchFamily="18" charset="0"/>
+                                </a:rPr>
+                                <m:t>lim</m:t>
+                              </m:r>
+                            </m:e>
+                            <m:lim>
+                              <m:r>
+                                <a:rPr lang="nl-BE" sz="3200" i="1">
+                                  <a:latin typeface="Cambria Math" panose="02040503050406030204" pitchFamily="18" charset="0"/>
+                                </a:rPr>
+                                <m:t>𝑛</m:t>
+                              </m:r>
+                              <m:r>
+                                <a:rPr lang="nl-BE" sz="3200" i="1">
+                                  <a:latin typeface="Cambria Math" panose="02040503050406030204" pitchFamily="18" charset="0"/>
+                                </a:rPr>
+                                <m:t>→∞</m:t>
+                              </m:r>
+                            </m:lim>
+                          </m:limLow>
+                        </m:fName>
+                        <m:e>
+                          <m:sSub>
+                            <m:sSubPr>
+                              <m:ctrlPr>
+                                <a:rPr lang="nl-BE" sz="3200" i="1">
+                                  <a:latin typeface="Cambria Math" panose="02040503050406030204" pitchFamily="18" charset="0"/>
+                                </a:rPr>
+                              </m:ctrlPr>
+                            </m:sSubPr>
+                            <m:e>
+                              <m:r>
+                                <a:rPr lang="nl-BE" sz="3200" i="1">
+                                  <a:latin typeface="Cambria Math" panose="02040503050406030204" pitchFamily="18" charset="0"/>
+                                </a:rPr>
+                                <m:t>𝑤</m:t>
+                              </m:r>
+                            </m:e>
+                            <m:sub>
+                              <m:r>
+                                <a:rPr lang="nl-BE" sz="3200" b="0" i="1" smtClean="0">
+                                  <a:latin typeface="Cambria Math" panose="02040503050406030204" pitchFamily="18" charset="0"/>
+                                </a:rPr>
+                                <m:t>𝑛</m:t>
+                              </m:r>
+                            </m:sub>
+                          </m:sSub>
+                        </m:e>
+                      </m:func>
+                    </m:oMath>
+                  </m:oMathPara>
                 </a14:m>
+                <a:endParaRPr lang="nl-BE" sz="3200" dirty="0"/>
+              </a:p>
+              <a:p>
                 <a:r>
                   <a:rPr lang="nl-BE" sz="3200" dirty="0"/>
-                  <a:t>,      </a:t>
+                  <a:t>      </a:t>
                 </a:r>
               </a:p>
               <a:p>
@@ -4987,8 +5019,8 @@
             </p:nvSpPr>
             <p:spPr>
               <a:xfrm>
-                <a:off x="7204866" y="1943664"/>
-                <a:ext cx="4987134" cy="2759345"/>
+                <a:off x="7214391" y="1690688"/>
+                <a:ext cx="4653710" cy="4236673"/>
               </a:xfrm>
               <a:prstGeom prst="rect">
                 <a:avLst/>
@@ -4996,7 +5028,7 @@
               <a:blipFill>
                 <a:blip r:embed="rId3"/>
                 <a:stretch>
-                  <a:fillRect t="-4204" r="-3912"/>
+                  <a:fillRect/>
                 </a:stretch>
               </a:blipFill>
             </p:spPr>
@@ -5104,15 +5136,33 @@
                                   </p:childTnLst>
                                 </p:cTn>
                               </p:par>
+                            </p:childTnLst>
+                          </p:cTn>
+                        </p:par>
+                      </p:childTnLst>
+                    </p:cTn>
+                  </p:par>
+                  <p:par>
+                    <p:cTn id="7" fill="hold">
+                      <p:stCondLst>
+                        <p:cond delay="indefinite"/>
+                      </p:stCondLst>
+                      <p:childTnLst>
+                        <p:par>
+                          <p:cTn id="8" fill="hold">
+                            <p:stCondLst>
+                              <p:cond delay="0"/>
+                            </p:stCondLst>
+                            <p:childTnLst>
                               <p:par>
-                                <p:cTn id="7" presetID="1" presetClass="entr" presetSubtype="0" fill="hold" nodeType="withEffect">
+                                <p:cTn id="9" presetID="1" presetClass="entr" presetSubtype="0" fill="hold" nodeType="clickEffect">
                                   <p:stCondLst>
                                     <p:cond delay="0"/>
                                   </p:stCondLst>
                                   <p:childTnLst>
                                     <p:set>
                                       <p:cBhvr>
-                                        <p:cTn id="8" dur="1" fill="hold">
+                                        <p:cTn id="10" dur="1" fill="hold">
                                           <p:stCondLst>
                                             <p:cond delay="0"/>
                                           </p:stCondLst>
@@ -5135,26 +5185,8 @@
                                   </p:childTnLst>
                                 </p:cTn>
                               </p:par>
-                            </p:childTnLst>
-                          </p:cTn>
-                        </p:par>
-                      </p:childTnLst>
-                    </p:cTn>
-                  </p:par>
-                  <p:par>
-                    <p:cTn id="9" fill="hold">
-                      <p:stCondLst>
-                        <p:cond delay="indefinite"/>
-                      </p:stCondLst>
-                      <p:childTnLst>
-                        <p:par>
-                          <p:cTn id="10" fill="hold">
-                            <p:stCondLst>
-                              <p:cond delay="0"/>
-                            </p:stCondLst>
-                            <p:childTnLst>
                               <p:par>
-                                <p:cTn id="11" presetID="1" presetClass="entr" presetSubtype="0" fill="hold" nodeType="clickEffect">
+                                <p:cTn id="11" presetID="1" presetClass="entr" presetSubtype="0" fill="hold" nodeType="withEffect">
                                   <p:stCondLst>
                                     <p:cond delay="0"/>
                                   </p:stCondLst>
@@ -5169,7 +5201,105 @@
                                         <p:tgtEl>
                                           <p:spTgt spid="3">
                                             <p:txEl>
-                                              <p:pRg st="3" end="3"/>
+                                              <p:pRg st="2" end="2"/>
+                                            </p:txEl>
+                                          </p:spTgt>
+                                        </p:tgtEl>
+                                        <p:attrNameLst>
+                                          <p:attrName>style.visibility</p:attrName>
+                                        </p:attrNameLst>
+                                      </p:cBhvr>
+                                      <p:to>
+                                        <p:strVal val="visible"/>
+                                      </p:to>
+                                    </p:set>
+                                  </p:childTnLst>
+                                </p:cTn>
+                              </p:par>
+                            </p:childTnLst>
+                          </p:cTn>
+                        </p:par>
+                      </p:childTnLst>
+                    </p:cTn>
+                  </p:par>
+                  <p:par>
+                    <p:cTn id="13" fill="hold">
+                      <p:stCondLst>
+                        <p:cond delay="indefinite"/>
+                      </p:stCondLst>
+                      <p:childTnLst>
+                        <p:par>
+                          <p:cTn id="14" fill="hold">
+                            <p:stCondLst>
+                              <p:cond delay="0"/>
+                            </p:stCondLst>
+                            <p:childTnLst>
+                              <p:par>
+                                <p:cTn id="15" presetID="1" presetClass="entr" presetSubtype="0" fill="hold" nodeType="clickEffect">
+                                  <p:stCondLst>
+                                    <p:cond delay="0"/>
+                                  </p:stCondLst>
+                                  <p:childTnLst>
+                                    <p:set>
+                                      <p:cBhvr>
+                                        <p:cTn id="16" dur="1" fill="hold">
+                                          <p:stCondLst>
+                                            <p:cond delay="0"/>
+                                          </p:stCondLst>
+                                        </p:cTn>
+                                        <p:tgtEl>
+                                          <p:spTgt spid="3">
+                                            <p:txEl>
+                                              <p:pRg st="5" end="5"/>
+                                            </p:txEl>
+                                          </p:spTgt>
+                                        </p:tgtEl>
+                                        <p:attrNameLst>
+                                          <p:attrName>style.visibility</p:attrName>
+                                        </p:attrNameLst>
+                                      </p:cBhvr>
+                                      <p:to>
+                                        <p:strVal val="visible"/>
+                                      </p:to>
+                                    </p:set>
+                                  </p:childTnLst>
+                                </p:cTn>
+                              </p:par>
+                            </p:childTnLst>
+                          </p:cTn>
+                        </p:par>
+                      </p:childTnLst>
+                    </p:cTn>
+                  </p:par>
+                  <p:par>
+                    <p:cTn id="17" fill="hold">
+                      <p:stCondLst>
+                        <p:cond delay="indefinite"/>
+                      </p:stCondLst>
+                      <p:childTnLst>
+                        <p:par>
+                          <p:cTn id="18" fill="hold">
+                            <p:stCondLst>
+                              <p:cond delay="0"/>
+                            </p:stCondLst>
+                            <p:childTnLst>
+                              <p:par>
+                                <p:cTn id="19" presetID="1" presetClass="entr" presetSubtype="0" fill="hold" nodeType="clickEffect">
+                                  <p:stCondLst>
+                                    <p:cond delay="0"/>
+                                  </p:stCondLst>
+                                  <p:childTnLst>
+                                    <p:set>
+                                      <p:cBhvr>
+                                        <p:cTn id="20" dur="1" fill="hold">
+                                          <p:stCondLst>
+                                            <p:cond delay="0"/>
+                                          </p:stCondLst>
+                                        </p:cTn>
+                                        <p:tgtEl>
+                                          <p:spTgt spid="3">
+                                            <p:txEl>
+                                              <p:pRg st="6" end="6"/>
                                             </p:txEl>
                                           </p:spTgt>
                                         </p:tgtEl>
@@ -5185,14 +5315,14 @@
                                 </p:cTn>
                               </p:par>
                               <p:par>
-                                <p:cTn id="13" presetID="1" presetClass="entr" presetSubtype="0" fill="hold" nodeType="withEffect">
+                                <p:cTn id="21" presetID="1" presetClass="entr" presetSubtype="0" fill="hold" nodeType="withEffect">
                                   <p:stCondLst>
                                     <p:cond delay="0"/>
                                   </p:stCondLst>
                                   <p:childTnLst>
                                     <p:set>
                                       <p:cBhvr>
-                                        <p:cTn id="14" dur="1" fill="hold">
+                                        <p:cTn id="22" dur="1" fill="hold">
                                           <p:stCondLst>
                                             <p:cond delay="0"/>
                                           </p:stCondLst>
@@ -5200,7 +5330,7 @@
                                         <p:tgtEl>
                                           <p:spTgt spid="3">
                                             <p:txEl>
-                                              <p:pRg st="4" end="4"/>
+                                              <p:pRg st="7" end="7"/>
                                             </p:txEl>
                                           </p:spTgt>
                                         </p:tgtEl>
@@ -5410,8 +5540,8 @@
           </p:sp>
         </mc:Fallback>
       </mc:AlternateContent>
-      <mc:AlternateContent xmlns:mc="http://schemas.openxmlformats.org/markup-compatibility/2006">
-        <mc:Choice xmlns:a14="http://schemas.microsoft.com/office/drawing/2010/main" Requires="a14">
+      <mc:AlternateContent xmlns:mc="http://schemas.openxmlformats.org/markup-compatibility/2006" xmlns:a14="http://schemas.microsoft.com/office/drawing/2010/main">
+        <mc:Choice Requires="a14">
           <p:sp>
             <p:nvSpPr>
               <p:cNvPr id="3" name="Tijdelijke aanduiding voor inhoud 2">
@@ -5922,7 +6052,7 @@
             </p:txBody>
           </p:sp>
         </mc:Choice>
-        <mc:Fallback>
+        <mc:Fallback xmlns="">
           <p:sp>
             <p:nvSpPr>
               <p:cNvPr id="3" name="Tijdelijke aanduiding voor inhoud 2">
@@ -6331,346 +6461,6 @@
 </file>
 
 <file path=ppt/slides/slide13.xml><?xml version="1.0" encoding="utf-8"?>
-<p:sld xmlns:a="http://schemas.openxmlformats.org/drawingml/2006/main" xmlns:r="http://schemas.openxmlformats.org/officeDocument/2006/relationships" xmlns:p="http://schemas.openxmlformats.org/presentationml/2006/main">
-  <p:cSld>
-    <p:spTree>
-      <p:nvGrpSpPr>
-        <p:cNvPr id="1" name=""/>
-        <p:cNvGrpSpPr/>
-        <p:nvPr/>
-      </p:nvGrpSpPr>
-      <p:grpSpPr>
-        <a:xfrm>
-          <a:off x="0" y="0"/>
-          <a:ext cx="0" cy="0"/>
-          <a:chOff x="0" y="0"/>
-          <a:chExt cx="0" cy="0"/>
-        </a:xfrm>
-      </p:grpSpPr>
-      <p:pic>
-        <p:nvPicPr>
-          <p:cNvPr id="6" name="Tijdelijke aanduiding voor inhoud 5">
-            <a:extLst>
-              <a:ext uri="{FF2B5EF4-FFF2-40B4-BE49-F238E27FC236}">
-                <a16:creationId xmlns:a16="http://schemas.microsoft.com/office/drawing/2014/main" id="{584DE6C4-DDD9-A734-BD22-FFDCDBAF295D}"/>
-              </a:ext>
-            </a:extLst>
-          </p:cNvPr>
-          <p:cNvPicPr>
-            <a:picLocks noGrp="1" noChangeAspect="1"/>
-          </p:cNvPicPr>
-          <p:nvPr>
-            <p:ph idx="1"/>
-          </p:nvPr>
-        </p:nvPicPr>
-        <p:blipFill>
-          <a:blip r:embed="rId2"/>
-          <a:stretch>
-            <a:fillRect/>
-          </a:stretch>
-        </p:blipFill>
-        <p:spPr>
-          <a:xfrm>
-            <a:off x="4043362" y="1943894"/>
-            <a:ext cx="4105275" cy="4114800"/>
-          </a:xfrm>
-          <a:prstGeom prst="rect">
-            <a:avLst/>
-          </a:prstGeom>
-        </p:spPr>
-      </p:pic>
-      <p:sp>
-        <p:nvSpPr>
-          <p:cNvPr id="4" name="Tijdelijke aanduiding voor voettekst 3">
-            <a:extLst>
-              <a:ext uri="{FF2B5EF4-FFF2-40B4-BE49-F238E27FC236}">
-                <a16:creationId xmlns:a16="http://schemas.microsoft.com/office/drawing/2014/main" id="{79312C72-E4D0-70E8-5D93-EF559DE7C875}"/>
-              </a:ext>
-            </a:extLst>
-          </p:cNvPr>
-          <p:cNvSpPr>
-            <a:spLocks noGrp="1"/>
-          </p:cNvSpPr>
-          <p:nvPr>
-            <p:ph type="ftr" sz="quarter" idx="11"/>
-          </p:nvPr>
-        </p:nvSpPr>
-        <p:spPr/>
-        <p:txBody>
-          <a:bodyPr/>
-          <a:lstStyle/>
-          <a:p>
-            <a:r>
-              <a:rPr lang="en-GB"/>
-              <a:t>Oefenzittingen Analyse I - Jasper Visterin</a:t>
-            </a:r>
-          </a:p>
-        </p:txBody>
-      </p:sp>
-      <mc:AlternateContent xmlns:mc="http://schemas.openxmlformats.org/markup-compatibility/2006">
-        <mc:Choice xmlns:a14="http://schemas.microsoft.com/office/drawing/2010/main" Requires="a14">
-          <p:sp>
-            <p:nvSpPr>
-              <p:cNvPr id="8" name="Tekstvak 7">
-                <a:extLst>
-                  <a:ext uri="{FF2B5EF4-FFF2-40B4-BE49-F238E27FC236}">
-                    <a16:creationId xmlns:a16="http://schemas.microsoft.com/office/drawing/2014/main" id="{DCBAF4EB-6564-9F5D-105B-F6960434561C}"/>
-                  </a:ext>
-                </a:extLst>
-              </p:cNvPr>
-              <p:cNvSpPr txBox="1"/>
-              <p:nvPr/>
-            </p:nvSpPr>
-            <p:spPr>
-              <a:xfrm>
-                <a:off x="3047999" y="799306"/>
-                <a:ext cx="6096000" cy="769441"/>
-              </a:xfrm>
-              <a:prstGeom prst="rect">
-                <a:avLst/>
-              </a:prstGeom>
-              <a:noFill/>
-            </p:spPr>
-            <p:txBody>
-              <a:bodyPr wrap="square">
-                <a:spAutoFit/>
-              </a:bodyPr>
-              <a:lstStyle/>
-              <a:p>
-                <a:pPr/>
-                <a14:m>
-                  <m:oMathPara xmlns:m="http://schemas.openxmlformats.org/officeDocument/2006/math">
-                    <m:oMath>
-                      <m:func>
-                        <m:funcPr>
-                          <m:ctrlPr>
-                            <a:rPr lang="nl-BE" sz="4400" b="0" i="0" smtClean="0">
-                              <a:latin typeface="Cambria Math" panose="02040503050406030204" pitchFamily="18" charset="0"/>
-                            </a:rPr>
-                          </m:ctrlPr>
-                        </m:funcPr>
-                        <m:fName>
-                          <m:r>
-                            <m:rPr>
-                              <m:sty m:val="p"/>
-                            </m:rPr>
-                            <a:rPr lang="nl-BE" sz="4400" b="0" i="0" smtClean="0">
-                              <a:latin typeface="Cambria Math" panose="02040503050406030204" pitchFamily="18" charset="0"/>
-                            </a:rPr>
-                            <m:t>lim</m:t>
-                          </m:r>
-                        </m:fName>
-                        <m:e>
-                          <m:r>
-                            <m:rPr>
-                              <m:sty m:val="p"/>
-                            </m:rPr>
-                            <a:rPr lang="nl-BE" sz="4400" b="0" i="1" smtClean="0">
-                              <a:latin typeface="Cambria Math" panose="02040503050406030204" pitchFamily="18" charset="0"/>
-                            </a:rPr>
-                            <m:t>sup</m:t>
-                          </m:r>
-                        </m:e>
-                      </m:func>
-                    </m:oMath>
-                  </m:oMathPara>
-                </a14:m>
-                <a:endParaRPr lang="nl-BE" dirty="0"/>
-              </a:p>
-            </p:txBody>
-          </p:sp>
-        </mc:Choice>
-        <mc:Fallback>
-          <p:sp>
-            <p:nvSpPr>
-              <p:cNvPr id="8" name="Tekstvak 7">
-                <a:extLst>
-                  <a:ext uri="{FF2B5EF4-FFF2-40B4-BE49-F238E27FC236}">
-                    <a16:creationId xmlns:a16="http://schemas.microsoft.com/office/drawing/2014/main" id="{DCBAF4EB-6564-9F5D-105B-F6960434561C}"/>
-                  </a:ext>
-                </a:extLst>
-              </p:cNvPr>
-              <p:cNvSpPr txBox="1">
-                <a:spLocks noRot="1" noChangeAspect="1" noMove="1" noResize="1" noEditPoints="1" noAdjustHandles="1" noChangeArrowheads="1" noChangeShapeType="1" noTextEdit="1"/>
-              </p:cNvSpPr>
-              <p:nvPr/>
-            </p:nvSpPr>
-            <p:spPr>
-              <a:xfrm>
-                <a:off x="3047999" y="799306"/>
-                <a:ext cx="6096000" cy="769441"/>
-              </a:xfrm>
-              <a:prstGeom prst="rect">
-                <a:avLst/>
-              </a:prstGeom>
-              <a:blipFill>
-                <a:blip r:embed="rId3"/>
-                <a:stretch>
-                  <a:fillRect/>
-                </a:stretch>
-              </a:blipFill>
-            </p:spPr>
-            <p:txBody>
-              <a:bodyPr/>
-              <a:lstStyle/>
-              <a:p>
-                <a:r>
-                  <a:rPr lang="nl-BE">
-                    <a:noFill/>
-                  </a:rPr>
-                  <a:t> </a:t>
-                </a:r>
-              </a:p>
-            </p:txBody>
-          </p:sp>
-        </mc:Fallback>
-      </mc:AlternateContent>
-    </p:spTree>
-    <p:extLst>
-      <p:ext uri="{BB962C8B-B14F-4D97-AF65-F5344CB8AC3E}">
-        <p14:creationId xmlns:p14="http://schemas.microsoft.com/office/powerpoint/2010/main" val="1143024439"/>
-      </p:ext>
-    </p:extLst>
-  </p:cSld>
-  <p:clrMapOvr>
-    <a:masterClrMapping/>
-  </p:clrMapOvr>
-  <p:timing>
-    <p:tnLst>
-      <p:par>
-        <p:cTn id="1" dur="indefinite" restart="never" nodeType="tmRoot">
-          <p:childTnLst>
-            <p:seq concurrent="1" nextAc="seek">
-              <p:cTn id="2" dur="indefinite" nodeType="mainSeq">
-                <p:childTnLst>
-                  <p:par>
-                    <p:cTn id="3" fill="hold">
-                      <p:stCondLst>
-                        <p:cond delay="indefinite"/>
-                      </p:stCondLst>
-                      <p:childTnLst>
-                        <p:par>
-                          <p:cTn id="4" fill="hold">
-                            <p:stCondLst>
-                              <p:cond delay="0"/>
-                            </p:stCondLst>
-                            <p:childTnLst>
-                              <p:par>
-                                <p:cTn id="5" presetID="42" presetClass="entr" presetSubtype="0" fill="hold" grpId="0" nodeType="clickEffect">
-                                  <p:stCondLst>
-                                    <p:cond delay="0"/>
-                                  </p:stCondLst>
-                                  <p:childTnLst>
-                                    <p:set>
-                                      <p:cBhvr>
-                                        <p:cTn id="6" dur="1" fill="hold">
-                                          <p:stCondLst>
-                                            <p:cond delay="0"/>
-                                          </p:stCondLst>
-                                        </p:cTn>
-                                        <p:tgtEl>
-                                          <p:spTgt spid="8"/>
-                                        </p:tgtEl>
-                                        <p:attrNameLst>
-                                          <p:attrName>style.visibility</p:attrName>
-                                        </p:attrNameLst>
-                                      </p:cBhvr>
-                                      <p:to>
-                                        <p:strVal val="visible"/>
-                                      </p:to>
-                                    </p:set>
-                                    <p:animEffect transition="in" filter="fade">
-                                      <p:cBhvr>
-                                        <p:cTn id="7" dur="1000"/>
-                                        <p:tgtEl>
-                                          <p:spTgt spid="8"/>
-                                        </p:tgtEl>
-                                      </p:cBhvr>
-                                    </p:animEffect>
-                                    <p:anim calcmode="lin" valueType="num">
-                                      <p:cBhvr>
-                                        <p:cTn id="8" dur="1000" fill="hold"/>
-                                        <p:tgtEl>
-                                          <p:spTgt spid="8"/>
-                                        </p:tgtEl>
-                                        <p:attrNameLst>
-                                          <p:attrName>ppt_x</p:attrName>
-                                        </p:attrNameLst>
-                                      </p:cBhvr>
-                                      <p:tavLst>
-                                        <p:tav tm="0">
-                                          <p:val>
-                                            <p:strVal val="#ppt_x"/>
-                                          </p:val>
-                                        </p:tav>
-                                        <p:tav tm="100000">
-                                          <p:val>
-                                            <p:strVal val="#ppt_x"/>
-                                          </p:val>
-                                        </p:tav>
-                                      </p:tavLst>
-                                    </p:anim>
-                                    <p:anim calcmode="lin" valueType="num">
-                                      <p:cBhvr>
-                                        <p:cTn id="9" dur="1000" fill="hold"/>
-                                        <p:tgtEl>
-                                          <p:spTgt spid="8"/>
-                                        </p:tgtEl>
-                                        <p:attrNameLst>
-                                          <p:attrName>ppt_y</p:attrName>
-                                        </p:attrNameLst>
-                                      </p:cBhvr>
-                                      <p:tavLst>
-                                        <p:tav tm="0">
-                                          <p:val>
-                                            <p:strVal val="#ppt_y+.1"/>
-                                          </p:val>
-                                        </p:tav>
-                                        <p:tav tm="100000">
-                                          <p:val>
-                                            <p:strVal val="#ppt_y"/>
-                                          </p:val>
-                                        </p:tav>
-                                      </p:tavLst>
-                                    </p:anim>
-                                  </p:childTnLst>
-                                </p:cTn>
-                              </p:par>
-                            </p:childTnLst>
-                          </p:cTn>
-                        </p:par>
-                      </p:childTnLst>
-                    </p:cTn>
-                  </p:par>
-                </p:childTnLst>
-              </p:cTn>
-              <p:prevCondLst>
-                <p:cond evt="onPrev" delay="0">
-                  <p:tgtEl>
-                    <p:sldTgt/>
-                  </p:tgtEl>
-                </p:cond>
-              </p:prevCondLst>
-              <p:nextCondLst>
-                <p:cond evt="onNext" delay="0">
-                  <p:tgtEl>
-                    <p:sldTgt/>
-                  </p:tgtEl>
-                </p:cond>
-              </p:nextCondLst>
-            </p:seq>
-          </p:childTnLst>
-        </p:cTn>
-      </p:par>
-    </p:tnLst>
-    <p:bldLst>
-      <p:bldP spid="8" grpId="0"/>
-    </p:bldLst>
-  </p:timing>
-</p:sld>
-</file>
-
-<file path=ppt/slides/slide14.xml><?xml version="1.0" encoding="utf-8"?>
 <p:sld xmlns:a="http://schemas.openxmlformats.org/drawingml/2006/main" xmlns:r="http://schemas.openxmlformats.org/officeDocument/2006/relationships" xmlns:p="http://schemas.openxmlformats.org/presentationml/2006/main">
   <p:cSld>
     <p:spTree>
@@ -7632,7 +7422,7 @@
 </p:sld>
 </file>
 
-<file path=ppt/slides/slide15.xml><?xml version="1.0" encoding="utf-8"?>
+<file path=ppt/slides/slide14.xml><?xml version="1.0" encoding="utf-8"?>
 <p:sld xmlns:a="http://schemas.openxmlformats.org/drawingml/2006/main" xmlns:r="http://schemas.openxmlformats.org/officeDocument/2006/relationships" xmlns:p="http://schemas.openxmlformats.org/presentationml/2006/main">
   <p:cSld>
     <p:spTree>
@@ -7677,8 +7467,8 @@
           </a:p>
         </p:txBody>
       </p:sp>
-      <mc:AlternateContent xmlns:mc="http://schemas.openxmlformats.org/markup-compatibility/2006">
-        <mc:Choice xmlns:a14="http://schemas.microsoft.com/office/drawing/2010/main" Requires="a14">
+      <mc:AlternateContent xmlns:mc="http://schemas.openxmlformats.org/markup-compatibility/2006" xmlns:a14="http://schemas.microsoft.com/office/drawing/2010/main">
+        <mc:Choice Requires="a14">
           <p:sp>
             <p:nvSpPr>
               <p:cNvPr id="3" name="Tijdelijke aanduiding voor inhoud 2">
@@ -7703,6 +7493,148 @@
               <a:lstStyle/>
               <a:p>
                 <a:endParaRPr lang="nl-BE" dirty="0"/>
+              </a:p>
+              <a:p>
+                <a:pPr marL="0" indent="0">
+                  <a:buNone/>
+                </a:pPr>
+                <a14:m>
+                  <m:oMathPara xmlns:m="http://schemas.openxmlformats.org/officeDocument/2006/math">
+                    <m:oMath>
+                      <m:func>
+                        <m:funcPr>
+                          <m:ctrlPr>
+                            <a:rPr lang="nl-BE" b="1" i="1">
+                              <a:latin typeface="Cambria Math" panose="02040503050406030204" pitchFamily="18" charset="0"/>
+                            </a:rPr>
+                          </m:ctrlPr>
+                        </m:funcPr>
+                        <m:fName>
+                          <m:limLow>
+                            <m:limLowPr>
+                              <m:ctrlPr>
+                                <a:rPr lang="nl-BE" b="1" i="1">
+                                  <a:latin typeface="Cambria Math" panose="02040503050406030204" pitchFamily="18" charset="0"/>
+                                </a:rPr>
+                              </m:ctrlPr>
+                            </m:limLowPr>
+                            <m:e>
+                              <m:r>
+                                <a:rPr lang="nl-BE" b="1" i="1">
+                                  <a:latin typeface="Cambria Math" panose="02040503050406030204" pitchFamily="18" charset="0"/>
+                                </a:rPr>
+                                <m:t>𝒍𝒊𝒎</m:t>
+                              </m:r>
+                            </m:e>
+                            <m:lim>
+                              <m:r>
+                                <a:rPr lang="nl-BE" b="1" i="1">
+                                  <a:latin typeface="Cambria Math" panose="02040503050406030204" pitchFamily="18" charset="0"/>
+                                </a:rPr>
+                                <m:t>𝒏</m:t>
+                              </m:r>
+                              <m:r>
+                                <a:rPr lang="nl-BE" b="1" i="1">
+                                  <a:latin typeface="Cambria Math" panose="02040503050406030204" pitchFamily="18" charset="0"/>
+                                </a:rPr>
+                                <m:t>→∞</m:t>
+                              </m:r>
+                            </m:lim>
+                          </m:limLow>
+                        </m:fName>
+                        <m:e>
+                          <m:sSup>
+                            <m:sSupPr>
+                              <m:ctrlPr>
+                                <a:rPr lang="nl-BE" b="1" i="1">
+                                  <a:latin typeface="Cambria Math" panose="02040503050406030204" pitchFamily="18" charset="0"/>
+                                </a:rPr>
+                              </m:ctrlPr>
+                            </m:sSupPr>
+                            <m:e>
+                              <m:d>
+                                <m:dPr>
+                                  <m:ctrlPr>
+                                    <a:rPr lang="nl-BE" b="1" i="1">
+                                      <a:latin typeface="Cambria Math" panose="02040503050406030204" pitchFamily="18" charset="0"/>
+                                    </a:rPr>
+                                  </m:ctrlPr>
+                                </m:dPr>
+                                <m:e>
+                                  <m:r>
+                                    <a:rPr lang="nl-BE" b="1" i="1">
+                                      <a:latin typeface="Cambria Math" panose="02040503050406030204" pitchFamily="18" charset="0"/>
+                                    </a:rPr>
+                                    <m:t>𝟏</m:t>
+                                  </m:r>
+                                  <m:r>
+                                    <a:rPr lang="nl-BE" b="1" i="1">
+                                      <a:latin typeface="Cambria Math" panose="02040503050406030204" pitchFamily="18" charset="0"/>
+                                    </a:rPr>
+                                    <m:t>+</m:t>
+                                  </m:r>
+                                  <m:f>
+                                    <m:fPr>
+                                      <m:ctrlPr>
+                                        <a:rPr lang="en-GB" b="1" i="1">
+                                          <a:latin typeface="Cambria Math" panose="02040503050406030204" pitchFamily="18" charset="0"/>
+                                        </a:rPr>
+                                      </m:ctrlPr>
+                                    </m:fPr>
+                                    <m:num>
+                                      <m:r>
+                                        <a:rPr lang="en-GB" b="1" i="1">
+                                          <a:latin typeface="Cambria Math" panose="02040503050406030204" pitchFamily="18" charset="0"/>
+                                        </a:rPr>
+                                        <m:t>𝟏</m:t>
+                                      </m:r>
+                                    </m:num>
+                                    <m:den>
+                                      <m:r>
+                                        <a:rPr lang="nl-BE" b="1" i="1">
+                                          <a:latin typeface="Cambria Math" panose="02040503050406030204" pitchFamily="18" charset="0"/>
+                                        </a:rPr>
+                                        <m:t>𝒏</m:t>
+                                      </m:r>
+                                    </m:den>
+                                  </m:f>
+                                </m:e>
+                              </m:d>
+                            </m:e>
+                            <m:sup>
+                              <m:r>
+                                <a:rPr lang="nl-BE" b="1" i="1">
+                                  <a:latin typeface="Cambria Math" panose="02040503050406030204" pitchFamily="18" charset="0"/>
+                                </a:rPr>
+                                <m:t>𝒏</m:t>
+                              </m:r>
+                            </m:sup>
+                          </m:sSup>
+                        </m:e>
+                      </m:func>
+                      <m:r>
+                        <a:rPr lang="nl-BE" b="1" i="1">
+                          <a:latin typeface="Cambria Math" panose="02040503050406030204" pitchFamily="18" charset="0"/>
+                        </a:rPr>
+                        <m:t>=</m:t>
+                      </m:r>
+                      <m:r>
+                        <a:rPr lang="en-GB" b="1" i="1">
+                          <a:latin typeface="Cambria Math" panose="02040503050406030204" pitchFamily="18" charset="0"/>
+                        </a:rPr>
+                        <m:t>𝒆</m:t>
+                      </m:r>
+                    </m:oMath>
+                  </m:oMathPara>
+                </a14:m>
+                <a:endParaRPr lang="en-GB" b="1" i="1" dirty="0">
+                  <a:latin typeface="Cambria Math" panose="02040503050406030204" pitchFamily="18" charset="0"/>
+                </a:endParaRPr>
+              </a:p>
+              <a:p>
+                <a:endParaRPr lang="nl-BE" b="1" i="1" dirty="0">
+                  <a:latin typeface="Cambria Math" panose="02040503050406030204" pitchFamily="18" charset="0"/>
+                </a:endParaRPr>
               </a:p>
               <a:p>
                 <a:pPr marL="0" indent="0">
@@ -7864,145 +7796,10 @@
                 </a:pPr>
                 <a:endParaRPr lang="nl-BE" b="1" dirty="0"/>
               </a:p>
-              <a:p>
-                <a:pPr marL="0" indent="0">
-                  <a:buNone/>
-                </a:pPr>
-                <a14:m>
-                  <m:oMathPara xmlns:m="http://schemas.openxmlformats.org/officeDocument/2006/math">
-                    <m:oMath>
-                      <m:func>
-                        <m:funcPr>
-                          <m:ctrlPr>
-                            <a:rPr lang="nl-BE" b="1" i="1">
-                              <a:latin typeface="Cambria Math" panose="02040503050406030204" pitchFamily="18" charset="0"/>
-                            </a:rPr>
-                          </m:ctrlPr>
-                        </m:funcPr>
-                        <m:fName>
-                          <m:limLow>
-                            <m:limLowPr>
-                              <m:ctrlPr>
-                                <a:rPr lang="nl-BE" b="1" i="1">
-                                  <a:latin typeface="Cambria Math" panose="02040503050406030204" pitchFamily="18" charset="0"/>
-                                </a:rPr>
-                              </m:ctrlPr>
-                            </m:limLowPr>
-                            <m:e>
-                              <m:r>
-                                <a:rPr lang="nl-BE" b="1" i="1">
-                                  <a:latin typeface="Cambria Math" panose="02040503050406030204" pitchFamily="18" charset="0"/>
-                                </a:rPr>
-                                <m:t>𝒍𝒊𝒎</m:t>
-                              </m:r>
-                            </m:e>
-                            <m:lim>
-                              <m:r>
-                                <a:rPr lang="nl-BE" b="1" i="1">
-                                  <a:latin typeface="Cambria Math" panose="02040503050406030204" pitchFamily="18" charset="0"/>
-                                </a:rPr>
-                                <m:t>𝒏</m:t>
-                              </m:r>
-                              <m:r>
-                                <a:rPr lang="nl-BE" b="1" i="1">
-                                  <a:latin typeface="Cambria Math" panose="02040503050406030204" pitchFamily="18" charset="0"/>
-                                </a:rPr>
-                                <m:t>→∞</m:t>
-                              </m:r>
-                            </m:lim>
-                          </m:limLow>
-                        </m:fName>
-                        <m:e>
-                          <m:sSup>
-                            <m:sSupPr>
-                              <m:ctrlPr>
-                                <a:rPr lang="nl-BE" b="1" i="1">
-                                  <a:latin typeface="Cambria Math" panose="02040503050406030204" pitchFamily="18" charset="0"/>
-                                </a:rPr>
-                              </m:ctrlPr>
-                            </m:sSupPr>
-                            <m:e>
-                              <m:d>
-                                <m:dPr>
-                                  <m:ctrlPr>
-                                    <a:rPr lang="nl-BE" b="1" i="1">
-                                      <a:latin typeface="Cambria Math" panose="02040503050406030204" pitchFamily="18" charset="0"/>
-                                    </a:rPr>
-                                  </m:ctrlPr>
-                                </m:dPr>
-                                <m:e>
-                                  <m:r>
-                                    <a:rPr lang="nl-BE" b="1" i="1">
-                                      <a:latin typeface="Cambria Math" panose="02040503050406030204" pitchFamily="18" charset="0"/>
-                                    </a:rPr>
-                                    <m:t>𝟏</m:t>
-                                  </m:r>
-                                  <m:r>
-                                    <a:rPr lang="nl-BE" b="1" i="1">
-                                      <a:latin typeface="Cambria Math" panose="02040503050406030204" pitchFamily="18" charset="0"/>
-                                    </a:rPr>
-                                    <m:t>+</m:t>
-                                  </m:r>
-                                  <m:f>
-                                    <m:fPr>
-                                      <m:ctrlPr>
-                                        <a:rPr lang="en-GB" b="1" i="1">
-                                          <a:latin typeface="Cambria Math" panose="02040503050406030204" pitchFamily="18" charset="0"/>
-                                        </a:rPr>
-                                      </m:ctrlPr>
-                                    </m:fPr>
-                                    <m:num>
-                                      <m:r>
-                                        <a:rPr lang="en-GB" b="1" i="1">
-                                          <a:latin typeface="Cambria Math" panose="02040503050406030204" pitchFamily="18" charset="0"/>
-                                        </a:rPr>
-                                        <m:t>𝟏</m:t>
-                                      </m:r>
-                                    </m:num>
-                                    <m:den>
-                                      <m:r>
-                                        <a:rPr lang="nl-BE" b="1" i="1">
-                                          <a:latin typeface="Cambria Math" panose="02040503050406030204" pitchFamily="18" charset="0"/>
-                                        </a:rPr>
-                                        <m:t>𝒏</m:t>
-                                      </m:r>
-                                    </m:den>
-                                  </m:f>
-                                </m:e>
-                              </m:d>
-                            </m:e>
-                            <m:sup>
-                              <m:r>
-                                <a:rPr lang="nl-BE" b="1" i="1">
-                                  <a:latin typeface="Cambria Math" panose="02040503050406030204" pitchFamily="18" charset="0"/>
-                                </a:rPr>
-                                <m:t>𝒏</m:t>
-                              </m:r>
-                            </m:sup>
-                          </m:sSup>
-                        </m:e>
-                      </m:func>
-                      <m:r>
-                        <a:rPr lang="nl-BE" b="1" i="1">
-                          <a:latin typeface="Cambria Math" panose="02040503050406030204" pitchFamily="18" charset="0"/>
-                        </a:rPr>
-                        <m:t>=</m:t>
-                      </m:r>
-                      <m:r>
-                        <a:rPr lang="en-GB" b="1" i="1">
-                          <a:latin typeface="Cambria Math" panose="02040503050406030204" pitchFamily="18" charset="0"/>
-                        </a:rPr>
-                        <m:t>𝒆</m:t>
-                      </m:r>
-                    </m:oMath>
-                  </m:oMathPara>
-                </a14:m>
-                <a:endParaRPr lang="nl-BE" b="1" dirty="0"/>
-              </a:p>
             </p:txBody>
           </p:sp>
         </mc:Choice>
-        <mc:Fallback>
+        <mc:Fallback xmlns="">
           <p:sp>
             <p:nvSpPr>
               <p:cNvPr id="3" name="Tijdelijke aanduiding voor inhoud 2">
@@ -8080,10 +7877,2465 @@
   <p:clrMapOvr>
     <a:masterClrMapping/>
   </p:clrMapOvr>
+  <p:timing>
+    <p:tnLst>
+      <p:par>
+        <p:cTn id="1" dur="indefinite" restart="never" nodeType="tmRoot">
+          <p:childTnLst>
+            <p:seq concurrent="1" nextAc="seek">
+              <p:cTn id="2" dur="indefinite" nodeType="mainSeq">
+                <p:childTnLst>
+                  <p:par>
+                    <p:cTn id="3" fill="hold">
+                      <p:stCondLst>
+                        <p:cond delay="indefinite"/>
+                      </p:stCondLst>
+                      <p:childTnLst>
+                        <p:par>
+                          <p:cTn id="4" fill="hold">
+                            <p:stCondLst>
+                              <p:cond delay="0"/>
+                            </p:stCondLst>
+                            <p:childTnLst>
+                              <p:par>
+                                <p:cTn id="5" presetID="1" presetClass="entr" presetSubtype="0" fill="hold" grpId="0" nodeType="clickEffect">
+                                  <p:stCondLst>
+                                    <p:cond delay="0"/>
+                                  </p:stCondLst>
+                                  <p:childTnLst>
+                                    <p:set>
+                                      <p:cBhvr>
+                                        <p:cTn id="6" dur="1" fill="hold">
+                                          <p:stCondLst>
+                                            <p:cond delay="0"/>
+                                          </p:stCondLst>
+                                        </p:cTn>
+                                        <p:tgtEl>
+                                          <p:spTgt spid="3">
+                                            <p:txEl>
+                                              <p:pRg st="1" end="1"/>
+                                            </p:txEl>
+                                          </p:spTgt>
+                                        </p:tgtEl>
+                                        <p:attrNameLst>
+                                          <p:attrName>style.visibility</p:attrName>
+                                        </p:attrNameLst>
+                                      </p:cBhvr>
+                                      <p:to>
+                                        <p:strVal val="visible"/>
+                                      </p:to>
+                                    </p:set>
+                                  </p:childTnLst>
+                                </p:cTn>
+                              </p:par>
+                            </p:childTnLst>
+                          </p:cTn>
+                        </p:par>
+                      </p:childTnLst>
+                    </p:cTn>
+                  </p:par>
+                  <p:par>
+                    <p:cTn id="7" fill="hold">
+                      <p:stCondLst>
+                        <p:cond delay="indefinite"/>
+                      </p:stCondLst>
+                      <p:childTnLst>
+                        <p:par>
+                          <p:cTn id="8" fill="hold">
+                            <p:stCondLst>
+                              <p:cond delay="0"/>
+                            </p:stCondLst>
+                            <p:childTnLst>
+                              <p:par>
+                                <p:cTn id="9" presetID="1" presetClass="entr" presetSubtype="0" fill="hold" grpId="0" nodeType="clickEffect">
+                                  <p:stCondLst>
+                                    <p:cond delay="0"/>
+                                  </p:stCondLst>
+                                  <p:childTnLst>
+                                    <p:set>
+                                      <p:cBhvr>
+                                        <p:cTn id="10" dur="1" fill="hold">
+                                          <p:stCondLst>
+                                            <p:cond delay="0"/>
+                                          </p:stCondLst>
+                                        </p:cTn>
+                                        <p:tgtEl>
+                                          <p:spTgt spid="3">
+                                            <p:txEl>
+                                              <p:pRg st="3" end="3"/>
+                                            </p:txEl>
+                                          </p:spTgt>
+                                        </p:tgtEl>
+                                        <p:attrNameLst>
+                                          <p:attrName>style.visibility</p:attrName>
+                                        </p:attrNameLst>
+                                      </p:cBhvr>
+                                      <p:to>
+                                        <p:strVal val="visible"/>
+                                      </p:to>
+                                    </p:set>
+                                  </p:childTnLst>
+                                </p:cTn>
+                              </p:par>
+                            </p:childTnLst>
+                          </p:cTn>
+                        </p:par>
+                      </p:childTnLst>
+                    </p:cTn>
+                  </p:par>
+                </p:childTnLst>
+              </p:cTn>
+              <p:prevCondLst>
+                <p:cond evt="onPrev" delay="0">
+                  <p:tgtEl>
+                    <p:sldTgt/>
+                  </p:tgtEl>
+                </p:cond>
+              </p:prevCondLst>
+              <p:nextCondLst>
+                <p:cond evt="onNext" delay="0">
+                  <p:tgtEl>
+                    <p:sldTgt/>
+                  </p:tgtEl>
+                </p:cond>
+              </p:nextCondLst>
+            </p:seq>
+          </p:childTnLst>
+        </p:cTn>
+      </p:par>
+    </p:tnLst>
+    <p:bldLst>
+      <p:bldP spid="3" grpId="0" build="p"/>
+    </p:bldLst>
+  </p:timing>
+</p:sld>
+</file>
+
+<file path=ppt/slides/slide15.xml><?xml version="1.0" encoding="utf-8"?>
+<p:sld xmlns:a="http://schemas.openxmlformats.org/drawingml/2006/main" xmlns:r="http://schemas.openxmlformats.org/officeDocument/2006/relationships" xmlns:p="http://schemas.openxmlformats.org/presentationml/2006/main">
+  <p:cSld>
+    <p:spTree>
+      <p:nvGrpSpPr>
+        <p:cNvPr id="1" name=""/>
+        <p:cNvGrpSpPr/>
+        <p:nvPr/>
+      </p:nvGrpSpPr>
+      <p:grpSpPr>
+        <a:xfrm>
+          <a:off x="0" y="0"/>
+          <a:ext cx="0" cy="0"/>
+          <a:chOff x="0" y="0"/>
+          <a:chExt cx="0" cy="0"/>
+        </a:xfrm>
+      </p:grpSpPr>
+      <p:sp>
+        <p:nvSpPr>
+          <p:cNvPr id="2" name="Titel 1">
+            <a:extLst>
+              <a:ext uri="{FF2B5EF4-FFF2-40B4-BE49-F238E27FC236}">
+                <a16:creationId xmlns:a16="http://schemas.microsoft.com/office/drawing/2014/main" id="{09548D57-1679-0B2D-6B2F-ADC879EE4184}"/>
+              </a:ext>
+            </a:extLst>
+          </p:cNvPr>
+          <p:cNvSpPr>
+            <a:spLocks noGrp="1"/>
+          </p:cNvSpPr>
+          <p:nvPr>
+            <p:ph type="title"/>
+          </p:nvPr>
+        </p:nvSpPr>
+        <p:spPr>
+          <a:xfrm>
+            <a:off x="838199" y="0"/>
+            <a:ext cx="10515600" cy="1325563"/>
+          </a:xfrm>
+        </p:spPr>
+        <p:txBody>
+          <a:bodyPr/>
+          <a:lstStyle/>
+          <a:p>
+            <a:r>
+              <a:rPr lang="nl-BE" dirty="0"/>
+              <a:t>3.1d</a:t>
+            </a:r>
+          </a:p>
+        </p:txBody>
+      </p:sp>
+      <mc:AlternateContent xmlns:mc="http://schemas.openxmlformats.org/markup-compatibility/2006" xmlns:a14="http://schemas.microsoft.com/office/drawing/2010/main">
+        <mc:Choice Requires="a14">
+          <p:sp>
+            <p:nvSpPr>
+              <p:cNvPr id="3" name="Tijdelijke aanduiding voor inhoud 2">
+                <a:extLst>
+                  <a:ext uri="{FF2B5EF4-FFF2-40B4-BE49-F238E27FC236}">
+                    <a16:creationId xmlns:a16="http://schemas.microsoft.com/office/drawing/2014/main" id="{CAF80120-A2DC-00BF-B7C1-123745AB7828}"/>
+                  </a:ext>
+                </a:extLst>
+              </p:cNvPr>
+              <p:cNvSpPr>
+                <a:spLocks noGrp="1"/>
+              </p:cNvSpPr>
+              <p:nvPr>
+                <p:ph idx="1"/>
+              </p:nvPr>
+            </p:nvSpPr>
+            <p:spPr>
+              <a:xfrm>
+                <a:off x="838199" y="1063625"/>
+                <a:ext cx="10515600" cy="4351338"/>
+              </a:xfrm>
+            </p:spPr>
+            <p:txBody>
+              <a:bodyPr/>
+              <a:lstStyle/>
+              <a:p>
+                <a14:m>
+                  <m:oMath xmlns:m="http://schemas.openxmlformats.org/officeDocument/2006/math">
+                    <m:r>
+                      <a:rPr lang="en-GB" b="0" i="1" smtClean="0">
+                        <a:latin typeface="Cambria Math" panose="02040503050406030204" pitchFamily="18" charset="0"/>
+                      </a:rPr>
+                      <m:t>𝑎</m:t>
+                    </m:r>
+                    <m:r>
+                      <a:rPr lang="en-GB" b="0" i="1" smtClean="0">
+                        <a:latin typeface="Cambria Math" panose="02040503050406030204" pitchFamily="18" charset="0"/>
+                      </a:rPr>
+                      <m:t>+1,</m:t>
+                    </m:r>
+                    <m:r>
+                      <a:rPr lang="en-GB" b="0" i="1" smtClean="0">
+                        <a:latin typeface="Cambria Math" panose="02040503050406030204" pitchFamily="18" charset="0"/>
+                      </a:rPr>
+                      <m:t>𝑎</m:t>
+                    </m:r>
+                    <m:r>
+                      <a:rPr lang="en-GB" b="0" i="1" smtClean="0">
+                        <a:latin typeface="Cambria Math" panose="02040503050406030204" pitchFamily="18" charset="0"/>
+                      </a:rPr>
+                      <m:t>+</m:t>
+                    </m:r>
+                    <m:f>
+                      <m:fPr>
+                        <m:ctrlPr>
+                          <a:rPr lang="en-GB" b="0" i="1" smtClean="0">
+                            <a:latin typeface="Cambria Math" panose="02040503050406030204" pitchFamily="18" charset="0"/>
+                          </a:rPr>
+                        </m:ctrlPr>
+                      </m:fPr>
+                      <m:num>
+                        <m:r>
+                          <a:rPr lang="en-GB" b="0" i="1" smtClean="0">
+                            <a:latin typeface="Cambria Math" panose="02040503050406030204" pitchFamily="18" charset="0"/>
+                          </a:rPr>
+                          <m:t>1</m:t>
+                        </m:r>
+                      </m:num>
+                      <m:den>
+                        <m:r>
+                          <a:rPr lang="en-GB" b="0" i="1" smtClean="0">
+                            <a:latin typeface="Cambria Math" panose="02040503050406030204" pitchFamily="18" charset="0"/>
+                          </a:rPr>
+                          <m:t>2</m:t>
+                        </m:r>
+                      </m:den>
+                    </m:f>
+                    <m:r>
+                      <a:rPr lang="en-GB" b="0" i="1" smtClean="0">
+                        <a:latin typeface="Cambria Math" panose="02040503050406030204" pitchFamily="18" charset="0"/>
+                      </a:rPr>
+                      <m:t>,</m:t>
+                    </m:r>
+                    <m:r>
+                      <a:rPr lang="en-GB" b="0" i="1" smtClean="0">
+                        <a:latin typeface="Cambria Math" panose="02040503050406030204" pitchFamily="18" charset="0"/>
+                      </a:rPr>
+                      <m:t>𝑎</m:t>
+                    </m:r>
+                    <m:r>
+                      <a:rPr lang="en-GB" b="0" i="1" smtClean="0">
+                        <a:latin typeface="Cambria Math" panose="02040503050406030204" pitchFamily="18" charset="0"/>
+                      </a:rPr>
+                      <m:t>+2,</m:t>
+                    </m:r>
+                    <m:r>
+                      <a:rPr lang="en-GB" b="0" i="1" smtClean="0">
+                        <a:latin typeface="Cambria Math" panose="02040503050406030204" pitchFamily="18" charset="0"/>
+                      </a:rPr>
+                      <m:t>𝑎</m:t>
+                    </m:r>
+                    <m:r>
+                      <a:rPr lang="en-GB" b="0" i="1" smtClean="0">
+                        <a:latin typeface="Cambria Math" panose="02040503050406030204" pitchFamily="18" charset="0"/>
+                      </a:rPr>
+                      <m:t>+</m:t>
+                    </m:r>
+                    <m:f>
+                      <m:fPr>
+                        <m:ctrlPr>
+                          <a:rPr lang="en-GB" b="0" i="1" smtClean="0">
+                            <a:latin typeface="Cambria Math" panose="02040503050406030204" pitchFamily="18" charset="0"/>
+                          </a:rPr>
+                        </m:ctrlPr>
+                      </m:fPr>
+                      <m:num>
+                        <m:r>
+                          <a:rPr lang="en-GB" b="0" i="1" smtClean="0">
+                            <a:latin typeface="Cambria Math" panose="02040503050406030204" pitchFamily="18" charset="0"/>
+                          </a:rPr>
+                          <m:t>1</m:t>
+                        </m:r>
+                      </m:num>
+                      <m:den>
+                        <m:r>
+                          <a:rPr lang="en-GB" b="0" i="1" smtClean="0">
+                            <a:latin typeface="Cambria Math" panose="02040503050406030204" pitchFamily="18" charset="0"/>
+                          </a:rPr>
+                          <m:t>3</m:t>
+                        </m:r>
+                      </m:den>
+                    </m:f>
+                    <m:r>
+                      <a:rPr lang="en-GB" b="0" i="1" smtClean="0">
+                        <a:latin typeface="Cambria Math" panose="02040503050406030204" pitchFamily="18" charset="0"/>
+                      </a:rPr>
+                      <m:t>,⋯</m:t>
+                    </m:r>
+                  </m:oMath>
+                </a14:m>
+                <a:endParaRPr lang="en-GB" b="0" dirty="0"/>
+              </a:p>
+              <a:p>
+                <a14:m>
+                  <m:oMath xmlns:m="http://schemas.openxmlformats.org/officeDocument/2006/math">
+                    <m:r>
+                      <a:rPr lang="en-GB" b="0" i="1" smtClean="0">
+                        <a:latin typeface="Cambria Math" panose="02040503050406030204" pitchFamily="18" charset="0"/>
+                      </a:rPr>
+                      <m:t> </m:t>
+                    </m:r>
+                    <m:r>
+                      <a:rPr lang="en-GB" b="1" i="1" smtClean="0">
+                        <a:solidFill>
+                          <a:srgbClr val="FF0000"/>
+                        </a:solidFill>
+                        <a:latin typeface="Cambria Math" panose="02040503050406030204" pitchFamily="18" charset="0"/>
+                      </a:rPr>
+                      <m:t>𝒂</m:t>
+                    </m:r>
+                    <m:r>
+                      <a:rPr lang="en-GB" b="1" i="1" smtClean="0">
+                        <a:solidFill>
+                          <a:srgbClr val="FF0000"/>
+                        </a:solidFill>
+                        <a:latin typeface="Cambria Math" panose="02040503050406030204" pitchFamily="18" charset="0"/>
+                      </a:rPr>
+                      <m:t>+</m:t>
+                    </m:r>
+                    <m:r>
+                      <a:rPr lang="en-GB" b="1" i="1" smtClean="0">
+                        <a:solidFill>
+                          <a:srgbClr val="FF0000"/>
+                        </a:solidFill>
+                        <a:latin typeface="Cambria Math" panose="02040503050406030204" pitchFamily="18" charset="0"/>
+                      </a:rPr>
+                      <m:t>𝟏</m:t>
+                    </m:r>
+                    <m:r>
+                      <a:rPr lang="en-GB" i="1">
+                        <a:latin typeface="Cambria Math" panose="02040503050406030204" pitchFamily="18" charset="0"/>
+                      </a:rPr>
+                      <m:t>,</m:t>
+                    </m:r>
+                    <m:r>
+                      <a:rPr lang="en-GB" b="1" i="1" smtClean="0">
+                        <a:solidFill>
+                          <a:srgbClr val="00B050"/>
+                        </a:solidFill>
+                        <a:latin typeface="Cambria Math" panose="02040503050406030204" pitchFamily="18" charset="0"/>
+                      </a:rPr>
+                      <m:t>𝒂</m:t>
+                    </m:r>
+                    <m:r>
+                      <a:rPr lang="en-GB" b="1" i="1" smtClean="0">
+                        <a:solidFill>
+                          <a:srgbClr val="00B050"/>
+                        </a:solidFill>
+                        <a:latin typeface="Cambria Math" panose="02040503050406030204" pitchFamily="18" charset="0"/>
+                      </a:rPr>
+                      <m:t>+</m:t>
+                    </m:r>
+                    <m:f>
+                      <m:fPr>
+                        <m:ctrlPr>
+                          <a:rPr lang="en-GB" b="1" i="1">
+                            <a:solidFill>
+                              <a:srgbClr val="00B050"/>
+                            </a:solidFill>
+                            <a:latin typeface="Cambria Math" panose="02040503050406030204" pitchFamily="18" charset="0"/>
+                          </a:rPr>
+                        </m:ctrlPr>
+                      </m:fPr>
+                      <m:num>
+                        <m:r>
+                          <a:rPr lang="en-GB" b="1" i="1">
+                            <a:solidFill>
+                              <a:srgbClr val="00B050"/>
+                            </a:solidFill>
+                            <a:latin typeface="Cambria Math" panose="02040503050406030204" pitchFamily="18" charset="0"/>
+                          </a:rPr>
+                          <m:t>𝟏</m:t>
+                        </m:r>
+                      </m:num>
+                      <m:den>
+                        <m:r>
+                          <a:rPr lang="en-GB" b="1" i="1">
+                            <a:solidFill>
+                              <a:srgbClr val="00B050"/>
+                            </a:solidFill>
+                            <a:latin typeface="Cambria Math" panose="02040503050406030204" pitchFamily="18" charset="0"/>
+                          </a:rPr>
+                          <m:t>𝟐</m:t>
+                        </m:r>
+                      </m:den>
+                    </m:f>
+                    <m:r>
+                      <a:rPr lang="en-GB" i="1">
+                        <a:latin typeface="Cambria Math" panose="02040503050406030204" pitchFamily="18" charset="0"/>
+                      </a:rPr>
+                      <m:t>,</m:t>
+                    </m:r>
+                    <m:r>
+                      <a:rPr lang="en-GB" b="1" i="1" smtClean="0">
+                        <a:solidFill>
+                          <a:srgbClr val="FF0000"/>
+                        </a:solidFill>
+                        <a:latin typeface="Cambria Math" panose="02040503050406030204" pitchFamily="18" charset="0"/>
+                      </a:rPr>
+                      <m:t>𝒂</m:t>
+                    </m:r>
+                    <m:r>
+                      <a:rPr lang="en-GB" b="1" i="1" smtClean="0">
+                        <a:solidFill>
+                          <a:srgbClr val="FF0000"/>
+                        </a:solidFill>
+                        <a:latin typeface="Cambria Math" panose="02040503050406030204" pitchFamily="18" charset="0"/>
+                      </a:rPr>
+                      <m:t>+</m:t>
+                    </m:r>
+                    <m:r>
+                      <a:rPr lang="en-GB" b="1" i="1" smtClean="0">
+                        <a:solidFill>
+                          <a:srgbClr val="FF0000"/>
+                        </a:solidFill>
+                        <a:latin typeface="Cambria Math" panose="02040503050406030204" pitchFamily="18" charset="0"/>
+                      </a:rPr>
+                      <m:t>𝟐</m:t>
+                    </m:r>
+                    <m:r>
+                      <a:rPr lang="en-GB" b="1" i="1">
+                        <a:latin typeface="Cambria Math" panose="02040503050406030204" pitchFamily="18" charset="0"/>
+                      </a:rPr>
+                      <m:t>,</m:t>
+                    </m:r>
+                    <m:r>
+                      <a:rPr lang="en-GB" b="1" i="1" smtClean="0">
+                        <a:solidFill>
+                          <a:srgbClr val="00B050"/>
+                        </a:solidFill>
+                        <a:latin typeface="Cambria Math" panose="02040503050406030204" pitchFamily="18" charset="0"/>
+                      </a:rPr>
+                      <m:t>𝒂</m:t>
+                    </m:r>
+                    <m:r>
+                      <a:rPr lang="en-GB" b="1" i="1" smtClean="0">
+                        <a:solidFill>
+                          <a:srgbClr val="00B050"/>
+                        </a:solidFill>
+                        <a:latin typeface="Cambria Math" panose="02040503050406030204" pitchFamily="18" charset="0"/>
+                      </a:rPr>
+                      <m:t>+</m:t>
+                    </m:r>
+                    <m:f>
+                      <m:fPr>
+                        <m:ctrlPr>
+                          <a:rPr lang="en-GB" b="1" i="1">
+                            <a:solidFill>
+                              <a:srgbClr val="00B050"/>
+                            </a:solidFill>
+                            <a:latin typeface="Cambria Math" panose="02040503050406030204" pitchFamily="18" charset="0"/>
+                          </a:rPr>
+                        </m:ctrlPr>
+                      </m:fPr>
+                      <m:num>
+                        <m:r>
+                          <a:rPr lang="en-GB" b="1" i="1">
+                            <a:solidFill>
+                              <a:srgbClr val="00B050"/>
+                            </a:solidFill>
+                            <a:latin typeface="Cambria Math" panose="02040503050406030204" pitchFamily="18" charset="0"/>
+                          </a:rPr>
+                          <m:t>𝟏</m:t>
+                        </m:r>
+                      </m:num>
+                      <m:den>
+                        <m:r>
+                          <a:rPr lang="en-GB" b="1" i="1">
+                            <a:solidFill>
+                              <a:srgbClr val="00B050"/>
+                            </a:solidFill>
+                            <a:latin typeface="Cambria Math" panose="02040503050406030204" pitchFamily="18" charset="0"/>
+                          </a:rPr>
+                          <m:t>𝟑</m:t>
+                        </m:r>
+                      </m:den>
+                    </m:f>
+                    <m:r>
+                      <a:rPr lang="en-GB" b="1" i="1">
+                        <a:latin typeface="Cambria Math" panose="02040503050406030204" pitchFamily="18" charset="0"/>
+                      </a:rPr>
+                      <m:t>,⋯</m:t>
+                    </m:r>
+                  </m:oMath>
+                </a14:m>
+                <a:endParaRPr lang="en-GB" b="1" dirty="0"/>
+              </a:p>
+              <a:p>
+                <a:endParaRPr lang="en-GB" b="0" i="1" dirty="0">
+                  <a:latin typeface="Cambria Math" panose="02040503050406030204" pitchFamily="18" charset="0"/>
+                </a:endParaRPr>
+              </a:p>
+              <a:p>
+                <a14:m>
+                  <m:oMath xmlns:m="http://schemas.openxmlformats.org/officeDocument/2006/math">
+                    <m:r>
+                      <a:rPr lang="en-GB" b="1" i="1" smtClean="0">
+                        <a:solidFill>
+                          <a:srgbClr val="FF0000"/>
+                        </a:solidFill>
+                        <a:latin typeface="Cambria Math" panose="02040503050406030204" pitchFamily="18" charset="0"/>
+                      </a:rPr>
+                      <m:t>𝒂</m:t>
+                    </m:r>
+                    <m:r>
+                      <a:rPr lang="en-GB" b="1" i="1" smtClean="0">
+                        <a:solidFill>
+                          <a:srgbClr val="FF0000"/>
+                        </a:solidFill>
+                        <a:latin typeface="Cambria Math" panose="02040503050406030204" pitchFamily="18" charset="0"/>
+                      </a:rPr>
+                      <m:t>+</m:t>
+                    </m:r>
+                    <m:r>
+                      <a:rPr lang="en-GB" b="1" i="1" smtClean="0">
+                        <a:solidFill>
+                          <a:srgbClr val="FF0000"/>
+                        </a:solidFill>
+                        <a:latin typeface="Cambria Math" panose="02040503050406030204" pitchFamily="18" charset="0"/>
+                      </a:rPr>
+                      <m:t>𝟏</m:t>
+                    </m:r>
+                    <m:r>
+                      <a:rPr lang="en-GB" b="1" i="1" smtClean="0">
+                        <a:solidFill>
+                          <a:srgbClr val="FF0000"/>
+                        </a:solidFill>
+                        <a:latin typeface="Cambria Math" panose="02040503050406030204" pitchFamily="18" charset="0"/>
+                      </a:rPr>
+                      <m:t>,</m:t>
+                    </m:r>
+                    <m:r>
+                      <a:rPr lang="en-GB" b="1" i="1" smtClean="0">
+                        <a:solidFill>
+                          <a:srgbClr val="FF0000"/>
+                        </a:solidFill>
+                        <a:latin typeface="Cambria Math" panose="02040503050406030204" pitchFamily="18" charset="0"/>
+                      </a:rPr>
+                      <m:t>𝒂</m:t>
+                    </m:r>
+                    <m:r>
+                      <a:rPr lang="en-GB" b="1" i="1" smtClean="0">
+                        <a:solidFill>
+                          <a:srgbClr val="FF0000"/>
+                        </a:solidFill>
+                        <a:latin typeface="Cambria Math" panose="02040503050406030204" pitchFamily="18" charset="0"/>
+                      </a:rPr>
+                      <m:t>+</m:t>
+                    </m:r>
+                    <m:r>
+                      <a:rPr lang="en-GB" b="1" i="1" smtClean="0">
+                        <a:solidFill>
+                          <a:srgbClr val="FF0000"/>
+                        </a:solidFill>
+                        <a:latin typeface="Cambria Math" panose="02040503050406030204" pitchFamily="18" charset="0"/>
+                      </a:rPr>
+                      <m:t>𝟐</m:t>
+                    </m:r>
+                    <m:r>
+                      <a:rPr lang="en-GB" b="1" i="1" smtClean="0">
+                        <a:solidFill>
+                          <a:srgbClr val="FF0000"/>
+                        </a:solidFill>
+                        <a:latin typeface="Cambria Math" panose="02040503050406030204" pitchFamily="18" charset="0"/>
+                      </a:rPr>
+                      <m:t>,</m:t>
+                    </m:r>
+                    <m:r>
+                      <a:rPr lang="en-GB" b="1" i="1" smtClean="0">
+                        <a:solidFill>
+                          <a:srgbClr val="FF0000"/>
+                        </a:solidFill>
+                        <a:latin typeface="Cambria Math" panose="02040503050406030204" pitchFamily="18" charset="0"/>
+                      </a:rPr>
+                      <m:t>𝒂</m:t>
+                    </m:r>
+                    <m:r>
+                      <a:rPr lang="en-GB" b="1" i="1" smtClean="0">
+                        <a:solidFill>
+                          <a:srgbClr val="FF0000"/>
+                        </a:solidFill>
+                        <a:latin typeface="Cambria Math" panose="02040503050406030204" pitchFamily="18" charset="0"/>
+                      </a:rPr>
+                      <m:t>+</m:t>
+                    </m:r>
+                    <m:r>
+                      <a:rPr lang="en-GB" b="1" i="1" smtClean="0">
+                        <a:solidFill>
+                          <a:srgbClr val="FF0000"/>
+                        </a:solidFill>
+                        <a:latin typeface="Cambria Math" panose="02040503050406030204" pitchFamily="18" charset="0"/>
+                      </a:rPr>
+                      <m:t>𝟑</m:t>
+                    </m:r>
+                    <m:r>
+                      <a:rPr lang="en-GB" b="1" i="1" smtClean="0">
+                        <a:solidFill>
+                          <a:srgbClr val="FF0000"/>
+                        </a:solidFill>
+                        <a:latin typeface="Cambria Math" panose="02040503050406030204" pitchFamily="18" charset="0"/>
+                      </a:rPr>
+                      <m:t>,⋯</m:t>
+                    </m:r>
+                  </m:oMath>
+                </a14:m>
+                <a:endParaRPr lang="en-GB" b="1" dirty="0">
+                  <a:solidFill>
+                    <a:srgbClr val="FF0000"/>
+                  </a:solidFill>
+                </a:endParaRPr>
+              </a:p>
+              <a:p>
+                <a14:m>
+                  <m:oMath xmlns:m="http://schemas.openxmlformats.org/officeDocument/2006/math">
+                    <m:r>
+                      <a:rPr lang="en-GB" b="1" i="1" smtClean="0">
+                        <a:solidFill>
+                          <a:srgbClr val="00B050"/>
+                        </a:solidFill>
+                        <a:latin typeface="Cambria Math" panose="02040503050406030204" pitchFamily="18" charset="0"/>
+                      </a:rPr>
+                      <m:t>𝒂</m:t>
+                    </m:r>
+                    <m:r>
+                      <a:rPr lang="en-GB" b="1" i="1" smtClean="0">
+                        <a:solidFill>
+                          <a:srgbClr val="00B050"/>
+                        </a:solidFill>
+                        <a:latin typeface="Cambria Math" panose="02040503050406030204" pitchFamily="18" charset="0"/>
+                      </a:rPr>
+                      <m:t>+</m:t>
+                    </m:r>
+                    <m:f>
+                      <m:fPr>
+                        <m:ctrlPr>
+                          <a:rPr lang="en-GB" b="1" i="1">
+                            <a:solidFill>
+                              <a:srgbClr val="00B050"/>
+                            </a:solidFill>
+                            <a:latin typeface="Cambria Math" panose="02040503050406030204" pitchFamily="18" charset="0"/>
+                          </a:rPr>
+                        </m:ctrlPr>
+                      </m:fPr>
+                      <m:num>
+                        <m:r>
+                          <a:rPr lang="en-GB" b="1" i="1">
+                            <a:solidFill>
+                              <a:srgbClr val="00B050"/>
+                            </a:solidFill>
+                            <a:latin typeface="Cambria Math" panose="02040503050406030204" pitchFamily="18" charset="0"/>
+                          </a:rPr>
+                          <m:t>𝟏</m:t>
+                        </m:r>
+                      </m:num>
+                      <m:den>
+                        <m:r>
+                          <a:rPr lang="en-GB" b="1" i="1" smtClean="0">
+                            <a:solidFill>
+                              <a:srgbClr val="00B050"/>
+                            </a:solidFill>
+                            <a:latin typeface="Cambria Math" panose="02040503050406030204" pitchFamily="18" charset="0"/>
+                          </a:rPr>
+                          <m:t>𝟐</m:t>
+                        </m:r>
+                      </m:den>
+                    </m:f>
+                    <m:r>
+                      <a:rPr lang="en-GB" b="1" i="1">
+                        <a:solidFill>
+                          <a:srgbClr val="00B050"/>
+                        </a:solidFill>
+                        <a:latin typeface="Cambria Math" panose="02040503050406030204" pitchFamily="18" charset="0"/>
+                      </a:rPr>
+                      <m:t>,</m:t>
+                    </m:r>
+                    <m:r>
+                      <a:rPr lang="en-GB" b="1" i="1">
+                        <a:solidFill>
+                          <a:srgbClr val="00B050"/>
+                        </a:solidFill>
+                        <a:latin typeface="Cambria Math" panose="02040503050406030204" pitchFamily="18" charset="0"/>
+                      </a:rPr>
+                      <m:t>𝒂</m:t>
+                    </m:r>
+                    <m:r>
+                      <a:rPr lang="en-GB" b="1" i="1">
+                        <a:solidFill>
+                          <a:srgbClr val="00B050"/>
+                        </a:solidFill>
+                        <a:latin typeface="Cambria Math" panose="02040503050406030204" pitchFamily="18" charset="0"/>
+                      </a:rPr>
+                      <m:t>+</m:t>
+                    </m:r>
+                    <m:f>
+                      <m:fPr>
+                        <m:ctrlPr>
+                          <a:rPr lang="en-GB" b="1" i="1" smtClean="0">
+                            <a:solidFill>
+                              <a:srgbClr val="00B050"/>
+                            </a:solidFill>
+                            <a:latin typeface="Cambria Math" panose="02040503050406030204" pitchFamily="18" charset="0"/>
+                          </a:rPr>
+                        </m:ctrlPr>
+                      </m:fPr>
+                      <m:num>
+                        <m:r>
+                          <a:rPr lang="en-GB" b="1" i="1" smtClean="0">
+                            <a:solidFill>
+                              <a:srgbClr val="00B050"/>
+                            </a:solidFill>
+                            <a:latin typeface="Cambria Math" panose="02040503050406030204" pitchFamily="18" charset="0"/>
+                          </a:rPr>
+                          <m:t>𝟏</m:t>
+                        </m:r>
+                      </m:num>
+                      <m:den>
+                        <m:r>
+                          <a:rPr lang="en-GB" b="1" i="1" smtClean="0">
+                            <a:solidFill>
+                              <a:srgbClr val="00B050"/>
+                            </a:solidFill>
+                            <a:latin typeface="Cambria Math" panose="02040503050406030204" pitchFamily="18" charset="0"/>
+                          </a:rPr>
+                          <m:t>𝟑</m:t>
+                        </m:r>
+                      </m:den>
+                    </m:f>
+                    <m:r>
+                      <a:rPr lang="en-GB" b="1" i="1">
+                        <a:solidFill>
+                          <a:srgbClr val="00B050"/>
+                        </a:solidFill>
+                        <a:latin typeface="Cambria Math" panose="02040503050406030204" pitchFamily="18" charset="0"/>
+                      </a:rPr>
+                      <m:t>,</m:t>
+                    </m:r>
+                    <m:r>
+                      <a:rPr lang="en-GB" b="1" i="1">
+                        <a:solidFill>
+                          <a:srgbClr val="00B050"/>
+                        </a:solidFill>
+                        <a:latin typeface="Cambria Math" panose="02040503050406030204" pitchFamily="18" charset="0"/>
+                      </a:rPr>
+                      <m:t>𝒂</m:t>
+                    </m:r>
+                    <m:r>
+                      <a:rPr lang="en-GB" b="1" i="1">
+                        <a:solidFill>
+                          <a:srgbClr val="00B050"/>
+                        </a:solidFill>
+                        <a:latin typeface="Cambria Math" panose="02040503050406030204" pitchFamily="18" charset="0"/>
+                      </a:rPr>
+                      <m:t>+</m:t>
+                    </m:r>
+                    <m:f>
+                      <m:fPr>
+                        <m:ctrlPr>
+                          <a:rPr lang="en-GB" b="1" i="1" smtClean="0">
+                            <a:solidFill>
+                              <a:srgbClr val="00B050"/>
+                            </a:solidFill>
+                            <a:latin typeface="Cambria Math" panose="02040503050406030204" pitchFamily="18" charset="0"/>
+                          </a:rPr>
+                        </m:ctrlPr>
+                      </m:fPr>
+                      <m:num>
+                        <m:r>
+                          <a:rPr lang="en-GB" b="1" i="1" smtClean="0">
+                            <a:solidFill>
+                              <a:srgbClr val="00B050"/>
+                            </a:solidFill>
+                            <a:latin typeface="Cambria Math" panose="02040503050406030204" pitchFamily="18" charset="0"/>
+                          </a:rPr>
+                          <m:t>𝟏</m:t>
+                        </m:r>
+                      </m:num>
+                      <m:den>
+                        <m:r>
+                          <a:rPr lang="en-GB" b="1" i="1" smtClean="0">
+                            <a:solidFill>
+                              <a:srgbClr val="00B050"/>
+                            </a:solidFill>
+                            <a:latin typeface="Cambria Math" panose="02040503050406030204" pitchFamily="18" charset="0"/>
+                          </a:rPr>
+                          <m:t>𝟒</m:t>
+                        </m:r>
+                      </m:den>
+                    </m:f>
+                    <m:r>
+                      <a:rPr lang="en-GB" b="1" i="1">
+                        <a:solidFill>
+                          <a:srgbClr val="00B050"/>
+                        </a:solidFill>
+                        <a:latin typeface="Cambria Math" panose="02040503050406030204" pitchFamily="18" charset="0"/>
+                      </a:rPr>
+                      <m:t>,⋯</m:t>
+                    </m:r>
+                  </m:oMath>
+                </a14:m>
+                <a:endParaRPr lang="en-GB" b="1" dirty="0">
+                  <a:solidFill>
+                    <a:srgbClr val="00B050"/>
+                  </a:solidFill>
+                </a:endParaRPr>
+              </a:p>
+              <a:p>
+                <a:endParaRPr lang="nl-BE" dirty="0"/>
+              </a:p>
+              <a:p>
+                <a:endParaRPr lang="nl-BE" dirty="0"/>
+              </a:p>
+              <a:p>
+                <a:endParaRPr lang="nl-BE" dirty="0"/>
+              </a:p>
+            </p:txBody>
+          </p:sp>
+        </mc:Choice>
+        <mc:Fallback xmlns="">
+          <p:sp>
+            <p:nvSpPr>
+              <p:cNvPr id="3" name="Tijdelijke aanduiding voor inhoud 2">
+                <a:extLst>
+                  <a:ext uri="{FF2B5EF4-FFF2-40B4-BE49-F238E27FC236}">
+                    <a16:creationId xmlns:a16="http://schemas.microsoft.com/office/drawing/2014/main" id="{CAF80120-A2DC-00BF-B7C1-123745AB7828}"/>
+                  </a:ext>
+                </a:extLst>
+              </p:cNvPr>
+              <p:cNvSpPr>
+                <a:spLocks noGrp="1" noRot="1" noChangeAspect="1" noMove="1" noResize="1" noEditPoints="1" noAdjustHandles="1" noChangeArrowheads="1" noChangeShapeType="1" noTextEdit="1"/>
+              </p:cNvSpPr>
+              <p:nvPr>
+                <p:ph idx="1"/>
+              </p:nvPr>
+            </p:nvSpPr>
+            <p:spPr>
+              <a:xfrm>
+                <a:off x="838199" y="1063625"/>
+                <a:ext cx="10515600" cy="4351338"/>
+              </a:xfrm>
+              <a:blipFill>
+                <a:blip r:embed="rId2"/>
+                <a:stretch>
+                  <a:fillRect/>
+                </a:stretch>
+              </a:blipFill>
+            </p:spPr>
+            <p:txBody>
+              <a:bodyPr/>
+              <a:lstStyle/>
+              <a:p>
+                <a:r>
+                  <a:rPr lang="nl-BE">
+                    <a:noFill/>
+                  </a:rPr>
+                  <a:t> </a:t>
+                </a:r>
+              </a:p>
+            </p:txBody>
+          </p:sp>
+        </mc:Fallback>
+      </mc:AlternateContent>
+      <mc:AlternateContent xmlns:mc="http://schemas.openxmlformats.org/markup-compatibility/2006" xmlns:a14="http://schemas.microsoft.com/office/drawing/2010/main">
+        <mc:Choice Requires="a14">
+          <p:graphicFrame>
+            <p:nvGraphicFramePr>
+              <p:cNvPr id="5" name="Tabel 4">
+                <a:extLst>
+                  <a:ext uri="{FF2B5EF4-FFF2-40B4-BE49-F238E27FC236}">
+                    <a16:creationId xmlns:a16="http://schemas.microsoft.com/office/drawing/2014/main" id="{3D8CD70B-D2AE-872B-4276-CEB9D91FD977}"/>
+                  </a:ext>
+                </a:extLst>
+              </p:cNvPr>
+              <p:cNvGraphicFramePr>
+                <a:graphicFrameLocks noGrp="1"/>
+              </p:cNvGraphicFramePr>
+              <p:nvPr>
+                <p:extLst>
+                  <p:ext uri="{D42A27DB-BD31-4B8C-83A1-F6EECF244321}">
+                    <p14:modId xmlns:p14="http://schemas.microsoft.com/office/powerpoint/2010/main" val="3122556352"/>
+                  </p:ext>
+                </p:extLst>
+              </p:nvPr>
+            </p:nvGraphicFramePr>
+            <p:xfrm>
+              <a:off x="914400" y="4611688"/>
+              <a:ext cx="10363197" cy="1866900"/>
+            </p:xfrm>
+            <a:graphic>
+              <a:graphicData uri="http://schemas.openxmlformats.org/drawingml/2006/table">
+                <a:tbl>
+                  <a:tblPr firstRow="1" bandRow="1">
+                    <a:tableStyleId>{5C22544A-7EE6-4342-B048-85BDC9FD1C3A}</a:tableStyleId>
+                  </a:tblPr>
+                  <a:tblGrid>
+                    <a:gridCol w="1512712">
+                      <a:extLst>
+                        <a:ext uri="{9D8B030D-6E8A-4147-A177-3AD203B41FA5}">
+                          <a16:colId xmlns:a16="http://schemas.microsoft.com/office/drawing/2014/main" val="3103796476"/>
+                        </a:ext>
+                      </a:extLst>
+                    </a:gridCol>
+                    <a:gridCol w="1088248">
+                      <a:extLst>
+                        <a:ext uri="{9D8B030D-6E8A-4147-A177-3AD203B41FA5}">
+                          <a16:colId xmlns:a16="http://schemas.microsoft.com/office/drawing/2014/main" val="728253802"/>
+                        </a:ext>
+                      </a:extLst>
+                    </a:gridCol>
+                    <a:gridCol w="1440462">
+                      <a:extLst>
+                        <a:ext uri="{9D8B030D-6E8A-4147-A177-3AD203B41FA5}">
+                          <a16:colId xmlns:a16="http://schemas.microsoft.com/office/drawing/2014/main" val="1230733389"/>
+                        </a:ext>
+                      </a:extLst>
+                    </a:gridCol>
+                    <a:gridCol w="1264355">
+                      <a:extLst>
+                        <a:ext uri="{9D8B030D-6E8A-4147-A177-3AD203B41FA5}">
+                          <a16:colId xmlns:a16="http://schemas.microsoft.com/office/drawing/2014/main" val="419003960"/>
+                        </a:ext>
+                      </a:extLst>
+                    </a:gridCol>
+                    <a:gridCol w="1264355">
+                      <a:extLst>
+                        <a:ext uri="{9D8B030D-6E8A-4147-A177-3AD203B41FA5}">
+                          <a16:colId xmlns:a16="http://schemas.microsoft.com/office/drawing/2014/main" val="3026958833"/>
+                        </a:ext>
+                      </a:extLst>
+                    </a:gridCol>
+                    <a:gridCol w="1264355">
+                      <a:extLst>
+                        <a:ext uri="{9D8B030D-6E8A-4147-A177-3AD203B41FA5}">
+                          <a16:colId xmlns:a16="http://schemas.microsoft.com/office/drawing/2014/main" val="2530790263"/>
+                        </a:ext>
+                      </a:extLst>
+                    </a:gridCol>
+                    <a:gridCol w="1264355">
+                      <a:extLst>
+                        <a:ext uri="{9D8B030D-6E8A-4147-A177-3AD203B41FA5}">
+                          <a16:colId xmlns:a16="http://schemas.microsoft.com/office/drawing/2014/main" val="1200962351"/>
+                        </a:ext>
+                      </a:extLst>
+                    </a:gridCol>
+                    <a:gridCol w="1264355">
+                      <a:extLst>
+                        <a:ext uri="{9D8B030D-6E8A-4147-A177-3AD203B41FA5}">
+                          <a16:colId xmlns:a16="http://schemas.microsoft.com/office/drawing/2014/main" val="2842989517"/>
+                        </a:ext>
+                      </a:extLst>
+                    </a:gridCol>
+                  </a:tblGrid>
+                  <a:tr h="933450">
+                    <a:tc>
+                      <a:txBody>
+                        <a:bodyPr/>
+                        <a:lstStyle/>
+                        <a:p>
+                          <a:r>
+                            <a:rPr lang="nl-BE" sz="2400" dirty="0"/>
+                            <a:t>sup</a:t>
+                          </a:r>
+                        </a:p>
+                      </a:txBody>
+                      <a:tcPr/>
+                    </a:tc>
+                    <a:tc>
+                      <a:txBody>
+                        <a:bodyPr/>
+                        <a:lstStyle/>
+                        <a:p>
+                          <a:r>
+                            <a:rPr lang="nl-BE" sz="2400" dirty="0" err="1"/>
+                            <a:t>inf</a:t>
+                          </a:r>
+                          <a:endParaRPr lang="nl-BE" sz="2400" dirty="0"/>
+                        </a:p>
+                      </a:txBody>
+                      <a:tcPr/>
+                    </a:tc>
+                    <a:tc>
+                      <a:txBody>
+                        <a:bodyPr/>
+                        <a:lstStyle/>
+                        <a:p>
+                          <a:r>
+                            <a:rPr lang="nl-BE" sz="2400" dirty="0"/>
+                            <a:t>max</a:t>
+                          </a:r>
+                        </a:p>
+                      </a:txBody>
+                      <a:tcPr/>
+                    </a:tc>
+                    <a:tc>
+                      <a:txBody>
+                        <a:bodyPr/>
+                        <a:lstStyle/>
+                        <a:p>
+                          <a:r>
+                            <a:rPr lang="nl-BE" sz="2400" dirty="0"/>
+                            <a:t>min</a:t>
+                          </a:r>
+                        </a:p>
+                      </a:txBody>
+                      <a:tcPr/>
+                    </a:tc>
+                    <a:tc>
+                      <a:txBody>
+                        <a:bodyPr/>
+                        <a:lstStyle/>
+                        <a:p>
+                          <a:r>
+                            <a:rPr lang="nl-BE" sz="2400" dirty="0"/>
+                            <a:t>Lim sup</a:t>
+                          </a:r>
+                        </a:p>
+                      </a:txBody>
+                      <a:tcPr/>
+                    </a:tc>
+                    <a:tc>
+                      <a:txBody>
+                        <a:bodyPr/>
+                        <a:lstStyle/>
+                        <a:p>
+                          <a:r>
+                            <a:rPr lang="nl-BE" sz="2400" dirty="0"/>
+                            <a:t>Lim </a:t>
+                          </a:r>
+                          <a:r>
+                            <a:rPr lang="nl-BE" sz="2400" dirty="0" err="1"/>
+                            <a:t>inf</a:t>
+                          </a:r>
+                          <a:endParaRPr lang="nl-BE" sz="2400" dirty="0"/>
+                        </a:p>
+                      </a:txBody>
+                      <a:tcPr/>
+                    </a:tc>
+                    <a:tc>
+                      <a:txBody>
+                        <a:bodyPr/>
+                        <a:lstStyle/>
+                        <a:p>
+                          <a:r>
+                            <a:rPr lang="nl-BE" sz="2400" dirty="0" err="1"/>
+                            <a:t>Ophop</a:t>
+                          </a:r>
+                          <a:r>
+                            <a:rPr lang="nl-BE" sz="2400" dirty="0"/>
+                            <a:t>.</a:t>
+                          </a:r>
+                        </a:p>
+                        <a:p>
+                          <a:r>
+                            <a:rPr lang="nl-BE" sz="2400" dirty="0"/>
+                            <a:t>punten</a:t>
+                          </a:r>
+                        </a:p>
+                      </a:txBody>
+                      <a:tcPr/>
+                    </a:tc>
+                    <a:tc>
+                      <a:txBody>
+                        <a:bodyPr/>
+                        <a:lstStyle/>
+                        <a:p>
+                          <a:r>
+                            <a:rPr lang="nl-BE" sz="2400" dirty="0"/>
+                            <a:t>Limiet</a:t>
+                          </a:r>
+                        </a:p>
+                      </a:txBody>
+                      <a:tcPr/>
+                    </a:tc>
+                    <a:extLst>
+                      <a:ext uri="{0D108BD9-81ED-4DB2-BD59-A6C34878D82A}">
+                        <a16:rowId xmlns:a16="http://schemas.microsoft.com/office/drawing/2014/main" val="2223524567"/>
+                      </a:ext>
+                    </a:extLst>
+                  </a:tr>
+                  <a:tr h="933450">
+                    <a:tc>
+                      <a:txBody>
+                        <a:bodyPr/>
+                        <a:lstStyle/>
+                        <a:p>
+                          <a:pPr>
+                            <a:lnSpc>
+                              <a:spcPct val="115000"/>
+                            </a:lnSpc>
+                            <a:spcAft>
+                              <a:spcPts val="800"/>
+                            </a:spcAft>
+                            <a:buNone/>
+                          </a:pPr>
+                          <a14:m>
+                            <m:oMathPara xmlns:m="http://schemas.openxmlformats.org/officeDocument/2006/math">
+                              <m:oMath>
+                                <m:r>
+                                  <a:rPr lang="en-GB" sz="3200" b="0" i="1" smtClean="0">
+                                    <a:latin typeface="Cambria Math" panose="02040503050406030204" pitchFamily="18" charset="0"/>
+                                  </a:rPr>
+                                  <m:t>+∞</m:t>
+                                </m:r>
+                              </m:oMath>
+                            </m:oMathPara>
+                          </a14:m>
+                          <a:endParaRPr lang="nl-BE" sz="3200" dirty="0"/>
+                        </a:p>
+                      </a:txBody>
+                      <a:tcPr marL="68580" marR="68580" marT="0" marB="0"/>
+                    </a:tc>
+                    <a:tc>
+                      <a:txBody>
+                        <a:bodyPr/>
+                        <a:lstStyle/>
+                        <a:p>
+                          <a:pPr>
+                            <a:lnSpc>
+                              <a:spcPct val="115000"/>
+                            </a:lnSpc>
+                            <a:spcAft>
+                              <a:spcPts val="800"/>
+                            </a:spcAft>
+                            <a:buNone/>
+                          </a:pPr>
+                          <a14:m>
+                            <m:oMathPara xmlns:m="http://schemas.openxmlformats.org/officeDocument/2006/math">
+                              <m:oMath>
+                                <m:r>
+                                  <a:rPr lang="en-GB" sz="3200" b="0" i="1" smtClean="0">
+                                    <a:latin typeface="Cambria Math" panose="02040503050406030204" pitchFamily="18" charset="0"/>
+                                  </a:rPr>
+                                  <m:t>𝑎</m:t>
+                                </m:r>
+                              </m:oMath>
+                            </m:oMathPara>
+                          </a14:m>
+                          <a:endParaRPr lang="nl-BE" sz="3200" dirty="0"/>
+                        </a:p>
+                      </a:txBody>
+                      <a:tcPr marL="68580" marR="68580" marT="0" marB="0"/>
+                    </a:tc>
+                    <a:tc>
+                      <a:txBody>
+                        <a:bodyPr/>
+                        <a:lstStyle/>
+                        <a:p>
+                          <a:pPr>
+                            <a:lnSpc>
+                              <a:spcPct val="115000"/>
+                            </a:lnSpc>
+                            <a:spcAft>
+                              <a:spcPts val="800"/>
+                            </a:spcAft>
+                            <a:buNone/>
+                          </a:pPr>
+                          <a14:m>
+                            <m:oMathPara xmlns:m="http://schemas.openxmlformats.org/officeDocument/2006/math">
+                              <m:oMath>
+                                <m:r>
+                                  <a:rPr lang="en-GB" sz="3200" b="0" i="1" smtClean="0">
+                                    <a:latin typeface="Cambria Math" panose="02040503050406030204" pitchFamily="18" charset="0"/>
+                                  </a:rPr>
+                                  <m:t>/</m:t>
+                                </m:r>
+                              </m:oMath>
+                            </m:oMathPara>
+                          </a14:m>
+                          <a:endParaRPr lang="nl-BE" sz="3200" dirty="0"/>
+                        </a:p>
+                      </a:txBody>
+                      <a:tcPr marL="68580" marR="68580" marT="0" marB="0"/>
+                    </a:tc>
+                    <a:tc>
+                      <a:txBody>
+                        <a:bodyPr/>
+                        <a:lstStyle/>
+                        <a:p>
+                          <a:pPr>
+                            <a:lnSpc>
+                              <a:spcPct val="115000"/>
+                            </a:lnSpc>
+                            <a:spcAft>
+                              <a:spcPts val="800"/>
+                            </a:spcAft>
+                            <a:buNone/>
+                          </a:pPr>
+                          <a14:m>
+                            <m:oMathPara xmlns:m="http://schemas.openxmlformats.org/officeDocument/2006/math">
+                              <m:oMath>
+                                <m:r>
+                                  <a:rPr lang="nl-BE" sz="3200" i="1" dirty="0" smtClean="0">
+                                    <a:latin typeface="Cambria Math" panose="02040503050406030204" pitchFamily="18" charset="0"/>
+                                  </a:rPr>
+                                  <m:t>/</m:t>
+                                </m:r>
+                              </m:oMath>
+                            </m:oMathPara>
+                          </a14:m>
+                          <a:endParaRPr lang="nl-BE" sz="3200" dirty="0"/>
+                        </a:p>
+                      </a:txBody>
+                      <a:tcPr marL="68580" marR="68580" marT="0" marB="0"/>
+                    </a:tc>
+                    <a:tc>
+                      <a:txBody>
+                        <a:bodyPr/>
+                        <a:lstStyle/>
+                        <a:p>
+                          <a:pPr>
+                            <a:lnSpc>
+                              <a:spcPct val="115000"/>
+                            </a:lnSpc>
+                            <a:spcAft>
+                              <a:spcPts val="800"/>
+                            </a:spcAft>
+                            <a:buNone/>
+                          </a:pPr>
+                          <a14:m>
+                            <m:oMathPara xmlns:m="http://schemas.openxmlformats.org/officeDocument/2006/math">
+                              <m:oMath>
+                                <m:r>
+                                  <a:rPr lang="en-GB" sz="3200" b="0" i="1" smtClean="0">
+                                    <a:latin typeface="Cambria Math" panose="02040503050406030204" pitchFamily="18" charset="0"/>
+                                  </a:rPr>
+                                  <m:t>+∞</m:t>
+                                </m:r>
+                              </m:oMath>
+                            </m:oMathPara>
+                          </a14:m>
+                          <a:endParaRPr lang="nl-BE" sz="3200" dirty="0"/>
+                        </a:p>
+                      </a:txBody>
+                      <a:tcPr marL="68580" marR="68580" marT="0" marB="0"/>
+                    </a:tc>
+                    <a:tc>
+                      <a:txBody>
+                        <a:bodyPr/>
+                        <a:lstStyle/>
+                        <a:p>
+                          <a:pPr>
+                            <a:lnSpc>
+                              <a:spcPct val="115000"/>
+                            </a:lnSpc>
+                            <a:spcAft>
+                              <a:spcPts val="800"/>
+                            </a:spcAft>
+                            <a:buNone/>
+                          </a:pPr>
+                          <a14:m>
+                            <m:oMathPara xmlns:m="http://schemas.openxmlformats.org/officeDocument/2006/math">
+                              <m:oMath>
+                                <m:r>
+                                  <a:rPr lang="en-GB" sz="3200" b="0" i="1" smtClean="0">
+                                    <a:latin typeface="Cambria Math" panose="02040503050406030204" pitchFamily="18" charset="0"/>
+                                  </a:rPr>
+                                  <m:t>𝑎</m:t>
+                                </m:r>
+                              </m:oMath>
+                            </m:oMathPara>
+                          </a14:m>
+                          <a:endParaRPr lang="nl-BE" sz="3200" dirty="0"/>
+                        </a:p>
+                      </a:txBody>
+                      <a:tcPr marL="68580" marR="68580" marT="0" marB="0"/>
+                    </a:tc>
+                    <a:tc>
+                      <a:txBody>
+                        <a:bodyPr/>
+                        <a:lstStyle/>
+                        <a:p>
+                          <a:pPr>
+                            <a:lnSpc>
+                              <a:spcPct val="115000"/>
+                            </a:lnSpc>
+                            <a:spcAft>
+                              <a:spcPts val="800"/>
+                            </a:spcAft>
+                            <a:buNone/>
+                          </a:pPr>
+                          <a14:m>
+                            <m:oMathPara xmlns:m="http://schemas.openxmlformats.org/officeDocument/2006/math">
+                              <m:oMath>
+                                <m:r>
+                                  <a:rPr lang="en-GB" sz="3200" b="0" i="1" dirty="0" smtClean="0">
+                                    <a:latin typeface="Cambria Math" panose="02040503050406030204" pitchFamily="18" charset="0"/>
+                                  </a:rPr>
+                                  <m:t>𝑎</m:t>
+                                </m:r>
+                              </m:oMath>
+                            </m:oMathPara>
+                          </a14:m>
+                          <a:endParaRPr lang="nl-BE" sz="3200" dirty="0"/>
+                        </a:p>
+                      </a:txBody>
+                      <a:tcPr marL="68580" marR="68580" marT="0" marB="0"/>
+                    </a:tc>
+                    <a:tc>
+                      <a:txBody>
+                        <a:bodyPr/>
+                        <a:lstStyle/>
+                        <a:p>
+                          <a:pPr>
+                            <a:lnSpc>
+                              <a:spcPct val="115000"/>
+                            </a:lnSpc>
+                            <a:spcAft>
+                              <a:spcPts val="800"/>
+                            </a:spcAft>
+                            <a:buNone/>
+                          </a:pPr>
+                          <a14:m>
+                            <m:oMathPara xmlns:m="http://schemas.openxmlformats.org/officeDocument/2006/math">
+                              <m:oMath>
+                                <m:r>
+                                  <a:rPr lang="nl-BE" sz="3200" i="1" dirty="0" smtClean="0">
+                                    <a:latin typeface="Cambria Math" panose="02040503050406030204" pitchFamily="18" charset="0"/>
+                                  </a:rPr>
+                                  <m:t>/</m:t>
+                                </m:r>
+                              </m:oMath>
+                            </m:oMathPara>
+                          </a14:m>
+                          <a:endParaRPr lang="nl-BE" sz="3200" dirty="0"/>
+                        </a:p>
+                      </a:txBody>
+                      <a:tcPr marL="68580" marR="68580" marT="0" marB="0"/>
+                    </a:tc>
+                    <a:extLst>
+                      <a:ext uri="{0D108BD9-81ED-4DB2-BD59-A6C34878D82A}">
+                        <a16:rowId xmlns:a16="http://schemas.microsoft.com/office/drawing/2014/main" val="1290068773"/>
+                      </a:ext>
+                    </a:extLst>
+                  </a:tr>
+                </a:tbl>
+              </a:graphicData>
+            </a:graphic>
+          </p:graphicFrame>
+        </mc:Choice>
+        <mc:Fallback xmlns="">
+          <p:graphicFrame>
+            <p:nvGraphicFramePr>
+              <p:cNvPr id="5" name="Tabel 4">
+                <a:extLst>
+                  <a:ext uri="{FF2B5EF4-FFF2-40B4-BE49-F238E27FC236}">
+                    <a16:creationId xmlns:a16="http://schemas.microsoft.com/office/drawing/2014/main" id="{3D8CD70B-D2AE-872B-4276-CEB9D91FD977}"/>
+                  </a:ext>
+                </a:extLst>
+              </p:cNvPr>
+              <p:cNvGraphicFramePr>
+                <a:graphicFrameLocks noGrp="1"/>
+              </p:cNvGraphicFramePr>
+              <p:nvPr>
+                <p:extLst>
+                  <p:ext uri="{D42A27DB-BD31-4B8C-83A1-F6EECF244321}">
+                    <p14:modId xmlns:p14="http://schemas.microsoft.com/office/powerpoint/2010/main" val="3122556352"/>
+                  </p:ext>
+                </p:extLst>
+              </p:nvPr>
+            </p:nvGraphicFramePr>
+            <p:xfrm>
+              <a:off x="914400" y="4611688"/>
+              <a:ext cx="10363197" cy="1866900"/>
+            </p:xfrm>
+            <a:graphic>
+              <a:graphicData uri="http://schemas.openxmlformats.org/drawingml/2006/table">
+                <a:tbl>
+                  <a:tblPr firstRow="1" bandRow="1">
+                    <a:tableStyleId>{5C22544A-7EE6-4342-B048-85BDC9FD1C3A}</a:tableStyleId>
+                  </a:tblPr>
+                  <a:tblGrid>
+                    <a:gridCol w="1512712">
+                      <a:extLst>
+                        <a:ext uri="{9D8B030D-6E8A-4147-A177-3AD203B41FA5}">
+                          <a16:colId xmlns:a16="http://schemas.microsoft.com/office/drawing/2014/main" val="3103796476"/>
+                        </a:ext>
+                      </a:extLst>
+                    </a:gridCol>
+                    <a:gridCol w="1088248">
+                      <a:extLst>
+                        <a:ext uri="{9D8B030D-6E8A-4147-A177-3AD203B41FA5}">
+                          <a16:colId xmlns:a16="http://schemas.microsoft.com/office/drawing/2014/main" val="728253802"/>
+                        </a:ext>
+                      </a:extLst>
+                    </a:gridCol>
+                    <a:gridCol w="1440462">
+                      <a:extLst>
+                        <a:ext uri="{9D8B030D-6E8A-4147-A177-3AD203B41FA5}">
+                          <a16:colId xmlns:a16="http://schemas.microsoft.com/office/drawing/2014/main" val="1230733389"/>
+                        </a:ext>
+                      </a:extLst>
+                    </a:gridCol>
+                    <a:gridCol w="1264355">
+                      <a:extLst>
+                        <a:ext uri="{9D8B030D-6E8A-4147-A177-3AD203B41FA5}">
+                          <a16:colId xmlns:a16="http://schemas.microsoft.com/office/drawing/2014/main" val="419003960"/>
+                        </a:ext>
+                      </a:extLst>
+                    </a:gridCol>
+                    <a:gridCol w="1264355">
+                      <a:extLst>
+                        <a:ext uri="{9D8B030D-6E8A-4147-A177-3AD203B41FA5}">
+                          <a16:colId xmlns:a16="http://schemas.microsoft.com/office/drawing/2014/main" val="3026958833"/>
+                        </a:ext>
+                      </a:extLst>
+                    </a:gridCol>
+                    <a:gridCol w="1264355">
+                      <a:extLst>
+                        <a:ext uri="{9D8B030D-6E8A-4147-A177-3AD203B41FA5}">
+                          <a16:colId xmlns:a16="http://schemas.microsoft.com/office/drawing/2014/main" val="2530790263"/>
+                        </a:ext>
+                      </a:extLst>
+                    </a:gridCol>
+                    <a:gridCol w="1264355">
+                      <a:extLst>
+                        <a:ext uri="{9D8B030D-6E8A-4147-A177-3AD203B41FA5}">
+                          <a16:colId xmlns:a16="http://schemas.microsoft.com/office/drawing/2014/main" val="1200962351"/>
+                        </a:ext>
+                      </a:extLst>
+                    </a:gridCol>
+                    <a:gridCol w="1264355">
+                      <a:extLst>
+                        <a:ext uri="{9D8B030D-6E8A-4147-A177-3AD203B41FA5}">
+                          <a16:colId xmlns:a16="http://schemas.microsoft.com/office/drawing/2014/main" val="2842989517"/>
+                        </a:ext>
+                      </a:extLst>
+                    </a:gridCol>
+                  </a:tblGrid>
+                  <a:tr h="933450">
+                    <a:tc>
+                      <a:txBody>
+                        <a:bodyPr/>
+                        <a:lstStyle/>
+                        <a:p>
+                          <a:r>
+                            <a:rPr lang="nl-BE" sz="2400" dirty="0"/>
+                            <a:t>sup</a:t>
+                          </a:r>
+                        </a:p>
+                      </a:txBody>
+                      <a:tcPr/>
+                    </a:tc>
+                    <a:tc>
+                      <a:txBody>
+                        <a:bodyPr/>
+                        <a:lstStyle/>
+                        <a:p>
+                          <a:r>
+                            <a:rPr lang="nl-BE" sz="2400" dirty="0" err="1"/>
+                            <a:t>inf</a:t>
+                          </a:r>
+                          <a:endParaRPr lang="nl-BE" sz="2400" dirty="0"/>
+                        </a:p>
+                      </a:txBody>
+                      <a:tcPr/>
+                    </a:tc>
+                    <a:tc>
+                      <a:txBody>
+                        <a:bodyPr/>
+                        <a:lstStyle/>
+                        <a:p>
+                          <a:r>
+                            <a:rPr lang="nl-BE" sz="2400" dirty="0"/>
+                            <a:t>max</a:t>
+                          </a:r>
+                        </a:p>
+                      </a:txBody>
+                      <a:tcPr/>
+                    </a:tc>
+                    <a:tc>
+                      <a:txBody>
+                        <a:bodyPr/>
+                        <a:lstStyle/>
+                        <a:p>
+                          <a:r>
+                            <a:rPr lang="nl-BE" sz="2400" dirty="0"/>
+                            <a:t>min</a:t>
+                          </a:r>
+                        </a:p>
+                      </a:txBody>
+                      <a:tcPr/>
+                    </a:tc>
+                    <a:tc>
+                      <a:txBody>
+                        <a:bodyPr/>
+                        <a:lstStyle/>
+                        <a:p>
+                          <a:r>
+                            <a:rPr lang="nl-BE" sz="2400" dirty="0"/>
+                            <a:t>Lim sup</a:t>
+                          </a:r>
+                        </a:p>
+                      </a:txBody>
+                      <a:tcPr/>
+                    </a:tc>
+                    <a:tc>
+                      <a:txBody>
+                        <a:bodyPr/>
+                        <a:lstStyle/>
+                        <a:p>
+                          <a:r>
+                            <a:rPr lang="nl-BE" sz="2400" dirty="0"/>
+                            <a:t>Lim </a:t>
+                          </a:r>
+                          <a:r>
+                            <a:rPr lang="nl-BE" sz="2400" dirty="0" err="1"/>
+                            <a:t>inf</a:t>
+                          </a:r>
+                          <a:endParaRPr lang="nl-BE" sz="2400" dirty="0"/>
+                        </a:p>
+                      </a:txBody>
+                      <a:tcPr/>
+                    </a:tc>
+                    <a:tc>
+                      <a:txBody>
+                        <a:bodyPr/>
+                        <a:lstStyle/>
+                        <a:p>
+                          <a:r>
+                            <a:rPr lang="nl-BE" sz="2400" dirty="0" err="1"/>
+                            <a:t>Ophop</a:t>
+                          </a:r>
+                          <a:r>
+                            <a:rPr lang="nl-BE" sz="2400" dirty="0"/>
+                            <a:t>.</a:t>
+                          </a:r>
+                        </a:p>
+                        <a:p>
+                          <a:r>
+                            <a:rPr lang="nl-BE" sz="2400" dirty="0"/>
+                            <a:t>punten</a:t>
+                          </a:r>
+                        </a:p>
+                      </a:txBody>
+                      <a:tcPr/>
+                    </a:tc>
+                    <a:tc>
+                      <a:txBody>
+                        <a:bodyPr/>
+                        <a:lstStyle/>
+                        <a:p>
+                          <a:r>
+                            <a:rPr lang="nl-BE" sz="2400" dirty="0"/>
+                            <a:t>Limiet</a:t>
+                          </a:r>
+                        </a:p>
+                      </a:txBody>
+                      <a:tcPr/>
+                    </a:tc>
+                    <a:extLst>
+                      <a:ext uri="{0D108BD9-81ED-4DB2-BD59-A6C34878D82A}">
+                        <a16:rowId xmlns:a16="http://schemas.microsoft.com/office/drawing/2014/main" val="2223524567"/>
+                      </a:ext>
+                    </a:extLst>
+                  </a:tr>
+                  <a:tr h="933450">
+                    <a:tc>
+                      <a:txBody>
+                        <a:bodyPr/>
+                        <a:lstStyle/>
+                        <a:p>
+                          <a:endParaRPr lang="en-BE"/>
+                        </a:p>
+                      </a:txBody>
+                      <a:tcPr marL="68580" marR="68580" marT="0" marB="0">
+                        <a:blipFill>
+                          <a:blip r:embed="rId3"/>
+                          <a:stretch>
+                            <a:fillRect l="-806" t="-105229" r="-587500" b="-1307"/>
+                          </a:stretch>
+                        </a:blipFill>
+                      </a:tcPr>
+                    </a:tc>
+                    <a:tc>
+                      <a:txBody>
+                        <a:bodyPr/>
+                        <a:lstStyle/>
+                        <a:p>
+                          <a:endParaRPr lang="en-BE"/>
+                        </a:p>
+                      </a:txBody>
+                      <a:tcPr marL="68580" marR="68580" marT="0" marB="0">
+                        <a:blipFill>
+                          <a:blip r:embed="rId3"/>
+                          <a:stretch>
+                            <a:fillRect l="-139665" t="-105229" r="-713966" b="-1307"/>
+                          </a:stretch>
+                        </a:blipFill>
+                      </a:tcPr>
+                    </a:tc>
+                    <a:tc>
+                      <a:txBody>
+                        <a:bodyPr/>
+                        <a:lstStyle/>
+                        <a:p>
+                          <a:endParaRPr lang="en-BE"/>
+                        </a:p>
+                      </a:txBody>
+                      <a:tcPr marL="68580" marR="68580" marT="0" marB="0">
+                        <a:blipFill>
+                          <a:blip r:embed="rId3"/>
+                          <a:stretch>
+                            <a:fillRect l="-181780" t="-105229" r="-441525" b="-1307"/>
+                          </a:stretch>
+                        </a:blipFill>
+                      </a:tcPr>
+                    </a:tc>
+                    <a:tc>
+                      <a:txBody>
+                        <a:bodyPr/>
+                        <a:lstStyle/>
+                        <a:p>
+                          <a:endParaRPr lang="en-BE"/>
+                        </a:p>
+                      </a:txBody>
+                      <a:tcPr marL="68580" marR="68580" marT="0" marB="0">
+                        <a:blipFill>
+                          <a:blip r:embed="rId3"/>
+                          <a:stretch>
+                            <a:fillRect l="-321256" t="-105229" r="-403382" b="-1307"/>
+                          </a:stretch>
+                        </a:blipFill>
+                      </a:tcPr>
+                    </a:tc>
+                    <a:tc>
+                      <a:txBody>
+                        <a:bodyPr/>
+                        <a:lstStyle/>
+                        <a:p>
+                          <a:endParaRPr lang="en-BE"/>
+                        </a:p>
+                      </a:txBody>
+                      <a:tcPr marL="68580" marR="68580" marT="0" marB="0">
+                        <a:blipFill>
+                          <a:blip r:embed="rId3"/>
+                          <a:stretch>
+                            <a:fillRect l="-419231" t="-105229" r="-301442" b="-1307"/>
+                          </a:stretch>
+                        </a:blipFill>
+                      </a:tcPr>
+                    </a:tc>
+                    <a:tc>
+                      <a:txBody>
+                        <a:bodyPr/>
+                        <a:lstStyle/>
+                        <a:p>
+                          <a:endParaRPr lang="en-BE"/>
+                        </a:p>
+                      </a:txBody>
+                      <a:tcPr marL="68580" marR="68580" marT="0" marB="0">
+                        <a:blipFill>
+                          <a:blip r:embed="rId3"/>
+                          <a:stretch>
+                            <a:fillRect l="-521739" t="-105229" r="-202899" b="-1307"/>
+                          </a:stretch>
+                        </a:blipFill>
+                      </a:tcPr>
+                    </a:tc>
+                    <a:tc>
+                      <a:txBody>
+                        <a:bodyPr/>
+                        <a:lstStyle/>
+                        <a:p>
+                          <a:endParaRPr lang="en-BE"/>
+                        </a:p>
+                      </a:txBody>
+                      <a:tcPr marL="68580" marR="68580" marT="0" marB="0">
+                        <a:blipFill>
+                          <a:blip r:embed="rId3"/>
+                          <a:stretch>
+                            <a:fillRect l="-618750" t="-105229" r="-101923" b="-1307"/>
+                          </a:stretch>
+                        </a:blipFill>
+                      </a:tcPr>
+                    </a:tc>
+                    <a:tc>
+                      <a:txBody>
+                        <a:bodyPr/>
+                        <a:lstStyle/>
+                        <a:p>
+                          <a:endParaRPr lang="en-BE"/>
+                        </a:p>
+                      </a:txBody>
+                      <a:tcPr marL="68580" marR="68580" marT="0" marB="0">
+                        <a:blipFill>
+                          <a:blip r:embed="rId3"/>
+                          <a:stretch>
+                            <a:fillRect l="-722222" t="-105229" r="-2415" b="-1307"/>
+                          </a:stretch>
+                        </a:blipFill>
+                      </a:tcPr>
+                    </a:tc>
+                    <a:extLst>
+                      <a:ext uri="{0D108BD9-81ED-4DB2-BD59-A6C34878D82A}">
+                        <a16:rowId xmlns:a16="http://schemas.microsoft.com/office/drawing/2014/main" val="1290068773"/>
+                      </a:ext>
+                    </a:extLst>
+                  </a:tr>
+                </a:tbl>
+              </a:graphicData>
+            </a:graphic>
+          </p:graphicFrame>
+        </mc:Fallback>
+      </mc:AlternateContent>
+    </p:spTree>
+    <p:extLst>
+      <p:ext uri="{BB962C8B-B14F-4D97-AF65-F5344CB8AC3E}">
+        <p14:creationId xmlns:p14="http://schemas.microsoft.com/office/powerpoint/2010/main" val="3661570043"/>
+      </p:ext>
+    </p:extLst>
+  </p:cSld>
+  <p:clrMapOvr>
+    <a:masterClrMapping/>
+  </p:clrMapOvr>
+  <p:timing>
+    <p:tnLst>
+      <p:par>
+        <p:cTn id="1" dur="indefinite" restart="never" nodeType="tmRoot">
+          <p:childTnLst>
+            <p:seq concurrent="1" nextAc="seek">
+              <p:cTn id="2" dur="indefinite" nodeType="mainSeq">
+                <p:childTnLst>
+                  <p:par>
+                    <p:cTn id="3" fill="hold">
+                      <p:stCondLst>
+                        <p:cond delay="indefinite"/>
+                      </p:stCondLst>
+                      <p:childTnLst>
+                        <p:par>
+                          <p:cTn id="4" fill="hold">
+                            <p:stCondLst>
+                              <p:cond delay="0"/>
+                            </p:stCondLst>
+                            <p:childTnLst>
+                              <p:par>
+                                <p:cTn id="5" presetID="1" presetClass="entr" presetSubtype="0" fill="hold" grpId="0" nodeType="clickEffect">
+                                  <p:stCondLst>
+                                    <p:cond delay="0"/>
+                                  </p:stCondLst>
+                                  <p:childTnLst>
+                                    <p:set>
+                                      <p:cBhvr>
+                                        <p:cTn id="6" dur="1" fill="hold">
+                                          <p:stCondLst>
+                                            <p:cond delay="0"/>
+                                          </p:stCondLst>
+                                        </p:cTn>
+                                        <p:tgtEl>
+                                          <p:spTgt spid="3">
+                                            <p:txEl>
+                                              <p:pRg st="0" end="0"/>
+                                            </p:txEl>
+                                          </p:spTgt>
+                                        </p:tgtEl>
+                                        <p:attrNameLst>
+                                          <p:attrName>style.visibility</p:attrName>
+                                        </p:attrNameLst>
+                                      </p:cBhvr>
+                                      <p:to>
+                                        <p:strVal val="visible"/>
+                                      </p:to>
+                                    </p:set>
+                                  </p:childTnLst>
+                                </p:cTn>
+                              </p:par>
+                            </p:childTnLst>
+                          </p:cTn>
+                        </p:par>
+                      </p:childTnLst>
+                    </p:cTn>
+                  </p:par>
+                  <p:par>
+                    <p:cTn id="7" fill="hold">
+                      <p:stCondLst>
+                        <p:cond delay="indefinite"/>
+                      </p:stCondLst>
+                      <p:childTnLst>
+                        <p:par>
+                          <p:cTn id="8" fill="hold">
+                            <p:stCondLst>
+                              <p:cond delay="0"/>
+                            </p:stCondLst>
+                            <p:childTnLst>
+                              <p:par>
+                                <p:cTn id="9" presetID="1" presetClass="entr" presetSubtype="0" fill="hold" grpId="0" nodeType="clickEffect">
+                                  <p:stCondLst>
+                                    <p:cond delay="0"/>
+                                  </p:stCondLst>
+                                  <p:childTnLst>
+                                    <p:set>
+                                      <p:cBhvr>
+                                        <p:cTn id="10" dur="1" fill="hold">
+                                          <p:stCondLst>
+                                            <p:cond delay="0"/>
+                                          </p:stCondLst>
+                                        </p:cTn>
+                                        <p:tgtEl>
+                                          <p:spTgt spid="3">
+                                            <p:txEl>
+                                              <p:pRg st="1" end="1"/>
+                                            </p:txEl>
+                                          </p:spTgt>
+                                        </p:tgtEl>
+                                        <p:attrNameLst>
+                                          <p:attrName>style.visibility</p:attrName>
+                                        </p:attrNameLst>
+                                      </p:cBhvr>
+                                      <p:to>
+                                        <p:strVal val="visible"/>
+                                      </p:to>
+                                    </p:set>
+                                  </p:childTnLst>
+                                </p:cTn>
+                              </p:par>
+                            </p:childTnLst>
+                          </p:cTn>
+                        </p:par>
+                      </p:childTnLst>
+                    </p:cTn>
+                  </p:par>
+                  <p:par>
+                    <p:cTn id="11" fill="hold">
+                      <p:stCondLst>
+                        <p:cond delay="indefinite"/>
+                      </p:stCondLst>
+                      <p:childTnLst>
+                        <p:par>
+                          <p:cTn id="12" fill="hold">
+                            <p:stCondLst>
+                              <p:cond delay="0"/>
+                            </p:stCondLst>
+                            <p:childTnLst>
+                              <p:par>
+                                <p:cTn id="13" presetID="1" presetClass="entr" presetSubtype="0" fill="hold" grpId="0" nodeType="clickEffect">
+                                  <p:stCondLst>
+                                    <p:cond delay="0"/>
+                                  </p:stCondLst>
+                                  <p:childTnLst>
+                                    <p:set>
+                                      <p:cBhvr>
+                                        <p:cTn id="14" dur="1" fill="hold">
+                                          <p:stCondLst>
+                                            <p:cond delay="0"/>
+                                          </p:stCondLst>
+                                        </p:cTn>
+                                        <p:tgtEl>
+                                          <p:spTgt spid="3">
+                                            <p:txEl>
+                                              <p:pRg st="3" end="3"/>
+                                            </p:txEl>
+                                          </p:spTgt>
+                                        </p:tgtEl>
+                                        <p:attrNameLst>
+                                          <p:attrName>style.visibility</p:attrName>
+                                        </p:attrNameLst>
+                                      </p:cBhvr>
+                                      <p:to>
+                                        <p:strVal val="visible"/>
+                                      </p:to>
+                                    </p:set>
+                                  </p:childTnLst>
+                                </p:cTn>
+                              </p:par>
+                            </p:childTnLst>
+                          </p:cTn>
+                        </p:par>
+                      </p:childTnLst>
+                    </p:cTn>
+                  </p:par>
+                  <p:par>
+                    <p:cTn id="15" fill="hold">
+                      <p:stCondLst>
+                        <p:cond delay="indefinite"/>
+                      </p:stCondLst>
+                      <p:childTnLst>
+                        <p:par>
+                          <p:cTn id="16" fill="hold">
+                            <p:stCondLst>
+                              <p:cond delay="0"/>
+                            </p:stCondLst>
+                            <p:childTnLst>
+                              <p:par>
+                                <p:cTn id="17" presetID="1" presetClass="entr" presetSubtype="0" fill="hold" grpId="0" nodeType="clickEffect">
+                                  <p:stCondLst>
+                                    <p:cond delay="0"/>
+                                  </p:stCondLst>
+                                  <p:childTnLst>
+                                    <p:set>
+                                      <p:cBhvr>
+                                        <p:cTn id="18" dur="1" fill="hold">
+                                          <p:stCondLst>
+                                            <p:cond delay="0"/>
+                                          </p:stCondLst>
+                                        </p:cTn>
+                                        <p:tgtEl>
+                                          <p:spTgt spid="3">
+                                            <p:txEl>
+                                              <p:pRg st="4" end="4"/>
+                                            </p:txEl>
+                                          </p:spTgt>
+                                        </p:tgtEl>
+                                        <p:attrNameLst>
+                                          <p:attrName>style.visibility</p:attrName>
+                                        </p:attrNameLst>
+                                      </p:cBhvr>
+                                      <p:to>
+                                        <p:strVal val="visible"/>
+                                      </p:to>
+                                    </p:set>
+                                  </p:childTnLst>
+                                </p:cTn>
+                              </p:par>
+                            </p:childTnLst>
+                          </p:cTn>
+                        </p:par>
+                      </p:childTnLst>
+                    </p:cTn>
+                  </p:par>
+                  <p:par>
+                    <p:cTn id="19" fill="hold">
+                      <p:stCondLst>
+                        <p:cond delay="indefinite"/>
+                      </p:stCondLst>
+                      <p:childTnLst>
+                        <p:par>
+                          <p:cTn id="20" fill="hold">
+                            <p:stCondLst>
+                              <p:cond delay="0"/>
+                            </p:stCondLst>
+                            <p:childTnLst>
+                              <p:par>
+                                <p:cTn id="21" presetID="1" presetClass="entr" presetSubtype="0" fill="hold" nodeType="clickEffect">
+                                  <p:stCondLst>
+                                    <p:cond delay="0"/>
+                                  </p:stCondLst>
+                                  <p:childTnLst>
+                                    <p:set>
+                                      <p:cBhvr>
+                                        <p:cTn id="22" dur="1" fill="hold">
+                                          <p:stCondLst>
+                                            <p:cond delay="0"/>
+                                          </p:stCondLst>
+                                        </p:cTn>
+                                        <p:tgtEl>
+                                          <p:spTgt spid="5"/>
+                                        </p:tgtEl>
+                                        <p:attrNameLst>
+                                          <p:attrName>style.visibility</p:attrName>
+                                        </p:attrNameLst>
+                                      </p:cBhvr>
+                                      <p:to>
+                                        <p:strVal val="visible"/>
+                                      </p:to>
+                                    </p:set>
+                                  </p:childTnLst>
+                                </p:cTn>
+                              </p:par>
+                            </p:childTnLst>
+                          </p:cTn>
+                        </p:par>
+                      </p:childTnLst>
+                    </p:cTn>
+                  </p:par>
+                </p:childTnLst>
+              </p:cTn>
+              <p:prevCondLst>
+                <p:cond evt="onPrev" delay="0">
+                  <p:tgtEl>
+                    <p:sldTgt/>
+                  </p:tgtEl>
+                </p:cond>
+              </p:prevCondLst>
+              <p:nextCondLst>
+                <p:cond evt="onNext" delay="0">
+                  <p:tgtEl>
+                    <p:sldTgt/>
+                  </p:tgtEl>
+                </p:cond>
+              </p:nextCondLst>
+            </p:seq>
+          </p:childTnLst>
+        </p:cTn>
+      </p:par>
+    </p:tnLst>
+    <p:bldLst>
+      <p:bldP spid="3" grpId="0" uiExpand="1" build="p"/>
+    </p:bldLst>
+  </p:timing>
 </p:sld>
 </file>
 
 <file path=ppt/slides/slide16.xml><?xml version="1.0" encoding="utf-8"?>
+<p:sld xmlns:a="http://schemas.openxmlformats.org/drawingml/2006/main" xmlns:r="http://schemas.openxmlformats.org/officeDocument/2006/relationships" xmlns:p="http://schemas.openxmlformats.org/presentationml/2006/main">
+  <p:cSld>
+    <p:spTree>
+      <p:nvGrpSpPr>
+        <p:cNvPr id="1" name=""/>
+        <p:cNvGrpSpPr/>
+        <p:nvPr/>
+      </p:nvGrpSpPr>
+      <p:grpSpPr>
+        <a:xfrm>
+          <a:off x="0" y="0"/>
+          <a:ext cx="0" cy="0"/>
+          <a:chOff x="0" y="0"/>
+          <a:chExt cx="0" cy="0"/>
+        </a:xfrm>
+      </p:grpSpPr>
+      <p:pic>
+        <p:nvPicPr>
+          <p:cNvPr id="6" name="Tijdelijke aanduiding voor inhoud 5">
+            <a:extLst>
+              <a:ext uri="{FF2B5EF4-FFF2-40B4-BE49-F238E27FC236}">
+                <a16:creationId xmlns:a16="http://schemas.microsoft.com/office/drawing/2014/main" id="{584DE6C4-DDD9-A734-BD22-FFDCDBAF295D}"/>
+              </a:ext>
+            </a:extLst>
+          </p:cNvPr>
+          <p:cNvPicPr>
+            <a:picLocks noGrp="1" noChangeAspect="1"/>
+          </p:cNvPicPr>
+          <p:nvPr>
+            <p:ph idx="1"/>
+          </p:nvPr>
+        </p:nvPicPr>
+        <p:blipFill>
+          <a:blip r:embed="rId4"/>
+          <a:stretch>
+            <a:fillRect/>
+          </a:stretch>
+        </p:blipFill>
+        <p:spPr>
+          <a:xfrm>
+            <a:off x="4043362" y="1943894"/>
+            <a:ext cx="4105275" cy="4114800"/>
+          </a:xfrm>
+          <a:prstGeom prst="rect">
+            <a:avLst/>
+          </a:prstGeom>
+        </p:spPr>
+      </p:pic>
+      <p:sp>
+        <p:nvSpPr>
+          <p:cNvPr id="4" name="Tijdelijke aanduiding voor voettekst 3">
+            <a:extLst>
+              <a:ext uri="{FF2B5EF4-FFF2-40B4-BE49-F238E27FC236}">
+                <a16:creationId xmlns:a16="http://schemas.microsoft.com/office/drawing/2014/main" id="{79312C72-E4D0-70E8-5D93-EF559DE7C875}"/>
+              </a:ext>
+            </a:extLst>
+          </p:cNvPr>
+          <p:cNvSpPr>
+            <a:spLocks noGrp="1"/>
+          </p:cNvSpPr>
+          <p:nvPr>
+            <p:ph type="ftr" sz="quarter" idx="11"/>
+          </p:nvPr>
+        </p:nvSpPr>
+        <p:spPr/>
+        <p:txBody>
+          <a:bodyPr/>
+          <a:lstStyle/>
+          <a:p>
+            <a:r>
+              <a:rPr lang="en-GB"/>
+              <a:t>Oefenzittingen Analyse I - Jasper Visterin</a:t>
+            </a:r>
+          </a:p>
+        </p:txBody>
+      </p:sp>
+      <mc:AlternateContent xmlns:mc="http://schemas.openxmlformats.org/markup-compatibility/2006" xmlns:a14="http://schemas.microsoft.com/office/drawing/2010/main">
+        <mc:Choice Requires="a14">
+          <p:sp>
+            <p:nvSpPr>
+              <p:cNvPr id="8" name="Tekstvak 7">
+                <a:extLst>
+                  <a:ext uri="{FF2B5EF4-FFF2-40B4-BE49-F238E27FC236}">
+                    <a16:creationId xmlns:a16="http://schemas.microsoft.com/office/drawing/2014/main" id="{DCBAF4EB-6564-9F5D-105B-F6960434561C}"/>
+                  </a:ext>
+                </a:extLst>
+              </p:cNvPr>
+              <p:cNvSpPr txBox="1"/>
+              <p:nvPr/>
+            </p:nvSpPr>
+            <p:spPr>
+              <a:xfrm>
+                <a:off x="3047999" y="799306"/>
+                <a:ext cx="6096000" cy="769441"/>
+              </a:xfrm>
+              <a:prstGeom prst="rect">
+                <a:avLst/>
+              </a:prstGeom>
+              <a:noFill/>
+            </p:spPr>
+            <p:txBody>
+              <a:bodyPr wrap="square">
+                <a:spAutoFit/>
+              </a:bodyPr>
+              <a:lstStyle/>
+              <a:p>
+                <a:pPr/>
+                <a14:m>
+                  <m:oMathPara xmlns:m="http://schemas.openxmlformats.org/officeDocument/2006/math">
+                    <m:oMath>
+                      <m:func>
+                        <m:funcPr>
+                          <m:ctrlPr>
+                            <a:rPr lang="nl-BE" sz="4400" b="0" i="0" smtClean="0">
+                              <a:latin typeface="Cambria Math" panose="02040503050406030204" pitchFamily="18" charset="0"/>
+                            </a:rPr>
+                          </m:ctrlPr>
+                        </m:funcPr>
+                        <m:fName>
+                          <m:r>
+                            <m:rPr>
+                              <m:sty m:val="p"/>
+                            </m:rPr>
+                            <a:rPr lang="nl-BE" sz="4400" b="0" i="0" smtClean="0">
+                              <a:latin typeface="Cambria Math" panose="02040503050406030204" pitchFamily="18" charset="0"/>
+                            </a:rPr>
+                            <m:t>lim</m:t>
+                          </m:r>
+                        </m:fName>
+                        <m:e>
+                          <m:r>
+                            <m:rPr>
+                              <m:sty m:val="p"/>
+                            </m:rPr>
+                            <a:rPr lang="nl-BE" sz="4400" b="0" i="1" smtClean="0">
+                              <a:latin typeface="Cambria Math" panose="02040503050406030204" pitchFamily="18" charset="0"/>
+                            </a:rPr>
+                            <m:t>sup</m:t>
+                          </m:r>
+                        </m:e>
+                      </m:func>
+                    </m:oMath>
+                  </m:oMathPara>
+                </a14:m>
+                <a:endParaRPr lang="nl-BE" dirty="0"/>
+              </a:p>
+            </p:txBody>
+          </p:sp>
+        </mc:Choice>
+        <mc:Fallback xmlns="">
+          <p:sp>
+            <p:nvSpPr>
+              <p:cNvPr id="8" name="Tekstvak 7">
+                <a:extLst>
+                  <a:ext uri="{FF2B5EF4-FFF2-40B4-BE49-F238E27FC236}">
+                    <a16:creationId xmlns:a16="http://schemas.microsoft.com/office/drawing/2014/main" id="{DCBAF4EB-6564-9F5D-105B-F6960434561C}"/>
+                  </a:ext>
+                </a:extLst>
+              </p:cNvPr>
+              <p:cNvSpPr txBox="1">
+                <a:spLocks noRot="1" noChangeAspect="1" noMove="1" noResize="1" noEditPoints="1" noAdjustHandles="1" noChangeArrowheads="1" noChangeShapeType="1" noTextEdit="1"/>
+              </p:cNvSpPr>
+              <p:nvPr/>
+            </p:nvSpPr>
+            <p:spPr>
+              <a:xfrm>
+                <a:off x="3047999" y="799306"/>
+                <a:ext cx="6096000" cy="769441"/>
+              </a:xfrm>
+              <a:prstGeom prst="rect">
+                <a:avLst/>
+              </a:prstGeom>
+              <a:blipFill>
+                <a:blip r:embed="rId5"/>
+                <a:stretch>
+                  <a:fillRect/>
+                </a:stretch>
+              </a:blipFill>
+            </p:spPr>
+            <p:txBody>
+              <a:bodyPr/>
+              <a:lstStyle/>
+              <a:p>
+                <a:r>
+                  <a:rPr lang="nl-BE">
+                    <a:noFill/>
+                  </a:rPr>
+                  <a:t> </a:t>
+                </a:r>
+              </a:p>
+            </p:txBody>
+          </p:sp>
+        </mc:Fallback>
+      </mc:AlternateContent>
+      <p:pic>
+        <p:nvPicPr>
+          <p:cNvPr id="2" name="Crickets (Awkward Silence) - Sound Effect (HD) [CpGtBnVZLSk]">
+            <a:hlinkClick r:id="" action="ppaction://media"/>
+            <a:extLst>
+              <a:ext uri="{FF2B5EF4-FFF2-40B4-BE49-F238E27FC236}">
+                <a16:creationId xmlns:a16="http://schemas.microsoft.com/office/drawing/2014/main" id="{2052C63D-A959-1AF4-29F3-CB3E189CBF71}"/>
+              </a:ext>
+            </a:extLst>
+          </p:cNvPr>
+          <p:cNvPicPr>
+            <a:picLocks noChangeAspect="1"/>
+          </p:cNvPicPr>
+          <p:nvPr>
+            <a:audioFile r:link="rId2"/>
+            <p:extLst>
+              <p:ext uri="{DAA4B4D4-6D71-4841-9C94-3DE7FCFB9230}">
+                <p14:media xmlns:p14="http://schemas.microsoft.com/office/powerpoint/2010/main" r:embed="rId1"/>
+              </p:ext>
+            </p:extLst>
+          </p:nvPr>
+        </p:nvPicPr>
+        <p:blipFill>
+          <a:blip r:embed="rId6"/>
+          <a:stretch>
+            <a:fillRect/>
+          </a:stretch>
+        </p:blipFill>
+        <p:spPr>
+          <a:xfrm>
+            <a:off x="12369800" y="6451600"/>
+            <a:ext cx="406400" cy="406400"/>
+          </a:xfrm>
+          <a:prstGeom prst="rect">
+            <a:avLst/>
+          </a:prstGeom>
+        </p:spPr>
+      </p:pic>
+    </p:spTree>
+    <p:extLst>
+      <p:ext uri="{BB962C8B-B14F-4D97-AF65-F5344CB8AC3E}">
+        <p14:creationId xmlns:p14="http://schemas.microsoft.com/office/powerpoint/2010/main" val="1143024439"/>
+      </p:ext>
+    </p:extLst>
+  </p:cSld>
+  <p:clrMapOvr>
+    <a:masterClrMapping/>
+  </p:clrMapOvr>
+  <p:timing>
+    <p:tnLst>
+      <p:par>
+        <p:cTn id="1" dur="indefinite" restart="never" nodeType="tmRoot">
+          <p:childTnLst>
+            <p:seq concurrent="1" nextAc="seek">
+              <p:cTn id="2" dur="indefinite" nodeType="mainSeq">
+                <p:childTnLst>
+                  <p:par>
+                    <p:cTn id="3" fill="hold">
+                      <p:stCondLst>
+                        <p:cond delay="indefinite"/>
+                      </p:stCondLst>
+                      <p:childTnLst>
+                        <p:par>
+                          <p:cTn id="4" fill="hold">
+                            <p:stCondLst>
+                              <p:cond delay="0"/>
+                            </p:stCondLst>
+                            <p:childTnLst>
+                              <p:par>
+                                <p:cTn id="5" presetID="42" presetClass="entr" presetSubtype="0" fill="hold" grpId="0" nodeType="clickEffect">
+                                  <p:stCondLst>
+                                    <p:cond delay="0"/>
+                                  </p:stCondLst>
+                                  <p:childTnLst>
+                                    <p:set>
+                                      <p:cBhvr>
+                                        <p:cTn id="6" dur="1" fill="hold">
+                                          <p:stCondLst>
+                                            <p:cond delay="0"/>
+                                          </p:stCondLst>
+                                        </p:cTn>
+                                        <p:tgtEl>
+                                          <p:spTgt spid="8"/>
+                                        </p:tgtEl>
+                                        <p:attrNameLst>
+                                          <p:attrName>style.visibility</p:attrName>
+                                        </p:attrNameLst>
+                                      </p:cBhvr>
+                                      <p:to>
+                                        <p:strVal val="visible"/>
+                                      </p:to>
+                                    </p:set>
+                                    <p:animEffect transition="in" filter="fade">
+                                      <p:cBhvr>
+                                        <p:cTn id="7" dur="1000"/>
+                                        <p:tgtEl>
+                                          <p:spTgt spid="8"/>
+                                        </p:tgtEl>
+                                      </p:cBhvr>
+                                    </p:animEffect>
+                                    <p:anim calcmode="lin" valueType="num">
+                                      <p:cBhvr>
+                                        <p:cTn id="8" dur="1000" fill="hold"/>
+                                        <p:tgtEl>
+                                          <p:spTgt spid="8"/>
+                                        </p:tgtEl>
+                                        <p:attrNameLst>
+                                          <p:attrName>ppt_x</p:attrName>
+                                        </p:attrNameLst>
+                                      </p:cBhvr>
+                                      <p:tavLst>
+                                        <p:tav tm="0">
+                                          <p:val>
+                                            <p:strVal val="#ppt_x"/>
+                                          </p:val>
+                                        </p:tav>
+                                        <p:tav tm="100000">
+                                          <p:val>
+                                            <p:strVal val="#ppt_x"/>
+                                          </p:val>
+                                        </p:tav>
+                                      </p:tavLst>
+                                    </p:anim>
+                                    <p:anim calcmode="lin" valueType="num">
+                                      <p:cBhvr>
+                                        <p:cTn id="9" dur="1000" fill="hold"/>
+                                        <p:tgtEl>
+                                          <p:spTgt spid="8"/>
+                                        </p:tgtEl>
+                                        <p:attrNameLst>
+                                          <p:attrName>ppt_y</p:attrName>
+                                        </p:attrNameLst>
+                                      </p:cBhvr>
+                                      <p:tavLst>
+                                        <p:tav tm="0">
+                                          <p:val>
+                                            <p:strVal val="#ppt_y+.1"/>
+                                          </p:val>
+                                        </p:tav>
+                                        <p:tav tm="100000">
+                                          <p:val>
+                                            <p:strVal val="#ppt_y"/>
+                                          </p:val>
+                                        </p:tav>
+                                      </p:tavLst>
+                                    </p:anim>
+                                  </p:childTnLst>
+                                </p:cTn>
+                              </p:par>
+                            </p:childTnLst>
+                          </p:cTn>
+                        </p:par>
+                      </p:childTnLst>
+                    </p:cTn>
+                  </p:par>
+                  <p:par>
+                    <p:cTn id="10" fill="hold">
+                      <p:stCondLst>
+                        <p:cond delay="indefinite"/>
+                      </p:stCondLst>
+                      <p:childTnLst>
+                        <p:par>
+                          <p:cTn id="11" fill="hold">
+                            <p:stCondLst>
+                              <p:cond delay="0"/>
+                            </p:stCondLst>
+                            <p:childTnLst>
+                              <p:par>
+                                <p:cTn id="12" presetID="1" presetClass="mediacall" presetSubtype="0" fill="hold" nodeType="clickEffect">
+                                  <p:stCondLst>
+                                    <p:cond delay="0"/>
+                                  </p:stCondLst>
+                                  <p:childTnLst>
+                                    <p:cmd type="call" cmd="playFrom(0.0)">
+                                      <p:cBhvr>
+                                        <p:cTn id="13" dur="10032" fill="hold"/>
+                                        <p:tgtEl>
+                                          <p:spTgt spid="2"/>
+                                        </p:tgtEl>
+                                      </p:cBhvr>
+                                    </p:cmd>
+                                  </p:childTnLst>
+                                </p:cTn>
+                              </p:par>
+                            </p:childTnLst>
+                          </p:cTn>
+                        </p:par>
+                      </p:childTnLst>
+                    </p:cTn>
+                  </p:par>
+                </p:childTnLst>
+              </p:cTn>
+              <p:prevCondLst>
+                <p:cond evt="onPrev" delay="0">
+                  <p:tgtEl>
+                    <p:sldTgt/>
+                  </p:tgtEl>
+                </p:cond>
+              </p:prevCondLst>
+              <p:nextCondLst>
+                <p:cond evt="onNext" delay="0">
+                  <p:tgtEl>
+                    <p:sldTgt/>
+                  </p:tgtEl>
+                </p:cond>
+              </p:nextCondLst>
+            </p:seq>
+            <p:audio>
+              <p:cMediaNode vol="80000">
+                <p:cTn id="14" fill="hold" display="0">
+                  <p:stCondLst>
+                    <p:cond delay="indefinite"/>
+                  </p:stCondLst>
+                  <p:endCondLst>
+                    <p:cond evt="onStopAudio" delay="0">
+                      <p:tgtEl>
+                        <p:sldTgt/>
+                      </p:tgtEl>
+                    </p:cond>
+                  </p:endCondLst>
+                </p:cTn>
+                <p:tgtEl>
+                  <p:spTgt spid="2"/>
+                </p:tgtEl>
+              </p:cMediaNode>
+            </p:audio>
+          </p:childTnLst>
+        </p:cTn>
+      </p:par>
+    </p:tnLst>
+    <p:bldLst>
+      <p:bldP spid="8" grpId="0"/>
+    </p:bldLst>
+  </p:timing>
+</p:sld>
+</file>
+
+<file path=ppt/slides/slide17.xml><?xml version="1.0" encoding="utf-8"?>
 <p:sld xmlns:a="http://schemas.openxmlformats.org/drawingml/2006/main" xmlns:r="http://schemas.openxmlformats.org/officeDocument/2006/relationships" xmlns:p="http://schemas.openxmlformats.org/presentationml/2006/main">
   <p:cSld>
     <p:spTree>
@@ -8227,7 +10479,7 @@
 </p:sld>
 </file>
 
-<file path=ppt/slides/slide17.xml><?xml version="1.0" encoding="utf-8"?>
+<file path=ppt/slides/slide18.xml><?xml version="1.0" encoding="utf-8"?>
 <p:sld xmlns:a="http://schemas.openxmlformats.org/drawingml/2006/main" xmlns:r="http://schemas.openxmlformats.org/officeDocument/2006/relationships" xmlns:p="http://schemas.openxmlformats.org/presentationml/2006/main">
   <p:cSld>
     <p:spTree>
@@ -8277,8 +10529,8 @@
           </a:p>
         </p:txBody>
       </p:sp>
-      <mc:AlternateContent xmlns:mc="http://schemas.openxmlformats.org/markup-compatibility/2006">
-        <mc:Choice xmlns:a14="http://schemas.microsoft.com/office/drawing/2010/main" Requires="a14">
+      <mc:AlternateContent xmlns:mc="http://schemas.openxmlformats.org/markup-compatibility/2006" xmlns:a14="http://schemas.microsoft.com/office/drawing/2010/main">
+        <mc:Choice Requires="a14">
           <p:graphicFrame>
             <p:nvGraphicFramePr>
               <p:cNvPr id="13" name="Tijdelijke aanduiding voor inhoud 12">
@@ -9625,7 +11877,7 @@
             </a:graphic>
           </p:graphicFrame>
         </mc:Choice>
-        <mc:Fallback>
+        <mc:Fallback xmlns="">
           <p:graphicFrame>
             <p:nvGraphicFramePr>
               <p:cNvPr id="13" name="Tijdelijke aanduiding voor inhoud 12">
@@ -10605,7 +12857,7 @@
 </p:sld>
 </file>
 
-<file path=ppt/slides/slide18.xml><?xml version="1.0" encoding="utf-8"?>
+<file path=ppt/slides/slide19.xml><?xml version="1.0" encoding="utf-8"?>
 <p:sld xmlns:a="http://schemas.openxmlformats.org/drawingml/2006/main" xmlns:r="http://schemas.openxmlformats.org/officeDocument/2006/relationships" xmlns:p="http://schemas.openxmlformats.org/presentationml/2006/main">
   <p:cSld>
     <p:spTree>
@@ -11583,8 +13835,8 @@
           </p:sp>
         </mc:Fallback>
       </mc:AlternateContent>
-      <mc:AlternateContent xmlns:mc="http://schemas.openxmlformats.org/markup-compatibility/2006">
-        <mc:Choice xmlns:a14="http://schemas.microsoft.com/office/drawing/2010/main" Requires="a14">
+      <mc:AlternateContent xmlns:mc="http://schemas.openxmlformats.org/markup-compatibility/2006" xmlns:a14="http://schemas.microsoft.com/office/drawing/2010/main">
+        <mc:Choice Requires="a14">
           <p:graphicFrame>
             <p:nvGraphicFramePr>
               <p:cNvPr id="4" name="Tabel 3">
@@ -11600,14 +13852,14 @@
               <p:nvPr>
                 <p:extLst>
                   <p:ext uri="{D42A27DB-BD31-4B8C-83A1-F6EECF244321}">
-                    <p14:modId xmlns:p14="http://schemas.microsoft.com/office/powerpoint/2010/main" val="3130092020"/>
+                    <p14:modId xmlns:p14="http://schemas.microsoft.com/office/powerpoint/2010/main" val="425527192"/>
                   </p:ext>
                 </p:extLst>
               </p:nvPr>
             </p:nvGraphicFramePr>
             <p:xfrm>
-              <a:off x="406402" y="4632960"/>
-              <a:ext cx="11379195" cy="1866900"/>
+              <a:off x="914401" y="4785360"/>
+              <a:ext cx="10363197" cy="1866900"/>
             </p:xfrm>
             <a:graphic>
               <a:graphicData uri="http://schemas.openxmlformats.org/drawingml/2006/table">
@@ -11616,13 +13868,6 @@
                     <a:tableStyleId>{5C22544A-7EE6-4342-B048-85BDC9FD1C3A}</a:tableStyleId>
                   </a:tblPr>
                   <a:tblGrid>
-                    <a:gridCol w="1015998">
-                      <a:extLst>
-                        <a:ext uri="{9D8B030D-6E8A-4147-A177-3AD203B41FA5}">
-                          <a16:colId xmlns:a16="http://schemas.microsoft.com/office/drawing/2014/main" val="1902359932"/>
-                        </a:ext>
-                      </a:extLst>
-                    </a:gridCol>
                     <a:gridCol w="1512712">
                       <a:extLst>
                         <a:ext uri="{9D8B030D-6E8A-4147-A177-3AD203B41FA5}">
@@ -11681,16 +13926,6 @@
                     </a:gridCol>
                   </a:tblGrid>
                   <a:tr h="933450">
-                    <a:tc>
-                      <a:txBody>
-                        <a:bodyPr/>
-                        <a:lstStyle/>
-                        <a:p>
-                          <a:endParaRPr lang="nl-BE" dirty="0"/>
-                        </a:p>
-                      </a:txBody>
-                      <a:tcPr/>
-                    </a:tc>
                     <a:tc>
                       <a:txBody>
                         <a:bodyPr/>
@@ -11823,19 +14058,6 @@
                         <a:bodyPr/>
                         <a:lstStyle/>
                         <a:p>
-                          <a:r>
-                            <a:rPr lang="nl-BE" sz="2800" dirty="0"/>
-                            <a:t>3.1G</a:t>
-                          </a:r>
-                        </a:p>
-                      </a:txBody>
-                      <a:tcPr/>
-                    </a:tc>
-                    <a:tc>
-                      <a:txBody>
-                        <a:bodyPr/>
-                        <a:lstStyle/>
-                        <a:p>
                           <a:pPr>
                             <a:lnSpc>
                               <a:spcPct val="115000"/>
@@ -11880,10 +14102,10 @@
                             <m:oMathPara xmlns:m="http://schemas.openxmlformats.org/officeDocument/2006/math">
                               <m:oMath>
                                 <m:r>
-                                  <a:rPr lang="nl-BE" sz="3200" i="1" dirty="0" smtClean="0">
+                                  <a:rPr lang="en-GB" sz="3200" b="0" i="1" smtClean="0">
                                     <a:latin typeface="Cambria Math" panose="02040503050406030204" pitchFamily="18" charset="0"/>
                                   </a:rPr>
-                                  <m:t>/</m:t>
+                                  <m:t>−∞</m:t>
                                 </m:r>
                               </m:oMath>
                             </m:oMathPara>
@@ -12090,7 +14312,7 @@
             </a:graphic>
           </p:graphicFrame>
         </mc:Choice>
-        <mc:Fallback>
+        <mc:Fallback xmlns="">
           <p:graphicFrame>
             <p:nvGraphicFramePr>
               <p:cNvPr id="4" name="Tabel 3">
@@ -12106,14 +14328,14 @@
               <p:nvPr>
                 <p:extLst>
                   <p:ext uri="{D42A27DB-BD31-4B8C-83A1-F6EECF244321}">
-                    <p14:modId xmlns:p14="http://schemas.microsoft.com/office/powerpoint/2010/main" val="3130092020"/>
+                    <p14:modId xmlns:p14="http://schemas.microsoft.com/office/powerpoint/2010/main" val="425527192"/>
                   </p:ext>
                 </p:extLst>
               </p:nvPr>
             </p:nvGraphicFramePr>
             <p:xfrm>
-              <a:off x="406402" y="4632960"/>
-              <a:ext cx="11379195" cy="1866900"/>
+              <a:off x="914401" y="4785360"/>
+              <a:ext cx="10363197" cy="1866900"/>
             </p:xfrm>
             <a:graphic>
               <a:graphicData uri="http://schemas.openxmlformats.org/drawingml/2006/table">
@@ -12122,13 +14344,6 @@
                     <a:tableStyleId>{5C22544A-7EE6-4342-B048-85BDC9FD1C3A}</a:tableStyleId>
                   </a:tblPr>
                   <a:tblGrid>
-                    <a:gridCol w="1015998">
-                      <a:extLst>
-                        <a:ext uri="{9D8B030D-6E8A-4147-A177-3AD203B41FA5}">
-                          <a16:colId xmlns:a16="http://schemas.microsoft.com/office/drawing/2014/main" val="1902359932"/>
-                        </a:ext>
-                      </a:extLst>
-                    </a:gridCol>
                     <a:gridCol w="1512712">
                       <a:extLst>
                         <a:ext uri="{9D8B030D-6E8A-4147-A177-3AD203B41FA5}">
@@ -12187,16 +14402,6 @@
                     </a:gridCol>
                   </a:tblGrid>
                   <a:tr h="933450">
-                    <a:tc>
-                      <a:txBody>
-                        <a:bodyPr/>
-                        <a:lstStyle/>
-                        <a:p>
-                          <a:endParaRPr lang="nl-BE" dirty="0"/>
-                        </a:p>
-                      </a:txBody>
-                      <a:tcPr/>
-                    </a:tc>
                     <a:tc>
                       <a:txBody>
                         <a:bodyPr/>
@@ -12329,19 +14534,6 @@
                         <a:bodyPr/>
                         <a:lstStyle/>
                         <a:p>
-                          <a:r>
-                            <a:rPr lang="nl-BE" sz="2800" dirty="0"/>
-                            <a:t>3.1G</a:t>
-                          </a:r>
-                        </a:p>
-                      </a:txBody>
-                      <a:tcPr/>
-                    </a:tc>
-                    <a:tc>
-                      <a:txBody>
-                        <a:bodyPr/>
-                        <a:lstStyle/>
-                        <a:p>
                           <a:endParaRPr lang="en-BE"/>
                         </a:p>
                       </a:txBody>
@@ -12349,7 +14541,7 @@
                         <a:blipFill>
                           <a:blip r:embed="rId3"/>
                           <a:stretch>
-                            <a:fillRect l="-67742" t="-105882" r="-587500" b="-1307"/>
+                            <a:fillRect l="-806" t="-105882" r="-587500" b="-1307"/>
                           </a:stretch>
                         </a:blipFill>
                       </a:tcPr>
@@ -12366,7 +14558,7 @@
                         <a:blipFill>
                           <a:blip r:embed="rId3"/>
                           <a:stretch>
-                            <a:fillRect l="-232402" t="-105882" r="-713966" b="-1307"/>
+                            <a:fillRect l="-139665" t="-105882" r="-713966" b="-1307"/>
                           </a:stretch>
                         </a:blipFill>
                       </a:tcPr>
@@ -12383,7 +14575,7 @@
                         <a:blipFill>
                           <a:blip r:embed="rId3"/>
                           <a:stretch>
-                            <a:fillRect l="-252119" t="-105882" r="-441525" b="-1307"/>
+                            <a:fillRect l="-181780" t="-105882" r="-441525" b="-1307"/>
                           </a:stretch>
                         </a:blipFill>
                       </a:tcPr>
@@ -12400,7 +14592,7 @@
                         <a:blipFill>
                           <a:blip r:embed="rId3"/>
                           <a:stretch>
-                            <a:fillRect l="-399519" t="-105882" r="-400962" b="-1307"/>
+                            <a:fillRect l="-321256" t="-105882" r="-403382" b="-1307"/>
                           </a:stretch>
                         </a:blipFill>
                       </a:tcPr>
@@ -12417,7 +14609,7 @@
                         <a:blipFill>
                           <a:blip r:embed="rId3"/>
                           <a:stretch>
-                            <a:fillRect l="-501932" t="-105882" r="-302899" b="-1307"/>
+                            <a:fillRect l="-419231" t="-105882" r="-301442" b="-1307"/>
                           </a:stretch>
                         </a:blipFill>
                       </a:tcPr>
@@ -12434,7 +14626,7 @@
                         <a:blipFill>
                           <a:blip r:embed="rId3"/>
                           <a:stretch>
-                            <a:fillRect l="-599038" t="-105882" r="-201442" b="-1307"/>
+                            <a:fillRect l="-521739" t="-105882" r="-202899" b="-1307"/>
                           </a:stretch>
                         </a:blipFill>
                       </a:tcPr>
@@ -12451,7 +14643,7 @@
                         <a:blipFill>
                           <a:blip r:embed="rId3"/>
                           <a:stretch>
-                            <a:fillRect l="-702415" t="-105882" r="-102415" b="-1307"/>
+                            <a:fillRect l="-618750" t="-105882" r="-101923" b="-1307"/>
                           </a:stretch>
                         </a:blipFill>
                       </a:tcPr>
@@ -12468,7 +14660,7 @@
                         <a:blipFill>
                           <a:blip r:embed="rId3"/>
                           <a:stretch>
-                            <a:fillRect l="-798558" t="-105882" r="-1923" b="-1307"/>
+                            <a:fillRect l="-722222" t="-105882" r="-2415" b="-1307"/>
                           </a:stretch>
                         </a:blipFill>
                       </a:tcPr>
@@ -12485,34 +14677,6 @@
           </p:graphicFrame>
         </mc:Fallback>
       </mc:AlternateContent>
-      <p:sp>
-        <p:nvSpPr>
-          <p:cNvPr id="5" name="Tijdelijke aanduiding voor voettekst 4">
-            <a:extLst>
-              <a:ext uri="{FF2B5EF4-FFF2-40B4-BE49-F238E27FC236}">
-                <a16:creationId xmlns:a16="http://schemas.microsoft.com/office/drawing/2014/main" id="{4A886FFA-7FA1-1F21-F896-EF45070E40BE}"/>
-              </a:ext>
-            </a:extLst>
-          </p:cNvPr>
-          <p:cNvSpPr>
-            <a:spLocks noGrp="1"/>
-          </p:cNvSpPr>
-          <p:nvPr>
-            <p:ph type="ftr" sz="quarter" idx="11"/>
-          </p:nvPr>
-        </p:nvSpPr>
-        <p:spPr/>
-        <p:txBody>
-          <a:bodyPr/>
-          <a:lstStyle/>
-          <a:p>
-            <a:r>
-              <a:rPr lang="en-GB"/>
-              <a:t>Oefenzittingen Analyse I - Jasper Visterin</a:t>
-            </a:r>
-          </a:p>
-        </p:txBody>
-      </p:sp>
     </p:spTree>
     <p:extLst>
       <p:ext uri="{BB962C8B-B14F-4D97-AF65-F5344CB8AC3E}">
@@ -12800,7 +14964,847 @@
 </p:sld>
 </file>
 
-<file path=ppt/slides/slide19.xml><?xml version="1.0" encoding="utf-8"?>
+<file path=ppt/slides/slide2.xml><?xml version="1.0" encoding="utf-8"?>
+<p:sld xmlns:a="http://schemas.openxmlformats.org/drawingml/2006/main" xmlns:r="http://schemas.openxmlformats.org/officeDocument/2006/relationships" xmlns:p="http://schemas.openxmlformats.org/presentationml/2006/main">
+  <p:cSld>
+    <p:spTree>
+      <p:nvGrpSpPr>
+        <p:cNvPr id="1" name=""/>
+        <p:cNvGrpSpPr/>
+        <p:nvPr/>
+      </p:nvGrpSpPr>
+      <p:grpSpPr>
+        <a:xfrm>
+          <a:off x="0" y="0"/>
+          <a:ext cx="0" cy="0"/>
+          <a:chOff x="0" y="0"/>
+          <a:chExt cx="0" cy="0"/>
+        </a:xfrm>
+      </p:grpSpPr>
+      <p:sp>
+        <p:nvSpPr>
+          <p:cNvPr id="2" name="Titel 1">
+            <a:extLst>
+              <a:ext uri="{FF2B5EF4-FFF2-40B4-BE49-F238E27FC236}">
+                <a16:creationId xmlns:a16="http://schemas.microsoft.com/office/drawing/2014/main" id="{E02FB0E5-F0A2-E3F5-71A0-8CC627A39557}"/>
+              </a:ext>
+            </a:extLst>
+          </p:cNvPr>
+          <p:cNvSpPr>
+            <a:spLocks noGrp="1"/>
+          </p:cNvSpPr>
+          <p:nvPr>
+            <p:ph type="title"/>
+          </p:nvPr>
+        </p:nvSpPr>
+        <p:spPr/>
+        <p:txBody>
+          <a:bodyPr/>
+          <a:lstStyle/>
+          <a:p>
+            <a:r>
+              <a:rPr lang="en-GB" dirty="0"/>
+              <a:t>(</a:t>
+            </a:r>
+            <a:r>
+              <a:rPr lang="en-GB" dirty="0" err="1"/>
+              <a:t>Strikt</a:t>
+            </a:r>
+            <a:r>
+              <a:rPr lang="en-GB" dirty="0"/>
+              <a:t>) </a:t>
+            </a:r>
+            <a:r>
+              <a:rPr lang="en-GB" dirty="0" err="1"/>
+              <a:t>Stijgende</a:t>
+            </a:r>
+            <a:r>
+              <a:rPr lang="en-GB" dirty="0"/>
+              <a:t> </a:t>
+            </a:r>
+            <a:r>
+              <a:rPr lang="en-GB" dirty="0" err="1"/>
+              <a:t>Rijen</a:t>
+            </a:r>
+            <a:endParaRPr lang="en-GB" dirty="0"/>
+          </a:p>
+        </p:txBody>
+      </p:sp>
+      <mc:AlternateContent xmlns:mc="http://schemas.openxmlformats.org/markup-compatibility/2006" xmlns:a14="http://schemas.microsoft.com/office/drawing/2010/main">
+        <mc:Choice Requires="a14">
+          <p:sp>
+            <p:nvSpPr>
+              <p:cNvPr id="3" name="Tijdelijke aanduiding voor inhoud 2">
+                <a:extLst>
+                  <a:ext uri="{FF2B5EF4-FFF2-40B4-BE49-F238E27FC236}">
+                    <a16:creationId xmlns:a16="http://schemas.microsoft.com/office/drawing/2014/main" id="{3520896E-5F2C-D486-D14B-00E6A40005C8}"/>
+                  </a:ext>
+                </a:extLst>
+              </p:cNvPr>
+              <p:cNvSpPr>
+                <a:spLocks noGrp="1"/>
+              </p:cNvSpPr>
+              <p:nvPr>
+                <p:ph idx="1"/>
+              </p:nvPr>
+            </p:nvSpPr>
+            <p:spPr/>
+            <p:txBody>
+              <a:bodyPr/>
+              <a:lstStyle/>
+              <a:p>
+                <a:r>
+                  <a:rPr lang="nl-BE" dirty="0"/>
+                  <a:t>Een rij</a:t>
+                </a:r>
+                <a:r>
+                  <a:rPr lang="nl-BE" b="1" dirty="0"/>
+                  <a:t> </a:t>
+                </a:r>
+                <a14:m>
+                  <m:oMath xmlns:m="http://schemas.openxmlformats.org/officeDocument/2006/math">
+                    <m:sSubSup>
+                      <m:sSubSupPr>
+                        <m:ctrlPr>
+                          <a:rPr lang="nl-BE" i="1">
+                            <a:latin typeface="Cambria Math" panose="02040503050406030204" pitchFamily="18" charset="0"/>
+                          </a:rPr>
+                        </m:ctrlPr>
+                      </m:sSubSupPr>
+                      <m:e>
+                        <m:d>
+                          <m:dPr>
+                            <m:begChr m:val="{"/>
+                            <m:endChr m:val="}"/>
+                            <m:ctrlPr>
+                              <a:rPr lang="nl-BE" i="1">
+                                <a:latin typeface="Cambria Math" panose="02040503050406030204" pitchFamily="18" charset="0"/>
+                              </a:rPr>
+                            </m:ctrlPr>
+                          </m:dPr>
+                          <m:e>
+                            <m:sSub>
+                              <m:sSubPr>
+                                <m:ctrlPr>
+                                  <a:rPr lang="nl-BE" i="1">
+                                    <a:latin typeface="Cambria Math" panose="02040503050406030204" pitchFamily="18" charset="0"/>
+                                  </a:rPr>
+                                </m:ctrlPr>
+                              </m:sSubPr>
+                              <m:e>
+                                <m:r>
+                                  <a:rPr lang="nl-BE" i="1">
+                                    <a:latin typeface="Cambria Math" panose="02040503050406030204" pitchFamily="18" charset="0"/>
+                                  </a:rPr>
+                                  <m:t>𝑢</m:t>
+                                </m:r>
+                              </m:e>
+                              <m:sub>
+                                <m:r>
+                                  <a:rPr lang="nl-BE" i="1">
+                                    <a:latin typeface="Cambria Math" panose="02040503050406030204" pitchFamily="18" charset="0"/>
+                                  </a:rPr>
+                                  <m:t>𝑛</m:t>
+                                </m:r>
+                              </m:sub>
+                            </m:sSub>
+                          </m:e>
+                        </m:d>
+                      </m:e>
+                      <m:sub>
+                        <m:r>
+                          <a:rPr lang="nl-BE" i="1">
+                            <a:latin typeface="Cambria Math" panose="02040503050406030204" pitchFamily="18" charset="0"/>
+                          </a:rPr>
+                          <m:t>𝑛</m:t>
+                        </m:r>
+                        <m:r>
+                          <a:rPr lang="nl-BE" i="1">
+                            <a:latin typeface="Cambria Math" panose="02040503050406030204" pitchFamily="18" charset="0"/>
+                          </a:rPr>
+                          <m:t>=1</m:t>
+                        </m:r>
+                      </m:sub>
+                      <m:sup>
+                        <m:r>
+                          <a:rPr lang="nl-BE" i="1">
+                            <a:latin typeface="Cambria Math" panose="02040503050406030204" pitchFamily="18" charset="0"/>
+                          </a:rPr>
+                          <m:t>∞</m:t>
+                        </m:r>
+                      </m:sup>
+                    </m:sSubSup>
+                  </m:oMath>
+                </a14:m>
+                <a:r>
+                  <a:rPr lang="nl-BE" dirty="0"/>
+                  <a:t> is een </a:t>
+                </a:r>
+                <a:r>
+                  <a:rPr lang="nl-BE" b="1" dirty="0"/>
+                  <a:t>stijgende</a:t>
+                </a:r>
+                <a:r>
+                  <a:rPr lang="nl-BE" dirty="0"/>
+                  <a:t> rij als</a:t>
+                </a:r>
+              </a:p>
+              <a:p>
+                <a:endParaRPr lang="nl-BE" dirty="0"/>
+              </a:p>
+              <a:p>
+                <a:pPr marL="0" indent="0">
+                  <a:buNone/>
+                </a:pPr>
+                <a14:m>
+                  <m:oMathPara xmlns:m="http://schemas.openxmlformats.org/officeDocument/2006/math">
+                    <m:oMath>
+                      <m:sSub>
+                        <m:sSubPr>
+                          <m:ctrlPr>
+                            <a:rPr lang="nl-BE" i="1">
+                              <a:latin typeface="Cambria Math" panose="02040503050406030204" pitchFamily="18" charset="0"/>
+                            </a:rPr>
+                          </m:ctrlPr>
+                        </m:sSubPr>
+                        <m:e>
+                          <m:r>
+                            <a:rPr lang="nl-BE" i="1">
+                              <a:latin typeface="Cambria Math" panose="02040503050406030204" pitchFamily="18" charset="0"/>
+                            </a:rPr>
+                            <m:t>𝑢</m:t>
+                          </m:r>
+                        </m:e>
+                        <m:sub>
+                          <m:r>
+                            <a:rPr lang="nl-BE" i="1">
+                              <a:latin typeface="Cambria Math" panose="02040503050406030204" pitchFamily="18" charset="0"/>
+                            </a:rPr>
+                            <m:t>𝑛</m:t>
+                          </m:r>
+                        </m:sub>
+                      </m:sSub>
+                      <m:r>
+                        <a:rPr lang="nl-BE" i="1">
+                          <a:latin typeface="Cambria Math" panose="02040503050406030204" pitchFamily="18" charset="0"/>
+                        </a:rPr>
+                        <m:t>≤</m:t>
+                      </m:r>
+                      <m:sSub>
+                        <m:sSubPr>
+                          <m:ctrlPr>
+                            <a:rPr lang="nl-BE" i="1">
+                              <a:latin typeface="Cambria Math" panose="02040503050406030204" pitchFamily="18" charset="0"/>
+                            </a:rPr>
+                          </m:ctrlPr>
+                        </m:sSubPr>
+                        <m:e>
+                          <m:r>
+                            <a:rPr lang="nl-BE" i="1">
+                              <a:latin typeface="Cambria Math" panose="02040503050406030204" pitchFamily="18" charset="0"/>
+                            </a:rPr>
+                            <m:t>𝑢</m:t>
+                          </m:r>
+                        </m:e>
+                        <m:sub>
+                          <m:r>
+                            <a:rPr lang="nl-BE" i="1">
+                              <a:latin typeface="Cambria Math" panose="02040503050406030204" pitchFamily="18" charset="0"/>
+                            </a:rPr>
+                            <m:t>𝑛</m:t>
+                          </m:r>
+                          <m:r>
+                            <a:rPr lang="nl-BE" i="1">
+                              <a:latin typeface="Cambria Math" panose="02040503050406030204" pitchFamily="18" charset="0"/>
+                            </a:rPr>
+                            <m:t>+1</m:t>
+                          </m:r>
+                        </m:sub>
+                      </m:sSub>
+                      <m:r>
+                        <a:rPr lang="nl-BE" i="1">
+                          <a:latin typeface="Cambria Math" panose="02040503050406030204" pitchFamily="18" charset="0"/>
+                        </a:rPr>
+                        <m:t>,  ∀</m:t>
+                      </m:r>
+                      <m:r>
+                        <a:rPr lang="nl-BE" i="1">
+                          <a:latin typeface="Cambria Math" panose="02040503050406030204" pitchFamily="18" charset="0"/>
+                        </a:rPr>
+                        <m:t>𝑛</m:t>
+                      </m:r>
+                      <m:r>
+                        <a:rPr lang="nl-BE" i="1">
+                          <a:latin typeface="Cambria Math" panose="02040503050406030204" pitchFamily="18" charset="0"/>
+                        </a:rPr>
+                        <m:t>∈</m:t>
+                      </m:r>
+                      <m:sSub>
+                        <m:sSubPr>
+                          <m:ctrlPr>
+                            <a:rPr lang="nl-BE" i="1">
+                              <a:latin typeface="Cambria Math" panose="02040503050406030204" pitchFamily="18" charset="0"/>
+                            </a:rPr>
+                          </m:ctrlPr>
+                        </m:sSubPr>
+                        <m:e>
+                          <m:r>
+                            <a:rPr lang="nl-BE" i="1">
+                              <a:latin typeface="Cambria Math" panose="02040503050406030204" pitchFamily="18" charset="0"/>
+                            </a:rPr>
+                            <m:t>ℤ</m:t>
+                          </m:r>
+                        </m:e>
+                        <m:sub>
+                          <m:r>
+                            <a:rPr lang="nl-BE" i="1">
+                              <a:latin typeface="Cambria Math" panose="02040503050406030204" pitchFamily="18" charset="0"/>
+                            </a:rPr>
+                            <m:t>≥1</m:t>
+                          </m:r>
+                        </m:sub>
+                      </m:sSub>
+                    </m:oMath>
+                  </m:oMathPara>
+                </a14:m>
+                <a:endParaRPr lang="nl-BE" dirty="0"/>
+              </a:p>
+              <a:p>
+                <a:endParaRPr lang="nl-BE" dirty="0"/>
+              </a:p>
+              <a:p>
+                <a:r>
+                  <a:rPr lang="nl-BE" dirty="0"/>
+                  <a:t>Een rij </a:t>
+                </a:r>
+                <a14:m>
+                  <m:oMath xmlns:m="http://schemas.openxmlformats.org/officeDocument/2006/math">
+                    <m:sSubSup>
+                      <m:sSubSupPr>
+                        <m:ctrlPr>
+                          <a:rPr lang="nl-BE" i="1">
+                            <a:latin typeface="Cambria Math" panose="02040503050406030204" pitchFamily="18" charset="0"/>
+                          </a:rPr>
+                        </m:ctrlPr>
+                      </m:sSubSupPr>
+                      <m:e>
+                        <m:d>
+                          <m:dPr>
+                            <m:begChr m:val="{"/>
+                            <m:endChr m:val="}"/>
+                            <m:ctrlPr>
+                              <a:rPr lang="nl-BE" i="1">
+                                <a:latin typeface="Cambria Math" panose="02040503050406030204" pitchFamily="18" charset="0"/>
+                              </a:rPr>
+                            </m:ctrlPr>
+                          </m:dPr>
+                          <m:e>
+                            <m:sSub>
+                              <m:sSubPr>
+                                <m:ctrlPr>
+                                  <a:rPr lang="nl-BE" i="1">
+                                    <a:latin typeface="Cambria Math" panose="02040503050406030204" pitchFamily="18" charset="0"/>
+                                  </a:rPr>
+                                </m:ctrlPr>
+                              </m:sSubPr>
+                              <m:e>
+                                <m:r>
+                                  <a:rPr lang="nl-BE" i="1">
+                                    <a:latin typeface="Cambria Math" panose="02040503050406030204" pitchFamily="18" charset="0"/>
+                                  </a:rPr>
+                                  <m:t>𝑢</m:t>
+                                </m:r>
+                              </m:e>
+                              <m:sub>
+                                <m:r>
+                                  <a:rPr lang="nl-BE" i="1">
+                                    <a:latin typeface="Cambria Math" panose="02040503050406030204" pitchFamily="18" charset="0"/>
+                                  </a:rPr>
+                                  <m:t>𝑛</m:t>
+                                </m:r>
+                              </m:sub>
+                            </m:sSub>
+                          </m:e>
+                        </m:d>
+                      </m:e>
+                      <m:sub>
+                        <m:r>
+                          <a:rPr lang="nl-BE" i="1">
+                            <a:latin typeface="Cambria Math" panose="02040503050406030204" pitchFamily="18" charset="0"/>
+                          </a:rPr>
+                          <m:t>𝑛</m:t>
+                        </m:r>
+                        <m:r>
+                          <a:rPr lang="nl-BE" i="1">
+                            <a:latin typeface="Cambria Math" panose="02040503050406030204" pitchFamily="18" charset="0"/>
+                          </a:rPr>
+                          <m:t>=1</m:t>
+                        </m:r>
+                      </m:sub>
+                      <m:sup>
+                        <m:r>
+                          <a:rPr lang="nl-BE" i="1">
+                            <a:latin typeface="Cambria Math" panose="02040503050406030204" pitchFamily="18" charset="0"/>
+                          </a:rPr>
+                          <m:t>∞</m:t>
+                        </m:r>
+                      </m:sup>
+                    </m:sSubSup>
+                  </m:oMath>
+                </a14:m>
+                <a:r>
+                  <a:rPr lang="nl-BE" dirty="0"/>
+                  <a:t> is een </a:t>
+                </a:r>
+                <a:r>
+                  <a:rPr lang="nl-BE" b="1" dirty="0"/>
+                  <a:t>strikt stijgende rij</a:t>
+                </a:r>
+                <a:r>
+                  <a:rPr lang="nl-BE" dirty="0"/>
+                  <a:t> als</a:t>
+                </a:r>
+              </a:p>
+              <a:p>
+                <a:endParaRPr lang="nl-BE" dirty="0"/>
+              </a:p>
+              <a:p>
+                <a:pPr marL="0" indent="0">
+                  <a:buNone/>
+                </a:pPr>
+                <a14:m>
+                  <m:oMathPara xmlns:m="http://schemas.openxmlformats.org/officeDocument/2006/math">
+                    <m:oMath>
+                      <m:sSub>
+                        <m:sSubPr>
+                          <m:ctrlPr>
+                            <a:rPr lang="nl-BE" i="1">
+                              <a:latin typeface="Cambria Math" panose="02040503050406030204" pitchFamily="18" charset="0"/>
+                            </a:rPr>
+                          </m:ctrlPr>
+                        </m:sSubPr>
+                        <m:e>
+                          <m:r>
+                            <a:rPr lang="nl-BE" i="1">
+                              <a:latin typeface="Cambria Math" panose="02040503050406030204" pitchFamily="18" charset="0"/>
+                            </a:rPr>
+                            <m:t>𝑢</m:t>
+                          </m:r>
+                        </m:e>
+                        <m:sub>
+                          <m:r>
+                            <a:rPr lang="nl-BE" i="1">
+                              <a:latin typeface="Cambria Math" panose="02040503050406030204" pitchFamily="18" charset="0"/>
+                            </a:rPr>
+                            <m:t>𝑛</m:t>
+                          </m:r>
+                        </m:sub>
+                      </m:sSub>
+                      <m:r>
+                        <a:rPr lang="nl-BE" i="1">
+                          <a:latin typeface="Cambria Math" panose="02040503050406030204" pitchFamily="18" charset="0"/>
+                        </a:rPr>
+                        <m:t>&lt;</m:t>
+                      </m:r>
+                      <m:sSub>
+                        <m:sSubPr>
+                          <m:ctrlPr>
+                            <a:rPr lang="nl-BE" i="1">
+                              <a:latin typeface="Cambria Math" panose="02040503050406030204" pitchFamily="18" charset="0"/>
+                            </a:rPr>
+                          </m:ctrlPr>
+                        </m:sSubPr>
+                        <m:e>
+                          <m:r>
+                            <a:rPr lang="nl-BE" i="1">
+                              <a:latin typeface="Cambria Math" panose="02040503050406030204" pitchFamily="18" charset="0"/>
+                            </a:rPr>
+                            <m:t>𝑢</m:t>
+                          </m:r>
+                        </m:e>
+                        <m:sub>
+                          <m:r>
+                            <a:rPr lang="nl-BE" i="1">
+                              <a:latin typeface="Cambria Math" panose="02040503050406030204" pitchFamily="18" charset="0"/>
+                            </a:rPr>
+                            <m:t>𝑛</m:t>
+                          </m:r>
+                          <m:r>
+                            <a:rPr lang="nl-BE" i="1">
+                              <a:latin typeface="Cambria Math" panose="02040503050406030204" pitchFamily="18" charset="0"/>
+                            </a:rPr>
+                            <m:t>+1</m:t>
+                          </m:r>
+                        </m:sub>
+                      </m:sSub>
+                      <m:r>
+                        <a:rPr lang="nl-BE" i="1">
+                          <a:latin typeface="Cambria Math" panose="02040503050406030204" pitchFamily="18" charset="0"/>
+                        </a:rPr>
+                        <m:t>,  ∀</m:t>
+                      </m:r>
+                      <m:r>
+                        <a:rPr lang="nl-BE" i="1">
+                          <a:latin typeface="Cambria Math" panose="02040503050406030204" pitchFamily="18" charset="0"/>
+                        </a:rPr>
+                        <m:t>𝑛</m:t>
+                      </m:r>
+                      <m:r>
+                        <a:rPr lang="nl-BE" i="1">
+                          <a:latin typeface="Cambria Math" panose="02040503050406030204" pitchFamily="18" charset="0"/>
+                        </a:rPr>
+                        <m:t>∈</m:t>
+                      </m:r>
+                      <m:sSub>
+                        <m:sSubPr>
+                          <m:ctrlPr>
+                            <a:rPr lang="nl-BE" i="1">
+                              <a:latin typeface="Cambria Math" panose="02040503050406030204" pitchFamily="18" charset="0"/>
+                            </a:rPr>
+                          </m:ctrlPr>
+                        </m:sSubPr>
+                        <m:e>
+                          <m:r>
+                            <a:rPr lang="nl-BE" i="1">
+                              <a:latin typeface="Cambria Math" panose="02040503050406030204" pitchFamily="18" charset="0"/>
+                            </a:rPr>
+                            <m:t>ℤ</m:t>
+                          </m:r>
+                        </m:e>
+                        <m:sub>
+                          <m:r>
+                            <a:rPr lang="nl-BE" i="1">
+                              <a:latin typeface="Cambria Math" panose="02040503050406030204" pitchFamily="18" charset="0"/>
+                            </a:rPr>
+                            <m:t>≥1</m:t>
+                          </m:r>
+                        </m:sub>
+                      </m:sSub>
+                    </m:oMath>
+                  </m:oMathPara>
+                </a14:m>
+                <a:endParaRPr lang="nl-BE" dirty="0"/>
+              </a:p>
+              <a:p>
+                <a:endParaRPr lang="nl-BE" dirty="0"/>
+              </a:p>
+              <a:p>
+                <a:endParaRPr lang="en-GB" dirty="0"/>
+              </a:p>
+            </p:txBody>
+          </p:sp>
+        </mc:Choice>
+        <mc:Fallback xmlns="">
+          <p:sp>
+            <p:nvSpPr>
+              <p:cNvPr id="3" name="Tijdelijke aanduiding voor inhoud 2">
+                <a:extLst>
+                  <a:ext uri="{FF2B5EF4-FFF2-40B4-BE49-F238E27FC236}">
+                    <a16:creationId xmlns:a16="http://schemas.microsoft.com/office/drawing/2014/main" id="{3520896E-5F2C-D486-D14B-00E6A40005C8}"/>
+                  </a:ext>
+                </a:extLst>
+              </p:cNvPr>
+              <p:cNvSpPr>
+                <a:spLocks noGrp="1" noRot="1" noChangeAspect="1" noMove="1" noResize="1" noEditPoints="1" noAdjustHandles="1" noChangeArrowheads="1" noChangeShapeType="1" noTextEdit="1"/>
+              </p:cNvSpPr>
+              <p:nvPr>
+                <p:ph idx="1"/>
+              </p:nvPr>
+            </p:nvSpPr>
+            <p:spPr>
+              <a:blipFill>
+                <a:blip r:embed="rId2"/>
+                <a:stretch>
+                  <a:fillRect l="-1043" t="-2381"/>
+                </a:stretch>
+              </a:blipFill>
+            </p:spPr>
+            <p:txBody>
+              <a:bodyPr/>
+              <a:lstStyle/>
+              <a:p>
+                <a:r>
+                  <a:rPr lang="nl-BE">
+                    <a:noFill/>
+                  </a:rPr>
+                  <a:t> </a:t>
+                </a:r>
+              </a:p>
+            </p:txBody>
+          </p:sp>
+        </mc:Fallback>
+      </mc:AlternateContent>
+      <p:sp>
+        <p:nvSpPr>
+          <p:cNvPr id="4" name="Tijdelijke aanduiding voor voettekst 3">
+            <a:extLst>
+              <a:ext uri="{FF2B5EF4-FFF2-40B4-BE49-F238E27FC236}">
+                <a16:creationId xmlns:a16="http://schemas.microsoft.com/office/drawing/2014/main" id="{63BE5DC3-02C5-2E42-26DF-9D9CC42C3F87}"/>
+              </a:ext>
+            </a:extLst>
+          </p:cNvPr>
+          <p:cNvSpPr>
+            <a:spLocks noGrp="1"/>
+          </p:cNvSpPr>
+          <p:nvPr>
+            <p:ph type="ftr" sz="quarter" idx="11"/>
+          </p:nvPr>
+        </p:nvSpPr>
+        <p:spPr/>
+        <p:txBody>
+          <a:bodyPr/>
+          <a:lstStyle/>
+          <a:p>
+            <a:r>
+              <a:rPr lang="en-GB"/>
+              <a:t>Oefenzittingen Analyse I - Jasper Visterin</a:t>
+            </a:r>
+          </a:p>
+        </p:txBody>
+      </p:sp>
+    </p:spTree>
+    <p:extLst>
+      <p:ext uri="{BB962C8B-B14F-4D97-AF65-F5344CB8AC3E}">
+        <p14:creationId xmlns:p14="http://schemas.microsoft.com/office/powerpoint/2010/main" val="3020939052"/>
+      </p:ext>
+    </p:extLst>
+  </p:cSld>
+  <p:clrMapOvr>
+    <a:masterClrMapping/>
+  </p:clrMapOvr>
+  <p:timing>
+    <p:tnLst>
+      <p:par>
+        <p:cTn id="1" dur="indefinite" restart="never" nodeType="tmRoot">
+          <p:childTnLst>
+            <p:seq concurrent="1" nextAc="seek">
+              <p:cTn id="2" dur="indefinite" nodeType="mainSeq">
+                <p:childTnLst>
+                  <p:par>
+                    <p:cTn id="3" fill="hold">
+                      <p:stCondLst>
+                        <p:cond delay="indefinite"/>
+                      </p:stCondLst>
+                      <p:childTnLst>
+                        <p:par>
+                          <p:cTn id="4" fill="hold">
+                            <p:stCondLst>
+                              <p:cond delay="0"/>
+                            </p:stCondLst>
+                            <p:childTnLst>
+                              <p:par>
+                                <p:cTn id="5" presetID="1" presetClass="entr" presetSubtype="0" fill="hold" grpId="0" nodeType="clickEffect">
+                                  <p:stCondLst>
+                                    <p:cond delay="0"/>
+                                  </p:stCondLst>
+                                  <p:childTnLst>
+                                    <p:set>
+                                      <p:cBhvr>
+                                        <p:cTn id="6" dur="1" fill="hold">
+                                          <p:stCondLst>
+                                            <p:cond delay="0"/>
+                                          </p:stCondLst>
+                                        </p:cTn>
+                                        <p:tgtEl>
+                                          <p:spTgt spid="3">
+                                            <p:txEl>
+                                              <p:pRg st="0" end="0"/>
+                                            </p:txEl>
+                                          </p:spTgt>
+                                        </p:tgtEl>
+                                        <p:attrNameLst>
+                                          <p:attrName>style.visibility</p:attrName>
+                                        </p:attrNameLst>
+                                      </p:cBhvr>
+                                      <p:to>
+                                        <p:strVal val="visible"/>
+                                      </p:to>
+                                    </p:set>
+                                  </p:childTnLst>
+                                </p:cTn>
+                              </p:par>
+                            </p:childTnLst>
+                          </p:cTn>
+                        </p:par>
+                      </p:childTnLst>
+                    </p:cTn>
+                  </p:par>
+                  <p:par>
+                    <p:cTn id="7" fill="hold">
+                      <p:stCondLst>
+                        <p:cond delay="indefinite"/>
+                      </p:stCondLst>
+                      <p:childTnLst>
+                        <p:par>
+                          <p:cTn id="8" fill="hold">
+                            <p:stCondLst>
+                              <p:cond delay="0"/>
+                            </p:stCondLst>
+                            <p:childTnLst>
+                              <p:par>
+                                <p:cTn id="9" presetID="1" presetClass="entr" presetSubtype="0" fill="hold" grpId="0" nodeType="clickEffect">
+                                  <p:stCondLst>
+                                    <p:cond delay="0"/>
+                                  </p:stCondLst>
+                                  <p:childTnLst>
+                                    <p:set>
+                                      <p:cBhvr>
+                                        <p:cTn id="10" dur="1" fill="hold">
+                                          <p:stCondLst>
+                                            <p:cond delay="0"/>
+                                          </p:stCondLst>
+                                        </p:cTn>
+                                        <p:tgtEl>
+                                          <p:spTgt spid="3">
+                                            <p:txEl>
+                                              <p:pRg st="2" end="2"/>
+                                            </p:txEl>
+                                          </p:spTgt>
+                                        </p:tgtEl>
+                                        <p:attrNameLst>
+                                          <p:attrName>style.visibility</p:attrName>
+                                        </p:attrNameLst>
+                                      </p:cBhvr>
+                                      <p:to>
+                                        <p:strVal val="visible"/>
+                                      </p:to>
+                                    </p:set>
+                                  </p:childTnLst>
+                                </p:cTn>
+                              </p:par>
+                            </p:childTnLst>
+                          </p:cTn>
+                        </p:par>
+                      </p:childTnLst>
+                    </p:cTn>
+                  </p:par>
+                  <p:par>
+                    <p:cTn id="11" fill="hold">
+                      <p:stCondLst>
+                        <p:cond delay="indefinite"/>
+                      </p:stCondLst>
+                      <p:childTnLst>
+                        <p:par>
+                          <p:cTn id="12" fill="hold">
+                            <p:stCondLst>
+                              <p:cond delay="0"/>
+                            </p:stCondLst>
+                            <p:childTnLst>
+                              <p:par>
+                                <p:cTn id="13" presetID="1" presetClass="entr" presetSubtype="0" fill="hold" grpId="0" nodeType="clickEffect">
+                                  <p:stCondLst>
+                                    <p:cond delay="0"/>
+                                  </p:stCondLst>
+                                  <p:childTnLst>
+                                    <p:set>
+                                      <p:cBhvr>
+                                        <p:cTn id="14" dur="1" fill="hold">
+                                          <p:stCondLst>
+                                            <p:cond delay="0"/>
+                                          </p:stCondLst>
+                                        </p:cTn>
+                                        <p:tgtEl>
+                                          <p:spTgt spid="3">
+                                            <p:txEl>
+                                              <p:pRg st="4" end="4"/>
+                                            </p:txEl>
+                                          </p:spTgt>
+                                        </p:tgtEl>
+                                        <p:attrNameLst>
+                                          <p:attrName>style.visibility</p:attrName>
+                                        </p:attrNameLst>
+                                      </p:cBhvr>
+                                      <p:to>
+                                        <p:strVal val="visible"/>
+                                      </p:to>
+                                    </p:set>
+                                  </p:childTnLst>
+                                </p:cTn>
+                              </p:par>
+                            </p:childTnLst>
+                          </p:cTn>
+                        </p:par>
+                      </p:childTnLst>
+                    </p:cTn>
+                  </p:par>
+                  <p:par>
+                    <p:cTn id="15" fill="hold">
+                      <p:stCondLst>
+                        <p:cond delay="indefinite"/>
+                      </p:stCondLst>
+                      <p:childTnLst>
+                        <p:par>
+                          <p:cTn id="16" fill="hold">
+                            <p:stCondLst>
+                              <p:cond delay="0"/>
+                            </p:stCondLst>
+                            <p:childTnLst>
+                              <p:par>
+                                <p:cTn id="17" presetID="1" presetClass="entr" presetSubtype="0" fill="hold" grpId="0" nodeType="clickEffect">
+                                  <p:stCondLst>
+                                    <p:cond delay="0"/>
+                                  </p:stCondLst>
+                                  <p:childTnLst>
+                                    <p:set>
+                                      <p:cBhvr>
+                                        <p:cTn id="18" dur="1" fill="hold">
+                                          <p:stCondLst>
+                                            <p:cond delay="0"/>
+                                          </p:stCondLst>
+                                        </p:cTn>
+                                        <p:tgtEl>
+                                          <p:spTgt spid="3">
+                                            <p:txEl>
+                                              <p:pRg st="6" end="6"/>
+                                            </p:txEl>
+                                          </p:spTgt>
+                                        </p:tgtEl>
+                                        <p:attrNameLst>
+                                          <p:attrName>style.visibility</p:attrName>
+                                        </p:attrNameLst>
+                                      </p:cBhvr>
+                                      <p:to>
+                                        <p:strVal val="visible"/>
+                                      </p:to>
+                                    </p:set>
+                                  </p:childTnLst>
+                                </p:cTn>
+                              </p:par>
+                            </p:childTnLst>
+                          </p:cTn>
+                        </p:par>
+                      </p:childTnLst>
+                    </p:cTn>
+                  </p:par>
+                </p:childTnLst>
+              </p:cTn>
+              <p:prevCondLst>
+                <p:cond evt="onPrev" delay="0">
+                  <p:tgtEl>
+                    <p:sldTgt/>
+                  </p:tgtEl>
+                </p:cond>
+              </p:prevCondLst>
+              <p:nextCondLst>
+                <p:cond evt="onNext" delay="0">
+                  <p:tgtEl>
+                    <p:sldTgt/>
+                  </p:tgtEl>
+                </p:cond>
+              </p:nextCondLst>
+            </p:seq>
+          </p:childTnLst>
+        </p:cTn>
+      </p:par>
+    </p:tnLst>
+    <p:bldLst>
+      <p:bldP spid="3" grpId="0" build="p"/>
+    </p:bldLst>
+  </p:timing>
+</p:sld>
+</file>
+
+<file path=ppt/slides/slide20.xml><?xml version="1.0" encoding="utf-8"?>
 <p:sld xmlns:a="http://schemas.openxmlformats.org/drawingml/2006/main" xmlns:r="http://schemas.openxmlformats.org/officeDocument/2006/relationships" xmlns:p="http://schemas.openxmlformats.org/presentationml/2006/main">
   <p:cSld>
     <p:spTree>
@@ -12850,8 +15854,8 @@
           </a:p>
         </p:txBody>
       </p:sp>
-      <mc:AlternateContent xmlns:mc="http://schemas.openxmlformats.org/markup-compatibility/2006">
-        <mc:Choice xmlns:a14="http://schemas.microsoft.com/office/drawing/2010/main" Requires="a14">
+      <mc:AlternateContent xmlns:mc="http://schemas.openxmlformats.org/markup-compatibility/2006" xmlns:a14="http://schemas.microsoft.com/office/drawing/2010/main">
+        <mc:Choice Requires="a14">
           <p:sp>
             <p:nvSpPr>
               <p:cNvPr id="3" name="Tijdelijke aanduiding voor inhoud 2">
@@ -13351,7 +16355,7 @@
             </p:txBody>
           </p:sp>
         </mc:Choice>
-        <mc:Fallback>
+        <mc:Fallback xmlns="">
           <p:sp>
             <p:nvSpPr>
               <p:cNvPr id="3" name="Tijdelijke aanduiding voor inhoud 2">
@@ -14281,847 +17285,7 @@
 </p:sld>
 </file>
 
-<file path=ppt/slides/slide2.xml><?xml version="1.0" encoding="utf-8"?>
-<p:sld xmlns:a="http://schemas.openxmlformats.org/drawingml/2006/main" xmlns:r="http://schemas.openxmlformats.org/officeDocument/2006/relationships" xmlns:p="http://schemas.openxmlformats.org/presentationml/2006/main">
-  <p:cSld>
-    <p:spTree>
-      <p:nvGrpSpPr>
-        <p:cNvPr id="1" name=""/>
-        <p:cNvGrpSpPr/>
-        <p:nvPr/>
-      </p:nvGrpSpPr>
-      <p:grpSpPr>
-        <a:xfrm>
-          <a:off x="0" y="0"/>
-          <a:ext cx="0" cy="0"/>
-          <a:chOff x="0" y="0"/>
-          <a:chExt cx="0" cy="0"/>
-        </a:xfrm>
-      </p:grpSpPr>
-      <p:sp>
-        <p:nvSpPr>
-          <p:cNvPr id="2" name="Titel 1">
-            <a:extLst>
-              <a:ext uri="{FF2B5EF4-FFF2-40B4-BE49-F238E27FC236}">
-                <a16:creationId xmlns:a16="http://schemas.microsoft.com/office/drawing/2014/main" id="{E02FB0E5-F0A2-E3F5-71A0-8CC627A39557}"/>
-              </a:ext>
-            </a:extLst>
-          </p:cNvPr>
-          <p:cNvSpPr>
-            <a:spLocks noGrp="1"/>
-          </p:cNvSpPr>
-          <p:nvPr>
-            <p:ph type="title"/>
-          </p:nvPr>
-        </p:nvSpPr>
-        <p:spPr/>
-        <p:txBody>
-          <a:bodyPr/>
-          <a:lstStyle/>
-          <a:p>
-            <a:r>
-              <a:rPr lang="en-GB" dirty="0"/>
-              <a:t>(</a:t>
-            </a:r>
-            <a:r>
-              <a:rPr lang="en-GB" dirty="0" err="1"/>
-              <a:t>Strikt</a:t>
-            </a:r>
-            <a:r>
-              <a:rPr lang="en-GB" dirty="0"/>
-              <a:t>) </a:t>
-            </a:r>
-            <a:r>
-              <a:rPr lang="en-GB" dirty="0" err="1"/>
-              <a:t>Stijgende</a:t>
-            </a:r>
-            <a:r>
-              <a:rPr lang="en-GB" dirty="0"/>
-              <a:t> </a:t>
-            </a:r>
-            <a:r>
-              <a:rPr lang="en-GB" dirty="0" err="1"/>
-              <a:t>Rijen</a:t>
-            </a:r>
-            <a:endParaRPr lang="en-GB" dirty="0"/>
-          </a:p>
-        </p:txBody>
-      </p:sp>
-      <mc:AlternateContent xmlns:mc="http://schemas.openxmlformats.org/markup-compatibility/2006">
-        <mc:Choice xmlns:a14="http://schemas.microsoft.com/office/drawing/2010/main" Requires="a14">
-          <p:sp>
-            <p:nvSpPr>
-              <p:cNvPr id="3" name="Tijdelijke aanduiding voor inhoud 2">
-                <a:extLst>
-                  <a:ext uri="{FF2B5EF4-FFF2-40B4-BE49-F238E27FC236}">
-                    <a16:creationId xmlns:a16="http://schemas.microsoft.com/office/drawing/2014/main" id="{3520896E-5F2C-D486-D14B-00E6A40005C8}"/>
-                  </a:ext>
-                </a:extLst>
-              </p:cNvPr>
-              <p:cNvSpPr>
-                <a:spLocks noGrp="1"/>
-              </p:cNvSpPr>
-              <p:nvPr>
-                <p:ph idx="1"/>
-              </p:nvPr>
-            </p:nvSpPr>
-            <p:spPr/>
-            <p:txBody>
-              <a:bodyPr/>
-              <a:lstStyle/>
-              <a:p>
-                <a:r>
-                  <a:rPr lang="nl-BE" dirty="0"/>
-                  <a:t>Een rij</a:t>
-                </a:r>
-                <a:r>
-                  <a:rPr lang="nl-BE" b="1" dirty="0"/>
-                  <a:t> </a:t>
-                </a:r>
-                <a14:m>
-                  <m:oMath xmlns:m="http://schemas.openxmlformats.org/officeDocument/2006/math">
-                    <m:sSubSup>
-                      <m:sSubSupPr>
-                        <m:ctrlPr>
-                          <a:rPr lang="nl-BE" i="1">
-                            <a:latin typeface="Cambria Math" panose="02040503050406030204" pitchFamily="18" charset="0"/>
-                          </a:rPr>
-                        </m:ctrlPr>
-                      </m:sSubSupPr>
-                      <m:e>
-                        <m:d>
-                          <m:dPr>
-                            <m:begChr m:val="{"/>
-                            <m:endChr m:val="}"/>
-                            <m:ctrlPr>
-                              <a:rPr lang="nl-BE" i="1">
-                                <a:latin typeface="Cambria Math" panose="02040503050406030204" pitchFamily="18" charset="0"/>
-                              </a:rPr>
-                            </m:ctrlPr>
-                          </m:dPr>
-                          <m:e>
-                            <m:sSub>
-                              <m:sSubPr>
-                                <m:ctrlPr>
-                                  <a:rPr lang="nl-BE" i="1">
-                                    <a:latin typeface="Cambria Math" panose="02040503050406030204" pitchFamily="18" charset="0"/>
-                                  </a:rPr>
-                                </m:ctrlPr>
-                              </m:sSubPr>
-                              <m:e>
-                                <m:r>
-                                  <a:rPr lang="nl-BE" i="1">
-                                    <a:latin typeface="Cambria Math" panose="02040503050406030204" pitchFamily="18" charset="0"/>
-                                  </a:rPr>
-                                  <m:t>𝑢</m:t>
-                                </m:r>
-                              </m:e>
-                              <m:sub>
-                                <m:r>
-                                  <a:rPr lang="nl-BE" i="1">
-                                    <a:latin typeface="Cambria Math" panose="02040503050406030204" pitchFamily="18" charset="0"/>
-                                  </a:rPr>
-                                  <m:t>𝑛</m:t>
-                                </m:r>
-                              </m:sub>
-                            </m:sSub>
-                          </m:e>
-                        </m:d>
-                      </m:e>
-                      <m:sub>
-                        <m:r>
-                          <a:rPr lang="nl-BE" i="1">
-                            <a:latin typeface="Cambria Math" panose="02040503050406030204" pitchFamily="18" charset="0"/>
-                          </a:rPr>
-                          <m:t>𝑛</m:t>
-                        </m:r>
-                        <m:r>
-                          <a:rPr lang="nl-BE" i="1">
-                            <a:latin typeface="Cambria Math" panose="02040503050406030204" pitchFamily="18" charset="0"/>
-                          </a:rPr>
-                          <m:t>=1</m:t>
-                        </m:r>
-                      </m:sub>
-                      <m:sup>
-                        <m:r>
-                          <a:rPr lang="nl-BE" i="1">
-                            <a:latin typeface="Cambria Math" panose="02040503050406030204" pitchFamily="18" charset="0"/>
-                          </a:rPr>
-                          <m:t>∞</m:t>
-                        </m:r>
-                      </m:sup>
-                    </m:sSubSup>
-                  </m:oMath>
-                </a14:m>
-                <a:r>
-                  <a:rPr lang="nl-BE" dirty="0"/>
-                  <a:t> is een </a:t>
-                </a:r>
-                <a:r>
-                  <a:rPr lang="nl-BE" b="1" dirty="0"/>
-                  <a:t>stijgende</a:t>
-                </a:r>
-                <a:r>
-                  <a:rPr lang="nl-BE" dirty="0"/>
-                  <a:t> rij als</a:t>
-                </a:r>
-              </a:p>
-              <a:p>
-                <a:endParaRPr lang="nl-BE" dirty="0"/>
-              </a:p>
-              <a:p>
-                <a:pPr marL="0" indent="0">
-                  <a:buNone/>
-                </a:pPr>
-                <a14:m>
-                  <m:oMathPara xmlns:m="http://schemas.openxmlformats.org/officeDocument/2006/math">
-                    <m:oMath>
-                      <m:sSub>
-                        <m:sSubPr>
-                          <m:ctrlPr>
-                            <a:rPr lang="nl-BE" i="1">
-                              <a:latin typeface="Cambria Math" panose="02040503050406030204" pitchFamily="18" charset="0"/>
-                            </a:rPr>
-                          </m:ctrlPr>
-                        </m:sSubPr>
-                        <m:e>
-                          <m:r>
-                            <a:rPr lang="nl-BE" i="1">
-                              <a:latin typeface="Cambria Math" panose="02040503050406030204" pitchFamily="18" charset="0"/>
-                            </a:rPr>
-                            <m:t>𝑢</m:t>
-                          </m:r>
-                        </m:e>
-                        <m:sub>
-                          <m:r>
-                            <a:rPr lang="nl-BE" i="1">
-                              <a:latin typeface="Cambria Math" panose="02040503050406030204" pitchFamily="18" charset="0"/>
-                            </a:rPr>
-                            <m:t>𝑛</m:t>
-                          </m:r>
-                        </m:sub>
-                      </m:sSub>
-                      <m:r>
-                        <a:rPr lang="nl-BE" i="1">
-                          <a:latin typeface="Cambria Math" panose="02040503050406030204" pitchFamily="18" charset="0"/>
-                        </a:rPr>
-                        <m:t>≤</m:t>
-                      </m:r>
-                      <m:sSub>
-                        <m:sSubPr>
-                          <m:ctrlPr>
-                            <a:rPr lang="nl-BE" i="1">
-                              <a:latin typeface="Cambria Math" panose="02040503050406030204" pitchFamily="18" charset="0"/>
-                            </a:rPr>
-                          </m:ctrlPr>
-                        </m:sSubPr>
-                        <m:e>
-                          <m:r>
-                            <a:rPr lang="nl-BE" i="1">
-                              <a:latin typeface="Cambria Math" panose="02040503050406030204" pitchFamily="18" charset="0"/>
-                            </a:rPr>
-                            <m:t>𝑢</m:t>
-                          </m:r>
-                        </m:e>
-                        <m:sub>
-                          <m:r>
-                            <a:rPr lang="nl-BE" i="1">
-                              <a:latin typeface="Cambria Math" panose="02040503050406030204" pitchFamily="18" charset="0"/>
-                            </a:rPr>
-                            <m:t>𝑛</m:t>
-                          </m:r>
-                          <m:r>
-                            <a:rPr lang="nl-BE" i="1">
-                              <a:latin typeface="Cambria Math" panose="02040503050406030204" pitchFamily="18" charset="0"/>
-                            </a:rPr>
-                            <m:t>+1</m:t>
-                          </m:r>
-                        </m:sub>
-                      </m:sSub>
-                      <m:r>
-                        <a:rPr lang="nl-BE" i="1">
-                          <a:latin typeface="Cambria Math" panose="02040503050406030204" pitchFamily="18" charset="0"/>
-                        </a:rPr>
-                        <m:t>,  ∀</m:t>
-                      </m:r>
-                      <m:r>
-                        <a:rPr lang="nl-BE" i="1">
-                          <a:latin typeface="Cambria Math" panose="02040503050406030204" pitchFamily="18" charset="0"/>
-                        </a:rPr>
-                        <m:t>𝑛</m:t>
-                      </m:r>
-                      <m:r>
-                        <a:rPr lang="nl-BE" i="1">
-                          <a:latin typeface="Cambria Math" panose="02040503050406030204" pitchFamily="18" charset="0"/>
-                        </a:rPr>
-                        <m:t>∈</m:t>
-                      </m:r>
-                      <m:sSub>
-                        <m:sSubPr>
-                          <m:ctrlPr>
-                            <a:rPr lang="nl-BE" i="1">
-                              <a:latin typeface="Cambria Math" panose="02040503050406030204" pitchFamily="18" charset="0"/>
-                            </a:rPr>
-                          </m:ctrlPr>
-                        </m:sSubPr>
-                        <m:e>
-                          <m:r>
-                            <a:rPr lang="nl-BE" i="1">
-                              <a:latin typeface="Cambria Math" panose="02040503050406030204" pitchFamily="18" charset="0"/>
-                            </a:rPr>
-                            <m:t>ℤ</m:t>
-                          </m:r>
-                        </m:e>
-                        <m:sub>
-                          <m:r>
-                            <a:rPr lang="nl-BE" i="1">
-                              <a:latin typeface="Cambria Math" panose="02040503050406030204" pitchFamily="18" charset="0"/>
-                            </a:rPr>
-                            <m:t>≥1</m:t>
-                          </m:r>
-                        </m:sub>
-                      </m:sSub>
-                    </m:oMath>
-                  </m:oMathPara>
-                </a14:m>
-                <a:endParaRPr lang="nl-BE" dirty="0"/>
-              </a:p>
-              <a:p>
-                <a:endParaRPr lang="nl-BE" dirty="0"/>
-              </a:p>
-              <a:p>
-                <a:r>
-                  <a:rPr lang="nl-BE" dirty="0"/>
-                  <a:t>Een rij </a:t>
-                </a:r>
-                <a14:m>
-                  <m:oMath xmlns:m="http://schemas.openxmlformats.org/officeDocument/2006/math">
-                    <m:sSubSup>
-                      <m:sSubSupPr>
-                        <m:ctrlPr>
-                          <a:rPr lang="nl-BE" i="1">
-                            <a:latin typeface="Cambria Math" panose="02040503050406030204" pitchFamily="18" charset="0"/>
-                          </a:rPr>
-                        </m:ctrlPr>
-                      </m:sSubSupPr>
-                      <m:e>
-                        <m:d>
-                          <m:dPr>
-                            <m:begChr m:val="{"/>
-                            <m:endChr m:val="}"/>
-                            <m:ctrlPr>
-                              <a:rPr lang="nl-BE" i="1">
-                                <a:latin typeface="Cambria Math" panose="02040503050406030204" pitchFamily="18" charset="0"/>
-                              </a:rPr>
-                            </m:ctrlPr>
-                          </m:dPr>
-                          <m:e>
-                            <m:sSub>
-                              <m:sSubPr>
-                                <m:ctrlPr>
-                                  <a:rPr lang="nl-BE" i="1">
-                                    <a:latin typeface="Cambria Math" panose="02040503050406030204" pitchFamily="18" charset="0"/>
-                                  </a:rPr>
-                                </m:ctrlPr>
-                              </m:sSubPr>
-                              <m:e>
-                                <m:r>
-                                  <a:rPr lang="nl-BE" i="1">
-                                    <a:latin typeface="Cambria Math" panose="02040503050406030204" pitchFamily="18" charset="0"/>
-                                  </a:rPr>
-                                  <m:t>𝑢</m:t>
-                                </m:r>
-                              </m:e>
-                              <m:sub>
-                                <m:r>
-                                  <a:rPr lang="nl-BE" i="1">
-                                    <a:latin typeface="Cambria Math" panose="02040503050406030204" pitchFamily="18" charset="0"/>
-                                  </a:rPr>
-                                  <m:t>𝑛</m:t>
-                                </m:r>
-                              </m:sub>
-                            </m:sSub>
-                          </m:e>
-                        </m:d>
-                      </m:e>
-                      <m:sub>
-                        <m:r>
-                          <a:rPr lang="nl-BE" i="1">
-                            <a:latin typeface="Cambria Math" panose="02040503050406030204" pitchFamily="18" charset="0"/>
-                          </a:rPr>
-                          <m:t>𝑛</m:t>
-                        </m:r>
-                        <m:r>
-                          <a:rPr lang="nl-BE" i="1">
-                            <a:latin typeface="Cambria Math" panose="02040503050406030204" pitchFamily="18" charset="0"/>
-                          </a:rPr>
-                          <m:t>=1</m:t>
-                        </m:r>
-                      </m:sub>
-                      <m:sup>
-                        <m:r>
-                          <a:rPr lang="nl-BE" i="1">
-                            <a:latin typeface="Cambria Math" panose="02040503050406030204" pitchFamily="18" charset="0"/>
-                          </a:rPr>
-                          <m:t>∞</m:t>
-                        </m:r>
-                      </m:sup>
-                    </m:sSubSup>
-                  </m:oMath>
-                </a14:m>
-                <a:r>
-                  <a:rPr lang="nl-BE" dirty="0"/>
-                  <a:t> is een </a:t>
-                </a:r>
-                <a:r>
-                  <a:rPr lang="nl-BE" b="1" dirty="0"/>
-                  <a:t>strikt stijgende rij</a:t>
-                </a:r>
-                <a:r>
-                  <a:rPr lang="nl-BE" dirty="0"/>
-                  <a:t> als</a:t>
-                </a:r>
-              </a:p>
-              <a:p>
-                <a:endParaRPr lang="nl-BE" dirty="0"/>
-              </a:p>
-              <a:p>
-                <a:pPr marL="0" indent="0">
-                  <a:buNone/>
-                </a:pPr>
-                <a14:m>
-                  <m:oMathPara xmlns:m="http://schemas.openxmlformats.org/officeDocument/2006/math">
-                    <m:oMath>
-                      <m:sSub>
-                        <m:sSubPr>
-                          <m:ctrlPr>
-                            <a:rPr lang="nl-BE" i="1">
-                              <a:latin typeface="Cambria Math" panose="02040503050406030204" pitchFamily="18" charset="0"/>
-                            </a:rPr>
-                          </m:ctrlPr>
-                        </m:sSubPr>
-                        <m:e>
-                          <m:r>
-                            <a:rPr lang="nl-BE" i="1">
-                              <a:latin typeface="Cambria Math" panose="02040503050406030204" pitchFamily="18" charset="0"/>
-                            </a:rPr>
-                            <m:t>𝑢</m:t>
-                          </m:r>
-                        </m:e>
-                        <m:sub>
-                          <m:r>
-                            <a:rPr lang="nl-BE" i="1">
-                              <a:latin typeface="Cambria Math" panose="02040503050406030204" pitchFamily="18" charset="0"/>
-                            </a:rPr>
-                            <m:t>𝑛</m:t>
-                          </m:r>
-                        </m:sub>
-                      </m:sSub>
-                      <m:r>
-                        <a:rPr lang="nl-BE" i="1">
-                          <a:latin typeface="Cambria Math" panose="02040503050406030204" pitchFamily="18" charset="0"/>
-                        </a:rPr>
-                        <m:t>&lt;</m:t>
-                      </m:r>
-                      <m:sSub>
-                        <m:sSubPr>
-                          <m:ctrlPr>
-                            <a:rPr lang="nl-BE" i="1">
-                              <a:latin typeface="Cambria Math" panose="02040503050406030204" pitchFamily="18" charset="0"/>
-                            </a:rPr>
-                          </m:ctrlPr>
-                        </m:sSubPr>
-                        <m:e>
-                          <m:r>
-                            <a:rPr lang="nl-BE" i="1">
-                              <a:latin typeface="Cambria Math" panose="02040503050406030204" pitchFamily="18" charset="0"/>
-                            </a:rPr>
-                            <m:t>𝑢</m:t>
-                          </m:r>
-                        </m:e>
-                        <m:sub>
-                          <m:r>
-                            <a:rPr lang="nl-BE" i="1">
-                              <a:latin typeface="Cambria Math" panose="02040503050406030204" pitchFamily="18" charset="0"/>
-                            </a:rPr>
-                            <m:t>𝑛</m:t>
-                          </m:r>
-                          <m:r>
-                            <a:rPr lang="nl-BE" i="1">
-                              <a:latin typeface="Cambria Math" panose="02040503050406030204" pitchFamily="18" charset="0"/>
-                            </a:rPr>
-                            <m:t>+1</m:t>
-                          </m:r>
-                        </m:sub>
-                      </m:sSub>
-                      <m:r>
-                        <a:rPr lang="nl-BE" i="1">
-                          <a:latin typeface="Cambria Math" panose="02040503050406030204" pitchFamily="18" charset="0"/>
-                        </a:rPr>
-                        <m:t>,  ∀</m:t>
-                      </m:r>
-                      <m:r>
-                        <a:rPr lang="nl-BE" i="1">
-                          <a:latin typeface="Cambria Math" panose="02040503050406030204" pitchFamily="18" charset="0"/>
-                        </a:rPr>
-                        <m:t>𝑛</m:t>
-                      </m:r>
-                      <m:r>
-                        <a:rPr lang="nl-BE" i="1">
-                          <a:latin typeface="Cambria Math" panose="02040503050406030204" pitchFamily="18" charset="0"/>
-                        </a:rPr>
-                        <m:t>∈</m:t>
-                      </m:r>
-                      <m:sSub>
-                        <m:sSubPr>
-                          <m:ctrlPr>
-                            <a:rPr lang="nl-BE" i="1">
-                              <a:latin typeface="Cambria Math" panose="02040503050406030204" pitchFamily="18" charset="0"/>
-                            </a:rPr>
-                          </m:ctrlPr>
-                        </m:sSubPr>
-                        <m:e>
-                          <m:r>
-                            <a:rPr lang="nl-BE" i="1">
-                              <a:latin typeface="Cambria Math" panose="02040503050406030204" pitchFamily="18" charset="0"/>
-                            </a:rPr>
-                            <m:t>ℤ</m:t>
-                          </m:r>
-                        </m:e>
-                        <m:sub>
-                          <m:r>
-                            <a:rPr lang="nl-BE" i="1">
-                              <a:latin typeface="Cambria Math" panose="02040503050406030204" pitchFamily="18" charset="0"/>
-                            </a:rPr>
-                            <m:t>≥1</m:t>
-                          </m:r>
-                        </m:sub>
-                      </m:sSub>
-                    </m:oMath>
-                  </m:oMathPara>
-                </a14:m>
-                <a:endParaRPr lang="nl-BE" dirty="0"/>
-              </a:p>
-              <a:p>
-                <a:endParaRPr lang="nl-BE" dirty="0"/>
-              </a:p>
-              <a:p>
-                <a:endParaRPr lang="en-GB" dirty="0"/>
-              </a:p>
-            </p:txBody>
-          </p:sp>
-        </mc:Choice>
-        <mc:Fallback>
-          <p:sp>
-            <p:nvSpPr>
-              <p:cNvPr id="3" name="Tijdelijke aanduiding voor inhoud 2">
-                <a:extLst>
-                  <a:ext uri="{FF2B5EF4-FFF2-40B4-BE49-F238E27FC236}">
-                    <a16:creationId xmlns:a16="http://schemas.microsoft.com/office/drawing/2014/main" id="{3520896E-5F2C-D486-D14B-00E6A40005C8}"/>
-                  </a:ext>
-                </a:extLst>
-              </p:cNvPr>
-              <p:cNvSpPr>
-                <a:spLocks noGrp="1" noRot="1" noChangeAspect="1" noMove="1" noResize="1" noEditPoints="1" noAdjustHandles="1" noChangeArrowheads="1" noChangeShapeType="1" noTextEdit="1"/>
-              </p:cNvSpPr>
-              <p:nvPr>
-                <p:ph idx="1"/>
-              </p:nvPr>
-            </p:nvSpPr>
-            <p:spPr>
-              <a:blipFill>
-                <a:blip r:embed="rId2"/>
-                <a:stretch>
-                  <a:fillRect l="-1043" t="-2381"/>
-                </a:stretch>
-              </a:blipFill>
-            </p:spPr>
-            <p:txBody>
-              <a:bodyPr/>
-              <a:lstStyle/>
-              <a:p>
-                <a:r>
-                  <a:rPr lang="nl-BE">
-                    <a:noFill/>
-                  </a:rPr>
-                  <a:t> </a:t>
-                </a:r>
-              </a:p>
-            </p:txBody>
-          </p:sp>
-        </mc:Fallback>
-      </mc:AlternateContent>
-      <p:sp>
-        <p:nvSpPr>
-          <p:cNvPr id="4" name="Tijdelijke aanduiding voor voettekst 3">
-            <a:extLst>
-              <a:ext uri="{FF2B5EF4-FFF2-40B4-BE49-F238E27FC236}">
-                <a16:creationId xmlns:a16="http://schemas.microsoft.com/office/drawing/2014/main" id="{63BE5DC3-02C5-2E42-26DF-9D9CC42C3F87}"/>
-              </a:ext>
-            </a:extLst>
-          </p:cNvPr>
-          <p:cNvSpPr>
-            <a:spLocks noGrp="1"/>
-          </p:cNvSpPr>
-          <p:nvPr>
-            <p:ph type="ftr" sz="quarter" idx="11"/>
-          </p:nvPr>
-        </p:nvSpPr>
-        <p:spPr/>
-        <p:txBody>
-          <a:bodyPr/>
-          <a:lstStyle/>
-          <a:p>
-            <a:r>
-              <a:rPr lang="en-GB"/>
-              <a:t>Oefenzittingen Analyse I - Jasper Visterin</a:t>
-            </a:r>
-          </a:p>
-        </p:txBody>
-      </p:sp>
-    </p:spTree>
-    <p:extLst>
-      <p:ext uri="{BB962C8B-B14F-4D97-AF65-F5344CB8AC3E}">
-        <p14:creationId xmlns:p14="http://schemas.microsoft.com/office/powerpoint/2010/main" val="3020939052"/>
-      </p:ext>
-    </p:extLst>
-  </p:cSld>
-  <p:clrMapOvr>
-    <a:masterClrMapping/>
-  </p:clrMapOvr>
-  <p:timing>
-    <p:tnLst>
-      <p:par>
-        <p:cTn id="1" dur="indefinite" restart="never" nodeType="tmRoot">
-          <p:childTnLst>
-            <p:seq concurrent="1" nextAc="seek">
-              <p:cTn id="2" dur="indefinite" nodeType="mainSeq">
-                <p:childTnLst>
-                  <p:par>
-                    <p:cTn id="3" fill="hold">
-                      <p:stCondLst>
-                        <p:cond delay="indefinite"/>
-                      </p:stCondLst>
-                      <p:childTnLst>
-                        <p:par>
-                          <p:cTn id="4" fill="hold">
-                            <p:stCondLst>
-                              <p:cond delay="0"/>
-                            </p:stCondLst>
-                            <p:childTnLst>
-                              <p:par>
-                                <p:cTn id="5" presetID="1" presetClass="entr" presetSubtype="0" fill="hold" grpId="0" nodeType="clickEffect">
-                                  <p:stCondLst>
-                                    <p:cond delay="0"/>
-                                  </p:stCondLst>
-                                  <p:childTnLst>
-                                    <p:set>
-                                      <p:cBhvr>
-                                        <p:cTn id="6" dur="1" fill="hold">
-                                          <p:stCondLst>
-                                            <p:cond delay="0"/>
-                                          </p:stCondLst>
-                                        </p:cTn>
-                                        <p:tgtEl>
-                                          <p:spTgt spid="3">
-                                            <p:txEl>
-                                              <p:pRg st="0" end="0"/>
-                                            </p:txEl>
-                                          </p:spTgt>
-                                        </p:tgtEl>
-                                        <p:attrNameLst>
-                                          <p:attrName>style.visibility</p:attrName>
-                                        </p:attrNameLst>
-                                      </p:cBhvr>
-                                      <p:to>
-                                        <p:strVal val="visible"/>
-                                      </p:to>
-                                    </p:set>
-                                  </p:childTnLst>
-                                </p:cTn>
-                              </p:par>
-                            </p:childTnLst>
-                          </p:cTn>
-                        </p:par>
-                      </p:childTnLst>
-                    </p:cTn>
-                  </p:par>
-                  <p:par>
-                    <p:cTn id="7" fill="hold">
-                      <p:stCondLst>
-                        <p:cond delay="indefinite"/>
-                      </p:stCondLst>
-                      <p:childTnLst>
-                        <p:par>
-                          <p:cTn id="8" fill="hold">
-                            <p:stCondLst>
-                              <p:cond delay="0"/>
-                            </p:stCondLst>
-                            <p:childTnLst>
-                              <p:par>
-                                <p:cTn id="9" presetID="1" presetClass="entr" presetSubtype="0" fill="hold" grpId="0" nodeType="clickEffect">
-                                  <p:stCondLst>
-                                    <p:cond delay="0"/>
-                                  </p:stCondLst>
-                                  <p:childTnLst>
-                                    <p:set>
-                                      <p:cBhvr>
-                                        <p:cTn id="10" dur="1" fill="hold">
-                                          <p:stCondLst>
-                                            <p:cond delay="0"/>
-                                          </p:stCondLst>
-                                        </p:cTn>
-                                        <p:tgtEl>
-                                          <p:spTgt spid="3">
-                                            <p:txEl>
-                                              <p:pRg st="2" end="2"/>
-                                            </p:txEl>
-                                          </p:spTgt>
-                                        </p:tgtEl>
-                                        <p:attrNameLst>
-                                          <p:attrName>style.visibility</p:attrName>
-                                        </p:attrNameLst>
-                                      </p:cBhvr>
-                                      <p:to>
-                                        <p:strVal val="visible"/>
-                                      </p:to>
-                                    </p:set>
-                                  </p:childTnLst>
-                                </p:cTn>
-                              </p:par>
-                            </p:childTnLst>
-                          </p:cTn>
-                        </p:par>
-                      </p:childTnLst>
-                    </p:cTn>
-                  </p:par>
-                  <p:par>
-                    <p:cTn id="11" fill="hold">
-                      <p:stCondLst>
-                        <p:cond delay="indefinite"/>
-                      </p:stCondLst>
-                      <p:childTnLst>
-                        <p:par>
-                          <p:cTn id="12" fill="hold">
-                            <p:stCondLst>
-                              <p:cond delay="0"/>
-                            </p:stCondLst>
-                            <p:childTnLst>
-                              <p:par>
-                                <p:cTn id="13" presetID="1" presetClass="entr" presetSubtype="0" fill="hold" grpId="0" nodeType="clickEffect">
-                                  <p:stCondLst>
-                                    <p:cond delay="0"/>
-                                  </p:stCondLst>
-                                  <p:childTnLst>
-                                    <p:set>
-                                      <p:cBhvr>
-                                        <p:cTn id="14" dur="1" fill="hold">
-                                          <p:stCondLst>
-                                            <p:cond delay="0"/>
-                                          </p:stCondLst>
-                                        </p:cTn>
-                                        <p:tgtEl>
-                                          <p:spTgt spid="3">
-                                            <p:txEl>
-                                              <p:pRg st="4" end="4"/>
-                                            </p:txEl>
-                                          </p:spTgt>
-                                        </p:tgtEl>
-                                        <p:attrNameLst>
-                                          <p:attrName>style.visibility</p:attrName>
-                                        </p:attrNameLst>
-                                      </p:cBhvr>
-                                      <p:to>
-                                        <p:strVal val="visible"/>
-                                      </p:to>
-                                    </p:set>
-                                  </p:childTnLst>
-                                </p:cTn>
-                              </p:par>
-                            </p:childTnLst>
-                          </p:cTn>
-                        </p:par>
-                      </p:childTnLst>
-                    </p:cTn>
-                  </p:par>
-                  <p:par>
-                    <p:cTn id="15" fill="hold">
-                      <p:stCondLst>
-                        <p:cond delay="indefinite"/>
-                      </p:stCondLst>
-                      <p:childTnLst>
-                        <p:par>
-                          <p:cTn id="16" fill="hold">
-                            <p:stCondLst>
-                              <p:cond delay="0"/>
-                            </p:stCondLst>
-                            <p:childTnLst>
-                              <p:par>
-                                <p:cTn id="17" presetID="1" presetClass="entr" presetSubtype="0" fill="hold" grpId="0" nodeType="clickEffect">
-                                  <p:stCondLst>
-                                    <p:cond delay="0"/>
-                                  </p:stCondLst>
-                                  <p:childTnLst>
-                                    <p:set>
-                                      <p:cBhvr>
-                                        <p:cTn id="18" dur="1" fill="hold">
-                                          <p:stCondLst>
-                                            <p:cond delay="0"/>
-                                          </p:stCondLst>
-                                        </p:cTn>
-                                        <p:tgtEl>
-                                          <p:spTgt spid="3">
-                                            <p:txEl>
-                                              <p:pRg st="6" end="6"/>
-                                            </p:txEl>
-                                          </p:spTgt>
-                                        </p:tgtEl>
-                                        <p:attrNameLst>
-                                          <p:attrName>style.visibility</p:attrName>
-                                        </p:attrNameLst>
-                                      </p:cBhvr>
-                                      <p:to>
-                                        <p:strVal val="visible"/>
-                                      </p:to>
-                                    </p:set>
-                                  </p:childTnLst>
-                                </p:cTn>
-                              </p:par>
-                            </p:childTnLst>
-                          </p:cTn>
-                        </p:par>
-                      </p:childTnLst>
-                    </p:cTn>
-                  </p:par>
-                </p:childTnLst>
-              </p:cTn>
-              <p:prevCondLst>
-                <p:cond evt="onPrev" delay="0">
-                  <p:tgtEl>
-                    <p:sldTgt/>
-                  </p:tgtEl>
-                </p:cond>
-              </p:prevCondLst>
-              <p:nextCondLst>
-                <p:cond evt="onNext" delay="0">
-                  <p:tgtEl>
-                    <p:sldTgt/>
-                  </p:tgtEl>
-                </p:cond>
-              </p:nextCondLst>
-            </p:seq>
-          </p:childTnLst>
-        </p:cTn>
-      </p:par>
-    </p:tnLst>
-    <p:bldLst>
-      <p:bldP spid="3" grpId="0" build="p"/>
-    </p:bldLst>
-  </p:timing>
-</p:sld>
-</file>
-
-<file path=ppt/slides/slide20.xml><?xml version="1.0" encoding="utf-8"?>
+<file path=ppt/slides/slide21.xml><?xml version="1.0" encoding="utf-8"?>
 <p:sld xmlns:a="http://schemas.openxmlformats.org/drawingml/2006/main" xmlns:r="http://schemas.openxmlformats.org/officeDocument/2006/relationships" xmlns:p="http://schemas.openxmlformats.org/presentationml/2006/main">
   <p:cSld>
     <p:spTree>
@@ -17114,8 +19278,8 @@
           </p:sp>
         </mc:Fallback>
       </mc:AlternateContent>
-      <mc:AlternateContent xmlns:mc="http://schemas.openxmlformats.org/markup-compatibility/2006">
-        <mc:Choice xmlns:a14="http://schemas.microsoft.com/office/drawing/2010/main" Requires="a14">
+      <mc:AlternateContent xmlns:mc="http://schemas.openxmlformats.org/markup-compatibility/2006" xmlns:a14="http://schemas.microsoft.com/office/drawing/2010/main">
+        <mc:Choice Requires="a14">
           <p:sp>
             <p:nvSpPr>
               <p:cNvPr id="5" name="Tekstvak 4">
@@ -17254,7 +19418,6 @@
                 <a:endParaRPr lang="fr-BE" sz="3200" b="0" dirty="0"/>
               </a:p>
               <a:p>
-                <a:pPr/>
                 <a:endParaRPr lang="nl-BE" sz="3200" dirty="0"/>
               </a:p>
               <a:p>
@@ -17383,13 +19546,12 @@
                 <a:endParaRPr lang="nl-BE" sz="3200" dirty="0"/>
               </a:p>
               <a:p>
-                <a:pPr/>
                 <a:endParaRPr lang="nl-BE" sz="3200" dirty="0"/>
               </a:p>
             </p:txBody>
           </p:sp>
         </mc:Choice>
-        <mc:Fallback>
+        <mc:Fallback xmlns="">
           <p:sp>
             <p:nvSpPr>
               <p:cNvPr id="5" name="Tekstvak 4">
@@ -17967,7 +20129,7 @@
 </p:sld>
 </file>
 
-<file path=ppt/slides/slide21.xml><?xml version="1.0" encoding="utf-8"?>
+<file path=ppt/slides/slide22.xml><?xml version="1.0" encoding="utf-8"?>
 <p:sld xmlns:a="http://schemas.openxmlformats.org/drawingml/2006/main" xmlns:r="http://schemas.openxmlformats.org/officeDocument/2006/relationships" xmlns:p="http://schemas.openxmlformats.org/presentationml/2006/main">
   <p:cSld>
     <p:spTree>
@@ -18012,8 +20174,8 @@
           </a:p>
         </p:txBody>
       </p:sp>
-      <mc:AlternateContent xmlns:mc="http://schemas.openxmlformats.org/markup-compatibility/2006">
-        <mc:Choice xmlns:a14="http://schemas.microsoft.com/office/drawing/2010/main" Requires="a14">
+      <mc:AlternateContent xmlns:mc="http://schemas.openxmlformats.org/markup-compatibility/2006" xmlns:a14="http://schemas.microsoft.com/office/drawing/2010/main">
+        <mc:Choice Requires="a14">
           <p:sp>
             <p:nvSpPr>
               <p:cNvPr id="3" name="Tijdelijke aanduiding voor inhoud 2">
@@ -18526,7 +20688,7 @@
             </p:txBody>
           </p:sp>
         </mc:Choice>
-        <mc:Fallback>
+        <mc:Fallback xmlns="">
           <p:sp>
             <p:nvSpPr>
               <p:cNvPr id="3" name="Tijdelijke aanduiding voor inhoud 2">
@@ -18987,7 +21149,7 @@
 </p:sld>
 </file>
 
-<file path=ppt/slides/slide22.xml><?xml version="1.0" encoding="utf-8"?>
+<file path=ppt/slides/slide23.xml><?xml version="1.0" encoding="utf-8"?>
 <p:sld xmlns:a="http://schemas.openxmlformats.org/drawingml/2006/main" xmlns:r="http://schemas.openxmlformats.org/officeDocument/2006/relationships" xmlns:p="http://schemas.openxmlformats.org/presentationml/2006/main">
   <p:cSld>
     <p:spTree>
@@ -19004,8 +21166,8 @@
           <a:chExt cx="0" cy="0"/>
         </a:xfrm>
       </p:grpSpPr>
-      <mc:AlternateContent xmlns:mc="http://schemas.openxmlformats.org/markup-compatibility/2006">
-        <mc:Choice xmlns:a14="http://schemas.microsoft.com/office/drawing/2010/main" Requires="a14">
+      <mc:AlternateContent xmlns:mc="http://schemas.openxmlformats.org/markup-compatibility/2006" xmlns:a14="http://schemas.microsoft.com/office/drawing/2010/main">
+        <mc:Choice Requires="a14">
           <p:sp>
             <p:nvSpPr>
               <p:cNvPr id="3" name="Tijdelijke aanduiding voor inhoud 2">
@@ -21422,7 +23584,7 @@
             </p:txBody>
           </p:sp>
         </mc:Choice>
-        <mc:Fallback>
+        <mc:Fallback xmlns="">
           <p:sp>
             <p:nvSpPr>
               <p:cNvPr id="3" name="Tijdelijke aanduiding voor inhoud 2">
@@ -21466,8 +23628,8 @@
           </p:sp>
         </mc:Fallback>
       </mc:AlternateContent>
-      <mc:AlternateContent xmlns:mc="http://schemas.openxmlformats.org/markup-compatibility/2006">
-        <mc:Choice xmlns:a14="http://schemas.microsoft.com/office/drawing/2010/main" Requires="a14">
+      <mc:AlternateContent xmlns:mc="http://schemas.openxmlformats.org/markup-compatibility/2006" xmlns:a14="http://schemas.microsoft.com/office/drawing/2010/main">
+        <mc:Choice Requires="a14">
           <p:sp>
             <p:nvSpPr>
               <p:cNvPr id="5" name="Tekstvak 4">
@@ -21598,13 +23760,7 @@
                         <a:rPr lang="fr-BE" sz="3200" b="0" i="1" smtClean="0">
                           <a:latin typeface="Cambria Math" panose="02040503050406030204" pitchFamily="18" charset="0"/>
                         </a:rPr>
-                        <m:t>=</m:t>
-                      </m:r>
-                      <m:r>
-                        <a:rPr lang="fr-BE" sz="3200" b="0" i="1" smtClean="0">
-                          <a:latin typeface="Cambria Math" panose="02040503050406030204" pitchFamily="18" charset="0"/>
-                        </a:rPr>
-                        <m:t>+∞</m:t>
+                        <m:t>=+∞</m:t>
                       </m:r>
                     </m:oMath>
                   </m:oMathPara>
@@ -21774,7 +23930,7 @@
             </p:txBody>
           </p:sp>
         </mc:Choice>
-        <mc:Fallback>
+        <mc:Fallback xmlns="">
           <p:sp>
             <p:nvSpPr>
               <p:cNvPr id="5" name="Tekstvak 4">
@@ -22316,7 +24472,7 @@
 </p:sld>
 </file>
 
-<file path=ppt/slides/slide23.xml><?xml version="1.0" encoding="utf-8"?>
+<file path=ppt/slides/slide24.xml><?xml version="1.0" encoding="utf-8"?>
 <p:sld xmlns:a="http://schemas.openxmlformats.org/drawingml/2006/main" xmlns:r="http://schemas.openxmlformats.org/officeDocument/2006/relationships" xmlns:p="http://schemas.openxmlformats.org/presentationml/2006/main">
   <p:cSld>
     <p:spTree>
@@ -22466,7 +24622,235 @@
 </p:sld>
 </file>
 
-<file path=ppt/slides/slide24.xml><?xml version="1.0" encoding="utf-8"?>
+<file path=ppt/slides/slide25.xml><?xml version="1.0" encoding="utf-8"?>
+<p:sld xmlns:a="http://schemas.openxmlformats.org/drawingml/2006/main" xmlns:r="http://schemas.openxmlformats.org/officeDocument/2006/relationships" xmlns:p="http://schemas.openxmlformats.org/presentationml/2006/main">
+  <p:cSld>
+    <p:spTree>
+      <p:nvGrpSpPr>
+        <p:cNvPr id="1" name=""/>
+        <p:cNvGrpSpPr/>
+        <p:nvPr/>
+      </p:nvGrpSpPr>
+      <p:grpSpPr>
+        <a:xfrm>
+          <a:off x="0" y="0"/>
+          <a:ext cx="0" cy="0"/>
+          <a:chOff x="0" y="0"/>
+          <a:chExt cx="0" cy="0"/>
+        </a:xfrm>
+      </p:grpSpPr>
+      <p:sp>
+        <p:nvSpPr>
+          <p:cNvPr id="2" name="Titel 1">
+            <a:extLst>
+              <a:ext uri="{FF2B5EF4-FFF2-40B4-BE49-F238E27FC236}">
+                <a16:creationId xmlns:a16="http://schemas.microsoft.com/office/drawing/2014/main" id="{554AB127-76A8-1B59-4629-A7EF8D5B6CF6}"/>
+              </a:ext>
+            </a:extLst>
+          </p:cNvPr>
+          <p:cNvSpPr>
+            <a:spLocks noGrp="1"/>
+          </p:cNvSpPr>
+          <p:nvPr>
+            <p:ph type="title"/>
+          </p:nvPr>
+        </p:nvSpPr>
+        <p:spPr/>
+        <p:txBody>
+          <a:bodyPr/>
+          <a:lstStyle/>
+          <a:p>
+            <a:r>
+              <a:rPr lang="nl-BE" dirty="0"/>
+              <a:t>3.2a</a:t>
+            </a:r>
+          </a:p>
+        </p:txBody>
+      </p:sp>
+      <p:sp>
+        <p:nvSpPr>
+          <p:cNvPr id="3" name="Tijdelijke aanduiding voor inhoud 2">
+            <a:extLst>
+              <a:ext uri="{FF2B5EF4-FFF2-40B4-BE49-F238E27FC236}">
+                <a16:creationId xmlns:a16="http://schemas.microsoft.com/office/drawing/2014/main" id="{D402CFA5-74D6-750E-2F83-CA99AA336A85}"/>
+              </a:ext>
+            </a:extLst>
+          </p:cNvPr>
+          <p:cNvSpPr>
+            <a:spLocks noGrp="1"/>
+          </p:cNvSpPr>
+          <p:nvPr>
+            <p:ph idx="1"/>
+          </p:nvPr>
+        </p:nvSpPr>
+        <p:spPr/>
+        <p:txBody>
+          <a:bodyPr/>
+          <a:lstStyle/>
+          <a:p>
+            <a:r>
+              <a:rPr lang="nl-BE" dirty="0"/>
+              <a:t>https://www.geogebra.org/calculator/hchpwhxq</a:t>
+            </a:r>
+          </a:p>
+        </p:txBody>
+      </p:sp>
+      <p:sp>
+        <p:nvSpPr>
+          <p:cNvPr id="4" name="Tijdelijke aanduiding voor voettekst 3">
+            <a:extLst>
+              <a:ext uri="{FF2B5EF4-FFF2-40B4-BE49-F238E27FC236}">
+                <a16:creationId xmlns:a16="http://schemas.microsoft.com/office/drawing/2014/main" id="{8EBBB738-AE06-FADE-10E1-69A515D47D90}"/>
+              </a:ext>
+            </a:extLst>
+          </p:cNvPr>
+          <p:cNvSpPr>
+            <a:spLocks noGrp="1"/>
+          </p:cNvSpPr>
+          <p:nvPr>
+            <p:ph type="ftr" sz="quarter" idx="11"/>
+          </p:nvPr>
+        </p:nvSpPr>
+        <p:spPr/>
+        <p:txBody>
+          <a:bodyPr/>
+          <a:lstStyle/>
+          <a:p>
+            <a:r>
+              <a:rPr lang="en-GB"/>
+              <a:t>Oefenzittingen Analyse I - Jasper Visterin</a:t>
+            </a:r>
+          </a:p>
+        </p:txBody>
+      </p:sp>
+    </p:spTree>
+    <p:extLst>
+      <p:ext uri="{BB962C8B-B14F-4D97-AF65-F5344CB8AC3E}">
+        <p14:creationId xmlns:p14="http://schemas.microsoft.com/office/powerpoint/2010/main" val="4194607247"/>
+      </p:ext>
+    </p:extLst>
+  </p:cSld>
+  <p:clrMapOvr>
+    <a:masterClrMapping/>
+  </p:clrMapOvr>
+</p:sld>
+</file>
+
+<file path=ppt/slides/slide26.xml><?xml version="1.0" encoding="utf-8"?>
+<p:sld xmlns:a="http://schemas.openxmlformats.org/drawingml/2006/main" xmlns:r="http://schemas.openxmlformats.org/officeDocument/2006/relationships" xmlns:p="http://schemas.openxmlformats.org/presentationml/2006/main">
+  <p:cSld>
+    <p:spTree>
+      <p:nvGrpSpPr>
+        <p:cNvPr id="1" name=""/>
+        <p:cNvGrpSpPr/>
+        <p:nvPr/>
+      </p:nvGrpSpPr>
+      <p:grpSpPr>
+        <a:xfrm>
+          <a:off x="0" y="0"/>
+          <a:ext cx="0" cy="0"/>
+          <a:chOff x="0" y="0"/>
+          <a:chExt cx="0" cy="0"/>
+        </a:xfrm>
+      </p:grpSpPr>
+      <p:sp>
+        <p:nvSpPr>
+          <p:cNvPr id="2" name="Titel 1">
+            <a:extLst>
+              <a:ext uri="{FF2B5EF4-FFF2-40B4-BE49-F238E27FC236}">
+                <a16:creationId xmlns:a16="http://schemas.microsoft.com/office/drawing/2014/main" id="{E15E0495-7BF3-8CF9-224C-900F74DBBFC7}"/>
+              </a:ext>
+            </a:extLst>
+          </p:cNvPr>
+          <p:cNvSpPr>
+            <a:spLocks noGrp="1"/>
+          </p:cNvSpPr>
+          <p:nvPr>
+            <p:ph type="title"/>
+          </p:nvPr>
+        </p:nvSpPr>
+        <p:spPr/>
+        <p:txBody>
+          <a:bodyPr/>
+          <a:lstStyle/>
+          <a:p>
+            <a:r>
+              <a:rPr lang="nl-BE" dirty="0"/>
+              <a:t>3.2d</a:t>
+            </a:r>
+          </a:p>
+        </p:txBody>
+      </p:sp>
+      <p:sp>
+        <p:nvSpPr>
+          <p:cNvPr id="3" name="Tijdelijke aanduiding voor inhoud 2">
+            <a:extLst>
+              <a:ext uri="{FF2B5EF4-FFF2-40B4-BE49-F238E27FC236}">
+                <a16:creationId xmlns:a16="http://schemas.microsoft.com/office/drawing/2014/main" id="{863010CE-2A1D-E169-0664-4F7D59ECE40C}"/>
+              </a:ext>
+            </a:extLst>
+          </p:cNvPr>
+          <p:cNvSpPr>
+            <a:spLocks noGrp="1"/>
+          </p:cNvSpPr>
+          <p:nvPr>
+            <p:ph idx="1"/>
+          </p:nvPr>
+        </p:nvSpPr>
+        <p:spPr/>
+        <p:txBody>
+          <a:bodyPr/>
+          <a:lstStyle/>
+          <a:p>
+            <a:r>
+              <a:rPr lang="nl-BE" dirty="0"/>
+              <a:t>https://www.geogebra.org/calculator/vzhnmuvd</a:t>
+            </a:r>
+          </a:p>
+        </p:txBody>
+      </p:sp>
+      <p:sp>
+        <p:nvSpPr>
+          <p:cNvPr id="4" name="Tijdelijke aanduiding voor voettekst 3">
+            <a:extLst>
+              <a:ext uri="{FF2B5EF4-FFF2-40B4-BE49-F238E27FC236}">
+                <a16:creationId xmlns:a16="http://schemas.microsoft.com/office/drawing/2014/main" id="{3273AB43-F19B-9DF7-6964-02FDAE4F4953}"/>
+              </a:ext>
+            </a:extLst>
+          </p:cNvPr>
+          <p:cNvSpPr>
+            <a:spLocks noGrp="1"/>
+          </p:cNvSpPr>
+          <p:nvPr>
+            <p:ph type="ftr" sz="quarter" idx="11"/>
+          </p:nvPr>
+        </p:nvSpPr>
+        <p:spPr/>
+        <p:txBody>
+          <a:bodyPr/>
+          <a:lstStyle/>
+          <a:p>
+            <a:r>
+              <a:rPr lang="en-GB"/>
+              <a:t>Oefenzittingen Analyse I - Jasper Visterin</a:t>
+            </a:r>
+          </a:p>
+        </p:txBody>
+      </p:sp>
+    </p:spTree>
+    <p:extLst>
+      <p:ext uri="{BB962C8B-B14F-4D97-AF65-F5344CB8AC3E}">
+        <p14:creationId xmlns:p14="http://schemas.microsoft.com/office/powerpoint/2010/main" val="3084744655"/>
+      </p:ext>
+    </p:extLst>
+  </p:cSld>
+  <p:clrMapOvr>
+    <a:masterClrMapping/>
+  </p:clrMapOvr>
+</p:sld>
+</file>
+
+<file path=ppt/slides/slide27.xml><?xml version="1.0" encoding="utf-8"?>
 <p:sld xmlns:a="http://schemas.openxmlformats.org/drawingml/2006/main" xmlns:r="http://schemas.openxmlformats.org/officeDocument/2006/relationships" xmlns:p="http://schemas.openxmlformats.org/presentationml/2006/main">
   <p:cSld>
     <p:spTree>
@@ -22560,7 +24944,1070 @@
 </p:sld>
 </file>
 
-<file path=ppt/slides/slide25.xml><?xml version="1.0" encoding="utf-8"?>
+<file path=ppt/slides/slide28.xml><?xml version="1.0" encoding="utf-8"?>
+<p:sld xmlns:a="http://schemas.openxmlformats.org/drawingml/2006/main" xmlns:r="http://schemas.openxmlformats.org/officeDocument/2006/relationships" xmlns:p="http://schemas.openxmlformats.org/presentationml/2006/main">
+  <p:cSld>
+    <p:spTree>
+      <p:nvGrpSpPr>
+        <p:cNvPr id="1" name=""/>
+        <p:cNvGrpSpPr/>
+        <p:nvPr/>
+      </p:nvGrpSpPr>
+      <p:grpSpPr>
+        <a:xfrm>
+          <a:off x="0" y="0"/>
+          <a:ext cx="0" cy="0"/>
+          <a:chOff x="0" y="0"/>
+          <a:chExt cx="0" cy="0"/>
+        </a:xfrm>
+      </p:grpSpPr>
+      <p:sp>
+        <p:nvSpPr>
+          <p:cNvPr id="2" name="Titel 1">
+            <a:extLst>
+              <a:ext uri="{FF2B5EF4-FFF2-40B4-BE49-F238E27FC236}">
+                <a16:creationId xmlns:a16="http://schemas.microsoft.com/office/drawing/2014/main" id="{F6C98146-9CBA-6CE4-1E5C-091B8E219A07}"/>
+              </a:ext>
+            </a:extLst>
+          </p:cNvPr>
+          <p:cNvSpPr>
+            <a:spLocks noGrp="1"/>
+          </p:cNvSpPr>
+          <p:nvPr>
+            <p:ph type="title"/>
+          </p:nvPr>
+        </p:nvSpPr>
+        <p:spPr/>
+        <p:txBody>
+          <a:bodyPr/>
+          <a:lstStyle/>
+          <a:p>
+            <a:r>
+              <a:rPr lang="nl-BE" dirty="0"/>
+              <a:t>3.6</a:t>
+            </a:r>
+          </a:p>
+        </p:txBody>
+      </p:sp>
+      <p:sp>
+        <p:nvSpPr>
+          <p:cNvPr id="3" name="Tijdelijke aanduiding voor inhoud 2">
+            <a:extLst>
+              <a:ext uri="{FF2B5EF4-FFF2-40B4-BE49-F238E27FC236}">
+                <a16:creationId xmlns:a16="http://schemas.microsoft.com/office/drawing/2014/main" id="{120C29C5-B4AA-74F5-70EE-E85DAF9A3906}"/>
+              </a:ext>
+            </a:extLst>
+          </p:cNvPr>
+          <p:cNvSpPr>
+            <a:spLocks noGrp="1"/>
+          </p:cNvSpPr>
+          <p:nvPr>
+            <p:ph idx="1"/>
+          </p:nvPr>
+        </p:nvSpPr>
+        <p:spPr/>
+        <p:txBody>
+          <a:bodyPr/>
+          <a:lstStyle/>
+          <a:p>
+            <a:r>
+              <a:rPr lang="nl-BE" dirty="0"/>
+              <a:t>https://www.geogebra.org/calculator/chs8ekw8</a:t>
+            </a:r>
+          </a:p>
+        </p:txBody>
+      </p:sp>
+      <p:sp>
+        <p:nvSpPr>
+          <p:cNvPr id="4" name="Tijdelijke aanduiding voor voettekst 3">
+            <a:extLst>
+              <a:ext uri="{FF2B5EF4-FFF2-40B4-BE49-F238E27FC236}">
+                <a16:creationId xmlns:a16="http://schemas.microsoft.com/office/drawing/2014/main" id="{85BADBD4-2A43-082D-7C45-B0464E6A1323}"/>
+              </a:ext>
+            </a:extLst>
+          </p:cNvPr>
+          <p:cNvSpPr>
+            <a:spLocks noGrp="1"/>
+          </p:cNvSpPr>
+          <p:nvPr>
+            <p:ph type="ftr" sz="quarter" idx="11"/>
+          </p:nvPr>
+        </p:nvSpPr>
+        <p:spPr/>
+        <p:txBody>
+          <a:bodyPr/>
+          <a:lstStyle/>
+          <a:p>
+            <a:r>
+              <a:rPr lang="en-GB"/>
+              <a:t>Oefenzittingen Analyse I - Jasper Visterin</a:t>
+            </a:r>
+          </a:p>
+        </p:txBody>
+      </p:sp>
+    </p:spTree>
+    <p:extLst>
+      <p:ext uri="{BB962C8B-B14F-4D97-AF65-F5344CB8AC3E}">
+        <p14:creationId xmlns:p14="http://schemas.microsoft.com/office/powerpoint/2010/main" val="1488593015"/>
+      </p:ext>
+    </p:extLst>
+  </p:cSld>
+  <p:clrMapOvr>
+    <a:masterClrMapping/>
+  </p:clrMapOvr>
+</p:sld>
+</file>
+
+<file path=ppt/slides/slide29.xml><?xml version="1.0" encoding="utf-8"?>
+<p:sld xmlns:a="http://schemas.openxmlformats.org/drawingml/2006/main" xmlns:r="http://schemas.openxmlformats.org/officeDocument/2006/relationships" xmlns:p="http://schemas.openxmlformats.org/presentationml/2006/main">
+  <p:cSld>
+    <p:spTree>
+      <p:nvGrpSpPr>
+        <p:cNvPr id="1" name=""/>
+        <p:cNvGrpSpPr/>
+        <p:nvPr/>
+      </p:nvGrpSpPr>
+      <p:grpSpPr>
+        <a:xfrm>
+          <a:off x="0" y="0"/>
+          <a:ext cx="0" cy="0"/>
+          <a:chOff x="0" y="0"/>
+          <a:chExt cx="0" cy="0"/>
+        </a:xfrm>
+      </p:grpSpPr>
+      <p:sp>
+        <p:nvSpPr>
+          <p:cNvPr id="2" name="Titel 1">
+            <a:extLst>
+              <a:ext uri="{FF2B5EF4-FFF2-40B4-BE49-F238E27FC236}">
+                <a16:creationId xmlns:a16="http://schemas.microsoft.com/office/drawing/2014/main" id="{24C27E54-9DD4-2106-F816-AD676049EEF0}"/>
+              </a:ext>
+            </a:extLst>
+          </p:cNvPr>
+          <p:cNvSpPr>
+            <a:spLocks noGrp="1"/>
+          </p:cNvSpPr>
+          <p:nvPr>
+            <p:ph type="title"/>
+          </p:nvPr>
+        </p:nvSpPr>
+        <p:spPr/>
+        <p:txBody>
+          <a:bodyPr/>
+          <a:lstStyle/>
+          <a:p>
+            <a:r>
+              <a:rPr lang="nl-BE" dirty="0"/>
+              <a:t>3.11</a:t>
+            </a:r>
+          </a:p>
+        </p:txBody>
+      </p:sp>
+      <p:sp>
+        <p:nvSpPr>
+          <p:cNvPr id="3" name="Tijdelijke aanduiding voor inhoud 2">
+            <a:extLst>
+              <a:ext uri="{FF2B5EF4-FFF2-40B4-BE49-F238E27FC236}">
+                <a16:creationId xmlns:a16="http://schemas.microsoft.com/office/drawing/2014/main" id="{BB01F5FE-ED5B-2A02-6332-C16FB2B02E14}"/>
+              </a:ext>
+            </a:extLst>
+          </p:cNvPr>
+          <p:cNvSpPr>
+            <a:spLocks noGrp="1"/>
+          </p:cNvSpPr>
+          <p:nvPr>
+            <p:ph idx="1"/>
+          </p:nvPr>
+        </p:nvSpPr>
+        <p:spPr/>
+        <p:txBody>
+          <a:bodyPr/>
+          <a:lstStyle/>
+          <a:p>
+            <a:r>
+              <a:rPr lang="nl-BE" dirty="0"/>
+              <a:t>https://www.geogebra.org/calculator/pc48dzep</a:t>
+            </a:r>
+          </a:p>
+        </p:txBody>
+      </p:sp>
+      <p:sp>
+        <p:nvSpPr>
+          <p:cNvPr id="4" name="Tijdelijke aanduiding voor voettekst 3">
+            <a:extLst>
+              <a:ext uri="{FF2B5EF4-FFF2-40B4-BE49-F238E27FC236}">
+                <a16:creationId xmlns:a16="http://schemas.microsoft.com/office/drawing/2014/main" id="{1FA65D7B-81F6-60FE-CC9F-500A679D8AF0}"/>
+              </a:ext>
+            </a:extLst>
+          </p:cNvPr>
+          <p:cNvSpPr>
+            <a:spLocks noGrp="1"/>
+          </p:cNvSpPr>
+          <p:nvPr>
+            <p:ph type="ftr" sz="quarter" idx="11"/>
+          </p:nvPr>
+        </p:nvSpPr>
+        <p:spPr/>
+        <p:txBody>
+          <a:bodyPr/>
+          <a:lstStyle/>
+          <a:p>
+            <a:r>
+              <a:rPr lang="en-GB"/>
+              <a:t>Oefenzittingen Analyse I - Jasper Visterin</a:t>
+            </a:r>
+          </a:p>
+        </p:txBody>
+      </p:sp>
+    </p:spTree>
+    <p:extLst>
+      <p:ext uri="{BB962C8B-B14F-4D97-AF65-F5344CB8AC3E}">
+        <p14:creationId xmlns:p14="http://schemas.microsoft.com/office/powerpoint/2010/main" val="3164578383"/>
+      </p:ext>
+    </p:extLst>
+  </p:cSld>
+  <p:clrMapOvr>
+    <a:masterClrMapping/>
+  </p:clrMapOvr>
+</p:sld>
+</file>
+
+<file path=ppt/slides/slide3.xml><?xml version="1.0" encoding="utf-8"?>
+<p:sld xmlns:a="http://schemas.openxmlformats.org/drawingml/2006/main" xmlns:r="http://schemas.openxmlformats.org/officeDocument/2006/relationships" xmlns:p="http://schemas.openxmlformats.org/presentationml/2006/main">
+  <p:cSld>
+    <p:spTree>
+      <p:nvGrpSpPr>
+        <p:cNvPr id="1" name=""/>
+        <p:cNvGrpSpPr/>
+        <p:nvPr/>
+      </p:nvGrpSpPr>
+      <p:grpSpPr>
+        <a:xfrm>
+          <a:off x="0" y="0"/>
+          <a:ext cx="0" cy="0"/>
+          <a:chOff x="0" y="0"/>
+          <a:chExt cx="0" cy="0"/>
+        </a:xfrm>
+      </p:grpSpPr>
+      <p:sp>
+        <p:nvSpPr>
+          <p:cNvPr id="2" name="Titel 1">
+            <a:extLst>
+              <a:ext uri="{FF2B5EF4-FFF2-40B4-BE49-F238E27FC236}">
+                <a16:creationId xmlns:a16="http://schemas.microsoft.com/office/drawing/2014/main" id="{3A12ADA9-91C4-6153-5032-F6539FBEF94C}"/>
+              </a:ext>
+            </a:extLst>
+          </p:cNvPr>
+          <p:cNvSpPr>
+            <a:spLocks noGrp="1"/>
+          </p:cNvSpPr>
+          <p:nvPr>
+            <p:ph type="title"/>
+          </p:nvPr>
+        </p:nvSpPr>
+        <p:spPr/>
+        <p:txBody>
+          <a:bodyPr/>
+          <a:lstStyle/>
+          <a:p>
+            <a:r>
+              <a:rPr lang="en-GB" dirty="0"/>
+              <a:t>(</a:t>
+            </a:r>
+            <a:r>
+              <a:rPr lang="en-GB" dirty="0" err="1"/>
+              <a:t>Strikt</a:t>
+            </a:r>
+            <a:r>
+              <a:rPr lang="en-GB" dirty="0"/>
+              <a:t>) </a:t>
+            </a:r>
+            <a:r>
+              <a:rPr lang="en-GB" dirty="0" err="1"/>
+              <a:t>Dalende</a:t>
+            </a:r>
+            <a:r>
+              <a:rPr lang="en-GB" dirty="0"/>
+              <a:t> </a:t>
+            </a:r>
+            <a:r>
+              <a:rPr lang="en-GB" dirty="0" err="1"/>
+              <a:t>Rijen</a:t>
+            </a:r>
+            <a:endParaRPr lang="nl-BE" dirty="0"/>
+          </a:p>
+        </p:txBody>
+      </p:sp>
+      <mc:AlternateContent xmlns:mc="http://schemas.openxmlformats.org/markup-compatibility/2006" xmlns:a14="http://schemas.microsoft.com/office/drawing/2010/main">
+        <mc:Choice Requires="a14">
+          <p:sp>
+            <p:nvSpPr>
+              <p:cNvPr id="3" name="Tijdelijke aanduiding voor inhoud 2">
+                <a:extLst>
+                  <a:ext uri="{FF2B5EF4-FFF2-40B4-BE49-F238E27FC236}">
+                    <a16:creationId xmlns:a16="http://schemas.microsoft.com/office/drawing/2014/main" id="{43BF45B8-A93F-DA57-2CF6-E2C73069B474}"/>
+                  </a:ext>
+                </a:extLst>
+              </p:cNvPr>
+              <p:cNvSpPr>
+                <a:spLocks noGrp="1"/>
+              </p:cNvSpPr>
+              <p:nvPr>
+                <p:ph idx="1"/>
+              </p:nvPr>
+            </p:nvSpPr>
+            <p:spPr/>
+            <p:txBody>
+              <a:bodyPr/>
+              <a:lstStyle/>
+              <a:p>
+                <a:r>
+                  <a:rPr lang="nl-BE" dirty="0"/>
+                  <a:t>Een rij </a:t>
+                </a:r>
+                <a14:m>
+                  <m:oMath xmlns:m="http://schemas.openxmlformats.org/officeDocument/2006/math">
+                    <m:sSubSup>
+                      <m:sSubSupPr>
+                        <m:ctrlPr>
+                          <a:rPr lang="nl-BE" i="1">
+                            <a:latin typeface="Cambria Math" panose="02040503050406030204" pitchFamily="18" charset="0"/>
+                          </a:rPr>
+                        </m:ctrlPr>
+                      </m:sSubSupPr>
+                      <m:e>
+                        <m:d>
+                          <m:dPr>
+                            <m:begChr m:val="{"/>
+                            <m:endChr m:val="}"/>
+                            <m:ctrlPr>
+                              <a:rPr lang="nl-BE" i="1">
+                                <a:latin typeface="Cambria Math" panose="02040503050406030204" pitchFamily="18" charset="0"/>
+                              </a:rPr>
+                            </m:ctrlPr>
+                          </m:dPr>
+                          <m:e>
+                            <m:sSub>
+                              <m:sSubPr>
+                                <m:ctrlPr>
+                                  <a:rPr lang="nl-BE" i="1">
+                                    <a:latin typeface="Cambria Math" panose="02040503050406030204" pitchFamily="18" charset="0"/>
+                                  </a:rPr>
+                                </m:ctrlPr>
+                              </m:sSubPr>
+                              <m:e>
+                                <m:r>
+                                  <a:rPr lang="nl-BE" i="1">
+                                    <a:latin typeface="Cambria Math" panose="02040503050406030204" pitchFamily="18" charset="0"/>
+                                  </a:rPr>
+                                  <m:t>𝑢</m:t>
+                                </m:r>
+                              </m:e>
+                              <m:sub>
+                                <m:r>
+                                  <a:rPr lang="nl-BE" i="1">
+                                    <a:latin typeface="Cambria Math" panose="02040503050406030204" pitchFamily="18" charset="0"/>
+                                  </a:rPr>
+                                  <m:t>𝑛</m:t>
+                                </m:r>
+                              </m:sub>
+                            </m:sSub>
+                          </m:e>
+                        </m:d>
+                      </m:e>
+                      <m:sub>
+                        <m:r>
+                          <a:rPr lang="nl-BE" i="1">
+                            <a:latin typeface="Cambria Math" panose="02040503050406030204" pitchFamily="18" charset="0"/>
+                          </a:rPr>
+                          <m:t>𝑛</m:t>
+                        </m:r>
+                        <m:r>
+                          <a:rPr lang="nl-BE" i="1">
+                            <a:latin typeface="Cambria Math" panose="02040503050406030204" pitchFamily="18" charset="0"/>
+                          </a:rPr>
+                          <m:t>=1</m:t>
+                        </m:r>
+                      </m:sub>
+                      <m:sup>
+                        <m:r>
+                          <a:rPr lang="nl-BE" i="1">
+                            <a:latin typeface="Cambria Math" panose="02040503050406030204" pitchFamily="18" charset="0"/>
+                          </a:rPr>
+                          <m:t>∞</m:t>
+                        </m:r>
+                      </m:sup>
+                    </m:sSubSup>
+                  </m:oMath>
+                </a14:m>
+                <a:r>
+                  <a:rPr lang="nl-BE" dirty="0"/>
+                  <a:t> is een </a:t>
+                </a:r>
+                <a:r>
+                  <a:rPr lang="nl-BE" b="1" dirty="0"/>
+                  <a:t>dalende rij </a:t>
+                </a:r>
+                <a:r>
+                  <a:rPr lang="nl-BE" dirty="0"/>
+                  <a:t>als</a:t>
+                </a:r>
+              </a:p>
+              <a:p>
+                <a:endParaRPr lang="nl-BE" dirty="0"/>
+              </a:p>
+              <a:p>
+                <a:pPr marL="0" indent="0">
+                  <a:buNone/>
+                </a:pPr>
+                <a14:m>
+                  <m:oMathPara xmlns:m="http://schemas.openxmlformats.org/officeDocument/2006/math">
+                    <m:oMath>
+                      <m:sSub>
+                        <m:sSubPr>
+                          <m:ctrlPr>
+                            <a:rPr lang="nl-BE" i="1">
+                              <a:latin typeface="Cambria Math" panose="02040503050406030204" pitchFamily="18" charset="0"/>
+                            </a:rPr>
+                          </m:ctrlPr>
+                        </m:sSubPr>
+                        <m:e>
+                          <m:r>
+                            <a:rPr lang="nl-BE" i="1">
+                              <a:latin typeface="Cambria Math" panose="02040503050406030204" pitchFamily="18" charset="0"/>
+                            </a:rPr>
+                            <m:t>𝑢</m:t>
+                          </m:r>
+                        </m:e>
+                        <m:sub>
+                          <m:r>
+                            <a:rPr lang="nl-BE" i="1">
+                              <a:latin typeface="Cambria Math" panose="02040503050406030204" pitchFamily="18" charset="0"/>
+                            </a:rPr>
+                            <m:t>𝑛</m:t>
+                          </m:r>
+                        </m:sub>
+                      </m:sSub>
+                      <m:r>
+                        <a:rPr lang="nl-BE" i="1">
+                          <a:latin typeface="Cambria Math" panose="02040503050406030204" pitchFamily="18" charset="0"/>
+                        </a:rPr>
+                        <m:t>≥</m:t>
+                      </m:r>
+                      <m:sSub>
+                        <m:sSubPr>
+                          <m:ctrlPr>
+                            <a:rPr lang="nl-BE" i="1">
+                              <a:latin typeface="Cambria Math" panose="02040503050406030204" pitchFamily="18" charset="0"/>
+                            </a:rPr>
+                          </m:ctrlPr>
+                        </m:sSubPr>
+                        <m:e>
+                          <m:r>
+                            <a:rPr lang="nl-BE" i="1">
+                              <a:latin typeface="Cambria Math" panose="02040503050406030204" pitchFamily="18" charset="0"/>
+                            </a:rPr>
+                            <m:t>𝑢</m:t>
+                          </m:r>
+                        </m:e>
+                        <m:sub>
+                          <m:r>
+                            <a:rPr lang="nl-BE" i="1">
+                              <a:latin typeface="Cambria Math" panose="02040503050406030204" pitchFamily="18" charset="0"/>
+                            </a:rPr>
+                            <m:t>𝑛</m:t>
+                          </m:r>
+                          <m:r>
+                            <a:rPr lang="nl-BE" i="1">
+                              <a:latin typeface="Cambria Math" panose="02040503050406030204" pitchFamily="18" charset="0"/>
+                            </a:rPr>
+                            <m:t>+1</m:t>
+                          </m:r>
+                        </m:sub>
+                      </m:sSub>
+                      <m:r>
+                        <a:rPr lang="nl-BE" i="1">
+                          <a:latin typeface="Cambria Math" panose="02040503050406030204" pitchFamily="18" charset="0"/>
+                        </a:rPr>
+                        <m:t>,  ∀</m:t>
+                      </m:r>
+                      <m:r>
+                        <a:rPr lang="nl-BE" i="1">
+                          <a:latin typeface="Cambria Math" panose="02040503050406030204" pitchFamily="18" charset="0"/>
+                        </a:rPr>
+                        <m:t>𝑛</m:t>
+                      </m:r>
+                      <m:r>
+                        <a:rPr lang="nl-BE" i="1">
+                          <a:latin typeface="Cambria Math" panose="02040503050406030204" pitchFamily="18" charset="0"/>
+                        </a:rPr>
+                        <m:t>∈</m:t>
+                      </m:r>
+                      <m:sSub>
+                        <m:sSubPr>
+                          <m:ctrlPr>
+                            <a:rPr lang="nl-BE" i="1">
+                              <a:latin typeface="Cambria Math" panose="02040503050406030204" pitchFamily="18" charset="0"/>
+                            </a:rPr>
+                          </m:ctrlPr>
+                        </m:sSubPr>
+                        <m:e>
+                          <m:r>
+                            <a:rPr lang="nl-BE" i="1">
+                              <a:latin typeface="Cambria Math" panose="02040503050406030204" pitchFamily="18" charset="0"/>
+                            </a:rPr>
+                            <m:t>ℤ</m:t>
+                          </m:r>
+                        </m:e>
+                        <m:sub>
+                          <m:r>
+                            <a:rPr lang="nl-BE" i="1">
+                              <a:latin typeface="Cambria Math" panose="02040503050406030204" pitchFamily="18" charset="0"/>
+                            </a:rPr>
+                            <m:t>≥1</m:t>
+                          </m:r>
+                        </m:sub>
+                      </m:sSub>
+                    </m:oMath>
+                  </m:oMathPara>
+                </a14:m>
+                <a:endParaRPr lang="nl-BE" dirty="0"/>
+              </a:p>
+              <a:p>
+                <a:endParaRPr lang="nl-BE" dirty="0"/>
+              </a:p>
+              <a:p>
+                <a:r>
+                  <a:rPr lang="nl-BE" dirty="0"/>
+                  <a:t>Een rij </a:t>
+                </a:r>
+                <a14:m>
+                  <m:oMath xmlns:m="http://schemas.openxmlformats.org/officeDocument/2006/math">
+                    <m:sSubSup>
+                      <m:sSubSupPr>
+                        <m:ctrlPr>
+                          <a:rPr lang="nl-BE" i="1">
+                            <a:latin typeface="Cambria Math" panose="02040503050406030204" pitchFamily="18" charset="0"/>
+                          </a:rPr>
+                        </m:ctrlPr>
+                      </m:sSubSupPr>
+                      <m:e>
+                        <m:d>
+                          <m:dPr>
+                            <m:begChr m:val="{"/>
+                            <m:endChr m:val="}"/>
+                            <m:ctrlPr>
+                              <a:rPr lang="nl-BE" i="1">
+                                <a:latin typeface="Cambria Math" panose="02040503050406030204" pitchFamily="18" charset="0"/>
+                              </a:rPr>
+                            </m:ctrlPr>
+                          </m:dPr>
+                          <m:e>
+                            <m:sSub>
+                              <m:sSubPr>
+                                <m:ctrlPr>
+                                  <a:rPr lang="nl-BE" i="1">
+                                    <a:latin typeface="Cambria Math" panose="02040503050406030204" pitchFamily="18" charset="0"/>
+                                  </a:rPr>
+                                </m:ctrlPr>
+                              </m:sSubPr>
+                              <m:e>
+                                <m:r>
+                                  <a:rPr lang="nl-BE" i="1">
+                                    <a:latin typeface="Cambria Math" panose="02040503050406030204" pitchFamily="18" charset="0"/>
+                                  </a:rPr>
+                                  <m:t>𝑢</m:t>
+                                </m:r>
+                              </m:e>
+                              <m:sub>
+                                <m:r>
+                                  <a:rPr lang="nl-BE" i="1">
+                                    <a:latin typeface="Cambria Math" panose="02040503050406030204" pitchFamily="18" charset="0"/>
+                                  </a:rPr>
+                                  <m:t>𝑛</m:t>
+                                </m:r>
+                              </m:sub>
+                            </m:sSub>
+                          </m:e>
+                        </m:d>
+                      </m:e>
+                      <m:sub>
+                        <m:r>
+                          <a:rPr lang="nl-BE" i="1">
+                            <a:latin typeface="Cambria Math" panose="02040503050406030204" pitchFamily="18" charset="0"/>
+                          </a:rPr>
+                          <m:t>𝑛</m:t>
+                        </m:r>
+                        <m:r>
+                          <a:rPr lang="nl-BE" i="1">
+                            <a:latin typeface="Cambria Math" panose="02040503050406030204" pitchFamily="18" charset="0"/>
+                          </a:rPr>
+                          <m:t>=1</m:t>
+                        </m:r>
+                      </m:sub>
+                      <m:sup>
+                        <m:r>
+                          <a:rPr lang="nl-BE" i="1">
+                            <a:latin typeface="Cambria Math" panose="02040503050406030204" pitchFamily="18" charset="0"/>
+                          </a:rPr>
+                          <m:t>∞</m:t>
+                        </m:r>
+                      </m:sup>
+                    </m:sSubSup>
+                  </m:oMath>
+                </a14:m>
+                <a:r>
+                  <a:rPr lang="nl-BE" dirty="0"/>
+                  <a:t> is een </a:t>
+                </a:r>
+                <a:r>
+                  <a:rPr lang="nl-BE" b="1" dirty="0"/>
+                  <a:t>strikt dalende rij </a:t>
+                </a:r>
+                <a:r>
+                  <a:rPr lang="nl-BE" dirty="0"/>
+                  <a:t>als</a:t>
+                </a:r>
+              </a:p>
+              <a:p>
+                <a:pPr marL="0" indent="0">
+                  <a:buNone/>
+                </a:pPr>
+                <a:endParaRPr lang="nl-BE" i="1" dirty="0">
+                  <a:latin typeface="Cambria Math" panose="02040503050406030204" pitchFamily="18" charset="0"/>
+                </a:endParaRPr>
+              </a:p>
+              <a:p>
+                <a:pPr marL="0" indent="0">
+                  <a:buNone/>
+                </a:pPr>
+                <a14:m>
+                  <m:oMathPara xmlns:m="http://schemas.openxmlformats.org/officeDocument/2006/math">
+                    <m:oMath>
+                      <m:sSub>
+                        <m:sSubPr>
+                          <m:ctrlPr>
+                            <a:rPr lang="nl-BE" i="1">
+                              <a:latin typeface="Cambria Math" panose="02040503050406030204" pitchFamily="18" charset="0"/>
+                            </a:rPr>
+                          </m:ctrlPr>
+                        </m:sSubPr>
+                        <m:e>
+                          <m:r>
+                            <a:rPr lang="nl-BE" i="1">
+                              <a:latin typeface="Cambria Math" panose="02040503050406030204" pitchFamily="18" charset="0"/>
+                            </a:rPr>
+                            <m:t>𝑢</m:t>
+                          </m:r>
+                        </m:e>
+                        <m:sub>
+                          <m:r>
+                            <a:rPr lang="nl-BE" i="1">
+                              <a:latin typeface="Cambria Math" panose="02040503050406030204" pitchFamily="18" charset="0"/>
+                            </a:rPr>
+                            <m:t>𝑛</m:t>
+                          </m:r>
+                        </m:sub>
+                      </m:sSub>
+                      <m:r>
+                        <a:rPr lang="nl-BE" i="1">
+                          <a:latin typeface="Cambria Math" panose="02040503050406030204" pitchFamily="18" charset="0"/>
+                        </a:rPr>
+                        <m:t>&gt;</m:t>
+                      </m:r>
+                      <m:sSub>
+                        <m:sSubPr>
+                          <m:ctrlPr>
+                            <a:rPr lang="nl-BE" i="1">
+                              <a:latin typeface="Cambria Math" panose="02040503050406030204" pitchFamily="18" charset="0"/>
+                            </a:rPr>
+                          </m:ctrlPr>
+                        </m:sSubPr>
+                        <m:e>
+                          <m:r>
+                            <a:rPr lang="nl-BE" i="1">
+                              <a:latin typeface="Cambria Math" panose="02040503050406030204" pitchFamily="18" charset="0"/>
+                            </a:rPr>
+                            <m:t>𝑢</m:t>
+                          </m:r>
+                        </m:e>
+                        <m:sub>
+                          <m:r>
+                            <a:rPr lang="nl-BE" i="1">
+                              <a:latin typeface="Cambria Math" panose="02040503050406030204" pitchFamily="18" charset="0"/>
+                            </a:rPr>
+                            <m:t>𝑛</m:t>
+                          </m:r>
+                          <m:r>
+                            <a:rPr lang="nl-BE" i="1">
+                              <a:latin typeface="Cambria Math" panose="02040503050406030204" pitchFamily="18" charset="0"/>
+                            </a:rPr>
+                            <m:t>+1</m:t>
+                          </m:r>
+                        </m:sub>
+                      </m:sSub>
+                      <m:r>
+                        <a:rPr lang="nl-BE" i="1">
+                          <a:latin typeface="Cambria Math" panose="02040503050406030204" pitchFamily="18" charset="0"/>
+                        </a:rPr>
+                        <m:t>,  ∀</m:t>
+                      </m:r>
+                      <m:r>
+                        <a:rPr lang="nl-BE" i="1">
+                          <a:latin typeface="Cambria Math" panose="02040503050406030204" pitchFamily="18" charset="0"/>
+                        </a:rPr>
+                        <m:t>𝑛</m:t>
+                      </m:r>
+                      <m:r>
+                        <a:rPr lang="nl-BE" i="1">
+                          <a:latin typeface="Cambria Math" panose="02040503050406030204" pitchFamily="18" charset="0"/>
+                        </a:rPr>
+                        <m:t>∈</m:t>
+                      </m:r>
+                      <m:sSub>
+                        <m:sSubPr>
+                          <m:ctrlPr>
+                            <a:rPr lang="nl-BE" i="1">
+                              <a:latin typeface="Cambria Math" panose="02040503050406030204" pitchFamily="18" charset="0"/>
+                            </a:rPr>
+                          </m:ctrlPr>
+                        </m:sSubPr>
+                        <m:e>
+                          <m:r>
+                            <a:rPr lang="nl-BE" i="1">
+                              <a:latin typeface="Cambria Math" panose="02040503050406030204" pitchFamily="18" charset="0"/>
+                            </a:rPr>
+                            <m:t>ℤ</m:t>
+                          </m:r>
+                        </m:e>
+                        <m:sub>
+                          <m:r>
+                            <a:rPr lang="nl-BE" i="1">
+                              <a:latin typeface="Cambria Math" panose="02040503050406030204" pitchFamily="18" charset="0"/>
+                            </a:rPr>
+                            <m:t>≥1</m:t>
+                          </m:r>
+                        </m:sub>
+                      </m:sSub>
+                    </m:oMath>
+                  </m:oMathPara>
+                </a14:m>
+                <a:endParaRPr lang="nl-BE" dirty="0"/>
+              </a:p>
+            </p:txBody>
+          </p:sp>
+        </mc:Choice>
+        <mc:Fallback xmlns="">
+          <p:sp>
+            <p:nvSpPr>
+              <p:cNvPr id="3" name="Tijdelijke aanduiding voor inhoud 2">
+                <a:extLst>
+                  <a:ext uri="{FF2B5EF4-FFF2-40B4-BE49-F238E27FC236}">
+                    <a16:creationId xmlns:a16="http://schemas.microsoft.com/office/drawing/2014/main" id="{43BF45B8-A93F-DA57-2CF6-E2C73069B474}"/>
+                  </a:ext>
+                </a:extLst>
+              </p:cNvPr>
+              <p:cNvSpPr>
+                <a:spLocks noGrp="1" noRot="1" noChangeAspect="1" noMove="1" noResize="1" noEditPoints="1" noAdjustHandles="1" noChangeArrowheads="1" noChangeShapeType="1" noTextEdit="1"/>
+              </p:cNvSpPr>
+              <p:nvPr>
+                <p:ph idx="1"/>
+              </p:nvPr>
+            </p:nvSpPr>
+            <p:spPr>
+              <a:blipFill>
+                <a:blip r:embed="rId2"/>
+                <a:stretch>
+                  <a:fillRect l="-1043" t="-2381"/>
+                </a:stretch>
+              </a:blipFill>
+            </p:spPr>
+            <p:txBody>
+              <a:bodyPr/>
+              <a:lstStyle/>
+              <a:p>
+                <a:r>
+                  <a:rPr lang="nl-BE">
+                    <a:noFill/>
+                  </a:rPr>
+                  <a:t> </a:t>
+                </a:r>
+              </a:p>
+            </p:txBody>
+          </p:sp>
+        </mc:Fallback>
+      </mc:AlternateContent>
+      <p:sp>
+        <p:nvSpPr>
+          <p:cNvPr id="4" name="Tijdelijke aanduiding voor voettekst 3">
+            <a:extLst>
+              <a:ext uri="{FF2B5EF4-FFF2-40B4-BE49-F238E27FC236}">
+                <a16:creationId xmlns:a16="http://schemas.microsoft.com/office/drawing/2014/main" id="{7626AB6D-9C15-4C18-724C-F4181FF0EAC5}"/>
+              </a:ext>
+            </a:extLst>
+          </p:cNvPr>
+          <p:cNvSpPr>
+            <a:spLocks noGrp="1"/>
+          </p:cNvSpPr>
+          <p:nvPr>
+            <p:ph type="ftr" sz="quarter" idx="11"/>
+          </p:nvPr>
+        </p:nvSpPr>
+        <p:spPr/>
+        <p:txBody>
+          <a:bodyPr/>
+          <a:lstStyle/>
+          <a:p>
+            <a:r>
+              <a:rPr lang="en-GB"/>
+              <a:t>Oefenzittingen Analyse I - Jasper Visterin</a:t>
+            </a:r>
+          </a:p>
+        </p:txBody>
+      </p:sp>
+    </p:spTree>
+    <p:extLst>
+      <p:ext uri="{BB962C8B-B14F-4D97-AF65-F5344CB8AC3E}">
+        <p14:creationId xmlns:p14="http://schemas.microsoft.com/office/powerpoint/2010/main" val="291514021"/>
+      </p:ext>
+    </p:extLst>
+  </p:cSld>
+  <p:clrMapOvr>
+    <a:masterClrMapping/>
+  </p:clrMapOvr>
+  <p:timing>
+    <p:tnLst>
+      <p:par>
+        <p:cTn id="1" dur="indefinite" restart="never" nodeType="tmRoot">
+          <p:childTnLst>
+            <p:seq concurrent="1" nextAc="seek">
+              <p:cTn id="2" dur="indefinite" nodeType="mainSeq">
+                <p:childTnLst>
+                  <p:par>
+                    <p:cTn id="3" fill="hold">
+                      <p:stCondLst>
+                        <p:cond delay="indefinite"/>
+                      </p:stCondLst>
+                      <p:childTnLst>
+                        <p:par>
+                          <p:cTn id="4" fill="hold">
+                            <p:stCondLst>
+                              <p:cond delay="0"/>
+                            </p:stCondLst>
+                            <p:childTnLst>
+                              <p:par>
+                                <p:cTn id="5" presetID="1" presetClass="entr" presetSubtype="0" fill="hold" grpId="0" nodeType="clickEffect">
+                                  <p:stCondLst>
+                                    <p:cond delay="0"/>
+                                  </p:stCondLst>
+                                  <p:childTnLst>
+                                    <p:set>
+                                      <p:cBhvr>
+                                        <p:cTn id="6" dur="1" fill="hold">
+                                          <p:stCondLst>
+                                            <p:cond delay="0"/>
+                                          </p:stCondLst>
+                                        </p:cTn>
+                                        <p:tgtEl>
+                                          <p:spTgt spid="3">
+                                            <p:txEl>
+                                              <p:pRg st="0" end="0"/>
+                                            </p:txEl>
+                                          </p:spTgt>
+                                        </p:tgtEl>
+                                        <p:attrNameLst>
+                                          <p:attrName>style.visibility</p:attrName>
+                                        </p:attrNameLst>
+                                      </p:cBhvr>
+                                      <p:to>
+                                        <p:strVal val="visible"/>
+                                      </p:to>
+                                    </p:set>
+                                  </p:childTnLst>
+                                </p:cTn>
+                              </p:par>
+                            </p:childTnLst>
+                          </p:cTn>
+                        </p:par>
+                      </p:childTnLst>
+                    </p:cTn>
+                  </p:par>
+                  <p:par>
+                    <p:cTn id="7" fill="hold">
+                      <p:stCondLst>
+                        <p:cond delay="indefinite"/>
+                      </p:stCondLst>
+                      <p:childTnLst>
+                        <p:par>
+                          <p:cTn id="8" fill="hold">
+                            <p:stCondLst>
+                              <p:cond delay="0"/>
+                            </p:stCondLst>
+                            <p:childTnLst>
+                              <p:par>
+                                <p:cTn id="9" presetID="1" presetClass="entr" presetSubtype="0" fill="hold" grpId="0" nodeType="clickEffect">
+                                  <p:stCondLst>
+                                    <p:cond delay="0"/>
+                                  </p:stCondLst>
+                                  <p:childTnLst>
+                                    <p:set>
+                                      <p:cBhvr>
+                                        <p:cTn id="10" dur="1" fill="hold">
+                                          <p:stCondLst>
+                                            <p:cond delay="0"/>
+                                          </p:stCondLst>
+                                        </p:cTn>
+                                        <p:tgtEl>
+                                          <p:spTgt spid="3">
+                                            <p:txEl>
+                                              <p:pRg st="2" end="2"/>
+                                            </p:txEl>
+                                          </p:spTgt>
+                                        </p:tgtEl>
+                                        <p:attrNameLst>
+                                          <p:attrName>style.visibility</p:attrName>
+                                        </p:attrNameLst>
+                                      </p:cBhvr>
+                                      <p:to>
+                                        <p:strVal val="visible"/>
+                                      </p:to>
+                                    </p:set>
+                                  </p:childTnLst>
+                                </p:cTn>
+                              </p:par>
+                            </p:childTnLst>
+                          </p:cTn>
+                        </p:par>
+                      </p:childTnLst>
+                    </p:cTn>
+                  </p:par>
+                  <p:par>
+                    <p:cTn id="11" fill="hold">
+                      <p:stCondLst>
+                        <p:cond delay="indefinite"/>
+                      </p:stCondLst>
+                      <p:childTnLst>
+                        <p:par>
+                          <p:cTn id="12" fill="hold">
+                            <p:stCondLst>
+                              <p:cond delay="0"/>
+                            </p:stCondLst>
+                            <p:childTnLst>
+                              <p:par>
+                                <p:cTn id="13" presetID="1" presetClass="entr" presetSubtype="0" fill="hold" grpId="0" nodeType="clickEffect">
+                                  <p:stCondLst>
+                                    <p:cond delay="0"/>
+                                  </p:stCondLst>
+                                  <p:childTnLst>
+                                    <p:set>
+                                      <p:cBhvr>
+                                        <p:cTn id="14" dur="1" fill="hold">
+                                          <p:stCondLst>
+                                            <p:cond delay="0"/>
+                                          </p:stCondLst>
+                                        </p:cTn>
+                                        <p:tgtEl>
+                                          <p:spTgt spid="3">
+                                            <p:txEl>
+                                              <p:pRg st="4" end="4"/>
+                                            </p:txEl>
+                                          </p:spTgt>
+                                        </p:tgtEl>
+                                        <p:attrNameLst>
+                                          <p:attrName>style.visibility</p:attrName>
+                                        </p:attrNameLst>
+                                      </p:cBhvr>
+                                      <p:to>
+                                        <p:strVal val="visible"/>
+                                      </p:to>
+                                    </p:set>
+                                  </p:childTnLst>
+                                </p:cTn>
+                              </p:par>
+                            </p:childTnLst>
+                          </p:cTn>
+                        </p:par>
+                      </p:childTnLst>
+                    </p:cTn>
+                  </p:par>
+                  <p:par>
+                    <p:cTn id="15" fill="hold">
+                      <p:stCondLst>
+                        <p:cond delay="indefinite"/>
+                      </p:stCondLst>
+                      <p:childTnLst>
+                        <p:par>
+                          <p:cTn id="16" fill="hold">
+                            <p:stCondLst>
+                              <p:cond delay="0"/>
+                            </p:stCondLst>
+                            <p:childTnLst>
+                              <p:par>
+                                <p:cTn id="17" presetID="1" presetClass="entr" presetSubtype="0" fill="hold" grpId="0" nodeType="clickEffect">
+                                  <p:stCondLst>
+                                    <p:cond delay="0"/>
+                                  </p:stCondLst>
+                                  <p:childTnLst>
+                                    <p:set>
+                                      <p:cBhvr>
+                                        <p:cTn id="18" dur="1" fill="hold">
+                                          <p:stCondLst>
+                                            <p:cond delay="0"/>
+                                          </p:stCondLst>
+                                        </p:cTn>
+                                        <p:tgtEl>
+                                          <p:spTgt spid="3">
+                                            <p:txEl>
+                                              <p:pRg st="6" end="6"/>
+                                            </p:txEl>
+                                          </p:spTgt>
+                                        </p:tgtEl>
+                                        <p:attrNameLst>
+                                          <p:attrName>style.visibility</p:attrName>
+                                        </p:attrNameLst>
+                                      </p:cBhvr>
+                                      <p:to>
+                                        <p:strVal val="visible"/>
+                                      </p:to>
+                                    </p:set>
+                                  </p:childTnLst>
+                                </p:cTn>
+                              </p:par>
+                            </p:childTnLst>
+                          </p:cTn>
+                        </p:par>
+                      </p:childTnLst>
+                    </p:cTn>
+                  </p:par>
+                </p:childTnLst>
+              </p:cTn>
+              <p:prevCondLst>
+                <p:cond evt="onPrev" delay="0">
+                  <p:tgtEl>
+                    <p:sldTgt/>
+                  </p:tgtEl>
+                </p:cond>
+              </p:prevCondLst>
+              <p:nextCondLst>
+                <p:cond evt="onNext" delay="0">
+                  <p:tgtEl>
+                    <p:sldTgt/>
+                  </p:tgtEl>
+                </p:cond>
+              </p:nextCondLst>
+            </p:seq>
+          </p:childTnLst>
+        </p:cTn>
+      </p:par>
+    </p:tnLst>
+    <p:bldLst>
+      <p:bldP spid="3" grpId="0" build="p"/>
+    </p:bldLst>
+  </p:timing>
+</p:sld>
+</file>
+
+<file path=ppt/slides/slide30.xml><?xml version="1.0" encoding="utf-8"?>
 <p:sld xmlns:a="http://schemas.openxmlformats.org/drawingml/2006/main" xmlns:r="http://schemas.openxmlformats.org/officeDocument/2006/relationships" xmlns:p="http://schemas.openxmlformats.org/presentationml/2006/main">
   <p:cSld>
     <p:spTree>
@@ -22599,7 +26046,12 @@
             <p:ph type="title"/>
           </p:nvPr>
         </p:nvSpPr>
-        <p:spPr/>
+        <p:spPr>
+          <a:xfrm>
+            <a:off x="838199" y="365125"/>
+            <a:ext cx="11001375" cy="1325563"/>
+          </a:xfrm>
+        </p:spPr>
         <p:txBody>
           <a:bodyPr/>
           <a:lstStyle/>
@@ -22616,13 +26068,13 @@
             </a:r>
             <a:r>
               <a:rPr lang="nl-BE" dirty="0"/>
-              <a:t>zie 4.1 (i, j, k)</a:t>
+              <a:t>zie 3.4(g, h) en 4.1 (i, j, k)</a:t>
             </a:r>
           </a:p>
         </p:txBody>
       </p:sp>
-      <mc:AlternateContent xmlns:mc="http://schemas.openxmlformats.org/markup-compatibility/2006">
-        <mc:Choice xmlns:a14="http://schemas.microsoft.com/office/drawing/2010/main" Requires="a14">
+      <mc:AlternateContent xmlns:mc="http://schemas.openxmlformats.org/markup-compatibility/2006" xmlns:a14="http://schemas.microsoft.com/office/drawing/2010/main">
+        <mc:Choice Requires="a14">
           <p:sp>
             <p:nvSpPr>
               <p:cNvPr id="3" name="Tijdelijke aanduiding voor inhoud 2">
@@ -22875,10 +26327,10 @@
                           <m:t>𝑏𝑛</m:t>
                         </m:r>
                         <m:r>
-                          <a:rPr lang="nl-BE" b="0" i="1" smtClean="0">
-                            <a:latin typeface="Cambria Math" panose="02040503050406030204" pitchFamily="18" charset="0"/>
-                          </a:rPr>
-                          <m:t>⋅</m:t>
+                          <a:rPr lang="en-GB" b="0" i="1" smtClean="0">
+                            <a:latin typeface="Cambria Math" panose="02040503050406030204" pitchFamily="18" charset="0"/>
+                          </a:rPr>
+                          <m:t> </m:t>
                         </m:r>
                         <m:func>
                           <m:funcPr>
@@ -23527,7 +26979,7 @@
             </p:txBody>
           </p:sp>
         </mc:Choice>
-        <mc:Fallback>
+        <mc:Fallback xmlns="">
           <p:sp>
             <p:nvSpPr>
               <p:cNvPr id="3" name="Tijdelijke aanduiding voor inhoud 2">
@@ -23609,841 +27061,6 @@
   <p:clrMapOvr>
     <a:masterClrMapping/>
   </p:clrMapOvr>
-</p:sld>
-</file>
-
-<file path=ppt/slides/slide3.xml><?xml version="1.0" encoding="utf-8"?>
-<p:sld xmlns:a="http://schemas.openxmlformats.org/drawingml/2006/main" xmlns:r="http://schemas.openxmlformats.org/officeDocument/2006/relationships" xmlns:p="http://schemas.openxmlformats.org/presentationml/2006/main">
-  <p:cSld>
-    <p:spTree>
-      <p:nvGrpSpPr>
-        <p:cNvPr id="1" name=""/>
-        <p:cNvGrpSpPr/>
-        <p:nvPr/>
-      </p:nvGrpSpPr>
-      <p:grpSpPr>
-        <a:xfrm>
-          <a:off x="0" y="0"/>
-          <a:ext cx="0" cy="0"/>
-          <a:chOff x="0" y="0"/>
-          <a:chExt cx="0" cy="0"/>
-        </a:xfrm>
-      </p:grpSpPr>
-      <p:sp>
-        <p:nvSpPr>
-          <p:cNvPr id="2" name="Titel 1">
-            <a:extLst>
-              <a:ext uri="{FF2B5EF4-FFF2-40B4-BE49-F238E27FC236}">
-                <a16:creationId xmlns:a16="http://schemas.microsoft.com/office/drawing/2014/main" id="{3A12ADA9-91C4-6153-5032-F6539FBEF94C}"/>
-              </a:ext>
-            </a:extLst>
-          </p:cNvPr>
-          <p:cNvSpPr>
-            <a:spLocks noGrp="1"/>
-          </p:cNvSpPr>
-          <p:nvPr>
-            <p:ph type="title"/>
-          </p:nvPr>
-        </p:nvSpPr>
-        <p:spPr/>
-        <p:txBody>
-          <a:bodyPr/>
-          <a:lstStyle/>
-          <a:p>
-            <a:r>
-              <a:rPr lang="en-GB" dirty="0"/>
-              <a:t>(</a:t>
-            </a:r>
-            <a:r>
-              <a:rPr lang="en-GB" dirty="0" err="1"/>
-              <a:t>Strikt</a:t>
-            </a:r>
-            <a:r>
-              <a:rPr lang="en-GB" dirty="0"/>
-              <a:t>) </a:t>
-            </a:r>
-            <a:r>
-              <a:rPr lang="en-GB" dirty="0" err="1"/>
-              <a:t>Dalende</a:t>
-            </a:r>
-            <a:r>
-              <a:rPr lang="en-GB" dirty="0"/>
-              <a:t> </a:t>
-            </a:r>
-            <a:r>
-              <a:rPr lang="en-GB" dirty="0" err="1"/>
-              <a:t>Rijen</a:t>
-            </a:r>
-            <a:endParaRPr lang="nl-BE" dirty="0"/>
-          </a:p>
-        </p:txBody>
-      </p:sp>
-      <mc:AlternateContent xmlns:mc="http://schemas.openxmlformats.org/markup-compatibility/2006">
-        <mc:Choice xmlns:a14="http://schemas.microsoft.com/office/drawing/2010/main" Requires="a14">
-          <p:sp>
-            <p:nvSpPr>
-              <p:cNvPr id="3" name="Tijdelijke aanduiding voor inhoud 2">
-                <a:extLst>
-                  <a:ext uri="{FF2B5EF4-FFF2-40B4-BE49-F238E27FC236}">
-                    <a16:creationId xmlns:a16="http://schemas.microsoft.com/office/drawing/2014/main" id="{43BF45B8-A93F-DA57-2CF6-E2C73069B474}"/>
-                  </a:ext>
-                </a:extLst>
-              </p:cNvPr>
-              <p:cNvSpPr>
-                <a:spLocks noGrp="1"/>
-              </p:cNvSpPr>
-              <p:nvPr>
-                <p:ph idx="1"/>
-              </p:nvPr>
-            </p:nvSpPr>
-            <p:spPr/>
-            <p:txBody>
-              <a:bodyPr/>
-              <a:lstStyle/>
-              <a:p>
-                <a:r>
-                  <a:rPr lang="nl-BE" dirty="0"/>
-                  <a:t>Een rij </a:t>
-                </a:r>
-                <a14:m>
-                  <m:oMath xmlns:m="http://schemas.openxmlformats.org/officeDocument/2006/math">
-                    <m:sSubSup>
-                      <m:sSubSupPr>
-                        <m:ctrlPr>
-                          <a:rPr lang="nl-BE" i="1">
-                            <a:latin typeface="Cambria Math" panose="02040503050406030204" pitchFamily="18" charset="0"/>
-                          </a:rPr>
-                        </m:ctrlPr>
-                      </m:sSubSupPr>
-                      <m:e>
-                        <m:d>
-                          <m:dPr>
-                            <m:begChr m:val="{"/>
-                            <m:endChr m:val="}"/>
-                            <m:ctrlPr>
-                              <a:rPr lang="nl-BE" i="1">
-                                <a:latin typeface="Cambria Math" panose="02040503050406030204" pitchFamily="18" charset="0"/>
-                              </a:rPr>
-                            </m:ctrlPr>
-                          </m:dPr>
-                          <m:e>
-                            <m:sSub>
-                              <m:sSubPr>
-                                <m:ctrlPr>
-                                  <a:rPr lang="nl-BE" i="1">
-                                    <a:latin typeface="Cambria Math" panose="02040503050406030204" pitchFamily="18" charset="0"/>
-                                  </a:rPr>
-                                </m:ctrlPr>
-                              </m:sSubPr>
-                              <m:e>
-                                <m:r>
-                                  <a:rPr lang="nl-BE" i="1">
-                                    <a:latin typeface="Cambria Math" panose="02040503050406030204" pitchFamily="18" charset="0"/>
-                                  </a:rPr>
-                                  <m:t>𝑢</m:t>
-                                </m:r>
-                              </m:e>
-                              <m:sub>
-                                <m:r>
-                                  <a:rPr lang="nl-BE" i="1">
-                                    <a:latin typeface="Cambria Math" panose="02040503050406030204" pitchFamily="18" charset="0"/>
-                                  </a:rPr>
-                                  <m:t>𝑛</m:t>
-                                </m:r>
-                              </m:sub>
-                            </m:sSub>
-                          </m:e>
-                        </m:d>
-                      </m:e>
-                      <m:sub>
-                        <m:r>
-                          <a:rPr lang="nl-BE" i="1">
-                            <a:latin typeface="Cambria Math" panose="02040503050406030204" pitchFamily="18" charset="0"/>
-                          </a:rPr>
-                          <m:t>𝑛</m:t>
-                        </m:r>
-                        <m:r>
-                          <a:rPr lang="nl-BE" i="1">
-                            <a:latin typeface="Cambria Math" panose="02040503050406030204" pitchFamily="18" charset="0"/>
-                          </a:rPr>
-                          <m:t>=1</m:t>
-                        </m:r>
-                      </m:sub>
-                      <m:sup>
-                        <m:r>
-                          <a:rPr lang="nl-BE" i="1">
-                            <a:latin typeface="Cambria Math" panose="02040503050406030204" pitchFamily="18" charset="0"/>
-                          </a:rPr>
-                          <m:t>∞</m:t>
-                        </m:r>
-                      </m:sup>
-                    </m:sSubSup>
-                  </m:oMath>
-                </a14:m>
-                <a:r>
-                  <a:rPr lang="nl-BE" dirty="0"/>
-                  <a:t> is een </a:t>
-                </a:r>
-                <a:r>
-                  <a:rPr lang="nl-BE" b="1" dirty="0"/>
-                  <a:t>dalende rij </a:t>
-                </a:r>
-                <a:r>
-                  <a:rPr lang="nl-BE" dirty="0"/>
-                  <a:t>als</a:t>
-                </a:r>
-              </a:p>
-              <a:p>
-                <a:endParaRPr lang="nl-BE" dirty="0"/>
-              </a:p>
-              <a:p>
-                <a:pPr marL="0" indent="0">
-                  <a:buNone/>
-                </a:pPr>
-                <a14:m>
-                  <m:oMathPara xmlns:m="http://schemas.openxmlformats.org/officeDocument/2006/math">
-                    <m:oMath>
-                      <m:sSub>
-                        <m:sSubPr>
-                          <m:ctrlPr>
-                            <a:rPr lang="nl-BE" i="1">
-                              <a:latin typeface="Cambria Math" panose="02040503050406030204" pitchFamily="18" charset="0"/>
-                            </a:rPr>
-                          </m:ctrlPr>
-                        </m:sSubPr>
-                        <m:e>
-                          <m:r>
-                            <a:rPr lang="nl-BE" i="1">
-                              <a:latin typeface="Cambria Math" panose="02040503050406030204" pitchFamily="18" charset="0"/>
-                            </a:rPr>
-                            <m:t>𝑢</m:t>
-                          </m:r>
-                        </m:e>
-                        <m:sub>
-                          <m:r>
-                            <a:rPr lang="nl-BE" i="1">
-                              <a:latin typeface="Cambria Math" panose="02040503050406030204" pitchFamily="18" charset="0"/>
-                            </a:rPr>
-                            <m:t>𝑛</m:t>
-                          </m:r>
-                        </m:sub>
-                      </m:sSub>
-                      <m:r>
-                        <a:rPr lang="nl-BE" i="1">
-                          <a:latin typeface="Cambria Math" panose="02040503050406030204" pitchFamily="18" charset="0"/>
-                        </a:rPr>
-                        <m:t>≥</m:t>
-                      </m:r>
-                      <m:sSub>
-                        <m:sSubPr>
-                          <m:ctrlPr>
-                            <a:rPr lang="nl-BE" i="1">
-                              <a:latin typeface="Cambria Math" panose="02040503050406030204" pitchFamily="18" charset="0"/>
-                            </a:rPr>
-                          </m:ctrlPr>
-                        </m:sSubPr>
-                        <m:e>
-                          <m:r>
-                            <a:rPr lang="nl-BE" i="1">
-                              <a:latin typeface="Cambria Math" panose="02040503050406030204" pitchFamily="18" charset="0"/>
-                            </a:rPr>
-                            <m:t>𝑢</m:t>
-                          </m:r>
-                        </m:e>
-                        <m:sub>
-                          <m:r>
-                            <a:rPr lang="nl-BE" i="1">
-                              <a:latin typeface="Cambria Math" panose="02040503050406030204" pitchFamily="18" charset="0"/>
-                            </a:rPr>
-                            <m:t>𝑛</m:t>
-                          </m:r>
-                          <m:r>
-                            <a:rPr lang="nl-BE" i="1">
-                              <a:latin typeface="Cambria Math" panose="02040503050406030204" pitchFamily="18" charset="0"/>
-                            </a:rPr>
-                            <m:t>+1</m:t>
-                          </m:r>
-                        </m:sub>
-                      </m:sSub>
-                      <m:r>
-                        <a:rPr lang="nl-BE" i="1">
-                          <a:latin typeface="Cambria Math" panose="02040503050406030204" pitchFamily="18" charset="0"/>
-                        </a:rPr>
-                        <m:t>,  ∀</m:t>
-                      </m:r>
-                      <m:r>
-                        <a:rPr lang="nl-BE" i="1">
-                          <a:latin typeface="Cambria Math" panose="02040503050406030204" pitchFamily="18" charset="0"/>
-                        </a:rPr>
-                        <m:t>𝑛</m:t>
-                      </m:r>
-                      <m:r>
-                        <a:rPr lang="nl-BE" i="1">
-                          <a:latin typeface="Cambria Math" panose="02040503050406030204" pitchFamily="18" charset="0"/>
-                        </a:rPr>
-                        <m:t>∈</m:t>
-                      </m:r>
-                      <m:sSub>
-                        <m:sSubPr>
-                          <m:ctrlPr>
-                            <a:rPr lang="nl-BE" i="1">
-                              <a:latin typeface="Cambria Math" panose="02040503050406030204" pitchFamily="18" charset="0"/>
-                            </a:rPr>
-                          </m:ctrlPr>
-                        </m:sSubPr>
-                        <m:e>
-                          <m:r>
-                            <a:rPr lang="nl-BE" i="1">
-                              <a:latin typeface="Cambria Math" panose="02040503050406030204" pitchFamily="18" charset="0"/>
-                            </a:rPr>
-                            <m:t>ℤ</m:t>
-                          </m:r>
-                        </m:e>
-                        <m:sub>
-                          <m:r>
-                            <a:rPr lang="nl-BE" i="1">
-                              <a:latin typeface="Cambria Math" panose="02040503050406030204" pitchFamily="18" charset="0"/>
-                            </a:rPr>
-                            <m:t>≥1</m:t>
-                          </m:r>
-                        </m:sub>
-                      </m:sSub>
-                    </m:oMath>
-                  </m:oMathPara>
-                </a14:m>
-                <a:endParaRPr lang="nl-BE" dirty="0"/>
-              </a:p>
-              <a:p>
-                <a:endParaRPr lang="nl-BE" dirty="0"/>
-              </a:p>
-              <a:p>
-                <a:r>
-                  <a:rPr lang="nl-BE" dirty="0"/>
-                  <a:t>Een rij </a:t>
-                </a:r>
-                <a14:m>
-                  <m:oMath xmlns:m="http://schemas.openxmlformats.org/officeDocument/2006/math">
-                    <m:sSubSup>
-                      <m:sSubSupPr>
-                        <m:ctrlPr>
-                          <a:rPr lang="nl-BE" i="1">
-                            <a:latin typeface="Cambria Math" panose="02040503050406030204" pitchFamily="18" charset="0"/>
-                          </a:rPr>
-                        </m:ctrlPr>
-                      </m:sSubSupPr>
-                      <m:e>
-                        <m:d>
-                          <m:dPr>
-                            <m:begChr m:val="{"/>
-                            <m:endChr m:val="}"/>
-                            <m:ctrlPr>
-                              <a:rPr lang="nl-BE" i="1">
-                                <a:latin typeface="Cambria Math" panose="02040503050406030204" pitchFamily="18" charset="0"/>
-                              </a:rPr>
-                            </m:ctrlPr>
-                          </m:dPr>
-                          <m:e>
-                            <m:sSub>
-                              <m:sSubPr>
-                                <m:ctrlPr>
-                                  <a:rPr lang="nl-BE" i="1">
-                                    <a:latin typeface="Cambria Math" panose="02040503050406030204" pitchFamily="18" charset="0"/>
-                                  </a:rPr>
-                                </m:ctrlPr>
-                              </m:sSubPr>
-                              <m:e>
-                                <m:r>
-                                  <a:rPr lang="nl-BE" i="1">
-                                    <a:latin typeface="Cambria Math" panose="02040503050406030204" pitchFamily="18" charset="0"/>
-                                  </a:rPr>
-                                  <m:t>𝑢</m:t>
-                                </m:r>
-                              </m:e>
-                              <m:sub>
-                                <m:r>
-                                  <a:rPr lang="nl-BE" i="1">
-                                    <a:latin typeface="Cambria Math" panose="02040503050406030204" pitchFamily="18" charset="0"/>
-                                  </a:rPr>
-                                  <m:t>𝑛</m:t>
-                                </m:r>
-                              </m:sub>
-                            </m:sSub>
-                          </m:e>
-                        </m:d>
-                      </m:e>
-                      <m:sub>
-                        <m:r>
-                          <a:rPr lang="nl-BE" i="1">
-                            <a:latin typeface="Cambria Math" panose="02040503050406030204" pitchFamily="18" charset="0"/>
-                          </a:rPr>
-                          <m:t>𝑛</m:t>
-                        </m:r>
-                        <m:r>
-                          <a:rPr lang="nl-BE" i="1">
-                            <a:latin typeface="Cambria Math" panose="02040503050406030204" pitchFamily="18" charset="0"/>
-                          </a:rPr>
-                          <m:t>=1</m:t>
-                        </m:r>
-                      </m:sub>
-                      <m:sup>
-                        <m:r>
-                          <a:rPr lang="nl-BE" i="1">
-                            <a:latin typeface="Cambria Math" panose="02040503050406030204" pitchFamily="18" charset="0"/>
-                          </a:rPr>
-                          <m:t>∞</m:t>
-                        </m:r>
-                      </m:sup>
-                    </m:sSubSup>
-                  </m:oMath>
-                </a14:m>
-                <a:r>
-                  <a:rPr lang="nl-BE" dirty="0"/>
-                  <a:t> is een </a:t>
-                </a:r>
-                <a:r>
-                  <a:rPr lang="nl-BE" b="1" dirty="0"/>
-                  <a:t>strikt dalende rij </a:t>
-                </a:r>
-                <a:r>
-                  <a:rPr lang="nl-BE" dirty="0"/>
-                  <a:t>als</a:t>
-                </a:r>
-              </a:p>
-              <a:p>
-                <a:pPr marL="0" indent="0">
-                  <a:buNone/>
-                </a:pPr>
-                <a:endParaRPr lang="nl-BE" i="1" dirty="0">
-                  <a:latin typeface="Cambria Math" panose="02040503050406030204" pitchFamily="18" charset="0"/>
-                </a:endParaRPr>
-              </a:p>
-              <a:p>
-                <a:pPr marL="0" indent="0">
-                  <a:buNone/>
-                </a:pPr>
-                <a14:m>
-                  <m:oMathPara xmlns:m="http://schemas.openxmlformats.org/officeDocument/2006/math">
-                    <m:oMath>
-                      <m:sSub>
-                        <m:sSubPr>
-                          <m:ctrlPr>
-                            <a:rPr lang="nl-BE" i="1">
-                              <a:latin typeface="Cambria Math" panose="02040503050406030204" pitchFamily="18" charset="0"/>
-                            </a:rPr>
-                          </m:ctrlPr>
-                        </m:sSubPr>
-                        <m:e>
-                          <m:r>
-                            <a:rPr lang="nl-BE" i="1">
-                              <a:latin typeface="Cambria Math" panose="02040503050406030204" pitchFamily="18" charset="0"/>
-                            </a:rPr>
-                            <m:t>𝑢</m:t>
-                          </m:r>
-                        </m:e>
-                        <m:sub>
-                          <m:r>
-                            <a:rPr lang="nl-BE" i="1">
-                              <a:latin typeface="Cambria Math" panose="02040503050406030204" pitchFamily="18" charset="0"/>
-                            </a:rPr>
-                            <m:t>𝑛</m:t>
-                          </m:r>
-                        </m:sub>
-                      </m:sSub>
-                      <m:r>
-                        <a:rPr lang="nl-BE" i="1">
-                          <a:latin typeface="Cambria Math" panose="02040503050406030204" pitchFamily="18" charset="0"/>
-                        </a:rPr>
-                        <m:t>&gt;</m:t>
-                      </m:r>
-                      <m:sSub>
-                        <m:sSubPr>
-                          <m:ctrlPr>
-                            <a:rPr lang="nl-BE" i="1">
-                              <a:latin typeface="Cambria Math" panose="02040503050406030204" pitchFamily="18" charset="0"/>
-                            </a:rPr>
-                          </m:ctrlPr>
-                        </m:sSubPr>
-                        <m:e>
-                          <m:r>
-                            <a:rPr lang="nl-BE" i="1">
-                              <a:latin typeface="Cambria Math" panose="02040503050406030204" pitchFamily="18" charset="0"/>
-                            </a:rPr>
-                            <m:t>𝑢</m:t>
-                          </m:r>
-                        </m:e>
-                        <m:sub>
-                          <m:r>
-                            <a:rPr lang="nl-BE" i="1">
-                              <a:latin typeface="Cambria Math" panose="02040503050406030204" pitchFamily="18" charset="0"/>
-                            </a:rPr>
-                            <m:t>𝑛</m:t>
-                          </m:r>
-                          <m:r>
-                            <a:rPr lang="nl-BE" i="1">
-                              <a:latin typeface="Cambria Math" panose="02040503050406030204" pitchFamily="18" charset="0"/>
-                            </a:rPr>
-                            <m:t>+1</m:t>
-                          </m:r>
-                        </m:sub>
-                      </m:sSub>
-                      <m:r>
-                        <a:rPr lang="nl-BE" i="1">
-                          <a:latin typeface="Cambria Math" panose="02040503050406030204" pitchFamily="18" charset="0"/>
-                        </a:rPr>
-                        <m:t>,  ∀</m:t>
-                      </m:r>
-                      <m:r>
-                        <a:rPr lang="nl-BE" i="1">
-                          <a:latin typeface="Cambria Math" panose="02040503050406030204" pitchFamily="18" charset="0"/>
-                        </a:rPr>
-                        <m:t>𝑛</m:t>
-                      </m:r>
-                      <m:r>
-                        <a:rPr lang="nl-BE" i="1">
-                          <a:latin typeface="Cambria Math" panose="02040503050406030204" pitchFamily="18" charset="0"/>
-                        </a:rPr>
-                        <m:t>∈</m:t>
-                      </m:r>
-                      <m:sSub>
-                        <m:sSubPr>
-                          <m:ctrlPr>
-                            <a:rPr lang="nl-BE" i="1">
-                              <a:latin typeface="Cambria Math" panose="02040503050406030204" pitchFamily="18" charset="0"/>
-                            </a:rPr>
-                          </m:ctrlPr>
-                        </m:sSubPr>
-                        <m:e>
-                          <m:r>
-                            <a:rPr lang="nl-BE" i="1">
-                              <a:latin typeface="Cambria Math" panose="02040503050406030204" pitchFamily="18" charset="0"/>
-                            </a:rPr>
-                            <m:t>ℤ</m:t>
-                          </m:r>
-                        </m:e>
-                        <m:sub>
-                          <m:r>
-                            <a:rPr lang="nl-BE" i="1">
-                              <a:latin typeface="Cambria Math" panose="02040503050406030204" pitchFamily="18" charset="0"/>
-                            </a:rPr>
-                            <m:t>≥1</m:t>
-                          </m:r>
-                        </m:sub>
-                      </m:sSub>
-                    </m:oMath>
-                  </m:oMathPara>
-                </a14:m>
-                <a:endParaRPr lang="nl-BE" dirty="0"/>
-              </a:p>
-            </p:txBody>
-          </p:sp>
-        </mc:Choice>
-        <mc:Fallback>
-          <p:sp>
-            <p:nvSpPr>
-              <p:cNvPr id="3" name="Tijdelijke aanduiding voor inhoud 2">
-                <a:extLst>
-                  <a:ext uri="{FF2B5EF4-FFF2-40B4-BE49-F238E27FC236}">
-                    <a16:creationId xmlns:a16="http://schemas.microsoft.com/office/drawing/2014/main" id="{43BF45B8-A93F-DA57-2CF6-E2C73069B474}"/>
-                  </a:ext>
-                </a:extLst>
-              </p:cNvPr>
-              <p:cNvSpPr>
-                <a:spLocks noGrp="1" noRot="1" noChangeAspect="1" noMove="1" noResize="1" noEditPoints="1" noAdjustHandles="1" noChangeArrowheads="1" noChangeShapeType="1" noTextEdit="1"/>
-              </p:cNvSpPr>
-              <p:nvPr>
-                <p:ph idx="1"/>
-              </p:nvPr>
-            </p:nvSpPr>
-            <p:spPr>
-              <a:blipFill>
-                <a:blip r:embed="rId2"/>
-                <a:stretch>
-                  <a:fillRect l="-1043" t="-2381"/>
-                </a:stretch>
-              </a:blipFill>
-            </p:spPr>
-            <p:txBody>
-              <a:bodyPr/>
-              <a:lstStyle/>
-              <a:p>
-                <a:r>
-                  <a:rPr lang="nl-BE">
-                    <a:noFill/>
-                  </a:rPr>
-                  <a:t> </a:t>
-                </a:r>
-              </a:p>
-            </p:txBody>
-          </p:sp>
-        </mc:Fallback>
-      </mc:AlternateContent>
-      <p:sp>
-        <p:nvSpPr>
-          <p:cNvPr id="4" name="Tijdelijke aanduiding voor voettekst 3">
-            <a:extLst>
-              <a:ext uri="{FF2B5EF4-FFF2-40B4-BE49-F238E27FC236}">
-                <a16:creationId xmlns:a16="http://schemas.microsoft.com/office/drawing/2014/main" id="{7626AB6D-9C15-4C18-724C-F4181FF0EAC5}"/>
-              </a:ext>
-            </a:extLst>
-          </p:cNvPr>
-          <p:cNvSpPr>
-            <a:spLocks noGrp="1"/>
-          </p:cNvSpPr>
-          <p:nvPr>
-            <p:ph type="ftr" sz="quarter" idx="11"/>
-          </p:nvPr>
-        </p:nvSpPr>
-        <p:spPr/>
-        <p:txBody>
-          <a:bodyPr/>
-          <a:lstStyle/>
-          <a:p>
-            <a:r>
-              <a:rPr lang="en-GB"/>
-              <a:t>Oefenzittingen Analyse I - Jasper Visterin</a:t>
-            </a:r>
-          </a:p>
-        </p:txBody>
-      </p:sp>
-    </p:spTree>
-    <p:extLst>
-      <p:ext uri="{BB962C8B-B14F-4D97-AF65-F5344CB8AC3E}">
-        <p14:creationId xmlns:p14="http://schemas.microsoft.com/office/powerpoint/2010/main" val="291514021"/>
-      </p:ext>
-    </p:extLst>
-  </p:cSld>
-  <p:clrMapOvr>
-    <a:masterClrMapping/>
-  </p:clrMapOvr>
-  <p:timing>
-    <p:tnLst>
-      <p:par>
-        <p:cTn id="1" dur="indefinite" restart="never" nodeType="tmRoot">
-          <p:childTnLst>
-            <p:seq concurrent="1" nextAc="seek">
-              <p:cTn id="2" dur="indefinite" nodeType="mainSeq">
-                <p:childTnLst>
-                  <p:par>
-                    <p:cTn id="3" fill="hold">
-                      <p:stCondLst>
-                        <p:cond delay="indefinite"/>
-                      </p:stCondLst>
-                      <p:childTnLst>
-                        <p:par>
-                          <p:cTn id="4" fill="hold">
-                            <p:stCondLst>
-                              <p:cond delay="0"/>
-                            </p:stCondLst>
-                            <p:childTnLst>
-                              <p:par>
-                                <p:cTn id="5" presetID="1" presetClass="entr" presetSubtype="0" fill="hold" grpId="0" nodeType="clickEffect">
-                                  <p:stCondLst>
-                                    <p:cond delay="0"/>
-                                  </p:stCondLst>
-                                  <p:childTnLst>
-                                    <p:set>
-                                      <p:cBhvr>
-                                        <p:cTn id="6" dur="1" fill="hold">
-                                          <p:stCondLst>
-                                            <p:cond delay="0"/>
-                                          </p:stCondLst>
-                                        </p:cTn>
-                                        <p:tgtEl>
-                                          <p:spTgt spid="3">
-                                            <p:txEl>
-                                              <p:pRg st="0" end="0"/>
-                                            </p:txEl>
-                                          </p:spTgt>
-                                        </p:tgtEl>
-                                        <p:attrNameLst>
-                                          <p:attrName>style.visibility</p:attrName>
-                                        </p:attrNameLst>
-                                      </p:cBhvr>
-                                      <p:to>
-                                        <p:strVal val="visible"/>
-                                      </p:to>
-                                    </p:set>
-                                  </p:childTnLst>
-                                </p:cTn>
-                              </p:par>
-                            </p:childTnLst>
-                          </p:cTn>
-                        </p:par>
-                      </p:childTnLst>
-                    </p:cTn>
-                  </p:par>
-                  <p:par>
-                    <p:cTn id="7" fill="hold">
-                      <p:stCondLst>
-                        <p:cond delay="indefinite"/>
-                      </p:stCondLst>
-                      <p:childTnLst>
-                        <p:par>
-                          <p:cTn id="8" fill="hold">
-                            <p:stCondLst>
-                              <p:cond delay="0"/>
-                            </p:stCondLst>
-                            <p:childTnLst>
-                              <p:par>
-                                <p:cTn id="9" presetID="1" presetClass="entr" presetSubtype="0" fill="hold" grpId="0" nodeType="clickEffect">
-                                  <p:stCondLst>
-                                    <p:cond delay="0"/>
-                                  </p:stCondLst>
-                                  <p:childTnLst>
-                                    <p:set>
-                                      <p:cBhvr>
-                                        <p:cTn id="10" dur="1" fill="hold">
-                                          <p:stCondLst>
-                                            <p:cond delay="0"/>
-                                          </p:stCondLst>
-                                        </p:cTn>
-                                        <p:tgtEl>
-                                          <p:spTgt spid="3">
-                                            <p:txEl>
-                                              <p:pRg st="2" end="2"/>
-                                            </p:txEl>
-                                          </p:spTgt>
-                                        </p:tgtEl>
-                                        <p:attrNameLst>
-                                          <p:attrName>style.visibility</p:attrName>
-                                        </p:attrNameLst>
-                                      </p:cBhvr>
-                                      <p:to>
-                                        <p:strVal val="visible"/>
-                                      </p:to>
-                                    </p:set>
-                                  </p:childTnLst>
-                                </p:cTn>
-                              </p:par>
-                            </p:childTnLst>
-                          </p:cTn>
-                        </p:par>
-                      </p:childTnLst>
-                    </p:cTn>
-                  </p:par>
-                  <p:par>
-                    <p:cTn id="11" fill="hold">
-                      <p:stCondLst>
-                        <p:cond delay="indefinite"/>
-                      </p:stCondLst>
-                      <p:childTnLst>
-                        <p:par>
-                          <p:cTn id="12" fill="hold">
-                            <p:stCondLst>
-                              <p:cond delay="0"/>
-                            </p:stCondLst>
-                            <p:childTnLst>
-                              <p:par>
-                                <p:cTn id="13" presetID="1" presetClass="entr" presetSubtype="0" fill="hold" grpId="0" nodeType="clickEffect">
-                                  <p:stCondLst>
-                                    <p:cond delay="0"/>
-                                  </p:stCondLst>
-                                  <p:childTnLst>
-                                    <p:set>
-                                      <p:cBhvr>
-                                        <p:cTn id="14" dur="1" fill="hold">
-                                          <p:stCondLst>
-                                            <p:cond delay="0"/>
-                                          </p:stCondLst>
-                                        </p:cTn>
-                                        <p:tgtEl>
-                                          <p:spTgt spid="3">
-                                            <p:txEl>
-                                              <p:pRg st="4" end="4"/>
-                                            </p:txEl>
-                                          </p:spTgt>
-                                        </p:tgtEl>
-                                        <p:attrNameLst>
-                                          <p:attrName>style.visibility</p:attrName>
-                                        </p:attrNameLst>
-                                      </p:cBhvr>
-                                      <p:to>
-                                        <p:strVal val="visible"/>
-                                      </p:to>
-                                    </p:set>
-                                  </p:childTnLst>
-                                </p:cTn>
-                              </p:par>
-                            </p:childTnLst>
-                          </p:cTn>
-                        </p:par>
-                      </p:childTnLst>
-                    </p:cTn>
-                  </p:par>
-                  <p:par>
-                    <p:cTn id="15" fill="hold">
-                      <p:stCondLst>
-                        <p:cond delay="indefinite"/>
-                      </p:stCondLst>
-                      <p:childTnLst>
-                        <p:par>
-                          <p:cTn id="16" fill="hold">
-                            <p:stCondLst>
-                              <p:cond delay="0"/>
-                            </p:stCondLst>
-                            <p:childTnLst>
-                              <p:par>
-                                <p:cTn id="17" presetID="1" presetClass="entr" presetSubtype="0" fill="hold" grpId="0" nodeType="clickEffect">
-                                  <p:stCondLst>
-                                    <p:cond delay="0"/>
-                                  </p:stCondLst>
-                                  <p:childTnLst>
-                                    <p:set>
-                                      <p:cBhvr>
-                                        <p:cTn id="18" dur="1" fill="hold">
-                                          <p:stCondLst>
-                                            <p:cond delay="0"/>
-                                          </p:stCondLst>
-                                        </p:cTn>
-                                        <p:tgtEl>
-                                          <p:spTgt spid="3">
-                                            <p:txEl>
-                                              <p:pRg st="6" end="6"/>
-                                            </p:txEl>
-                                          </p:spTgt>
-                                        </p:tgtEl>
-                                        <p:attrNameLst>
-                                          <p:attrName>style.visibility</p:attrName>
-                                        </p:attrNameLst>
-                                      </p:cBhvr>
-                                      <p:to>
-                                        <p:strVal val="visible"/>
-                                      </p:to>
-                                    </p:set>
-                                  </p:childTnLst>
-                                </p:cTn>
-                              </p:par>
-                            </p:childTnLst>
-                          </p:cTn>
-                        </p:par>
-                      </p:childTnLst>
-                    </p:cTn>
-                  </p:par>
-                </p:childTnLst>
-              </p:cTn>
-              <p:prevCondLst>
-                <p:cond evt="onPrev" delay="0">
-                  <p:tgtEl>
-                    <p:sldTgt/>
-                  </p:tgtEl>
-                </p:cond>
-              </p:prevCondLst>
-              <p:nextCondLst>
-                <p:cond evt="onNext" delay="0">
-                  <p:tgtEl>
-                    <p:sldTgt/>
-                  </p:tgtEl>
-                </p:cond>
-              </p:nextCondLst>
-            </p:seq>
-          </p:childTnLst>
-        </p:cTn>
-      </p:par>
-    </p:tnLst>
-    <p:bldLst>
-      <p:bldP spid="3" grpId="0" build="p"/>
-    </p:bldLst>
-  </p:timing>
 </p:sld>
 </file>
 
@@ -26083,8 +28700,8 @@
           </a:fontRef>
         </p:style>
       </p:cxnSp>
-      <mc:AlternateContent xmlns:mc="http://schemas.openxmlformats.org/markup-compatibility/2006">
-        <mc:Choice xmlns:a14="http://schemas.microsoft.com/office/drawing/2010/main" Requires="a14">
+      <mc:AlternateContent xmlns:mc="http://schemas.openxmlformats.org/markup-compatibility/2006" xmlns:a14="http://schemas.microsoft.com/office/drawing/2010/main">
+        <mc:Choice Requires="a14">
           <p:sp>
             <p:nvSpPr>
               <p:cNvPr id="23" name="Tekstvak 22">
@@ -26131,7 +28748,7 @@
             </p:txBody>
           </p:sp>
         </mc:Choice>
-        <mc:Fallback>
+        <mc:Fallback xmlns="">
           <p:sp>
             <p:nvSpPr>
               <p:cNvPr id="23" name="Tekstvak 22">
@@ -26204,8 +28821,8 @@
           </a:p>
         </p:txBody>
       </p:sp>
-      <mc:AlternateContent xmlns:mc="http://schemas.openxmlformats.org/markup-compatibility/2006">
-        <mc:Choice xmlns:a14="http://schemas.microsoft.com/office/drawing/2010/main" Requires="a14">
+      <mc:AlternateContent xmlns:mc="http://schemas.openxmlformats.org/markup-compatibility/2006" xmlns:a14="http://schemas.microsoft.com/office/drawing/2010/main">
+        <mc:Choice Requires="a14">
           <p:sp>
             <p:nvSpPr>
               <p:cNvPr id="11" name="Tekstvak 10">
@@ -26330,7 +28947,7 @@
             </p:txBody>
           </p:sp>
         </mc:Choice>
-        <mc:Fallback>
+        <mc:Fallback xmlns="">
           <p:sp>
             <p:nvSpPr>
               <p:cNvPr id="11" name="Tekstvak 10">
@@ -26385,6 +29002,241 @@
   <p:clrMapOvr>
     <a:masterClrMapping/>
   </p:clrMapOvr>
+  <p:timing>
+    <p:tnLst>
+      <p:par>
+        <p:cTn id="1" dur="indefinite" restart="never" nodeType="tmRoot">
+          <p:childTnLst>
+            <p:seq concurrent="1" nextAc="seek">
+              <p:cTn id="2" dur="indefinite" nodeType="mainSeq">
+                <p:childTnLst>
+                  <p:par>
+                    <p:cTn id="3" fill="hold">
+                      <p:stCondLst>
+                        <p:cond delay="indefinite"/>
+                      </p:stCondLst>
+                      <p:childTnLst>
+                        <p:par>
+                          <p:cTn id="4" fill="hold">
+                            <p:stCondLst>
+                              <p:cond delay="0"/>
+                            </p:stCondLst>
+                            <p:childTnLst>
+                              <p:par>
+                                <p:cTn id="5" presetID="1" presetClass="entr" presetSubtype="0" fill="hold" grpId="0" nodeType="clickEffect">
+                                  <p:stCondLst>
+                                    <p:cond delay="0"/>
+                                  </p:stCondLst>
+                                  <p:childTnLst>
+                                    <p:set>
+                                      <p:cBhvr>
+                                        <p:cTn id="6" dur="1" fill="hold">
+                                          <p:stCondLst>
+                                            <p:cond delay="0"/>
+                                          </p:stCondLst>
+                                        </p:cTn>
+                                        <p:tgtEl>
+                                          <p:spTgt spid="7"/>
+                                        </p:tgtEl>
+                                        <p:attrNameLst>
+                                          <p:attrName>style.visibility</p:attrName>
+                                        </p:attrNameLst>
+                                      </p:cBhvr>
+                                      <p:to>
+                                        <p:strVal val="visible"/>
+                                      </p:to>
+                                    </p:set>
+                                  </p:childTnLst>
+                                </p:cTn>
+                              </p:par>
+                              <p:par>
+                                <p:cTn id="7" presetID="1" presetClass="entr" presetSubtype="0" fill="hold" grpId="0" nodeType="withEffect">
+                                  <p:stCondLst>
+                                    <p:cond delay="0"/>
+                                  </p:stCondLst>
+                                  <p:childTnLst>
+                                    <p:set>
+                                      <p:cBhvr>
+                                        <p:cTn id="8" dur="1" fill="hold">
+                                          <p:stCondLst>
+                                            <p:cond delay="0"/>
+                                          </p:stCondLst>
+                                        </p:cTn>
+                                        <p:tgtEl>
+                                          <p:spTgt spid="8"/>
+                                        </p:tgtEl>
+                                        <p:attrNameLst>
+                                          <p:attrName>style.visibility</p:attrName>
+                                        </p:attrNameLst>
+                                      </p:cBhvr>
+                                      <p:to>
+                                        <p:strVal val="visible"/>
+                                      </p:to>
+                                    </p:set>
+                                  </p:childTnLst>
+                                </p:cTn>
+                              </p:par>
+                              <p:par>
+                                <p:cTn id="9" presetID="1" presetClass="entr" presetSubtype="0" fill="hold" grpId="0" nodeType="withEffect">
+                                  <p:stCondLst>
+                                    <p:cond delay="0"/>
+                                  </p:stCondLst>
+                                  <p:childTnLst>
+                                    <p:set>
+                                      <p:cBhvr>
+                                        <p:cTn id="10" dur="1" fill="hold">
+                                          <p:stCondLst>
+                                            <p:cond delay="0"/>
+                                          </p:stCondLst>
+                                        </p:cTn>
+                                        <p:tgtEl>
+                                          <p:spTgt spid="10"/>
+                                        </p:tgtEl>
+                                        <p:attrNameLst>
+                                          <p:attrName>style.visibility</p:attrName>
+                                        </p:attrNameLst>
+                                      </p:cBhvr>
+                                      <p:to>
+                                        <p:strVal val="visible"/>
+                                      </p:to>
+                                    </p:set>
+                                  </p:childTnLst>
+                                </p:cTn>
+                              </p:par>
+                              <p:par>
+                                <p:cTn id="11" presetID="1" presetClass="entr" presetSubtype="0" fill="hold" grpId="0" nodeType="withEffect">
+                                  <p:stCondLst>
+                                    <p:cond delay="0"/>
+                                  </p:stCondLst>
+                                  <p:childTnLst>
+                                    <p:set>
+                                      <p:cBhvr>
+                                        <p:cTn id="12" dur="1" fill="hold">
+                                          <p:stCondLst>
+                                            <p:cond delay="0"/>
+                                          </p:stCondLst>
+                                        </p:cTn>
+                                        <p:tgtEl>
+                                          <p:spTgt spid="16"/>
+                                        </p:tgtEl>
+                                        <p:attrNameLst>
+                                          <p:attrName>style.visibility</p:attrName>
+                                        </p:attrNameLst>
+                                      </p:cBhvr>
+                                      <p:to>
+                                        <p:strVal val="visible"/>
+                                      </p:to>
+                                    </p:set>
+                                  </p:childTnLst>
+                                </p:cTn>
+                              </p:par>
+                            </p:childTnLst>
+                          </p:cTn>
+                        </p:par>
+                      </p:childTnLst>
+                    </p:cTn>
+                  </p:par>
+                  <p:par>
+                    <p:cTn id="13" fill="hold">
+                      <p:stCondLst>
+                        <p:cond delay="indefinite"/>
+                      </p:stCondLst>
+                      <p:childTnLst>
+                        <p:par>
+                          <p:cTn id="14" fill="hold">
+                            <p:stCondLst>
+                              <p:cond delay="0"/>
+                            </p:stCondLst>
+                            <p:childTnLst>
+                              <p:par>
+                                <p:cTn id="15" presetID="1" presetClass="entr" presetSubtype="0" fill="hold" nodeType="clickEffect">
+                                  <p:stCondLst>
+                                    <p:cond delay="0"/>
+                                  </p:stCondLst>
+                                  <p:childTnLst>
+                                    <p:set>
+                                      <p:cBhvr>
+                                        <p:cTn id="16" dur="1" fill="hold">
+                                          <p:stCondLst>
+                                            <p:cond delay="0"/>
+                                          </p:stCondLst>
+                                        </p:cTn>
+                                        <p:tgtEl>
+                                          <p:spTgt spid="20"/>
+                                        </p:tgtEl>
+                                        <p:attrNameLst>
+                                          <p:attrName>style.visibility</p:attrName>
+                                        </p:attrNameLst>
+                                      </p:cBhvr>
+                                      <p:to>
+                                        <p:strVal val="visible"/>
+                                      </p:to>
+                                    </p:set>
+                                  </p:childTnLst>
+                                </p:cTn>
+                              </p:par>
+                              <p:par>
+                                <p:cTn id="17" presetID="1" presetClass="entr" presetSubtype="0" fill="hold" grpId="0" nodeType="withEffect">
+                                  <p:stCondLst>
+                                    <p:cond delay="0"/>
+                                  </p:stCondLst>
+                                  <p:childTnLst>
+                                    <p:set>
+                                      <p:cBhvr>
+                                        <p:cTn id="18" dur="1" fill="hold">
+                                          <p:stCondLst>
+                                            <p:cond delay="0"/>
+                                          </p:stCondLst>
+                                        </p:cTn>
+                                        <p:tgtEl>
+                                          <p:spTgt spid="23"/>
+                                        </p:tgtEl>
+                                        <p:attrNameLst>
+                                          <p:attrName>style.visibility</p:attrName>
+                                        </p:attrNameLst>
+                                      </p:cBhvr>
+                                      <p:to>
+                                        <p:strVal val="visible"/>
+                                      </p:to>
+                                    </p:set>
+                                  </p:childTnLst>
+                                </p:cTn>
+                              </p:par>
+                            </p:childTnLst>
+                          </p:cTn>
+                        </p:par>
+                      </p:childTnLst>
+                    </p:cTn>
+                  </p:par>
+                </p:childTnLst>
+              </p:cTn>
+              <p:prevCondLst>
+                <p:cond evt="onPrev" delay="0">
+                  <p:tgtEl>
+                    <p:sldTgt/>
+                  </p:tgtEl>
+                </p:cond>
+              </p:prevCondLst>
+              <p:nextCondLst>
+                <p:cond evt="onNext" delay="0">
+                  <p:tgtEl>
+                    <p:sldTgt/>
+                  </p:tgtEl>
+                </p:cond>
+              </p:nextCondLst>
+            </p:seq>
+          </p:childTnLst>
+        </p:cTn>
+      </p:par>
+    </p:tnLst>
+    <p:bldLst>
+      <p:bldP spid="7" grpId="0" animBg="1"/>
+      <p:bldP spid="8" grpId="0"/>
+      <p:bldP spid="10" grpId="0"/>
+      <p:bldP spid="16" grpId="0"/>
+      <p:bldP spid="23" grpId="0"/>
+    </p:bldLst>
+  </p:timing>
 </p:sld>
 </file>
 
@@ -27549,8 +30401,8 @@
           </a:p>
         </p:txBody>
       </p:sp>
-      <mc:AlternateContent xmlns:mc="http://schemas.openxmlformats.org/markup-compatibility/2006">
-        <mc:Choice xmlns:a14="http://schemas.microsoft.com/office/drawing/2010/main" Requires="a14">
+      <mc:AlternateContent xmlns:mc="http://schemas.openxmlformats.org/markup-compatibility/2006" xmlns:a14="http://schemas.microsoft.com/office/drawing/2010/main">
+        <mc:Choice Requires="a14">
           <p:sp>
             <p:nvSpPr>
               <p:cNvPr id="7" name="Tijdelijke aanduiding voor inhoud 6">
@@ -27958,7 +30810,7 @@
             </p:txBody>
           </p:sp>
         </mc:Choice>
-        <mc:Fallback>
+        <mc:Fallback xmlns="">
           <p:sp>
             <p:nvSpPr>
               <p:cNvPr id="7" name="Tijdelijke aanduiding voor inhoud 6">

--- a/files/Oefenzitting 3.pptx
+++ b/files/Oefenzitting 3.pptx
@@ -226,7 +226,7 @@
           <a:p>
             <a:fld id="{A9DB7E03-661F-4C0B-9E36-F84246C76B04}" type="datetimeFigureOut">
               <a:rPr lang="nl-BE" smtClean="0"/>
-              <a:t>23/10/2026</a:t>
+              <a:t>25/10/2026</a:t>
             </a:fld>
             <a:endParaRPr lang="nl-BE"/>
           </a:p>
@@ -727,7 +727,7 @@
           <a:p>
             <a:fld id="{248AEA1D-3A63-4DCC-8F9E-CD0DD112EA0F}" type="datetime1">
               <a:rPr lang="en-GB" smtClean="0"/>
-              <a:t>23/10/2026</a:t>
+              <a:t>25/10/2026</a:t>
             </a:fld>
             <a:endParaRPr lang="en-GB"/>
           </a:p>
@@ -930,7 +930,7 @@
           <a:p>
             <a:fld id="{151C7047-593E-4161-A5AA-2912C55A020C}" type="datetime1">
               <a:rPr lang="en-GB" smtClean="0"/>
-              <a:t>23/10/2026</a:t>
+              <a:t>25/10/2026</a:t>
             </a:fld>
             <a:endParaRPr lang="en-GB"/>
           </a:p>
@@ -1143,7 +1143,7 @@
           <a:p>
             <a:fld id="{699A5536-8A5B-4EF1-9BEC-91F04DF48C09}" type="datetime1">
               <a:rPr lang="en-GB" smtClean="0"/>
-              <a:t>23/10/2026</a:t>
+              <a:t>25/10/2026</a:t>
             </a:fld>
             <a:endParaRPr lang="en-GB"/>
           </a:p>
@@ -1346,7 +1346,7 @@
           <a:p>
             <a:fld id="{69D5B8CA-4143-4DB4-B3DE-A86564E80819}" type="datetime1">
               <a:rPr lang="en-GB" smtClean="0"/>
-              <a:t>23/10/2026</a:t>
+              <a:t>25/10/2026</a:t>
             </a:fld>
             <a:endParaRPr lang="en-GB"/>
           </a:p>
@@ -1625,7 +1625,7 @@
           <a:p>
             <a:fld id="{E5702A0E-D15A-4F40-9977-39CB8C790C52}" type="datetime1">
               <a:rPr lang="en-GB" smtClean="0"/>
-              <a:t>23/10/2026</a:t>
+              <a:t>25/10/2026</a:t>
             </a:fld>
             <a:endParaRPr lang="en-GB"/>
           </a:p>
@@ -1896,7 +1896,7 @@
           <a:p>
             <a:fld id="{FE6CB1B1-EFD3-4622-A266-A9B50BDDB889}" type="datetime1">
               <a:rPr lang="en-GB" smtClean="0"/>
-              <a:t>23/10/2026</a:t>
+              <a:t>25/10/2026</a:t>
             </a:fld>
             <a:endParaRPr lang="en-GB"/>
           </a:p>
@@ -2314,7 +2314,7 @@
           <a:p>
             <a:fld id="{EDCDDD00-FA74-4297-9563-A6F8F6747D94}" type="datetime1">
               <a:rPr lang="en-GB" smtClean="0"/>
-              <a:t>23/10/2026</a:t>
+              <a:t>25/10/2026</a:t>
             </a:fld>
             <a:endParaRPr lang="en-GB"/>
           </a:p>
@@ -2459,7 +2459,7 @@
           <a:p>
             <a:fld id="{1F14F46C-CEF6-41BB-B38E-8E1DFBBF95E1}" type="datetime1">
               <a:rPr lang="en-GB" smtClean="0"/>
-              <a:t>23/10/2026</a:t>
+              <a:t>25/10/2026</a:t>
             </a:fld>
             <a:endParaRPr lang="en-GB"/>
           </a:p>
@@ -2575,7 +2575,7 @@
           <a:p>
             <a:fld id="{DA2372E5-6DA2-4819-A932-963CCE7DCB96}" type="datetime1">
               <a:rPr lang="en-GB" smtClean="0"/>
-              <a:t>23/10/2026</a:t>
+              <a:t>25/10/2026</a:t>
             </a:fld>
             <a:endParaRPr lang="en-GB"/>
           </a:p>
@@ -2891,7 +2891,7 @@
           <a:p>
             <a:fld id="{68D5B330-7BF2-4076-9D48-5C97281A2A16}" type="datetime1">
               <a:rPr lang="en-GB" smtClean="0"/>
-              <a:t>23/10/2026</a:t>
+              <a:t>25/10/2026</a:t>
             </a:fld>
             <a:endParaRPr lang="en-GB"/>
           </a:p>
@@ -3183,7 +3183,7 @@
           <a:p>
             <a:fld id="{9A34BC19-953E-4C1B-949F-F6CB74DE458F}" type="datetime1">
               <a:rPr lang="en-GB" smtClean="0"/>
-              <a:t>23/10/2026</a:t>
+              <a:t>25/10/2026</a:t>
             </a:fld>
             <a:endParaRPr lang="en-GB"/>
           </a:p>
@@ -3429,7 +3429,7 @@
           <a:p>
             <a:fld id="{9E31DF74-C119-425A-907A-F8F97C0742ED}" type="datetime1">
               <a:rPr lang="en-GB" smtClean="0"/>
-              <a:t>23/10/2026</a:t>
+              <a:t>25/10/2026</a:t>
             </a:fld>
             <a:endParaRPr lang="en-GB"/>
           </a:p>
@@ -16079,31 +16079,61 @@
                       </a:rPr>
                       <m:t>sin</m:t>
                     </m:r>
-                    <m:r>
-                      <a:rPr lang="nl-BE" i="1">
-                        <a:latin typeface="Cambria Math" panose="02040503050406030204" pitchFamily="18" charset="0"/>
-                      </a:rPr>
-                      <m:t> </m:t>
-                    </m:r>
+                    <m:d>
+                      <m:dPr>
+                        <m:ctrlPr>
+                          <a:rPr lang="nl-BE" i="1">
+                            <a:latin typeface="Cambria Math" panose="02040503050406030204" pitchFamily="18" charset="0"/>
+                          </a:rPr>
+                        </m:ctrlPr>
+                      </m:dPr>
+                      <m:e>
+                        <m:f>
+                          <m:fPr>
+                            <m:ctrlPr>
+                              <a:rPr lang="nl-BE" i="1">
+                                <a:latin typeface="Cambria Math" panose="02040503050406030204" pitchFamily="18" charset="0"/>
+                              </a:rPr>
+                            </m:ctrlPr>
+                          </m:fPr>
+                          <m:num>
+                            <m:r>
+                              <a:rPr lang="nl-BE" i="1">
+                                <a:latin typeface="Cambria Math" panose="02040503050406030204" pitchFamily="18" charset="0"/>
+                              </a:rPr>
+                              <m:t>𝑛</m:t>
+                            </m:r>
+                            <m:r>
+                              <a:rPr lang="nl-BE" i="1">
+                                <a:latin typeface="Cambria Math" panose="02040503050406030204" pitchFamily="18" charset="0"/>
+                              </a:rPr>
+                              <m:t>𝜋</m:t>
+                            </m:r>
+                          </m:num>
+                          <m:den>
+                            <m:r>
+                              <a:rPr lang="nl-BE" i="1">
+                                <a:latin typeface="Cambria Math" panose="02040503050406030204" pitchFamily="18" charset="0"/>
+                              </a:rPr>
+                              <m:t>4</m:t>
+                            </m:r>
+                          </m:den>
+                        </m:f>
+                      </m:e>
+                    </m:d>
                   </m:oMath>
                 </a14:m>
                 <a:r>
                   <a:rPr lang="nl-BE" dirty="0"/>
-                  <a:t>is </a:t>
+                  <a:t> is </a:t>
                 </a:r>
                 <a14:m>
                   <m:oMath xmlns:m="http://schemas.openxmlformats.org/officeDocument/2006/math">
                     <m:r>
-                      <a:rPr lang="nl-BE" i="1" dirty="0">
+                      <a:rPr lang="nl-BE" b="0" i="1" dirty="0" smtClean="0">
                         <a:latin typeface="Cambria Math" panose="02040503050406030204" pitchFamily="18" charset="0"/>
                       </a:rPr>
-                      <m:t>2</m:t>
-                    </m:r>
-                    <m:r>
-                      <a:rPr lang="nl-BE" i="1" dirty="0">
-                        <a:latin typeface="Cambria Math" panose="02040503050406030204" pitchFamily="18" charset="0"/>
-                      </a:rPr>
-                      <m:t>𝜋</m:t>
+                      <m:t>8</m:t>
                     </m:r>
                   </m:oMath>
                 </a14:m>
@@ -16197,19 +16227,7 @@
                           <a:rPr lang="nl-BE" b="0" i="1" smtClean="0">
                             <a:latin typeface="Cambria Math" panose="02040503050406030204" pitchFamily="18" charset="0"/>
                           </a:rPr>
-                          <m:t>2</m:t>
-                        </m:r>
-                        <m:r>
-                          <a:rPr lang="nl-BE" b="0" i="1" smtClean="0">
-                            <a:latin typeface="Cambria Math" panose="02040503050406030204" pitchFamily="18" charset="0"/>
-                          </a:rPr>
-                          <m:t>𝜋</m:t>
-                        </m:r>
-                        <m:r>
-                          <a:rPr lang="nl-BE" b="0" i="1" smtClean="0">
-                            <a:latin typeface="Cambria Math" panose="02040503050406030204" pitchFamily="18" charset="0"/>
-                          </a:rPr>
-                          <m:t>,2</m:t>
+                          <m:t>2,8</m:t>
                         </m:r>
                       </m:e>
                     </m:d>
@@ -16217,101 +16235,11 @@
                       <a:rPr lang="nl-BE" b="0" i="1" smtClean="0">
                         <a:latin typeface="Cambria Math" panose="02040503050406030204" pitchFamily="18" charset="0"/>
                       </a:rPr>
-                      <m:t>=2</m:t>
-                    </m:r>
-                    <m:r>
-                      <a:rPr lang="nl-BE" b="0" i="1" smtClean="0">
-                        <a:latin typeface="Cambria Math" panose="02040503050406030204" pitchFamily="18" charset="0"/>
-                      </a:rPr>
-                      <m:t>𝜋</m:t>
+                      <m:t>=8</m:t>
                     </m:r>
                   </m:oMath>
                 </a14:m>
                 <a:endParaRPr lang="nl-BE" dirty="0"/>
-              </a:p>
-              <a:p>
-                <a:pPr lvl="1"/>
-                <a14:m>
-                  <m:oMath xmlns:m="http://schemas.openxmlformats.org/officeDocument/2006/math">
-                    <m:f>
-                      <m:fPr>
-                        <m:ctrlPr>
-                          <a:rPr lang="nl-BE" b="0" i="1" smtClean="0">
-                            <a:latin typeface="Cambria Math" panose="02040503050406030204" pitchFamily="18" charset="0"/>
-                          </a:rPr>
-                        </m:ctrlPr>
-                      </m:fPr>
-                      <m:num>
-                        <m:r>
-                          <a:rPr lang="nl-BE" b="0" i="1" smtClean="0">
-                            <a:latin typeface="Cambria Math" panose="02040503050406030204" pitchFamily="18" charset="0"/>
-                          </a:rPr>
-                          <m:t>𝑛</m:t>
-                        </m:r>
-                        <m:r>
-                          <a:rPr lang="nl-BE" b="0" i="1" smtClean="0">
-                            <a:latin typeface="Cambria Math" panose="02040503050406030204" pitchFamily="18" charset="0"/>
-                          </a:rPr>
-                          <m:t>𝜋</m:t>
-                        </m:r>
-                      </m:num>
-                      <m:den>
-                        <m:r>
-                          <a:rPr lang="nl-BE" b="0" i="1" smtClean="0">
-                            <a:latin typeface="Cambria Math" panose="02040503050406030204" pitchFamily="18" charset="0"/>
-                          </a:rPr>
-                          <m:t>4</m:t>
-                        </m:r>
-                      </m:den>
-                    </m:f>
-                    <m:r>
-                      <a:rPr lang="nl-BE" b="0" i="1" smtClean="0">
-                        <a:latin typeface="Cambria Math" panose="02040503050406030204" pitchFamily="18" charset="0"/>
-                      </a:rPr>
-                      <m:t>=2</m:t>
-                    </m:r>
-                    <m:r>
-                      <a:rPr lang="nl-BE" b="0" i="1" smtClean="0">
-                        <a:latin typeface="Cambria Math" panose="02040503050406030204" pitchFamily="18" charset="0"/>
-                      </a:rPr>
-                      <m:t>𝜋</m:t>
-                    </m:r>
-                    <m:r>
-                      <a:rPr lang="nl-BE" b="0" i="1" smtClean="0">
-                        <a:latin typeface="Cambria Math" panose="02040503050406030204" pitchFamily="18" charset="0"/>
-                      </a:rPr>
-                      <m:t>𝑘</m:t>
-                    </m:r>
-                    <m:r>
-                      <a:rPr lang="nl-BE" b="0" i="1" smtClean="0">
-                        <a:latin typeface="Cambria Math" panose="02040503050406030204" pitchFamily="18" charset="0"/>
-                      </a:rPr>
-                      <m:t>→</m:t>
-                    </m:r>
-                    <m:r>
-                      <a:rPr lang="nl-BE" b="0" i="1" smtClean="0">
-                        <a:latin typeface="Cambria Math" panose="02040503050406030204" pitchFamily="18" charset="0"/>
-                      </a:rPr>
-                      <m:t>𝑛</m:t>
-                    </m:r>
-                    <m:r>
-                      <a:rPr lang="nl-BE" b="0" i="1" smtClean="0">
-                        <a:latin typeface="Cambria Math" panose="02040503050406030204" pitchFamily="18" charset="0"/>
-                      </a:rPr>
-                      <m:t>=8</m:t>
-                    </m:r>
-                    <m:r>
-                      <a:rPr lang="nl-BE" b="0" i="1" smtClean="0">
-                        <a:latin typeface="Cambria Math" panose="02040503050406030204" pitchFamily="18" charset="0"/>
-                      </a:rPr>
-                      <m:t>𝑘</m:t>
-                    </m:r>
-                  </m:oMath>
-                </a14:m>
-                <a:r>
-                  <a:rPr lang="nl-BE" dirty="0"/>
-                  <a:t>  </a:t>
-                </a:r>
               </a:p>
               <a:p>
                 <a:pPr lvl="1"/>
@@ -16826,26 +16754,39 @@
                                   </p:childTnLst>
                                 </p:cTn>
                               </p:par>
-                            </p:childTnLst>
-                          </p:cTn>
-                        </p:par>
-                      </p:childTnLst>
-                    </p:cTn>
-                  </p:par>
-                  <p:par>
-                    <p:cTn id="11" fill="hold">
-                      <p:stCondLst>
-                        <p:cond delay="indefinite"/>
-                      </p:stCondLst>
-                      <p:childTnLst>
-                        <p:par>
-                          <p:cTn id="12" fill="hold">
-                            <p:stCondLst>
-                              <p:cond delay="0"/>
-                            </p:stCondLst>
-                            <p:childTnLst>
                               <p:par>
-                                <p:cTn id="13" presetID="1" presetClass="entr" presetSubtype="0" fill="hold" grpId="0" nodeType="clickEffect">
+                                <p:cTn id="11" presetID="1" presetClass="entr" presetSubtype="0" fill="hold" grpId="0" nodeType="withEffect">
+                                  <p:stCondLst>
+                                    <p:cond delay="0"/>
+                                  </p:stCondLst>
+                                  <p:childTnLst>
+                                    <p:set>
+                                      <p:cBhvr>
+                                        <p:cTn id="12" dur="1" fill="hold">
+                                          <p:stCondLst>
+                                            <p:cond delay="0"/>
+                                          </p:stCondLst>
+                                        </p:cTn>
+                                        <p:tgtEl>
+                                          <p:spTgt spid="3">
+                                            <p:txEl>
+                                              <p:pRg st="2" end="2"/>
+                                            </p:txEl>
+                                          </p:spTgt>
+                                        </p:tgtEl>
+                                        <p:attrNameLst>
+                                          <p:attrName>style.visibility</p:attrName>
+                                        </p:attrNameLst>
+                                      </p:cBhvr>
+                                      <p:to>
+                                        <p:strVal val="visible"/>
+                                      </p:to>
+                                    </p:set>
+                                  </p:childTnLst>
+                                </p:cTn>
+                              </p:par>
+                              <p:par>
+                                <p:cTn id="13" presetID="1" presetClass="entr" presetSubtype="0" fill="hold" grpId="0" nodeType="withEffect">
                                   <p:stCondLst>
                                     <p:cond delay="0"/>
                                   </p:stCondLst>
@@ -16860,7 +16801,7 @@
                                         <p:tgtEl>
                                           <p:spTgt spid="3">
                                             <p:txEl>
-                                              <p:pRg st="2" end="2"/>
+                                              <p:pRg st="3" end="3"/>
                                             </p:txEl>
                                           </p:spTgt>
                                         </p:tgtEl>
@@ -16909,7 +16850,7 @@
                                         <p:tgtEl>
                                           <p:spTgt spid="3">
                                             <p:txEl>
-                                              <p:pRg st="3" end="3"/>
+                                              <p:pRg st="4" end="4"/>
                                             </p:txEl>
                                           </p:spTgt>
                                         </p:tgtEl>
@@ -16958,38 +16899,7 @@
                                         <p:tgtEl>
                                           <p:spTgt spid="3">
                                             <p:txEl>
-                                              <p:pRg st="4" end="4"/>
-                                            </p:txEl>
-                                          </p:spTgt>
-                                        </p:tgtEl>
-                                        <p:attrNameLst>
-                                          <p:attrName>style.visibility</p:attrName>
-                                        </p:attrNameLst>
-                                      </p:cBhvr>
-                                      <p:to>
-                                        <p:strVal val="visible"/>
-                                      </p:to>
-                                    </p:set>
-                                  </p:childTnLst>
-                                </p:cTn>
-                              </p:par>
-                              <p:par>
-                                <p:cTn id="23" presetID="1" presetClass="entr" presetSubtype="0" fill="hold" grpId="0" nodeType="withEffect">
-                                  <p:stCondLst>
-                                    <p:cond delay="0"/>
-                                  </p:stCondLst>
-                                  <p:childTnLst>
-                                    <p:set>
-                                      <p:cBhvr>
-                                        <p:cTn id="24" dur="1" fill="hold">
-                                          <p:stCondLst>
-                                            <p:cond delay="0"/>
-                                          </p:stCondLst>
-                                        </p:cTn>
-                                        <p:tgtEl>
-                                          <p:spTgt spid="3">
-                                            <p:txEl>
-                                              <p:pRg st="5" end="5"/>
+                                              <p:pRg st="6" end="6"/>
                                             </p:txEl>
                                           </p:spTgt>
                                         </p:tgtEl>
@@ -17011,26 +16921,26 @@
                     </p:cTn>
                   </p:par>
                   <p:par>
-                    <p:cTn id="25" fill="hold">
+                    <p:cTn id="23" fill="hold">
                       <p:stCondLst>
                         <p:cond delay="indefinite"/>
                       </p:stCondLst>
                       <p:childTnLst>
                         <p:par>
-                          <p:cTn id="26" fill="hold">
+                          <p:cTn id="24" fill="hold">
                             <p:stCondLst>
                               <p:cond delay="0"/>
                             </p:stCondLst>
                             <p:childTnLst>
                               <p:par>
-                                <p:cTn id="27" presetID="1" presetClass="entr" presetSubtype="0" fill="hold" grpId="0" nodeType="clickEffect">
+                                <p:cTn id="25" presetID="1" presetClass="entr" presetSubtype="0" fill="hold" grpId="0" nodeType="clickEffect">
                                   <p:stCondLst>
                                     <p:cond delay="0"/>
                                   </p:stCondLst>
                                   <p:childTnLst>
                                     <p:set>
                                       <p:cBhvr>
-                                        <p:cTn id="28" dur="1" fill="hold">
+                                        <p:cTn id="26" dur="1" fill="hold">
                                           <p:stCondLst>
                                             <p:cond delay="0"/>
                                           </p:stCondLst>
@@ -17060,26 +16970,26 @@
                     </p:cTn>
                   </p:par>
                   <p:par>
-                    <p:cTn id="29" fill="hold">
+                    <p:cTn id="27" fill="hold">
                       <p:stCondLst>
                         <p:cond delay="indefinite"/>
                       </p:stCondLst>
                       <p:childTnLst>
                         <p:par>
-                          <p:cTn id="30" fill="hold">
+                          <p:cTn id="28" fill="hold">
                             <p:stCondLst>
                               <p:cond delay="0"/>
                             </p:stCondLst>
                             <p:childTnLst>
                               <p:par>
-                                <p:cTn id="31" presetID="1" presetClass="entr" presetSubtype="0" fill="hold" grpId="0" nodeType="clickEffect">
+                                <p:cTn id="29" presetID="1" presetClass="entr" presetSubtype="0" fill="hold" grpId="0" nodeType="clickEffect">
                                   <p:stCondLst>
                                     <p:cond delay="0"/>
                                   </p:stCondLst>
                                   <p:childTnLst>
                                     <p:set>
                                       <p:cBhvr>
-                                        <p:cTn id="32" dur="1" fill="hold">
+                                        <p:cTn id="30" dur="1" fill="hold">
                                           <p:stCondLst>
                                             <p:cond delay="0"/>
                                           </p:stCondLst>
@@ -17109,75 +17019,26 @@
                     </p:cTn>
                   </p:par>
                   <p:par>
-                    <p:cTn id="33" fill="hold">
+                    <p:cTn id="31" fill="hold">
                       <p:stCondLst>
                         <p:cond delay="indefinite"/>
                       </p:stCondLst>
                       <p:childTnLst>
                         <p:par>
-                          <p:cTn id="34" fill="hold">
+                          <p:cTn id="32" fill="hold">
                             <p:stCondLst>
                               <p:cond delay="0"/>
                             </p:stCondLst>
                             <p:childTnLst>
                               <p:par>
-                                <p:cTn id="35" presetID="1" presetClass="entr" presetSubtype="0" fill="hold" grpId="0" nodeType="clickEffect">
+                                <p:cTn id="33" presetID="1" presetClass="entr" presetSubtype="0" fill="hold" nodeType="clickEffect">
                                   <p:stCondLst>
                                     <p:cond delay="0"/>
                                   </p:stCondLst>
                                   <p:childTnLst>
                                     <p:set>
                                       <p:cBhvr>
-                                        <p:cTn id="36" dur="1" fill="hold">
-                                          <p:stCondLst>
-                                            <p:cond delay="0"/>
-                                          </p:stCondLst>
-                                        </p:cTn>
-                                        <p:tgtEl>
-                                          <p:spTgt spid="3">
-                                            <p:txEl>
-                                              <p:pRg st="9" end="9"/>
-                                            </p:txEl>
-                                          </p:spTgt>
-                                        </p:tgtEl>
-                                        <p:attrNameLst>
-                                          <p:attrName>style.visibility</p:attrName>
-                                        </p:attrNameLst>
-                                      </p:cBhvr>
-                                      <p:to>
-                                        <p:strVal val="visible"/>
-                                      </p:to>
-                                    </p:set>
-                                  </p:childTnLst>
-                                </p:cTn>
-                              </p:par>
-                            </p:childTnLst>
-                          </p:cTn>
-                        </p:par>
-                      </p:childTnLst>
-                    </p:cTn>
-                  </p:par>
-                  <p:par>
-                    <p:cTn id="37" fill="hold">
-                      <p:stCondLst>
-                        <p:cond delay="indefinite"/>
-                      </p:stCondLst>
-                      <p:childTnLst>
-                        <p:par>
-                          <p:cTn id="38" fill="hold">
-                            <p:stCondLst>
-                              <p:cond delay="0"/>
-                            </p:stCondLst>
-                            <p:childTnLst>
-                              <p:par>
-                                <p:cTn id="39" presetID="1" presetClass="entr" presetSubtype="0" fill="hold" nodeType="clickEffect">
-                                  <p:stCondLst>
-                                    <p:cond delay="0"/>
-                                  </p:stCondLst>
-                                  <p:childTnLst>
-                                    <p:set>
-                                      <p:cBhvr>
-                                        <p:cTn id="40" dur="1" fill="hold">
+                                        <p:cTn id="34" dur="1" fill="hold">
                                           <p:stCondLst>
                                             <p:cond delay="0"/>
                                           </p:stCondLst>
@@ -17197,14 +17058,14 @@
                                 </p:cTn>
                               </p:par>
                               <p:par>
-                                <p:cTn id="41" presetID="1" presetClass="entr" presetSubtype="0" fill="hold" grpId="0" nodeType="withEffect">
+                                <p:cTn id="35" presetID="1" presetClass="entr" presetSubtype="0" fill="hold" grpId="0" nodeType="withEffect">
                                   <p:stCondLst>
                                     <p:cond delay="0"/>
                                   </p:stCondLst>
                                   <p:childTnLst>
                                     <p:set>
                                       <p:cBhvr>
-                                        <p:cTn id="42" dur="1" fill="hold">
+                                        <p:cTn id="36" dur="1" fill="hold">
                                           <p:stCondLst>
                                             <p:cond delay="0"/>
                                           </p:stCondLst>
@@ -17224,14 +17085,14 @@
                                 </p:cTn>
                               </p:par>
                               <p:par>
-                                <p:cTn id="43" presetID="1" presetClass="entr" presetSubtype="0" fill="hold" nodeType="withEffect">
+                                <p:cTn id="37" presetID="1" presetClass="entr" presetSubtype="0" fill="hold" nodeType="withEffect">
                                   <p:stCondLst>
                                     <p:cond delay="0"/>
                                   </p:stCondLst>
                                   <p:childTnLst>
                                     <p:set>
                                       <p:cBhvr>
-                                        <p:cTn id="44" dur="1" fill="hold">
+                                        <p:cTn id="38" dur="1" fill="hold">
                                           <p:stCondLst>
                                             <p:cond delay="0"/>
                                           </p:stCondLst>
@@ -20199,7 +20060,9 @@
               </a:xfrm>
             </p:spPr>
             <p:txBody>
-              <a:bodyPr/>
+              <a:bodyPr>
+                <a:normAutofit/>
+              </a:bodyPr>
               <a:lstStyle/>
               <a:p>
                 <a14:m>
@@ -20414,15 +20277,70 @@
                 </a:r>
                 <a14:m>
                   <m:oMath xmlns:m="http://schemas.openxmlformats.org/officeDocument/2006/math">
-                    <m:r>
-                      <m:rPr>
-                        <m:sty m:val="p"/>
-                      </m:rPr>
-                      <a:rPr lang="nl-BE" b="0" i="0" smtClean="0">
-                        <a:latin typeface="Cambria Math" panose="02040503050406030204" pitchFamily="18" charset="0"/>
-                      </a:rPr>
-                      <m:t>cot</m:t>
-                    </m:r>
+                    <m:func>
+                      <m:funcPr>
+                        <m:ctrlPr>
+                          <a:rPr lang="nl-BE">
+                            <a:latin typeface="Cambria Math" panose="02040503050406030204" pitchFamily="18" charset="0"/>
+                          </a:rPr>
+                        </m:ctrlPr>
+                      </m:funcPr>
+                      <m:fName>
+                        <m:r>
+                          <m:rPr>
+                            <m:sty m:val="p"/>
+                          </m:rPr>
+                          <a:rPr lang="nl-BE">
+                            <a:latin typeface="Cambria Math" panose="02040503050406030204" pitchFamily="18" charset="0"/>
+                          </a:rPr>
+                          <m:t>cot</m:t>
+                        </m:r>
+                      </m:fName>
+                      <m:e>
+                        <m:d>
+                          <m:dPr>
+                            <m:ctrlPr>
+                              <a:rPr lang="nl-BE" i="1">
+                                <a:latin typeface="Cambria Math" panose="02040503050406030204" pitchFamily="18" charset="0"/>
+                              </a:rPr>
+                            </m:ctrlPr>
+                          </m:dPr>
+                          <m:e>
+                            <m:f>
+                              <m:fPr>
+                                <m:ctrlPr>
+                                  <a:rPr lang="nl-BE" i="1">
+                                    <a:latin typeface="Cambria Math" panose="02040503050406030204" pitchFamily="18" charset="0"/>
+                                  </a:rPr>
+                                </m:ctrlPr>
+                              </m:fPr>
+                              <m:num>
+                                <m:r>
+                                  <a:rPr lang="nl-BE" i="1">
+                                    <a:latin typeface="Cambria Math" panose="02040503050406030204" pitchFamily="18" charset="0"/>
+                                  </a:rPr>
+                                  <m:t>𝑛</m:t>
+                                </m:r>
+                                <m:r>
+                                  <a:rPr lang="nl-BE" i="1">
+                                    <a:latin typeface="Cambria Math" panose="02040503050406030204" pitchFamily="18" charset="0"/>
+                                  </a:rPr>
+                                  <m:t>𝜋</m:t>
+                                </m:r>
+                              </m:num>
+                              <m:den>
+                                <m:r>
+                                  <a:rPr lang="nl-BE" i="1">
+                                    <a:latin typeface="Cambria Math" panose="02040503050406030204" pitchFamily="18" charset="0"/>
+                                  </a:rPr>
+                                  <m:t>3</m:t>
+                                </m:r>
+                              </m:den>
+                            </m:f>
+                          </m:e>
+                        </m:d>
+                      </m:e>
+                    </m:func>
                   </m:oMath>
                 </a14:m>
                 <a:r>
@@ -20432,10 +20350,10 @@
                 <a14:m>
                   <m:oMath xmlns:m="http://schemas.openxmlformats.org/officeDocument/2006/math">
                     <m:r>
-                      <a:rPr lang="nl-BE" i="1" dirty="0">
+                      <a:rPr lang="nl-BE" b="0" i="1" dirty="0" smtClean="0">
                         <a:latin typeface="Cambria Math" panose="02040503050406030204" pitchFamily="18" charset="0"/>
                       </a:rPr>
-                      <m:t>𝜋</m:t>
+                      <m:t>3</m:t>
                     </m:r>
                   </m:oMath>
                 </a14:m>
@@ -20491,6 +20409,10 @@
                   <a:rPr lang="nl-BE" dirty="0"/>
                   <a:t> is 2</a:t>
                 </a:r>
+              </a:p>
+              <a:p>
+                <a:pPr lvl="1"/>
+                <a:endParaRPr lang="nl-BE" dirty="0"/>
               </a:p>
               <a:p>
                 <a:r>
@@ -20519,23 +20441,23 @@
                     <m:d>
                       <m:dPr>
                         <m:ctrlPr>
-                          <a:rPr lang="nl-BE" i="1">
+                          <a:rPr lang="nl-BE" b="0" i="1" smtClean="0">
                             <a:latin typeface="Cambria Math" panose="02040503050406030204" pitchFamily="18" charset="0"/>
                           </a:rPr>
                         </m:ctrlPr>
                       </m:dPr>
                       <m:e>
                         <m:r>
-                          <a:rPr lang="nl-BE" i="1">
-                            <a:latin typeface="Cambria Math" panose="02040503050406030204" pitchFamily="18" charset="0"/>
-                          </a:rPr>
-                          <m:t>𝜋</m:t>
+                          <a:rPr lang="nl-BE" b="0" i="1" smtClean="0">
+                            <a:latin typeface="Cambria Math" panose="02040503050406030204" pitchFamily="18" charset="0"/>
+                          </a:rPr>
+                          <m:t>3,</m:t>
                         </m:r>
                         <m:r>
                           <a:rPr lang="nl-BE" i="1">
                             <a:latin typeface="Cambria Math" panose="02040503050406030204" pitchFamily="18" charset="0"/>
                           </a:rPr>
-                          <m:t>,2</m:t>
+                          <m:t>2</m:t>
                         </m:r>
                       </m:e>
                     </m:d>
@@ -20549,100 +20471,11 @@
                       <a:rPr lang="nl-BE" b="0" i="1" smtClean="0">
                         <a:latin typeface="Cambria Math" panose="02040503050406030204" pitchFamily="18" charset="0"/>
                       </a:rPr>
-                      <m:t>2</m:t>
-                    </m:r>
-                    <m:r>
-                      <a:rPr lang="nl-BE" i="1">
-                        <a:latin typeface="Cambria Math" panose="02040503050406030204" pitchFamily="18" charset="0"/>
-                      </a:rPr>
-                      <m:t>𝜋</m:t>
+                      <m:t>6</m:t>
                     </m:r>
                   </m:oMath>
                 </a14:m>
                 <a:endParaRPr lang="nl-BE" dirty="0"/>
-              </a:p>
-              <a:p>
-                <a14:m>
-                  <m:oMath xmlns:m="http://schemas.openxmlformats.org/officeDocument/2006/math">
-                    <m:f>
-                      <m:fPr>
-                        <m:ctrlPr>
-                          <a:rPr lang="nl-BE" i="1">
-                            <a:latin typeface="Cambria Math" panose="02040503050406030204" pitchFamily="18" charset="0"/>
-                          </a:rPr>
-                        </m:ctrlPr>
-                      </m:fPr>
-                      <m:num>
-                        <m:r>
-                          <a:rPr lang="nl-BE" i="1">
-                            <a:latin typeface="Cambria Math" panose="02040503050406030204" pitchFamily="18" charset="0"/>
-                          </a:rPr>
-                          <m:t>𝑛</m:t>
-                        </m:r>
-                        <m:r>
-                          <a:rPr lang="nl-BE" i="1">
-                            <a:latin typeface="Cambria Math" panose="02040503050406030204" pitchFamily="18" charset="0"/>
-                          </a:rPr>
-                          <m:t>𝜋</m:t>
-                        </m:r>
-                      </m:num>
-                      <m:den>
-                        <m:r>
-                          <a:rPr lang="nl-BE" b="0" i="1" smtClean="0">
-                            <a:latin typeface="Cambria Math" panose="02040503050406030204" pitchFamily="18" charset="0"/>
-                          </a:rPr>
-                          <m:t>3</m:t>
-                        </m:r>
-                      </m:den>
-                    </m:f>
-                    <m:r>
-                      <a:rPr lang="nl-BE" i="1">
-                        <a:latin typeface="Cambria Math" panose="02040503050406030204" pitchFamily="18" charset="0"/>
-                      </a:rPr>
-                      <m:t>=2</m:t>
-                    </m:r>
-                    <m:r>
-                      <a:rPr lang="nl-BE" i="1">
-                        <a:latin typeface="Cambria Math" panose="02040503050406030204" pitchFamily="18" charset="0"/>
-                      </a:rPr>
-                      <m:t>𝜋</m:t>
-                    </m:r>
-                    <m:r>
-                      <a:rPr lang="nl-BE" i="1">
-                        <a:latin typeface="Cambria Math" panose="02040503050406030204" pitchFamily="18" charset="0"/>
-                      </a:rPr>
-                      <m:t>𝑘</m:t>
-                    </m:r>
-                    <m:r>
-                      <a:rPr lang="nl-BE" i="1">
-                        <a:latin typeface="Cambria Math" panose="02040503050406030204" pitchFamily="18" charset="0"/>
-                      </a:rPr>
-                      <m:t>→</m:t>
-                    </m:r>
-                    <m:r>
-                      <a:rPr lang="nl-BE" i="1">
-                        <a:latin typeface="Cambria Math" panose="02040503050406030204" pitchFamily="18" charset="0"/>
-                      </a:rPr>
-                      <m:t>𝑛</m:t>
-                    </m:r>
-                    <m:r>
-                      <a:rPr lang="nl-BE" i="1">
-                        <a:latin typeface="Cambria Math" panose="02040503050406030204" pitchFamily="18" charset="0"/>
-                      </a:rPr>
-                      <m:t>=6</m:t>
-                    </m:r>
-                    <m:r>
-                      <a:rPr lang="nl-BE" i="1">
-                        <a:latin typeface="Cambria Math" panose="02040503050406030204" pitchFamily="18" charset="0"/>
-                      </a:rPr>
-                      <m:t>𝑘</m:t>
-                    </m:r>
-                  </m:oMath>
-                </a14:m>
-                <a:r>
-                  <a:rPr lang="nl-BE" dirty="0"/>
-                  <a:t>  </a:t>
-                </a:r>
               </a:p>
               <a:p>
                 <a:endParaRPr lang="nl-BE" dirty="0"/>
@@ -20760,6 +20593,221 @@
           </a:p>
         </p:txBody>
       </p:sp>
+      <p:pic>
+        <p:nvPicPr>
+          <p:cNvPr id="5" name="Afbeelding 4" descr="Tangent and Cotangent Graphs | Brilliant Math &amp; Science Wiki">
+            <a:extLst>
+              <a:ext uri="{FF2B5EF4-FFF2-40B4-BE49-F238E27FC236}">
+                <a16:creationId xmlns:a16="http://schemas.microsoft.com/office/drawing/2014/main" id="{EE9AB9C6-1BA2-86E0-59B1-39F68773BA92}"/>
+              </a:ext>
+            </a:extLst>
+          </p:cNvPr>
+          <p:cNvPicPr>
+            <a:picLocks noChangeAspect="1"/>
+          </p:cNvPicPr>
+          <p:nvPr/>
+        </p:nvPicPr>
+        <p:blipFill>
+          <a:blip r:embed="rId3"/>
+          <a:stretch>
+            <a:fillRect/>
+          </a:stretch>
+        </p:blipFill>
+        <p:spPr>
+          <a:xfrm>
+            <a:off x="7407839" y="136525"/>
+            <a:ext cx="4708572" cy="4435475"/>
+          </a:xfrm>
+          <a:prstGeom prst="rect">
+            <a:avLst/>
+          </a:prstGeom>
+        </p:spPr>
+      </p:pic>
+      <mc:AlternateContent xmlns:mc="http://schemas.openxmlformats.org/markup-compatibility/2006">
+        <mc:Choice xmlns:a14="http://schemas.microsoft.com/office/drawing/2010/main" Requires="a14">
+          <p:sp>
+            <p:nvSpPr>
+              <p:cNvPr id="6" name="Tekstvak 5">
+                <a:extLst>
+                  <a:ext uri="{FF2B5EF4-FFF2-40B4-BE49-F238E27FC236}">
+                    <a16:creationId xmlns:a16="http://schemas.microsoft.com/office/drawing/2014/main" id="{59203EB7-64C2-0EE1-8C21-9A92D8526AFA}"/>
+                  </a:ext>
+                </a:extLst>
+              </p:cNvPr>
+              <p:cNvSpPr txBox="1"/>
+              <p:nvPr/>
+            </p:nvSpPr>
+            <p:spPr>
+              <a:xfrm>
+                <a:off x="9413748" y="0"/>
+                <a:ext cx="180306" cy="276999"/>
+              </a:xfrm>
+              <a:prstGeom prst="rect">
+                <a:avLst/>
+              </a:prstGeom>
+              <a:noFill/>
+            </p:spPr>
+            <p:txBody>
+              <a:bodyPr wrap="none" lIns="0" tIns="0" rIns="0" bIns="0" rtlCol="0">
+                <a:spAutoFit/>
+              </a:bodyPr>
+              <a:lstStyle/>
+              <a:p>
+                <a14:m>
+                  <m:oMathPara xmlns:m="http://schemas.openxmlformats.org/officeDocument/2006/math">
+                    <m:oMath>
+                      <m:r>
+                        <a:rPr lang="nl-BE" b="0" i="1" smtClean="0">
+                          <a:latin typeface="Cambria Math" panose="02040503050406030204" pitchFamily="18" charset="0"/>
+                        </a:rPr>
+                        <m:t>𝑦</m:t>
+                      </m:r>
+                    </m:oMath>
+                  </m:oMathPara>
+                </a14:m>
+                <a:endParaRPr lang="nl-BE" dirty="0"/>
+              </a:p>
+            </p:txBody>
+          </p:sp>
+        </mc:Choice>
+        <mc:Fallback>
+          <p:sp>
+            <p:nvSpPr>
+              <p:cNvPr id="6" name="Tekstvak 5">
+                <a:extLst>
+                  <a:ext uri="{FF2B5EF4-FFF2-40B4-BE49-F238E27FC236}">
+                    <a16:creationId xmlns:a16="http://schemas.microsoft.com/office/drawing/2014/main" id="{59203EB7-64C2-0EE1-8C21-9A92D8526AFA}"/>
+                  </a:ext>
+                </a:extLst>
+              </p:cNvPr>
+              <p:cNvSpPr txBox="1">
+                <a:spLocks noRot="1" noChangeAspect="1" noMove="1" noResize="1" noEditPoints="1" noAdjustHandles="1" noChangeArrowheads="1" noChangeShapeType="1" noTextEdit="1"/>
+              </p:cNvSpPr>
+              <p:nvPr/>
+            </p:nvSpPr>
+            <p:spPr>
+              <a:xfrm>
+                <a:off x="9413748" y="0"/>
+                <a:ext cx="180306" cy="276999"/>
+              </a:xfrm>
+              <a:prstGeom prst="rect">
+                <a:avLst/>
+              </a:prstGeom>
+              <a:blipFill>
+                <a:blip r:embed="rId4"/>
+                <a:stretch>
+                  <a:fillRect l="-33333" r="-30000" b="-26667"/>
+                </a:stretch>
+              </a:blipFill>
+            </p:spPr>
+            <p:txBody>
+              <a:bodyPr/>
+              <a:lstStyle/>
+              <a:p>
+                <a:r>
+                  <a:rPr lang="nl-BE">
+                    <a:noFill/>
+                  </a:rPr>
+                  <a:t> </a:t>
+                </a:r>
+              </a:p>
+            </p:txBody>
+          </p:sp>
+        </mc:Fallback>
+      </mc:AlternateContent>
+      <mc:AlternateContent xmlns:mc="http://schemas.openxmlformats.org/markup-compatibility/2006">
+        <mc:Choice xmlns:a14="http://schemas.microsoft.com/office/drawing/2010/main" Requires="a14">
+          <p:sp>
+            <p:nvSpPr>
+              <p:cNvPr id="8" name="Tekstvak 7">
+                <a:extLst>
+                  <a:ext uri="{FF2B5EF4-FFF2-40B4-BE49-F238E27FC236}">
+                    <a16:creationId xmlns:a16="http://schemas.microsoft.com/office/drawing/2014/main" id="{272AF27D-26E5-33D0-FB34-3E19F1924DFD}"/>
+                  </a:ext>
+                </a:extLst>
+              </p:cNvPr>
+              <p:cNvSpPr txBox="1"/>
+              <p:nvPr/>
+            </p:nvSpPr>
+            <p:spPr>
+              <a:xfrm>
+                <a:off x="11936105" y="2438400"/>
+                <a:ext cx="176907" cy="276999"/>
+              </a:xfrm>
+              <a:prstGeom prst="rect">
+                <a:avLst/>
+              </a:prstGeom>
+              <a:noFill/>
+            </p:spPr>
+            <p:txBody>
+              <a:bodyPr wrap="none" lIns="0" tIns="0" rIns="0" bIns="0" rtlCol="0">
+                <a:spAutoFit/>
+              </a:bodyPr>
+              <a:lstStyle/>
+              <a:p>
+                <a:pPr/>
+                <a14:m>
+                  <m:oMathPara xmlns:m="http://schemas.openxmlformats.org/officeDocument/2006/math">
+                    <m:oMath>
+                      <m:r>
+                        <a:rPr lang="nl-BE" b="0" i="1" smtClean="0">
+                          <a:latin typeface="Cambria Math" panose="02040503050406030204" pitchFamily="18" charset="0"/>
+                        </a:rPr>
+                        <m:t>𝑥</m:t>
+                      </m:r>
+                    </m:oMath>
+                  </m:oMathPara>
+                </a14:m>
+                <a:endParaRPr lang="nl-BE" dirty="0"/>
+              </a:p>
+            </p:txBody>
+          </p:sp>
+        </mc:Choice>
+        <mc:Fallback>
+          <p:sp>
+            <p:nvSpPr>
+              <p:cNvPr id="8" name="Tekstvak 7">
+                <a:extLst>
+                  <a:ext uri="{FF2B5EF4-FFF2-40B4-BE49-F238E27FC236}">
+                    <a16:creationId xmlns:a16="http://schemas.microsoft.com/office/drawing/2014/main" id="{272AF27D-26E5-33D0-FB34-3E19F1924DFD}"/>
+                  </a:ext>
+                </a:extLst>
+              </p:cNvPr>
+              <p:cNvSpPr txBox="1">
+                <a:spLocks noRot="1" noChangeAspect="1" noMove="1" noResize="1" noEditPoints="1" noAdjustHandles="1" noChangeArrowheads="1" noChangeShapeType="1" noTextEdit="1"/>
+              </p:cNvSpPr>
+              <p:nvPr/>
+            </p:nvSpPr>
+            <p:spPr>
+              <a:xfrm>
+                <a:off x="11936105" y="2438400"/>
+                <a:ext cx="176907" cy="276999"/>
+              </a:xfrm>
+              <a:prstGeom prst="rect">
+                <a:avLst/>
+              </a:prstGeom>
+              <a:blipFill>
+                <a:blip r:embed="rId5"/>
+                <a:stretch>
+                  <a:fillRect l="-20690" r="-17241"/>
+                </a:stretch>
+              </a:blipFill>
+            </p:spPr>
+            <p:txBody>
+              <a:bodyPr/>
+              <a:lstStyle/>
+              <a:p>
+                <a:r>
+                  <a:rPr lang="nl-BE">
+                    <a:noFill/>
+                  </a:rPr>
+                  <a:t> </a:t>
+                </a:r>
+              </a:p>
+            </p:txBody>
+          </p:sp>
+        </mc:Fallback>
+      </mc:AlternateContent>
     </p:spTree>
     <p:extLst>
       <p:ext uri="{BB962C8B-B14F-4D97-AF65-F5344CB8AC3E}">
@@ -20870,26 +20918,39 @@
                                   </p:childTnLst>
                                 </p:cTn>
                               </p:par>
-                            </p:childTnLst>
-                          </p:cTn>
-                        </p:par>
-                      </p:childTnLst>
-                    </p:cTn>
-                  </p:par>
-                  <p:par>
-                    <p:cTn id="11" fill="hold">
-                      <p:stCondLst>
-                        <p:cond delay="indefinite"/>
-                      </p:stCondLst>
-                      <p:childTnLst>
-                        <p:par>
-                          <p:cTn id="12" fill="hold">
-                            <p:stCondLst>
-                              <p:cond delay="0"/>
-                            </p:stCondLst>
-                            <p:childTnLst>
                               <p:par>
-                                <p:cTn id="13" presetID="1" presetClass="entr" presetSubtype="0" fill="hold" grpId="0" nodeType="clickEffect">
+                                <p:cTn id="11" presetID="1" presetClass="entr" presetSubtype="0" fill="hold" grpId="0" nodeType="withEffect">
+                                  <p:stCondLst>
+                                    <p:cond delay="0"/>
+                                  </p:stCondLst>
+                                  <p:childTnLst>
+                                    <p:set>
+                                      <p:cBhvr>
+                                        <p:cTn id="12" dur="1" fill="hold">
+                                          <p:stCondLst>
+                                            <p:cond delay="0"/>
+                                          </p:stCondLst>
+                                        </p:cTn>
+                                        <p:tgtEl>
+                                          <p:spTgt spid="3">
+                                            <p:txEl>
+                                              <p:pRg st="2" end="2"/>
+                                            </p:txEl>
+                                          </p:spTgt>
+                                        </p:tgtEl>
+                                        <p:attrNameLst>
+                                          <p:attrName>style.visibility</p:attrName>
+                                        </p:attrNameLst>
+                                      </p:cBhvr>
+                                      <p:to>
+                                        <p:strVal val="visible"/>
+                                      </p:to>
+                                    </p:set>
+                                  </p:childTnLst>
+                                </p:cTn>
+                              </p:par>
+                              <p:par>
+                                <p:cTn id="13" presetID="1" presetClass="entr" presetSubtype="0" fill="hold" grpId="0" nodeType="withEffect">
                                   <p:stCondLst>
                                     <p:cond delay="0"/>
                                   </p:stCondLst>
@@ -20904,7 +20965,7 @@
                                         <p:tgtEl>
                                           <p:spTgt spid="3">
                                             <p:txEl>
-                                              <p:pRg st="2" end="2"/>
+                                              <p:pRg st="3" end="3"/>
                                             </p:txEl>
                                           </p:spTgt>
                                         </p:tgtEl>
@@ -20953,7 +21014,7 @@
                                         <p:tgtEl>
                                           <p:spTgt spid="3">
                                             <p:txEl>
-                                              <p:pRg st="3" end="3"/>
+                                              <p:pRg st="5" end="5"/>
                                             </p:txEl>
                                           </p:spTgt>
                                         </p:tgtEl>
@@ -20995,104 +21056,6 @@
                                     <p:set>
                                       <p:cBhvr>
                                         <p:cTn id="22" dur="1" fill="hold">
-                                          <p:stCondLst>
-                                            <p:cond delay="0"/>
-                                          </p:stCondLst>
-                                        </p:cTn>
-                                        <p:tgtEl>
-                                          <p:spTgt spid="3">
-                                            <p:txEl>
-                                              <p:pRg st="4" end="4"/>
-                                            </p:txEl>
-                                          </p:spTgt>
-                                        </p:tgtEl>
-                                        <p:attrNameLst>
-                                          <p:attrName>style.visibility</p:attrName>
-                                        </p:attrNameLst>
-                                      </p:cBhvr>
-                                      <p:to>
-                                        <p:strVal val="visible"/>
-                                      </p:to>
-                                    </p:set>
-                                  </p:childTnLst>
-                                </p:cTn>
-                              </p:par>
-                            </p:childTnLst>
-                          </p:cTn>
-                        </p:par>
-                      </p:childTnLst>
-                    </p:cTn>
-                  </p:par>
-                  <p:par>
-                    <p:cTn id="23" fill="hold">
-                      <p:stCondLst>
-                        <p:cond delay="indefinite"/>
-                      </p:stCondLst>
-                      <p:childTnLst>
-                        <p:par>
-                          <p:cTn id="24" fill="hold">
-                            <p:stCondLst>
-                              <p:cond delay="0"/>
-                            </p:stCondLst>
-                            <p:childTnLst>
-                              <p:par>
-                                <p:cTn id="25" presetID="1" presetClass="entr" presetSubtype="0" fill="hold" grpId="0" nodeType="clickEffect">
-                                  <p:stCondLst>
-                                    <p:cond delay="0"/>
-                                  </p:stCondLst>
-                                  <p:childTnLst>
-                                    <p:set>
-                                      <p:cBhvr>
-                                        <p:cTn id="26" dur="1" fill="hold">
-                                          <p:stCondLst>
-                                            <p:cond delay="0"/>
-                                          </p:stCondLst>
-                                        </p:cTn>
-                                        <p:tgtEl>
-                                          <p:spTgt spid="3">
-                                            <p:txEl>
-                                              <p:pRg st="5" end="5"/>
-                                            </p:txEl>
-                                          </p:spTgt>
-                                        </p:tgtEl>
-                                        <p:attrNameLst>
-                                          <p:attrName>style.visibility</p:attrName>
-                                        </p:attrNameLst>
-                                      </p:cBhvr>
-                                      <p:to>
-                                        <p:strVal val="visible"/>
-                                      </p:to>
-                                    </p:set>
-                                  </p:childTnLst>
-                                </p:cTn>
-                              </p:par>
-                            </p:childTnLst>
-                          </p:cTn>
-                        </p:par>
-                      </p:childTnLst>
-                    </p:cTn>
-                  </p:par>
-                  <p:par>
-                    <p:cTn id="27" fill="hold">
-                      <p:stCondLst>
-                        <p:cond delay="indefinite"/>
-                      </p:stCondLst>
-                      <p:childTnLst>
-                        <p:par>
-                          <p:cTn id="28" fill="hold">
-                            <p:stCondLst>
-                              <p:cond delay="0"/>
-                            </p:stCondLst>
-                            <p:childTnLst>
-                              <p:par>
-                                <p:cTn id="29" presetID="1" presetClass="entr" presetSubtype="0" fill="hold" grpId="0" nodeType="clickEffect">
-                                  <p:stCondLst>
-                                    <p:cond delay="0"/>
-                                  </p:stCondLst>
-                                  <p:childTnLst>
-                                    <p:set>
-                                      <p:cBhvr>
-                                        <p:cTn id="30" dur="1" fill="hold">
                                           <p:stCondLst>
                                             <p:cond delay="0"/>
                                           </p:stCondLst>
@@ -21202,7 +21165,6 @@
                 </a:r>
               </a:p>
               <a:p>
-                <a:pPr lvl="1"/>
                 <a14:m>
                   <m:oMath xmlns:m="http://schemas.openxmlformats.org/officeDocument/2006/math">
                     <m:limLow>
@@ -21237,31 +21199,18 @@
                           </a:rPr>
                           <m:t>→</m:t>
                         </m:r>
-                        <m:sSup>
-                          <m:sSupPr>
-                            <m:ctrlPr>
-                              <a:rPr lang="nl-BE" b="0" i="1" smtClean="0">
-                                <a:latin typeface="Cambria Math" panose="02040503050406030204" pitchFamily="18" charset="0"/>
-                              </a:rPr>
-                            </m:ctrlPr>
-                          </m:sSupPr>
-                          <m:e>
-                            <m:r>
-                              <a:rPr lang="nl-BE" b="0" i="1" smtClean="0">
-                                <a:latin typeface="Cambria Math" panose="02040503050406030204" pitchFamily="18" charset="0"/>
-                              </a:rPr>
-                              <m:t>0</m:t>
-                            </m:r>
-                          </m:e>
-                          <m:sup>
-                            <m:r>
-                              <a:rPr lang="nl-BE" b="0" i="1" smtClean="0">
-                                <a:latin typeface="Cambria Math" panose="02040503050406030204" pitchFamily="18" charset="0"/>
-                              </a:rPr>
-                              <m:t>+</m:t>
-                            </m:r>
-                          </m:sup>
-                        </m:sSup>
+                        <m:r>
+                          <a:rPr lang="nl-BE" b="0" i="1" smtClean="0">
+                            <a:latin typeface="Cambria Math" panose="02040503050406030204" pitchFamily="18" charset="0"/>
+                          </a:rPr>
+                          <m:t>𝑘</m:t>
+                        </m:r>
+                        <m:r>
+                          <a:rPr lang="nl-BE" b="0" i="1" smtClean="0">
+                            <a:latin typeface="Cambria Math" panose="02040503050406030204" pitchFamily="18" charset="0"/>
+                          </a:rPr>
+                          <m:t>𝜋</m:t>
+                        </m:r>
                       </m:lim>
                     </m:limLow>
                     <m:func>
@@ -21303,138 +21252,15 @@
                         </m:d>
                       </m:e>
                     </m:func>
-                    <m:r>
-                      <a:rPr lang="nl-BE" b="0" i="1" smtClean="0">
-                        <a:latin typeface="Cambria Math" panose="02040503050406030204" pitchFamily="18" charset="0"/>
-                      </a:rPr>
-                      <m:t>=+∞</m:t>
-                    </m:r>
                   </m:oMath>
                 </a14:m>
-                <a:endParaRPr lang="nl-BE" dirty="0"/>
+                <a:r>
+                  <a:rPr lang="nl-BE" dirty="0"/>
+                  <a:t> bestaat niet!</a:t>
+                </a:r>
               </a:p>
               <a:p>
                 <a:pPr lvl="1"/>
-                <a14:m>
-                  <m:oMath xmlns:m="http://schemas.openxmlformats.org/officeDocument/2006/math">
-                    <m:limLow>
-                      <m:limLowPr>
-                        <m:ctrlPr>
-                          <a:rPr lang="nl-BE">
-                            <a:latin typeface="Cambria Math" panose="02040503050406030204" pitchFamily="18" charset="0"/>
-                          </a:rPr>
-                        </m:ctrlPr>
-                      </m:limLowPr>
-                      <m:e>
-                        <m:r>
-                          <m:rPr>
-                            <m:sty m:val="p"/>
-                          </m:rPr>
-                          <a:rPr lang="nl-BE">
-                            <a:latin typeface="Cambria Math" panose="02040503050406030204" pitchFamily="18" charset="0"/>
-                          </a:rPr>
-                          <m:t>lim</m:t>
-                        </m:r>
-                      </m:e>
-                      <m:lim>
-                        <m:r>
-                          <a:rPr lang="nl-BE" i="1">
-                            <a:latin typeface="Cambria Math" panose="02040503050406030204" pitchFamily="18" charset="0"/>
-                          </a:rPr>
-                          <m:t>𝑥</m:t>
-                        </m:r>
-                        <m:r>
-                          <a:rPr lang="nl-BE" i="1">
-                            <a:latin typeface="Cambria Math" panose="02040503050406030204" pitchFamily="18" charset="0"/>
-                          </a:rPr>
-                          <m:t>→</m:t>
-                        </m:r>
-                        <m:sSup>
-                          <m:sSupPr>
-                            <m:ctrlPr>
-                              <a:rPr lang="nl-BE" i="1">
-                                <a:latin typeface="Cambria Math" panose="02040503050406030204" pitchFamily="18" charset="0"/>
-                              </a:rPr>
-                            </m:ctrlPr>
-                          </m:sSupPr>
-                          <m:e>
-                            <m:r>
-                              <a:rPr lang="nl-BE" i="1">
-                                <a:latin typeface="Cambria Math" panose="02040503050406030204" pitchFamily="18" charset="0"/>
-                              </a:rPr>
-                              <m:t>0</m:t>
-                            </m:r>
-                          </m:e>
-                          <m:sup>
-                            <m:r>
-                              <a:rPr lang="nl-BE" b="0" i="1" smtClean="0">
-                                <a:latin typeface="Cambria Math" panose="02040503050406030204" pitchFamily="18" charset="0"/>
-                              </a:rPr>
-                              <m:t>−</m:t>
-                            </m:r>
-                          </m:sup>
-                        </m:sSup>
-                      </m:lim>
-                    </m:limLow>
-                    <m:func>
-                      <m:funcPr>
-                        <m:ctrlPr>
-                          <a:rPr lang="nl-BE">
-                            <a:latin typeface="Cambria Math" panose="02040503050406030204" pitchFamily="18" charset="0"/>
-                          </a:rPr>
-                        </m:ctrlPr>
-                      </m:funcPr>
-                      <m:fName>
-                        <m:r>
-                          <m:rPr>
-                            <m:sty m:val="p"/>
-                          </m:rPr>
-                          <a:rPr lang="nl-BE">
-                            <a:latin typeface="Cambria Math" panose="02040503050406030204" pitchFamily="18" charset="0"/>
-                          </a:rPr>
-                          <m:t>cot</m:t>
-                        </m:r>
-                      </m:fName>
-                      <m:e>
-                        <m:d>
-                          <m:dPr>
-                            <m:ctrlPr>
-                              <a:rPr lang="nl-BE" i="1">
-                                <a:latin typeface="Cambria Math" panose="02040503050406030204" pitchFamily="18" charset="0"/>
-                              </a:rPr>
-                            </m:ctrlPr>
-                          </m:dPr>
-                          <m:e>
-                            <m:r>
-                              <a:rPr lang="nl-BE" i="1">
-                                <a:latin typeface="Cambria Math" panose="02040503050406030204" pitchFamily="18" charset="0"/>
-                              </a:rPr>
-                              <m:t>𝑥</m:t>
-                            </m:r>
-                          </m:e>
-                        </m:d>
-                      </m:e>
-                    </m:func>
-                    <m:r>
-                      <a:rPr lang="nl-BE" i="1">
-                        <a:latin typeface="Cambria Math" panose="02040503050406030204" pitchFamily="18" charset="0"/>
-                      </a:rPr>
-                      <m:t>=</m:t>
-                    </m:r>
-                    <m:r>
-                      <a:rPr lang="nl-BE" b="0" i="1" smtClean="0">
-                        <a:latin typeface="Cambria Math" panose="02040503050406030204" pitchFamily="18" charset="0"/>
-                      </a:rPr>
-                      <m:t>−</m:t>
-                    </m:r>
-                    <m:r>
-                      <a:rPr lang="nl-BE" i="1">
-                        <a:latin typeface="Cambria Math" panose="02040503050406030204" pitchFamily="18" charset="0"/>
-                      </a:rPr>
-                      <m:t>∞</m:t>
-                    </m:r>
-                  </m:oMath>
-                </a14:m>
                 <a:endParaRPr lang="nl-BE" dirty="0"/>
               </a:p>
               <a:p>
@@ -24036,39 +23862,26 @@
                                   </p:childTnLst>
                                 </p:cTn>
                               </p:par>
+                            </p:childTnLst>
+                          </p:cTn>
+                        </p:par>
+                      </p:childTnLst>
+                    </p:cTn>
+                  </p:par>
+                  <p:par>
+                    <p:cTn id="7" fill="hold">
+                      <p:stCondLst>
+                        <p:cond delay="indefinite"/>
+                      </p:stCondLst>
+                      <p:childTnLst>
+                        <p:par>
+                          <p:cTn id="8" fill="hold">
+                            <p:stCondLst>
+                              <p:cond delay="0"/>
+                            </p:stCondLst>
+                            <p:childTnLst>
                               <p:par>
-                                <p:cTn id="7" presetID="1" presetClass="entr" presetSubtype="0" fill="hold" grpId="0" nodeType="withEffect">
-                                  <p:stCondLst>
-                                    <p:cond delay="0"/>
-                                  </p:stCondLst>
-                                  <p:childTnLst>
-                                    <p:set>
-                                      <p:cBhvr>
-                                        <p:cTn id="8" dur="1" fill="hold">
-                                          <p:stCondLst>
-                                            <p:cond delay="0"/>
-                                          </p:stCondLst>
-                                        </p:cTn>
-                                        <p:tgtEl>
-                                          <p:spTgt spid="3">
-                                            <p:txEl>
-                                              <p:pRg st="1" end="1"/>
-                                            </p:txEl>
-                                          </p:spTgt>
-                                        </p:tgtEl>
-                                        <p:attrNameLst>
-                                          <p:attrName>style.visibility</p:attrName>
-                                        </p:attrNameLst>
-                                      </p:cBhvr>
-                                      <p:to>
-                                        <p:strVal val="visible"/>
-                                      </p:to>
-                                    </p:set>
-                                  </p:childTnLst>
-                                </p:cTn>
-                              </p:par>
-                              <p:par>
-                                <p:cTn id="9" presetID="1" presetClass="entr" presetSubtype="0" fill="hold" grpId="0" nodeType="withEffect">
+                                <p:cTn id="9" presetID="1" presetClass="entr" presetSubtype="0" fill="hold" grpId="0" nodeType="clickEffect">
                                   <p:stCondLst>
                                     <p:cond delay="0"/>
                                   </p:stCondLst>
@@ -24083,7 +23896,7 @@
                                         <p:tgtEl>
                                           <p:spTgt spid="3">
                                             <p:txEl>
-                                              <p:pRg st="2" end="2"/>
+                                              <p:pRg st="1" end="1"/>
                                             </p:txEl>
                                           </p:spTgt>
                                         </p:tgtEl>
